--- a/Slides/Lec1 - Scene & Primitives.pptx
+++ b/Slides/Lec1 - Scene & Primitives.pptx
@@ -16,8 +16,8 @@
     <p:sldId id="305" r:id="rId4"/>
     <p:sldId id="314" r:id="rId5"/>
     <p:sldId id="329" r:id="rId6"/>
-    <p:sldId id="330" r:id="rId7"/>
-    <p:sldId id="306" r:id="rId8"/>
+    <p:sldId id="306" r:id="rId7"/>
+    <p:sldId id="330" r:id="rId8"/>
     <p:sldId id="332" r:id="rId9"/>
     <p:sldId id="331" r:id="rId10"/>
     <p:sldId id="315" r:id="rId11"/>
@@ -49,7 +49,7 @@
       <p:bold r:id="rId27"/>
     </p:embeddedFont>
     <p:embeddedFont>
-      <p:font typeface="Noto Sans Symbols" panose="020B0604020202020204" charset="0"/>
+      <p:font typeface="Noto Sans Symbols" pitchFamily="2" charset="0"/>
       <p:regular r:id="rId28"/>
       <p:bold r:id="rId29"/>
     </p:embeddedFont>
@@ -297,12 +297,12 @@
             <p14:sldId id="305"/>
             <p14:sldId id="314"/>
             <p14:sldId id="329"/>
-            <p14:sldId id="330"/>
           </p14:sldIdLst>
         </p14:section>
         <p14:section name="Fundamentals" id="{311EEC78-3BDD-4F8C-AF8E-F1696CC6520F}">
           <p14:sldIdLst>
             <p14:sldId id="306"/>
+            <p14:sldId id="330"/>
             <p14:sldId id="332"/>
           </p14:sldIdLst>
         </p14:section>
@@ -351,7 +351,7 @@
       </p15:notesGuideLst>
     </p:ext>
     <p:ext uri="GoogleSlidesCustomDataVersion2">
-      <go:slidesCustomData xmlns="" xmlns:mc="http://schemas.openxmlformats.org/markup-compatibility/2006" xmlns:mv="urn:schemas-microsoft-com:mac:vml" xmlns:c="http://schemas.openxmlformats.org/drawingml/2006/chart" xmlns:dgm="http://schemas.openxmlformats.org/drawingml/2006/diagram" xmlns:o="urn:schemas-microsoft-com:office:office" xmlns:v="urn:schemas-microsoft-com:vml" xmlns:pvml="urn:schemas-microsoft-com:office:powerpoint" xmlns:com="http://schemas.openxmlformats.org/drawingml/2006/compatibility" xmlns:p14="http://schemas.microsoft.com/office/powerpoint/2010/main" xmlns:p15="http://schemas.microsoft.com/office/powerpoint/2012/main" xmlns:ahyp="http://schemas.microsoft.com/office/drawing/2018/hyperlinkcolor" xmlns:go="http://customooxmlschemas.google.com/" r:id="rId85" roundtripDataSignature="AMtx7mjnchW9jt+BL3pINn0mejfXPXn+WA=="/>
+      <go:slidesCustomData xmlns:go="http://customooxmlschemas.google.com/" xmlns:ahyp="http://schemas.microsoft.com/office/drawing/2018/hyperlinkcolor" xmlns:p15="http://schemas.microsoft.com/office/powerpoint/2012/main" xmlns:p14="http://schemas.microsoft.com/office/powerpoint/2010/main" xmlns:com="http://schemas.openxmlformats.org/drawingml/2006/compatibility" xmlns:pvml="urn:schemas-microsoft-com:office:powerpoint" xmlns:v="urn:schemas-microsoft-com:vml" xmlns:o="urn:schemas-microsoft-com:office:office" xmlns:dgm="http://schemas.openxmlformats.org/drawingml/2006/diagram" xmlns:c="http://schemas.openxmlformats.org/drawingml/2006/chart" xmlns:mv="urn:schemas-microsoft-com:mac:vml" xmlns:mc="http://schemas.openxmlformats.org/markup-compatibility/2006" xmlns="" r:id="rId85" roundtripDataSignature="AMtx7mjnchW9jt+BL3pINn0mejfXPXn+WA=="/>
     </p:ext>
   </p:extLst>
 </p:presentation>
@@ -451,7 +451,7 @@
           <a:p>
             <a:fld id="{C5083AF9-D621-4D22-98A6-93B8FF1F7E4E}" type="datetimeFigureOut">
               <a:rPr lang="en-US" smtClean="0"/>
-              <a:t>3/6/2026</a:t>
+              <a:t>3/8/2026</a:t>
             </a:fld>
             <a:endParaRPr lang="en-US"/>
           </a:p>
@@ -2701,7 +2701,7 @@
               </a:spcAft>
               <a:buNone/>
             </a:pPr>
-            <a:endParaRPr/>
+            <a:endParaRPr dirty="0"/>
           </a:p>
         </p:txBody>
       </p:sp>
@@ -4061,6 +4061,1686 @@
         <p:cNvPr id="1" name="Shape 129">
           <a:extLst>
             <a:ext uri="{FF2B5EF4-FFF2-40B4-BE49-F238E27FC236}">
+              <a16:creationId xmlns:a16="http://schemas.microsoft.com/office/drawing/2014/main" id="{B76A3783-A40A-C424-79E4-B8FE4103633C}"/>
+            </a:ext>
+          </a:extLst>
+        </p:cNvPr>
+        <p:cNvGrpSpPr/>
+        <p:nvPr/>
+      </p:nvGrpSpPr>
+      <p:grpSpPr>
+        <a:xfrm>
+          <a:off x="0" y="0"/>
+          <a:ext cx="0" cy="0"/>
+          <a:chOff x="0" y="0"/>
+          <a:chExt cx="0" cy="0"/>
+        </a:xfrm>
+      </p:grpSpPr>
+      <p:sp>
+        <p:nvSpPr>
+          <p:cNvPr id="130" name="Google Shape;130;p3:notes">
+            <a:extLst>
+              <a:ext uri="{FF2B5EF4-FFF2-40B4-BE49-F238E27FC236}">
+                <a16:creationId xmlns:a16="http://schemas.microsoft.com/office/drawing/2014/main" id="{0B650B32-AB4A-3865-46D9-F7254B820752}"/>
+              </a:ext>
+            </a:extLst>
+          </p:cNvPr>
+          <p:cNvSpPr>
+            <a:spLocks noGrp="1" noRot="1" noChangeAspect="1"/>
+          </p:cNvSpPr>
+          <p:nvPr>
+            <p:ph type="sldImg" idx="2"/>
+          </p:nvPr>
+        </p:nvSpPr>
+        <p:spPr>
+          <a:xfrm>
+            <a:off x="2857500" y="514350"/>
+            <a:ext cx="3429000" cy="2571750"/>
+          </a:xfrm>
+          <a:custGeom>
+            <a:avLst/>
+            <a:gdLst/>
+            <a:ahLst/>
+            <a:cxnLst/>
+            <a:rect l="l" t="t" r="r" b="b"/>
+            <a:pathLst>
+              <a:path w="120000" h="120000" extrusionOk="0">
+                <a:moveTo>
+                  <a:pt x="0" y="0"/>
+                </a:moveTo>
+                <a:lnTo>
+                  <a:pt x="120000" y="0"/>
+                </a:lnTo>
+                <a:lnTo>
+                  <a:pt x="120000" y="120000"/>
+                </a:lnTo>
+                <a:lnTo>
+                  <a:pt x="0" y="120000"/>
+                </a:lnTo>
+                <a:close/>
+              </a:path>
+            </a:pathLst>
+          </a:custGeom>
+          <a:noFill/>
+          <a:ln w="12700" cap="flat" cmpd="sng">
+            <a:solidFill>
+              <a:srgbClr val="000000"/>
+            </a:solidFill>
+            <a:prstDash val="solid"/>
+            <a:round/>
+            <a:headEnd type="none" w="sm" len="sm"/>
+            <a:tailEnd type="none" w="sm" len="sm"/>
+          </a:ln>
+        </p:spPr>
+      </p:sp>
+      <p:sp>
+        <p:nvSpPr>
+          <p:cNvPr id="131" name="Google Shape;131;p3:notes">
+            <a:extLst>
+              <a:ext uri="{FF2B5EF4-FFF2-40B4-BE49-F238E27FC236}">
+                <a16:creationId xmlns:a16="http://schemas.microsoft.com/office/drawing/2014/main" id="{E8C010FB-808F-21C6-1824-CB02AFC2322F}"/>
+              </a:ext>
+            </a:extLst>
+          </p:cNvPr>
+          <p:cNvSpPr txBox="1">
+            <a:spLocks noGrp="1"/>
+          </p:cNvSpPr>
+          <p:nvPr>
+            <p:ph type="body" idx="1"/>
+          </p:nvPr>
+        </p:nvSpPr>
+        <p:spPr>
+          <a:xfrm>
+            <a:off x="914400" y="3257550"/>
+            <a:ext cx="7315200" cy="3086100"/>
+          </a:xfrm>
+          <a:prstGeom prst="rect">
+            <a:avLst/>
+          </a:prstGeom>
+          <a:noFill/>
+          <a:ln>
+            <a:noFill/>
+          </a:ln>
+        </p:spPr>
+        <p:txBody>
+          <a:bodyPr spcFirstLastPara="1" wrap="square" lIns="91425" tIns="45700" rIns="91425" bIns="45700" anchor="t" anchorCtr="0">
+            <a:noAutofit/>
+          </a:bodyPr>
+          <a:lstStyle/>
+          <a:p>
+            <a:pPr algn="just"/>
+            <a:r>
+              <a:rPr lang="en-US" sz="1200" b="0" i="0" u="none" strike="noStrike" cap="none" dirty="0">
+                <a:solidFill>
+                  <a:schemeClr val="dk1"/>
+                </a:solidFill>
+                <a:effectLst/>
+                <a:latin typeface="Calibri"/>
+                <a:ea typeface="Calibri"/>
+                <a:cs typeface="Calibri"/>
+                <a:sym typeface="Calibri"/>
+              </a:rPr>
+              <a:t>Things to notice about the diagram above:</a:t>
+            </a:r>
+          </a:p>
+          <a:p>
+            <a:pPr algn="just">
+              <a:buFontTx/>
+              <a:buChar char="-"/>
+            </a:pPr>
+            <a:r>
+              <a:rPr lang="en-US" sz="1200" b="0" i="0" u="none" strike="noStrike" cap="none" dirty="0">
+                <a:solidFill>
+                  <a:schemeClr val="dk1"/>
+                </a:solidFill>
+                <a:effectLst/>
+                <a:latin typeface="Calibri"/>
+                <a:ea typeface="Calibri"/>
+                <a:cs typeface="Calibri"/>
+                <a:sym typeface="Calibri"/>
+              </a:rPr>
+              <a:t>There is a </a:t>
+            </a:r>
+            <a:r>
+              <a:rPr lang="en-US" sz="1200" b="0" i="0" u="none" strike="noStrike" cap="none" dirty="0">
+                <a:solidFill>
+                  <a:schemeClr val="dk1"/>
+                </a:solidFill>
+                <a:effectLst/>
+                <a:latin typeface="Calibri"/>
+                <a:ea typeface="Calibri"/>
+                <a:cs typeface="Calibri"/>
+                <a:sym typeface="Calibri"/>
+                <a:hlinkClick r:id="rId3"/>
+              </a:rPr>
+              <a:t>Renderer</a:t>
+            </a:r>
+            <a:r>
+              <a:rPr lang="en-US" sz="1200" b="0" i="0" u="none" strike="noStrike" cap="none" dirty="0">
+                <a:solidFill>
+                  <a:schemeClr val="dk1"/>
+                </a:solidFill>
+                <a:effectLst/>
+                <a:latin typeface="Calibri"/>
+                <a:ea typeface="Calibri"/>
+                <a:cs typeface="Calibri"/>
+                <a:sym typeface="Calibri"/>
+              </a:rPr>
+              <a:t>. This is arguably the main object of three.js. You pass a </a:t>
+            </a:r>
+            <a:r>
+              <a:rPr lang="en-US" sz="1200" b="0" i="0" u="none" strike="noStrike" cap="none" dirty="0">
+                <a:solidFill>
+                  <a:schemeClr val="dk1"/>
+                </a:solidFill>
+                <a:effectLst/>
+                <a:latin typeface="Calibri"/>
+                <a:ea typeface="Calibri"/>
+                <a:cs typeface="Calibri"/>
+                <a:sym typeface="Calibri"/>
+                <a:hlinkClick r:id="rId4"/>
+              </a:rPr>
+              <a:t>Scene</a:t>
+            </a:r>
+            <a:r>
+              <a:rPr lang="en-US" sz="1200" b="0" i="0" u="none" strike="noStrike" cap="none" dirty="0">
+                <a:solidFill>
+                  <a:schemeClr val="dk1"/>
+                </a:solidFill>
+                <a:effectLst/>
+                <a:latin typeface="Calibri"/>
+                <a:ea typeface="Calibri"/>
+                <a:cs typeface="Calibri"/>
+                <a:sym typeface="Calibri"/>
+              </a:rPr>
+              <a:t> and a </a:t>
+            </a:r>
+            <a:r>
+              <a:rPr lang="en-US" sz="1200" b="0" i="0" u="none" strike="noStrike" cap="none" dirty="0">
+                <a:solidFill>
+                  <a:schemeClr val="dk1"/>
+                </a:solidFill>
+                <a:effectLst/>
+                <a:latin typeface="Calibri"/>
+                <a:ea typeface="Calibri"/>
+                <a:cs typeface="Calibri"/>
+                <a:sym typeface="Calibri"/>
+                <a:hlinkClick r:id="rId5"/>
+              </a:rPr>
+              <a:t>Camera</a:t>
+            </a:r>
+            <a:r>
+              <a:rPr lang="en-US" sz="1200" b="0" i="0" u="none" strike="noStrike" cap="none" dirty="0">
+                <a:solidFill>
+                  <a:schemeClr val="dk1"/>
+                </a:solidFill>
+                <a:effectLst/>
+                <a:latin typeface="Calibri"/>
+                <a:ea typeface="Calibri"/>
+                <a:cs typeface="Calibri"/>
+                <a:sym typeface="Calibri"/>
+              </a:rPr>
+              <a:t> to a </a:t>
+            </a:r>
+            <a:r>
+              <a:rPr lang="en-US" sz="1200" b="0" i="0" u="none" strike="noStrike" cap="none" dirty="0">
+                <a:solidFill>
+                  <a:schemeClr val="dk1"/>
+                </a:solidFill>
+                <a:effectLst/>
+                <a:latin typeface="Calibri"/>
+                <a:ea typeface="Calibri"/>
+                <a:cs typeface="Calibri"/>
+                <a:sym typeface="Calibri"/>
+                <a:hlinkClick r:id="rId3"/>
+              </a:rPr>
+              <a:t>Renderer</a:t>
+            </a:r>
+            <a:r>
+              <a:rPr lang="en-US" sz="1200" b="0" i="0" u="none" strike="noStrike" cap="none" dirty="0">
+                <a:solidFill>
+                  <a:schemeClr val="dk1"/>
+                </a:solidFill>
+                <a:effectLst/>
+                <a:latin typeface="Calibri"/>
+                <a:ea typeface="Calibri"/>
+                <a:cs typeface="Calibri"/>
+                <a:sym typeface="Calibri"/>
+              </a:rPr>
+              <a:t> and it renders (draws) the portion of the 3D scene that is inside the </a:t>
+            </a:r>
+            <a:r>
+              <a:rPr lang="en-US" sz="1200" b="0" i="1" u="none" strike="noStrike" cap="none" dirty="0">
+                <a:solidFill>
+                  <a:schemeClr val="dk1"/>
+                </a:solidFill>
+                <a:effectLst/>
+                <a:latin typeface="Calibri"/>
+                <a:ea typeface="Calibri"/>
+                <a:cs typeface="Calibri"/>
+                <a:sym typeface="Calibri"/>
+              </a:rPr>
+              <a:t>frustum</a:t>
+            </a:r>
+            <a:r>
+              <a:rPr lang="en-US" sz="1200" b="0" i="0" u="none" strike="noStrike" cap="none" dirty="0">
+                <a:solidFill>
+                  <a:schemeClr val="dk1"/>
+                </a:solidFill>
+                <a:effectLst/>
+                <a:latin typeface="Calibri"/>
+                <a:ea typeface="Calibri"/>
+                <a:cs typeface="Calibri"/>
+                <a:sym typeface="Calibri"/>
+              </a:rPr>
+              <a:t> of the camera as a 2D image to a canvas.</a:t>
+            </a:r>
+          </a:p>
+          <a:p>
+            <a:pPr algn="just">
+              <a:buFontTx/>
+              <a:buChar char="-"/>
+            </a:pPr>
+            <a:endParaRPr lang="en-US" sz="1200" b="0" i="0" u="none" strike="noStrike" cap="none" dirty="0">
+              <a:solidFill>
+                <a:schemeClr val="dk1"/>
+              </a:solidFill>
+              <a:effectLst/>
+              <a:latin typeface="Calibri"/>
+              <a:ea typeface="Calibri"/>
+              <a:cs typeface="Calibri"/>
+              <a:sym typeface="Calibri"/>
+            </a:endParaRPr>
+          </a:p>
+          <a:p>
+            <a:pPr algn="just">
+              <a:buFontTx/>
+              <a:buChar char="-"/>
+            </a:pPr>
+            <a:r>
+              <a:rPr lang="en-US" sz="1200" b="0" i="0" u="none" strike="noStrike" cap="none" dirty="0">
+                <a:solidFill>
+                  <a:schemeClr val="dk1"/>
+                </a:solidFill>
+                <a:effectLst/>
+                <a:latin typeface="Calibri"/>
+                <a:ea typeface="Calibri"/>
+                <a:cs typeface="Calibri"/>
+                <a:sym typeface="Calibri"/>
+              </a:rPr>
+              <a:t>There is a </a:t>
+            </a:r>
+            <a:r>
+              <a:rPr lang="en-US" sz="1200" b="0" i="0" u="none" strike="noStrike" cap="none" dirty="0" err="1">
+                <a:solidFill>
+                  <a:schemeClr val="dk1"/>
+                </a:solidFill>
+                <a:effectLst/>
+                <a:latin typeface="Calibri"/>
+                <a:ea typeface="Calibri"/>
+                <a:cs typeface="Calibri"/>
+                <a:sym typeface="Calibri"/>
+                <a:hlinkClick r:id="rId6"/>
+              </a:rPr>
+              <a:t>scenegraph</a:t>
+            </a:r>
+            <a:r>
+              <a:rPr lang="en-US" sz="1200" b="0" i="0" u="none" strike="noStrike" cap="none" dirty="0">
+                <a:solidFill>
+                  <a:schemeClr val="dk1"/>
+                </a:solidFill>
+                <a:effectLst/>
+                <a:latin typeface="Calibri"/>
+                <a:ea typeface="Calibri"/>
+                <a:cs typeface="Calibri"/>
+                <a:sym typeface="Calibri"/>
+              </a:rPr>
+              <a:t> which is a tree like structure, consisting of various objects like a </a:t>
+            </a:r>
+            <a:r>
+              <a:rPr lang="en-US" sz="1200" b="0" i="0" u="none" strike="noStrike" cap="none" dirty="0">
+                <a:solidFill>
+                  <a:schemeClr val="dk1"/>
+                </a:solidFill>
+                <a:effectLst/>
+                <a:latin typeface="Calibri"/>
+                <a:ea typeface="Calibri"/>
+                <a:cs typeface="Calibri"/>
+                <a:sym typeface="Calibri"/>
+                <a:hlinkClick r:id="rId4"/>
+              </a:rPr>
+              <a:t>Scene</a:t>
+            </a:r>
+            <a:r>
+              <a:rPr lang="en-US" sz="1200" b="0" i="0" u="none" strike="noStrike" cap="none" dirty="0">
+                <a:solidFill>
+                  <a:schemeClr val="dk1"/>
+                </a:solidFill>
+                <a:effectLst/>
+                <a:latin typeface="Calibri"/>
+                <a:ea typeface="Calibri"/>
+                <a:cs typeface="Calibri"/>
+                <a:sym typeface="Calibri"/>
+              </a:rPr>
+              <a:t> object, multiple </a:t>
+            </a:r>
+            <a:r>
+              <a:rPr lang="en-US" sz="1200" b="0" i="0" u="none" strike="noStrike" cap="none" dirty="0">
+                <a:solidFill>
+                  <a:schemeClr val="dk1"/>
+                </a:solidFill>
+                <a:effectLst/>
+                <a:latin typeface="Calibri"/>
+                <a:ea typeface="Calibri"/>
+                <a:cs typeface="Calibri"/>
+                <a:sym typeface="Calibri"/>
+                <a:hlinkClick r:id="rId7"/>
+              </a:rPr>
+              <a:t>Mesh</a:t>
+            </a:r>
+            <a:r>
+              <a:rPr lang="en-US" sz="1200" b="0" i="0" u="none" strike="noStrike" cap="none" dirty="0">
+                <a:solidFill>
+                  <a:schemeClr val="dk1"/>
+                </a:solidFill>
+                <a:effectLst/>
+                <a:latin typeface="Calibri"/>
+                <a:ea typeface="Calibri"/>
+                <a:cs typeface="Calibri"/>
+                <a:sym typeface="Calibri"/>
+              </a:rPr>
+              <a:t> objects, </a:t>
+            </a:r>
+            <a:r>
+              <a:rPr lang="en-US" sz="1200" b="0" i="0" u="none" strike="noStrike" cap="none" dirty="0">
+                <a:solidFill>
+                  <a:schemeClr val="dk1"/>
+                </a:solidFill>
+                <a:effectLst/>
+                <a:latin typeface="Calibri"/>
+                <a:ea typeface="Calibri"/>
+                <a:cs typeface="Calibri"/>
+                <a:sym typeface="Calibri"/>
+                <a:hlinkClick r:id="rId8"/>
+              </a:rPr>
+              <a:t>Light</a:t>
+            </a:r>
+            <a:r>
+              <a:rPr lang="en-US" sz="1200" b="0" i="0" u="none" strike="noStrike" cap="none" dirty="0">
+                <a:solidFill>
+                  <a:schemeClr val="dk1"/>
+                </a:solidFill>
+                <a:effectLst/>
+                <a:latin typeface="Calibri"/>
+                <a:ea typeface="Calibri"/>
+                <a:cs typeface="Calibri"/>
+                <a:sym typeface="Calibri"/>
+              </a:rPr>
+              <a:t> objects, </a:t>
+            </a:r>
+            <a:r>
+              <a:rPr lang="en-US" sz="1200" b="0" i="0" u="none" strike="noStrike" cap="none" dirty="0">
+                <a:solidFill>
+                  <a:schemeClr val="dk1"/>
+                </a:solidFill>
+                <a:effectLst/>
+                <a:latin typeface="Calibri"/>
+                <a:ea typeface="Calibri"/>
+                <a:cs typeface="Calibri"/>
+                <a:sym typeface="Calibri"/>
+                <a:hlinkClick r:id="rId9"/>
+              </a:rPr>
+              <a:t>Group</a:t>
+            </a:r>
+            <a:r>
+              <a:rPr lang="en-US" sz="1200" b="0" i="0" u="none" strike="noStrike" cap="none" dirty="0">
+                <a:solidFill>
+                  <a:schemeClr val="dk1"/>
+                </a:solidFill>
+                <a:effectLst/>
+                <a:latin typeface="Calibri"/>
+                <a:ea typeface="Calibri"/>
+                <a:cs typeface="Calibri"/>
+                <a:sym typeface="Calibri"/>
+              </a:rPr>
+              <a:t>, </a:t>
+            </a:r>
+            <a:r>
+              <a:rPr lang="en-US" sz="1200" b="0" i="0" u="none" strike="noStrike" cap="none" dirty="0">
+                <a:solidFill>
+                  <a:schemeClr val="dk1"/>
+                </a:solidFill>
+                <a:effectLst/>
+                <a:latin typeface="Calibri"/>
+                <a:ea typeface="Calibri"/>
+                <a:cs typeface="Calibri"/>
+                <a:sym typeface="Calibri"/>
+                <a:hlinkClick r:id="rId10"/>
+              </a:rPr>
+              <a:t>Object3D</a:t>
+            </a:r>
+            <a:r>
+              <a:rPr lang="en-US" sz="1200" b="0" i="0" u="none" strike="noStrike" cap="none" dirty="0">
+                <a:solidFill>
+                  <a:schemeClr val="dk1"/>
+                </a:solidFill>
+                <a:effectLst/>
+                <a:latin typeface="Calibri"/>
+                <a:ea typeface="Calibri"/>
+                <a:cs typeface="Calibri"/>
+                <a:sym typeface="Calibri"/>
+              </a:rPr>
+              <a:t>, and </a:t>
+            </a:r>
+            <a:r>
+              <a:rPr lang="en-US" sz="1200" b="0" i="0" u="none" strike="noStrike" cap="none" dirty="0">
+                <a:solidFill>
+                  <a:schemeClr val="dk1"/>
+                </a:solidFill>
+                <a:effectLst/>
+                <a:latin typeface="Calibri"/>
+                <a:ea typeface="Calibri"/>
+                <a:cs typeface="Calibri"/>
+                <a:sym typeface="Calibri"/>
+                <a:hlinkClick r:id="rId5"/>
+              </a:rPr>
+              <a:t>Camera</a:t>
+            </a:r>
+            <a:r>
+              <a:rPr lang="en-US" sz="1200" b="0" i="0" u="none" strike="noStrike" cap="none" dirty="0">
+                <a:solidFill>
+                  <a:schemeClr val="dk1"/>
+                </a:solidFill>
+                <a:effectLst/>
+                <a:latin typeface="Calibri"/>
+                <a:ea typeface="Calibri"/>
+                <a:cs typeface="Calibri"/>
+                <a:sym typeface="Calibri"/>
+              </a:rPr>
+              <a:t> objects. A </a:t>
+            </a:r>
+            <a:r>
+              <a:rPr lang="en-US" sz="1200" b="0" i="0" u="none" strike="noStrike" cap="none" dirty="0">
+                <a:solidFill>
+                  <a:schemeClr val="dk1"/>
+                </a:solidFill>
+                <a:effectLst/>
+                <a:latin typeface="Calibri"/>
+                <a:ea typeface="Calibri"/>
+                <a:cs typeface="Calibri"/>
+                <a:sym typeface="Calibri"/>
+                <a:hlinkClick r:id="rId4"/>
+              </a:rPr>
+              <a:t>Scene</a:t>
+            </a:r>
+            <a:r>
+              <a:rPr lang="en-US" sz="1200" b="0" i="0" u="none" strike="noStrike" cap="none" dirty="0">
+                <a:solidFill>
+                  <a:schemeClr val="dk1"/>
+                </a:solidFill>
+                <a:effectLst/>
+                <a:latin typeface="Calibri"/>
+                <a:ea typeface="Calibri"/>
+                <a:cs typeface="Calibri"/>
+                <a:sym typeface="Calibri"/>
+              </a:rPr>
+              <a:t> object defines the root of the </a:t>
+            </a:r>
+            <a:r>
+              <a:rPr lang="en-US" sz="1200" b="0" i="0" u="none" strike="noStrike" cap="none" dirty="0" err="1">
+                <a:solidFill>
+                  <a:schemeClr val="dk1"/>
+                </a:solidFill>
+                <a:effectLst/>
+                <a:latin typeface="Calibri"/>
+                <a:ea typeface="Calibri"/>
+                <a:cs typeface="Calibri"/>
+                <a:sym typeface="Calibri"/>
+              </a:rPr>
+              <a:t>scenegraph</a:t>
+            </a:r>
+            <a:r>
+              <a:rPr lang="en-US" sz="1200" b="0" i="0" u="none" strike="noStrike" cap="none" dirty="0">
+                <a:solidFill>
+                  <a:schemeClr val="dk1"/>
+                </a:solidFill>
+                <a:effectLst/>
+                <a:latin typeface="Calibri"/>
+                <a:ea typeface="Calibri"/>
+                <a:cs typeface="Calibri"/>
+                <a:sym typeface="Calibri"/>
+              </a:rPr>
+              <a:t> and contains properties like the background color and fog. These objects define a hierarchical parent/child tree like structure and represent where objects appear and how they are oriented. Children are positioned and oriented relative to their parent. For example the wheels on a car might be children of the car so that moving and orienting the car's object automatically moves the wheels. You can read more about this in </a:t>
+            </a:r>
+            <a:r>
+              <a:rPr lang="en-US" sz="1200" b="0" i="0" u="none" strike="noStrike" cap="none" dirty="0">
+                <a:solidFill>
+                  <a:schemeClr val="dk1"/>
+                </a:solidFill>
+                <a:effectLst/>
+                <a:latin typeface="Calibri"/>
+                <a:ea typeface="Calibri"/>
+                <a:cs typeface="Calibri"/>
+                <a:sym typeface="Calibri"/>
+                <a:hlinkClick r:id="rId6"/>
+              </a:rPr>
+              <a:t>the article on </a:t>
+            </a:r>
+            <a:r>
+              <a:rPr lang="en-US" sz="1200" b="0" i="0" u="none" strike="noStrike" cap="none" dirty="0" err="1">
+                <a:solidFill>
+                  <a:schemeClr val="dk1"/>
+                </a:solidFill>
+                <a:effectLst/>
+                <a:latin typeface="Calibri"/>
+                <a:ea typeface="Calibri"/>
+                <a:cs typeface="Calibri"/>
+                <a:sym typeface="Calibri"/>
+                <a:hlinkClick r:id="rId6"/>
+              </a:rPr>
+              <a:t>scenegraphs</a:t>
+            </a:r>
+            <a:r>
+              <a:rPr lang="en-US" sz="1200" b="0" i="0" u="none" strike="noStrike" cap="none" dirty="0">
+                <a:solidFill>
+                  <a:schemeClr val="dk1"/>
+                </a:solidFill>
+                <a:effectLst/>
+                <a:latin typeface="Calibri"/>
+                <a:ea typeface="Calibri"/>
+                <a:cs typeface="Calibri"/>
+                <a:sym typeface="Calibri"/>
+              </a:rPr>
+              <a:t>.</a:t>
+            </a:r>
+          </a:p>
+          <a:p>
+            <a:pPr algn="just">
+              <a:buFontTx/>
+              <a:buChar char="-"/>
+            </a:pPr>
+            <a:endParaRPr lang="en-US" sz="1200" b="0" i="0" u="none" strike="noStrike" cap="none" dirty="0">
+              <a:solidFill>
+                <a:schemeClr val="dk1"/>
+              </a:solidFill>
+              <a:effectLst/>
+              <a:latin typeface="Calibri"/>
+              <a:ea typeface="Calibri"/>
+              <a:cs typeface="Calibri"/>
+              <a:sym typeface="Calibri"/>
+            </a:endParaRPr>
+          </a:p>
+          <a:p>
+            <a:pPr algn="just">
+              <a:buFontTx/>
+              <a:buChar char="-"/>
+            </a:pPr>
+            <a:r>
+              <a:rPr lang="en-US" sz="1200" b="0" i="0" u="none" strike="noStrike" cap="none" dirty="0">
+                <a:solidFill>
+                  <a:schemeClr val="dk1"/>
+                </a:solidFill>
+                <a:effectLst/>
+                <a:latin typeface="Calibri"/>
+                <a:ea typeface="Calibri"/>
+                <a:cs typeface="Calibri"/>
+                <a:sym typeface="Calibri"/>
+              </a:rPr>
+              <a:t>Note in the diagram </a:t>
+            </a:r>
+            <a:r>
+              <a:rPr lang="en-US" sz="1200" b="0" i="0" u="none" strike="noStrike" cap="none" dirty="0">
+                <a:solidFill>
+                  <a:schemeClr val="dk1"/>
+                </a:solidFill>
+                <a:effectLst/>
+                <a:latin typeface="Calibri"/>
+                <a:ea typeface="Calibri"/>
+                <a:cs typeface="Calibri"/>
+                <a:sym typeface="Calibri"/>
+                <a:hlinkClick r:id="rId5"/>
+              </a:rPr>
+              <a:t>Camera</a:t>
+            </a:r>
+            <a:r>
+              <a:rPr lang="en-US" sz="1200" b="0" i="0" u="none" strike="noStrike" cap="none" dirty="0">
+                <a:solidFill>
+                  <a:schemeClr val="dk1"/>
+                </a:solidFill>
+                <a:effectLst/>
+                <a:latin typeface="Calibri"/>
+                <a:ea typeface="Calibri"/>
+                <a:cs typeface="Calibri"/>
+                <a:sym typeface="Calibri"/>
+              </a:rPr>
+              <a:t> is half in half out of the </a:t>
+            </a:r>
+            <a:r>
+              <a:rPr lang="en-US" sz="1200" b="0" i="0" u="none" strike="noStrike" cap="none" dirty="0" err="1">
+                <a:solidFill>
+                  <a:schemeClr val="dk1"/>
+                </a:solidFill>
+                <a:effectLst/>
+                <a:latin typeface="Calibri"/>
+                <a:ea typeface="Calibri"/>
+                <a:cs typeface="Calibri"/>
+                <a:sym typeface="Calibri"/>
+              </a:rPr>
+              <a:t>scenegraph</a:t>
+            </a:r>
+            <a:r>
+              <a:rPr lang="en-US" sz="1200" b="0" i="0" u="none" strike="noStrike" cap="none" dirty="0">
+                <a:solidFill>
+                  <a:schemeClr val="dk1"/>
+                </a:solidFill>
+                <a:effectLst/>
+                <a:latin typeface="Calibri"/>
+                <a:ea typeface="Calibri"/>
+                <a:cs typeface="Calibri"/>
+                <a:sym typeface="Calibri"/>
+              </a:rPr>
+              <a:t>. This is to represent that in three.js, unlike the other objects, a </a:t>
+            </a:r>
+            <a:r>
+              <a:rPr lang="en-US" sz="1200" b="0" i="0" u="none" strike="noStrike" cap="none" dirty="0">
+                <a:solidFill>
+                  <a:schemeClr val="dk1"/>
+                </a:solidFill>
+                <a:effectLst/>
+                <a:latin typeface="Calibri"/>
+                <a:ea typeface="Calibri"/>
+                <a:cs typeface="Calibri"/>
+                <a:sym typeface="Calibri"/>
+                <a:hlinkClick r:id="rId5"/>
+              </a:rPr>
+              <a:t>Camera</a:t>
+            </a:r>
+            <a:r>
+              <a:rPr lang="en-US" sz="1200" b="0" i="0" u="none" strike="noStrike" cap="none" dirty="0">
+                <a:solidFill>
+                  <a:schemeClr val="dk1"/>
+                </a:solidFill>
+                <a:effectLst/>
+                <a:latin typeface="Calibri"/>
+                <a:ea typeface="Calibri"/>
+                <a:cs typeface="Calibri"/>
+                <a:sym typeface="Calibri"/>
+              </a:rPr>
+              <a:t> does not have to be in the </a:t>
+            </a:r>
+            <a:r>
+              <a:rPr lang="en-US" sz="1200" b="0" i="0" u="none" strike="noStrike" cap="none" dirty="0" err="1">
+                <a:solidFill>
+                  <a:schemeClr val="dk1"/>
+                </a:solidFill>
+                <a:effectLst/>
+                <a:latin typeface="Calibri"/>
+                <a:ea typeface="Calibri"/>
+                <a:cs typeface="Calibri"/>
+                <a:sym typeface="Calibri"/>
+              </a:rPr>
+              <a:t>scenegraph</a:t>
+            </a:r>
+            <a:r>
+              <a:rPr lang="en-US" sz="1200" b="0" i="0" u="none" strike="noStrike" cap="none" dirty="0">
+                <a:solidFill>
+                  <a:schemeClr val="dk1"/>
+                </a:solidFill>
+                <a:effectLst/>
+                <a:latin typeface="Calibri"/>
+                <a:ea typeface="Calibri"/>
+                <a:cs typeface="Calibri"/>
+                <a:sym typeface="Calibri"/>
+              </a:rPr>
+              <a:t> to function. Just like other objects, a </a:t>
+            </a:r>
+            <a:r>
+              <a:rPr lang="en-US" sz="1200" b="0" i="0" u="none" strike="noStrike" cap="none" dirty="0">
+                <a:solidFill>
+                  <a:schemeClr val="dk1"/>
+                </a:solidFill>
+                <a:effectLst/>
+                <a:latin typeface="Calibri"/>
+                <a:ea typeface="Calibri"/>
+                <a:cs typeface="Calibri"/>
+                <a:sym typeface="Calibri"/>
+                <a:hlinkClick r:id="rId5"/>
+              </a:rPr>
+              <a:t>Camera</a:t>
+            </a:r>
+            <a:r>
+              <a:rPr lang="en-US" sz="1200" b="0" i="0" u="none" strike="noStrike" cap="none" dirty="0">
+                <a:solidFill>
+                  <a:schemeClr val="dk1"/>
+                </a:solidFill>
+                <a:effectLst/>
+                <a:latin typeface="Calibri"/>
+                <a:ea typeface="Calibri"/>
+                <a:cs typeface="Calibri"/>
+                <a:sym typeface="Calibri"/>
+              </a:rPr>
+              <a:t>, as a child of some other object, will move and orient relative to its parent object. There is an example of putting multiple </a:t>
+            </a:r>
+            <a:r>
+              <a:rPr lang="en-US" sz="1200" b="0" i="0" u="none" strike="noStrike" cap="none" dirty="0">
+                <a:solidFill>
+                  <a:schemeClr val="dk1"/>
+                </a:solidFill>
+                <a:effectLst/>
+                <a:latin typeface="Calibri"/>
+                <a:ea typeface="Calibri"/>
+                <a:cs typeface="Calibri"/>
+                <a:sym typeface="Calibri"/>
+                <a:hlinkClick r:id="rId5"/>
+              </a:rPr>
+              <a:t>Camera</a:t>
+            </a:r>
+            <a:r>
+              <a:rPr lang="en-US" sz="1200" b="0" i="0" u="none" strike="noStrike" cap="none" dirty="0">
+                <a:solidFill>
+                  <a:schemeClr val="dk1"/>
+                </a:solidFill>
+                <a:effectLst/>
+                <a:latin typeface="Calibri"/>
+                <a:ea typeface="Calibri"/>
+                <a:cs typeface="Calibri"/>
+                <a:sym typeface="Calibri"/>
+              </a:rPr>
+              <a:t> objects in a </a:t>
+            </a:r>
+            <a:r>
+              <a:rPr lang="en-US" sz="1200" b="0" i="0" u="none" strike="noStrike" cap="none" dirty="0" err="1">
+                <a:solidFill>
+                  <a:schemeClr val="dk1"/>
+                </a:solidFill>
+                <a:effectLst/>
+                <a:latin typeface="Calibri"/>
+                <a:ea typeface="Calibri"/>
+                <a:cs typeface="Calibri"/>
+                <a:sym typeface="Calibri"/>
+              </a:rPr>
+              <a:t>scenegraph</a:t>
+            </a:r>
+            <a:r>
+              <a:rPr lang="en-US" sz="1200" b="0" i="0" u="none" strike="noStrike" cap="none" dirty="0">
+                <a:solidFill>
+                  <a:schemeClr val="dk1"/>
+                </a:solidFill>
+                <a:effectLst/>
+                <a:latin typeface="Calibri"/>
+                <a:ea typeface="Calibri"/>
+                <a:cs typeface="Calibri"/>
+                <a:sym typeface="Calibri"/>
+              </a:rPr>
+              <a:t> at the end of </a:t>
+            </a:r>
+            <a:r>
+              <a:rPr lang="en-US" sz="1200" b="0" i="0" u="none" strike="noStrike" cap="none" dirty="0">
+                <a:solidFill>
+                  <a:schemeClr val="dk1"/>
+                </a:solidFill>
+                <a:effectLst/>
+                <a:latin typeface="Calibri"/>
+                <a:ea typeface="Calibri"/>
+                <a:cs typeface="Calibri"/>
+                <a:sym typeface="Calibri"/>
+                <a:hlinkClick r:id="rId6"/>
+              </a:rPr>
+              <a:t>the article on </a:t>
+            </a:r>
+            <a:r>
+              <a:rPr lang="en-US" sz="1200" b="0" i="0" u="none" strike="noStrike" cap="none" dirty="0" err="1">
+                <a:solidFill>
+                  <a:schemeClr val="dk1"/>
+                </a:solidFill>
+                <a:effectLst/>
+                <a:latin typeface="Calibri"/>
+                <a:ea typeface="Calibri"/>
+                <a:cs typeface="Calibri"/>
+                <a:sym typeface="Calibri"/>
+                <a:hlinkClick r:id="rId6"/>
+              </a:rPr>
+              <a:t>scenegraphs</a:t>
+            </a:r>
+            <a:r>
+              <a:rPr lang="en-US" sz="1200" b="0" i="0" u="none" strike="noStrike" cap="none" dirty="0">
+                <a:solidFill>
+                  <a:schemeClr val="dk1"/>
+                </a:solidFill>
+                <a:effectLst/>
+                <a:latin typeface="Calibri"/>
+                <a:ea typeface="Calibri"/>
+                <a:cs typeface="Calibri"/>
+                <a:sym typeface="Calibri"/>
+              </a:rPr>
+              <a:t>.</a:t>
+            </a:r>
+          </a:p>
+          <a:p>
+            <a:pPr algn="just">
+              <a:buFontTx/>
+              <a:buChar char="-"/>
+            </a:pPr>
+            <a:endParaRPr lang="en-US" sz="1200" b="0" i="0" u="none" strike="noStrike" cap="none" dirty="0">
+              <a:solidFill>
+                <a:schemeClr val="dk1"/>
+              </a:solidFill>
+              <a:effectLst/>
+              <a:latin typeface="Calibri"/>
+              <a:ea typeface="Calibri"/>
+              <a:cs typeface="Calibri"/>
+              <a:sym typeface="Calibri"/>
+              <a:hlinkClick r:id="rId7"/>
+            </a:endParaRPr>
+          </a:p>
+          <a:p>
+            <a:pPr algn="just">
+              <a:buFontTx/>
+              <a:buChar char="-"/>
+            </a:pPr>
+            <a:r>
+              <a:rPr lang="en-US" sz="1200" b="0" i="0" u="none" strike="noStrike" cap="none" dirty="0">
+                <a:solidFill>
+                  <a:schemeClr val="dk1"/>
+                </a:solidFill>
+                <a:effectLst/>
+                <a:latin typeface="Calibri"/>
+                <a:ea typeface="Calibri"/>
+                <a:cs typeface="Calibri"/>
+                <a:sym typeface="Calibri"/>
+                <a:hlinkClick r:id="rId7"/>
+              </a:rPr>
+              <a:t>Mesh</a:t>
+            </a:r>
+            <a:r>
+              <a:rPr lang="en-US" sz="1200" b="0" i="0" u="none" strike="noStrike" cap="none" dirty="0">
+                <a:solidFill>
+                  <a:schemeClr val="dk1"/>
+                </a:solidFill>
+                <a:effectLst/>
+                <a:latin typeface="Calibri"/>
+                <a:ea typeface="Calibri"/>
+                <a:cs typeface="Calibri"/>
+                <a:sym typeface="Calibri"/>
+              </a:rPr>
+              <a:t> objects represent drawing a specific Geometry with a specific </a:t>
+            </a:r>
+            <a:r>
+              <a:rPr lang="en-US" sz="1200" b="0" i="0" u="none" strike="noStrike" cap="none" dirty="0">
+                <a:solidFill>
+                  <a:schemeClr val="dk1"/>
+                </a:solidFill>
+                <a:effectLst/>
+                <a:latin typeface="Calibri"/>
+                <a:ea typeface="Calibri"/>
+                <a:cs typeface="Calibri"/>
+                <a:sym typeface="Calibri"/>
+                <a:hlinkClick r:id="rId11"/>
+              </a:rPr>
+              <a:t>Material</a:t>
+            </a:r>
+            <a:r>
+              <a:rPr lang="en-US" sz="1200" b="0" i="0" u="none" strike="noStrike" cap="none" dirty="0">
+                <a:solidFill>
+                  <a:schemeClr val="dk1"/>
+                </a:solidFill>
+                <a:effectLst/>
+                <a:latin typeface="Calibri"/>
+                <a:ea typeface="Calibri"/>
+                <a:cs typeface="Calibri"/>
+                <a:sym typeface="Calibri"/>
+              </a:rPr>
+              <a:t>. Both </a:t>
+            </a:r>
+            <a:r>
+              <a:rPr lang="en-US" sz="1200" b="0" i="0" u="none" strike="noStrike" cap="none" dirty="0">
+                <a:solidFill>
+                  <a:schemeClr val="dk1"/>
+                </a:solidFill>
+                <a:effectLst/>
+                <a:latin typeface="Calibri"/>
+                <a:ea typeface="Calibri"/>
+                <a:cs typeface="Calibri"/>
+                <a:sym typeface="Calibri"/>
+                <a:hlinkClick r:id="rId11"/>
+              </a:rPr>
+              <a:t>Material</a:t>
+            </a:r>
+            <a:r>
+              <a:rPr lang="en-US" sz="1200" b="0" i="0" u="none" strike="noStrike" cap="none" dirty="0">
+                <a:solidFill>
+                  <a:schemeClr val="dk1"/>
+                </a:solidFill>
+                <a:effectLst/>
+                <a:latin typeface="Calibri"/>
+                <a:ea typeface="Calibri"/>
+                <a:cs typeface="Calibri"/>
+                <a:sym typeface="Calibri"/>
+              </a:rPr>
+              <a:t> objects and Geometry objects can be used by multiple </a:t>
+            </a:r>
+            <a:r>
+              <a:rPr lang="en-US" sz="1200" b="0" i="0" u="none" strike="noStrike" cap="none" dirty="0">
+                <a:solidFill>
+                  <a:schemeClr val="dk1"/>
+                </a:solidFill>
+                <a:effectLst/>
+                <a:latin typeface="Calibri"/>
+                <a:ea typeface="Calibri"/>
+                <a:cs typeface="Calibri"/>
+                <a:sym typeface="Calibri"/>
+                <a:hlinkClick r:id="rId7"/>
+              </a:rPr>
+              <a:t>Mesh</a:t>
+            </a:r>
+            <a:r>
+              <a:rPr lang="en-US" sz="1200" b="0" i="0" u="none" strike="noStrike" cap="none" dirty="0">
+                <a:solidFill>
+                  <a:schemeClr val="dk1"/>
+                </a:solidFill>
+                <a:effectLst/>
+                <a:latin typeface="Calibri"/>
+                <a:ea typeface="Calibri"/>
+                <a:cs typeface="Calibri"/>
+                <a:sym typeface="Calibri"/>
+              </a:rPr>
+              <a:t> objects. For example to draw two blue cubes in different locations we could need two </a:t>
+            </a:r>
+            <a:r>
+              <a:rPr lang="en-US" sz="1200" b="0" i="0" u="none" strike="noStrike" cap="none" dirty="0">
+                <a:solidFill>
+                  <a:schemeClr val="dk1"/>
+                </a:solidFill>
+                <a:effectLst/>
+                <a:latin typeface="Calibri"/>
+                <a:ea typeface="Calibri"/>
+                <a:cs typeface="Calibri"/>
+                <a:sym typeface="Calibri"/>
+                <a:hlinkClick r:id="rId7"/>
+              </a:rPr>
+              <a:t>Mesh</a:t>
+            </a:r>
+            <a:r>
+              <a:rPr lang="en-US" sz="1200" b="0" i="0" u="none" strike="noStrike" cap="none" dirty="0">
+                <a:solidFill>
+                  <a:schemeClr val="dk1"/>
+                </a:solidFill>
+                <a:effectLst/>
+                <a:latin typeface="Calibri"/>
+                <a:ea typeface="Calibri"/>
+                <a:cs typeface="Calibri"/>
+                <a:sym typeface="Calibri"/>
+              </a:rPr>
+              <a:t> objects to represent the position and orientation of each cube. We would only need one Geometry to hold the vertex data for a cube and we would only need one </a:t>
+            </a:r>
+            <a:r>
+              <a:rPr lang="en-US" sz="1200" b="0" i="0" u="none" strike="noStrike" cap="none" dirty="0">
+                <a:solidFill>
+                  <a:schemeClr val="dk1"/>
+                </a:solidFill>
+                <a:effectLst/>
+                <a:latin typeface="Calibri"/>
+                <a:ea typeface="Calibri"/>
+                <a:cs typeface="Calibri"/>
+                <a:sym typeface="Calibri"/>
+                <a:hlinkClick r:id="rId11"/>
+              </a:rPr>
+              <a:t>Material</a:t>
+            </a:r>
+            <a:r>
+              <a:rPr lang="en-US" sz="1200" b="0" i="0" u="none" strike="noStrike" cap="none" dirty="0">
+                <a:solidFill>
+                  <a:schemeClr val="dk1"/>
+                </a:solidFill>
+                <a:effectLst/>
+                <a:latin typeface="Calibri"/>
+                <a:ea typeface="Calibri"/>
+                <a:cs typeface="Calibri"/>
+                <a:sym typeface="Calibri"/>
+              </a:rPr>
+              <a:t> to specify the color blue. Both </a:t>
+            </a:r>
+            <a:r>
+              <a:rPr lang="en-US" sz="1200" b="0" i="0" u="none" strike="noStrike" cap="none" dirty="0">
+                <a:solidFill>
+                  <a:schemeClr val="dk1"/>
+                </a:solidFill>
+                <a:effectLst/>
+                <a:latin typeface="Calibri"/>
+                <a:ea typeface="Calibri"/>
+                <a:cs typeface="Calibri"/>
+                <a:sym typeface="Calibri"/>
+                <a:hlinkClick r:id="rId7"/>
+              </a:rPr>
+              <a:t>Mesh</a:t>
+            </a:r>
+            <a:r>
+              <a:rPr lang="en-US" sz="1200" b="0" i="0" u="none" strike="noStrike" cap="none" dirty="0">
+                <a:solidFill>
+                  <a:schemeClr val="dk1"/>
+                </a:solidFill>
+                <a:effectLst/>
+                <a:latin typeface="Calibri"/>
+                <a:ea typeface="Calibri"/>
+                <a:cs typeface="Calibri"/>
+                <a:sym typeface="Calibri"/>
+              </a:rPr>
+              <a:t> objects could reference the same Geometry object and the same </a:t>
+            </a:r>
+            <a:r>
+              <a:rPr lang="en-US" sz="1200" b="0" i="0" u="none" strike="noStrike" cap="none" dirty="0">
+                <a:solidFill>
+                  <a:schemeClr val="dk1"/>
+                </a:solidFill>
+                <a:effectLst/>
+                <a:latin typeface="Calibri"/>
+                <a:ea typeface="Calibri"/>
+                <a:cs typeface="Calibri"/>
+                <a:sym typeface="Calibri"/>
+                <a:hlinkClick r:id="rId11"/>
+              </a:rPr>
+              <a:t>Material</a:t>
+            </a:r>
+            <a:r>
+              <a:rPr lang="en-US" sz="1200" b="0" i="0" u="none" strike="noStrike" cap="none" dirty="0">
+                <a:solidFill>
+                  <a:schemeClr val="dk1"/>
+                </a:solidFill>
+                <a:effectLst/>
+                <a:latin typeface="Calibri"/>
+                <a:ea typeface="Calibri"/>
+                <a:cs typeface="Calibri"/>
+                <a:sym typeface="Calibri"/>
+              </a:rPr>
+              <a:t> object.</a:t>
+            </a:r>
+          </a:p>
+          <a:p>
+            <a:pPr algn="just"/>
+            <a:endParaRPr lang="en-US" sz="1200" b="0" i="0" u="none" strike="noStrike" cap="none" dirty="0">
+              <a:solidFill>
+                <a:schemeClr val="dk1"/>
+              </a:solidFill>
+              <a:effectLst/>
+              <a:latin typeface="Calibri"/>
+              <a:ea typeface="Calibri"/>
+              <a:cs typeface="Calibri"/>
+              <a:sym typeface="Calibri"/>
+            </a:endParaRPr>
+          </a:p>
+          <a:p>
+            <a:pPr algn="just">
+              <a:buFontTx/>
+              <a:buChar char="-"/>
+            </a:pPr>
+            <a:r>
+              <a:rPr lang="en-US" sz="1200" b="0" i="0" u="none" strike="noStrike" cap="none" dirty="0">
+                <a:solidFill>
+                  <a:schemeClr val="dk1"/>
+                </a:solidFill>
+                <a:effectLst/>
+                <a:latin typeface="Calibri"/>
+                <a:ea typeface="Calibri"/>
+                <a:cs typeface="Calibri"/>
+                <a:sym typeface="Calibri"/>
+              </a:rPr>
+              <a:t>Geometry objects represent the vertex data of some piece of geometry like a sphere, cube, plane, dog, cat, human, tree, building, etc... Three.js provides many kinds of built in </a:t>
+            </a:r>
+            <a:r>
+              <a:rPr lang="en-US" sz="1200" b="0" i="0" u="none" strike="noStrike" cap="none" dirty="0">
+                <a:solidFill>
+                  <a:schemeClr val="dk1"/>
+                </a:solidFill>
+                <a:effectLst/>
+                <a:latin typeface="Calibri"/>
+                <a:ea typeface="Calibri"/>
+                <a:cs typeface="Calibri"/>
+                <a:sym typeface="Calibri"/>
+                <a:hlinkClick r:id="rId12"/>
+              </a:rPr>
+              <a:t>geometry primitives</a:t>
+            </a:r>
+            <a:r>
+              <a:rPr lang="en-US" sz="1200" b="0" i="0" u="none" strike="noStrike" cap="none" dirty="0">
+                <a:solidFill>
+                  <a:schemeClr val="dk1"/>
+                </a:solidFill>
+                <a:effectLst/>
+                <a:latin typeface="Calibri"/>
+                <a:ea typeface="Calibri"/>
+                <a:cs typeface="Calibri"/>
+                <a:sym typeface="Calibri"/>
+              </a:rPr>
+              <a:t>. You can also </a:t>
+            </a:r>
+            <a:r>
+              <a:rPr lang="en-US" sz="1200" b="0" i="0" u="none" strike="noStrike" cap="none" dirty="0">
+                <a:solidFill>
+                  <a:schemeClr val="dk1"/>
+                </a:solidFill>
+                <a:effectLst/>
+                <a:latin typeface="Calibri"/>
+                <a:ea typeface="Calibri"/>
+                <a:cs typeface="Calibri"/>
+                <a:sym typeface="Calibri"/>
+                <a:hlinkClick r:id="rId13"/>
+              </a:rPr>
+              <a:t>create custom geometry</a:t>
+            </a:r>
+            <a:r>
+              <a:rPr lang="en-US" sz="1200" b="0" i="0" u="none" strike="noStrike" cap="none" dirty="0">
+                <a:solidFill>
+                  <a:schemeClr val="dk1"/>
+                </a:solidFill>
+                <a:effectLst/>
+                <a:latin typeface="Calibri"/>
+                <a:ea typeface="Calibri"/>
+                <a:cs typeface="Calibri"/>
+                <a:sym typeface="Calibri"/>
+              </a:rPr>
+              <a:t> as well as </a:t>
+            </a:r>
+            <a:r>
+              <a:rPr lang="en-US" sz="1200" b="0" i="0" u="none" strike="noStrike" cap="none" dirty="0">
+                <a:solidFill>
+                  <a:schemeClr val="dk1"/>
+                </a:solidFill>
+                <a:effectLst/>
+                <a:latin typeface="Calibri"/>
+                <a:ea typeface="Calibri"/>
+                <a:cs typeface="Calibri"/>
+                <a:sym typeface="Calibri"/>
+                <a:hlinkClick r:id="rId14"/>
+              </a:rPr>
+              <a:t>load geometry from files</a:t>
+            </a:r>
+            <a:r>
+              <a:rPr lang="en-US" sz="1200" b="0" i="0" u="none" strike="noStrike" cap="none" dirty="0">
+                <a:solidFill>
+                  <a:schemeClr val="dk1"/>
+                </a:solidFill>
+                <a:effectLst/>
+                <a:latin typeface="Calibri"/>
+                <a:ea typeface="Calibri"/>
+                <a:cs typeface="Calibri"/>
+                <a:sym typeface="Calibri"/>
+              </a:rPr>
+              <a:t>.</a:t>
+            </a:r>
+          </a:p>
+          <a:p>
+            <a:pPr algn="just">
+              <a:buFontTx/>
+              <a:buChar char="-"/>
+            </a:pPr>
+            <a:endParaRPr lang="en-US" sz="1200" b="0" i="0" u="none" strike="noStrike" cap="none" dirty="0">
+              <a:solidFill>
+                <a:schemeClr val="dk1"/>
+              </a:solidFill>
+              <a:effectLst/>
+              <a:latin typeface="Calibri"/>
+              <a:ea typeface="Calibri"/>
+              <a:cs typeface="Calibri"/>
+              <a:sym typeface="Calibri"/>
+            </a:endParaRPr>
+          </a:p>
+          <a:p>
+            <a:pPr algn="just">
+              <a:buFontTx/>
+              <a:buChar char="-"/>
+            </a:pPr>
+            <a:r>
+              <a:rPr lang="en-US" sz="1200" b="0" i="0" u="none" strike="noStrike" cap="none" dirty="0">
+                <a:solidFill>
+                  <a:schemeClr val="dk1"/>
+                </a:solidFill>
+                <a:effectLst/>
+                <a:latin typeface="Calibri"/>
+                <a:ea typeface="Calibri"/>
+                <a:cs typeface="Calibri"/>
+                <a:sym typeface="Calibri"/>
+                <a:hlinkClick r:id="rId11"/>
+              </a:rPr>
+              <a:t>Material</a:t>
+            </a:r>
+            <a:r>
+              <a:rPr lang="en-US" sz="1200" b="0" i="0" u="none" strike="noStrike" cap="none" dirty="0">
+                <a:solidFill>
+                  <a:schemeClr val="dk1"/>
+                </a:solidFill>
+                <a:effectLst/>
+                <a:latin typeface="Calibri"/>
+                <a:ea typeface="Calibri"/>
+                <a:cs typeface="Calibri"/>
+                <a:sym typeface="Calibri"/>
+              </a:rPr>
+              <a:t> objects represent </a:t>
+            </a:r>
+            <a:r>
+              <a:rPr lang="en-US" sz="1200" b="0" i="0" u="none" strike="noStrike" cap="none" dirty="0">
+                <a:solidFill>
+                  <a:schemeClr val="dk1"/>
+                </a:solidFill>
+                <a:effectLst/>
+                <a:latin typeface="Calibri"/>
+                <a:ea typeface="Calibri"/>
+                <a:cs typeface="Calibri"/>
+                <a:sym typeface="Calibri"/>
+                <a:hlinkClick r:id="rId15"/>
+              </a:rPr>
+              <a:t>the surface properties used to draw geometry</a:t>
+            </a:r>
+            <a:r>
+              <a:rPr lang="en-US" sz="1200" b="0" i="0" u="none" strike="noStrike" cap="none" dirty="0">
+                <a:solidFill>
+                  <a:schemeClr val="dk1"/>
+                </a:solidFill>
+                <a:effectLst/>
+                <a:latin typeface="Calibri"/>
+                <a:ea typeface="Calibri"/>
+                <a:cs typeface="Calibri"/>
+                <a:sym typeface="Calibri"/>
+              </a:rPr>
+              <a:t> including things like the color to use and how shiny it is. A </a:t>
+            </a:r>
+            <a:r>
+              <a:rPr lang="en-US" sz="1200" b="0" i="0" u="none" strike="noStrike" cap="none" dirty="0">
+                <a:solidFill>
+                  <a:schemeClr val="dk1"/>
+                </a:solidFill>
+                <a:effectLst/>
+                <a:latin typeface="Calibri"/>
+                <a:ea typeface="Calibri"/>
+                <a:cs typeface="Calibri"/>
+                <a:sym typeface="Calibri"/>
+                <a:hlinkClick r:id="rId11"/>
+              </a:rPr>
+              <a:t>Material</a:t>
+            </a:r>
+            <a:r>
+              <a:rPr lang="en-US" sz="1200" b="0" i="0" u="none" strike="noStrike" cap="none" dirty="0">
+                <a:solidFill>
+                  <a:schemeClr val="dk1"/>
+                </a:solidFill>
+                <a:effectLst/>
+                <a:latin typeface="Calibri"/>
+                <a:ea typeface="Calibri"/>
+                <a:cs typeface="Calibri"/>
+                <a:sym typeface="Calibri"/>
+              </a:rPr>
+              <a:t> can also reference one or more </a:t>
+            </a:r>
+            <a:r>
+              <a:rPr lang="en-US" sz="1200" b="0" i="0" u="none" strike="noStrike" cap="none" dirty="0">
+                <a:solidFill>
+                  <a:schemeClr val="dk1"/>
+                </a:solidFill>
+                <a:effectLst/>
+                <a:latin typeface="Calibri"/>
+                <a:ea typeface="Calibri"/>
+                <a:cs typeface="Calibri"/>
+                <a:sym typeface="Calibri"/>
+                <a:hlinkClick r:id="rId16"/>
+              </a:rPr>
+              <a:t>Texture</a:t>
+            </a:r>
+            <a:r>
+              <a:rPr lang="en-US" sz="1200" b="0" i="0" u="none" strike="noStrike" cap="none" dirty="0">
+                <a:solidFill>
+                  <a:schemeClr val="dk1"/>
+                </a:solidFill>
+                <a:effectLst/>
+                <a:latin typeface="Calibri"/>
+                <a:ea typeface="Calibri"/>
+                <a:cs typeface="Calibri"/>
+                <a:sym typeface="Calibri"/>
+              </a:rPr>
+              <a:t> objects which can be used, for example, to wrap an image onto the surface of a geometry.</a:t>
+            </a:r>
+          </a:p>
+          <a:p>
+            <a:pPr algn="just">
+              <a:buFontTx/>
+              <a:buChar char="-"/>
+            </a:pPr>
+            <a:endParaRPr lang="en-US" sz="1200" b="0" i="0" u="none" strike="noStrike" cap="none" dirty="0">
+              <a:solidFill>
+                <a:schemeClr val="dk1"/>
+              </a:solidFill>
+              <a:effectLst/>
+              <a:latin typeface="Calibri"/>
+              <a:ea typeface="Calibri"/>
+              <a:cs typeface="Calibri"/>
+              <a:sym typeface="Calibri"/>
+              <a:hlinkClick r:id="rId16"/>
+            </a:endParaRPr>
+          </a:p>
+          <a:p>
+            <a:pPr algn="just">
+              <a:buFontTx/>
+              <a:buChar char="-"/>
+            </a:pPr>
+            <a:r>
+              <a:rPr lang="en-US" sz="1200" b="0" i="0" u="none" strike="noStrike" cap="none" dirty="0">
+                <a:solidFill>
+                  <a:schemeClr val="dk1"/>
+                </a:solidFill>
+                <a:effectLst/>
+                <a:latin typeface="Calibri"/>
+                <a:ea typeface="Calibri"/>
+                <a:cs typeface="Calibri"/>
+                <a:sym typeface="Calibri"/>
+                <a:hlinkClick r:id="rId16"/>
+              </a:rPr>
+              <a:t>Texture</a:t>
+            </a:r>
+            <a:r>
+              <a:rPr lang="en-US" sz="1200" b="0" i="0" u="none" strike="noStrike" cap="none" dirty="0">
+                <a:solidFill>
+                  <a:schemeClr val="dk1"/>
+                </a:solidFill>
+                <a:effectLst/>
+                <a:latin typeface="Calibri"/>
+                <a:ea typeface="Calibri"/>
+                <a:cs typeface="Calibri"/>
+                <a:sym typeface="Calibri"/>
+              </a:rPr>
+              <a:t> objects generally represent images either </a:t>
+            </a:r>
+            <a:r>
+              <a:rPr lang="en-US" sz="1200" b="0" i="0" u="none" strike="noStrike" cap="none" dirty="0">
+                <a:solidFill>
+                  <a:schemeClr val="dk1"/>
+                </a:solidFill>
+                <a:effectLst/>
+                <a:latin typeface="Calibri"/>
+                <a:ea typeface="Calibri"/>
+                <a:cs typeface="Calibri"/>
+                <a:sym typeface="Calibri"/>
+                <a:hlinkClick r:id="rId17"/>
+              </a:rPr>
+              <a:t>loaded from image files</a:t>
+            </a:r>
+            <a:r>
+              <a:rPr lang="en-US" sz="1200" b="0" i="0" u="none" strike="noStrike" cap="none" dirty="0">
+                <a:solidFill>
+                  <a:schemeClr val="dk1"/>
+                </a:solidFill>
+                <a:effectLst/>
+                <a:latin typeface="Calibri"/>
+                <a:ea typeface="Calibri"/>
+                <a:cs typeface="Calibri"/>
+                <a:sym typeface="Calibri"/>
+              </a:rPr>
+              <a:t>, </a:t>
+            </a:r>
+            <a:r>
+              <a:rPr lang="en-US" sz="1200" b="0" i="0" u="none" strike="noStrike" cap="none" dirty="0">
+                <a:solidFill>
+                  <a:schemeClr val="dk1"/>
+                </a:solidFill>
+                <a:effectLst/>
+                <a:latin typeface="Calibri"/>
+                <a:ea typeface="Calibri"/>
+                <a:cs typeface="Calibri"/>
+                <a:sym typeface="Calibri"/>
+                <a:hlinkClick r:id="rId18"/>
+              </a:rPr>
+              <a:t>generated from a canvas</a:t>
+            </a:r>
+            <a:r>
+              <a:rPr lang="en-US" sz="1200" b="0" i="0" u="none" strike="noStrike" cap="none" dirty="0">
+                <a:solidFill>
+                  <a:schemeClr val="dk1"/>
+                </a:solidFill>
+                <a:effectLst/>
+                <a:latin typeface="Calibri"/>
+                <a:ea typeface="Calibri"/>
+                <a:cs typeface="Calibri"/>
+                <a:sym typeface="Calibri"/>
+              </a:rPr>
+              <a:t> or </a:t>
+            </a:r>
+            <a:r>
+              <a:rPr lang="en-US" sz="1200" b="0" i="0" u="none" strike="noStrike" cap="none" dirty="0">
+                <a:solidFill>
+                  <a:schemeClr val="dk1"/>
+                </a:solidFill>
+                <a:effectLst/>
+                <a:latin typeface="Calibri"/>
+                <a:ea typeface="Calibri"/>
+                <a:cs typeface="Calibri"/>
+                <a:sym typeface="Calibri"/>
+                <a:hlinkClick r:id="rId19"/>
+              </a:rPr>
+              <a:t>rendered from another scene</a:t>
+            </a:r>
+            <a:r>
+              <a:rPr lang="en-US" sz="1200" b="0" i="0" u="none" strike="noStrike" cap="none" dirty="0">
+                <a:solidFill>
+                  <a:schemeClr val="dk1"/>
+                </a:solidFill>
+                <a:effectLst/>
+                <a:latin typeface="Calibri"/>
+                <a:ea typeface="Calibri"/>
+                <a:cs typeface="Calibri"/>
+                <a:sym typeface="Calibri"/>
+              </a:rPr>
+              <a:t>.</a:t>
+            </a:r>
+          </a:p>
+          <a:p>
+            <a:pPr algn="just">
+              <a:buFontTx/>
+              <a:buChar char="-"/>
+            </a:pPr>
+            <a:endParaRPr lang="en-US" sz="1200" b="0" i="0" u="none" strike="noStrike" cap="none" dirty="0">
+              <a:solidFill>
+                <a:schemeClr val="dk1"/>
+              </a:solidFill>
+              <a:effectLst/>
+              <a:latin typeface="Calibri"/>
+              <a:ea typeface="Calibri"/>
+              <a:cs typeface="Calibri"/>
+              <a:sym typeface="Calibri"/>
+              <a:hlinkClick r:id="rId8"/>
+            </a:endParaRPr>
+          </a:p>
+          <a:p>
+            <a:pPr algn="just">
+              <a:buFontTx/>
+              <a:buChar char="-"/>
+            </a:pPr>
+            <a:r>
+              <a:rPr lang="en-US" sz="1200" b="0" i="0" u="none" strike="noStrike" cap="none" dirty="0">
+                <a:solidFill>
+                  <a:schemeClr val="dk1"/>
+                </a:solidFill>
+                <a:effectLst/>
+                <a:latin typeface="Calibri"/>
+                <a:ea typeface="Calibri"/>
+                <a:cs typeface="Calibri"/>
+                <a:sym typeface="Calibri"/>
+                <a:hlinkClick r:id="rId8"/>
+              </a:rPr>
+              <a:t>Light</a:t>
+            </a:r>
+            <a:r>
+              <a:rPr lang="en-US" sz="1200" b="0" i="0" u="none" strike="noStrike" cap="none" dirty="0">
+                <a:solidFill>
+                  <a:schemeClr val="dk1"/>
+                </a:solidFill>
+                <a:effectLst/>
+                <a:latin typeface="Calibri"/>
+                <a:ea typeface="Calibri"/>
+                <a:cs typeface="Calibri"/>
+                <a:sym typeface="Calibri"/>
+              </a:rPr>
+              <a:t> objects represent </a:t>
+            </a:r>
+            <a:r>
+              <a:rPr lang="en-US" sz="1200" b="0" i="0" u="none" strike="noStrike" cap="none" dirty="0">
+                <a:solidFill>
+                  <a:schemeClr val="dk1"/>
+                </a:solidFill>
+                <a:effectLst/>
+                <a:latin typeface="Calibri"/>
+                <a:ea typeface="Calibri"/>
+                <a:cs typeface="Calibri"/>
+                <a:sym typeface="Calibri"/>
+                <a:hlinkClick r:id="rId20"/>
+              </a:rPr>
+              <a:t>different kinds of lights</a:t>
+            </a:r>
+            <a:r>
+              <a:rPr lang="en-US" sz="1200" b="0" i="0" u="none" strike="noStrike" cap="none" dirty="0">
+                <a:solidFill>
+                  <a:schemeClr val="dk1"/>
+                </a:solidFill>
+                <a:effectLst/>
+                <a:latin typeface="Calibri"/>
+                <a:ea typeface="Calibri"/>
+                <a:cs typeface="Calibri"/>
+                <a:sym typeface="Calibri"/>
+              </a:rPr>
+              <a:t>.</a:t>
+            </a:r>
+          </a:p>
+          <a:p>
+            <a:pPr marL="0" lvl="0" indent="0" algn="l" rtl="0">
+              <a:spcBef>
+                <a:spcPts val="0"/>
+              </a:spcBef>
+              <a:spcAft>
+                <a:spcPts val="0"/>
+              </a:spcAft>
+              <a:buNone/>
+            </a:pPr>
+            <a:endParaRPr dirty="0"/>
+          </a:p>
+        </p:txBody>
+      </p:sp>
+      <p:sp>
+        <p:nvSpPr>
+          <p:cNvPr id="132" name="Google Shape;132;p3:notes">
+            <a:extLst>
+              <a:ext uri="{FF2B5EF4-FFF2-40B4-BE49-F238E27FC236}">
+                <a16:creationId xmlns:a16="http://schemas.microsoft.com/office/drawing/2014/main" id="{C0DAEBE7-F9B7-0A88-13C9-07F7E4DD2744}"/>
+              </a:ext>
+            </a:extLst>
+          </p:cNvPr>
+          <p:cNvSpPr txBox="1">
+            <a:spLocks noGrp="1"/>
+          </p:cNvSpPr>
+          <p:nvPr>
+            <p:ph type="dt" idx="10"/>
+          </p:nvPr>
+        </p:nvSpPr>
+        <p:spPr>
+          <a:xfrm>
+            <a:off x="5179484" y="0"/>
+            <a:ext cx="3962400" cy="342900"/>
+          </a:xfrm>
+          <a:prstGeom prst="rect">
+            <a:avLst/>
+          </a:prstGeom>
+          <a:noFill/>
+          <a:ln>
+            <a:noFill/>
+          </a:ln>
+        </p:spPr>
+        <p:txBody>
+          <a:bodyPr spcFirstLastPara="1" wrap="square" lIns="91425" tIns="45700" rIns="91425" bIns="45700" anchor="t" anchorCtr="0">
+            <a:noAutofit/>
+          </a:bodyPr>
+          <a:lstStyle/>
+          <a:p>
+            <a:pPr marL="0" lvl="0" indent="0" algn="r" rtl="0">
+              <a:spcBef>
+                <a:spcPts val="0"/>
+              </a:spcBef>
+              <a:spcAft>
+                <a:spcPts val="0"/>
+              </a:spcAft>
+              <a:buNone/>
+            </a:pPr>
+            <a:endParaRPr/>
+          </a:p>
+        </p:txBody>
+      </p:sp>
+      <p:sp>
+        <p:nvSpPr>
+          <p:cNvPr id="133" name="Google Shape;133;p3:notes">
+            <a:extLst>
+              <a:ext uri="{FF2B5EF4-FFF2-40B4-BE49-F238E27FC236}">
+                <a16:creationId xmlns:a16="http://schemas.microsoft.com/office/drawing/2014/main" id="{6E32A4AA-4EE5-C432-DFFB-A235B5E4FB64}"/>
+              </a:ext>
+            </a:extLst>
+          </p:cNvPr>
+          <p:cNvSpPr txBox="1">
+            <a:spLocks noGrp="1"/>
+          </p:cNvSpPr>
+          <p:nvPr>
+            <p:ph type="sldNum" idx="12"/>
+          </p:nvPr>
+        </p:nvSpPr>
+        <p:spPr>
+          <a:xfrm>
+            <a:off x="5179484" y="6513910"/>
+            <a:ext cx="3962400" cy="342900"/>
+          </a:xfrm>
+          <a:prstGeom prst="rect">
+            <a:avLst/>
+          </a:prstGeom>
+          <a:noFill/>
+          <a:ln>
+            <a:noFill/>
+          </a:ln>
+        </p:spPr>
+        <p:txBody>
+          <a:bodyPr spcFirstLastPara="1" wrap="square" lIns="91425" tIns="45700" rIns="91425" bIns="45700" anchor="b" anchorCtr="0">
+            <a:noAutofit/>
+          </a:bodyPr>
+          <a:lstStyle/>
+          <a:p>
+            <a:pPr marL="0" lvl="0" indent="0" algn="r" rtl="0">
+              <a:spcBef>
+                <a:spcPts val="0"/>
+              </a:spcBef>
+              <a:spcAft>
+                <a:spcPts val="0"/>
+              </a:spcAft>
+              <a:buNone/>
+            </a:pPr>
+            <a:fld id="{00000000-1234-1234-1234-123412341234}" type="slidenum">
+              <a:rPr lang="en-US"/>
+              <a:t>5</a:t>
+            </a:fld>
+            <a:endParaRPr/>
+          </a:p>
+        </p:txBody>
+      </p:sp>
+    </p:spTree>
+    <p:extLst>
+      <p:ext uri="{BB962C8B-B14F-4D97-AF65-F5344CB8AC3E}">
+        <p14:creationId xmlns:p14="http://schemas.microsoft.com/office/powerpoint/2010/main" val="1371247825"/>
+      </p:ext>
+    </p:extLst>
+  </p:cSld>
+  <p:clrMapOvr>
+    <a:masterClrMapping/>
+  </p:clrMapOvr>
+</p:notes>
+</file>
+
+<file path=ppt/notesSlides/notesSlide7.xml><?xml version="1.0" encoding="utf-8"?>
+<p:notes xmlns:a="http://schemas.openxmlformats.org/drawingml/2006/main" xmlns:r="http://schemas.openxmlformats.org/officeDocument/2006/relationships" xmlns:p="http://schemas.openxmlformats.org/presentationml/2006/main" showMasterSp="0" showMasterPhAnim="0">
+  <p:cSld>
+    <p:spTree>
+      <p:nvGrpSpPr>
+        <p:cNvPr id="1" name="Shape 129">
+          <a:extLst>
+            <a:ext uri="{FF2B5EF4-FFF2-40B4-BE49-F238E27FC236}">
               <a16:creationId xmlns:a16="http://schemas.microsoft.com/office/drawing/2014/main" id="{C2D2DB31-8E90-C75C-BCB1-8EE1A0FE1304}"/>
             </a:ext>
           </a:extLst>
@@ -5162,7 +6842,7 @@
             </a:pPr>
             <a:fld id="{00000000-1234-1234-1234-123412341234}" type="slidenum">
               <a:rPr lang="en-US"/>
-              <a:t>5</a:t>
+              <a:t>6</a:t>
             </a:fld>
             <a:endParaRPr/>
           </a:p>
@@ -5172,1686 +6852,6 @@
     <p:extLst>
       <p:ext uri="{BB962C8B-B14F-4D97-AF65-F5344CB8AC3E}">
         <p14:creationId xmlns:p14="http://schemas.microsoft.com/office/powerpoint/2010/main" val="136697936"/>
-      </p:ext>
-    </p:extLst>
-  </p:cSld>
-  <p:clrMapOvr>
-    <a:masterClrMapping/>
-  </p:clrMapOvr>
-</p:notes>
-</file>
-
-<file path=ppt/notesSlides/notesSlide7.xml><?xml version="1.0" encoding="utf-8"?>
-<p:notes xmlns:a="http://schemas.openxmlformats.org/drawingml/2006/main" xmlns:r="http://schemas.openxmlformats.org/officeDocument/2006/relationships" xmlns:p="http://schemas.openxmlformats.org/presentationml/2006/main" showMasterSp="0" showMasterPhAnim="0">
-  <p:cSld>
-    <p:spTree>
-      <p:nvGrpSpPr>
-        <p:cNvPr id="1" name="Shape 129">
-          <a:extLst>
-            <a:ext uri="{FF2B5EF4-FFF2-40B4-BE49-F238E27FC236}">
-              <a16:creationId xmlns:a16="http://schemas.microsoft.com/office/drawing/2014/main" id="{B76A3783-A40A-C424-79E4-B8FE4103633C}"/>
-            </a:ext>
-          </a:extLst>
-        </p:cNvPr>
-        <p:cNvGrpSpPr/>
-        <p:nvPr/>
-      </p:nvGrpSpPr>
-      <p:grpSpPr>
-        <a:xfrm>
-          <a:off x="0" y="0"/>
-          <a:ext cx="0" cy="0"/>
-          <a:chOff x="0" y="0"/>
-          <a:chExt cx="0" cy="0"/>
-        </a:xfrm>
-      </p:grpSpPr>
-      <p:sp>
-        <p:nvSpPr>
-          <p:cNvPr id="130" name="Google Shape;130;p3:notes">
-            <a:extLst>
-              <a:ext uri="{FF2B5EF4-FFF2-40B4-BE49-F238E27FC236}">
-                <a16:creationId xmlns:a16="http://schemas.microsoft.com/office/drawing/2014/main" id="{0B650B32-AB4A-3865-46D9-F7254B820752}"/>
-              </a:ext>
-            </a:extLst>
-          </p:cNvPr>
-          <p:cNvSpPr>
-            <a:spLocks noGrp="1" noRot="1" noChangeAspect="1"/>
-          </p:cNvSpPr>
-          <p:nvPr>
-            <p:ph type="sldImg" idx="2"/>
-          </p:nvPr>
-        </p:nvSpPr>
-        <p:spPr>
-          <a:xfrm>
-            <a:off x="2857500" y="514350"/>
-            <a:ext cx="3429000" cy="2571750"/>
-          </a:xfrm>
-          <a:custGeom>
-            <a:avLst/>
-            <a:gdLst/>
-            <a:ahLst/>
-            <a:cxnLst/>
-            <a:rect l="l" t="t" r="r" b="b"/>
-            <a:pathLst>
-              <a:path w="120000" h="120000" extrusionOk="0">
-                <a:moveTo>
-                  <a:pt x="0" y="0"/>
-                </a:moveTo>
-                <a:lnTo>
-                  <a:pt x="120000" y="0"/>
-                </a:lnTo>
-                <a:lnTo>
-                  <a:pt x="120000" y="120000"/>
-                </a:lnTo>
-                <a:lnTo>
-                  <a:pt x="0" y="120000"/>
-                </a:lnTo>
-                <a:close/>
-              </a:path>
-            </a:pathLst>
-          </a:custGeom>
-          <a:noFill/>
-          <a:ln w="12700" cap="flat" cmpd="sng">
-            <a:solidFill>
-              <a:srgbClr val="000000"/>
-            </a:solidFill>
-            <a:prstDash val="solid"/>
-            <a:round/>
-            <a:headEnd type="none" w="sm" len="sm"/>
-            <a:tailEnd type="none" w="sm" len="sm"/>
-          </a:ln>
-        </p:spPr>
-      </p:sp>
-      <p:sp>
-        <p:nvSpPr>
-          <p:cNvPr id="131" name="Google Shape;131;p3:notes">
-            <a:extLst>
-              <a:ext uri="{FF2B5EF4-FFF2-40B4-BE49-F238E27FC236}">
-                <a16:creationId xmlns:a16="http://schemas.microsoft.com/office/drawing/2014/main" id="{E8C010FB-808F-21C6-1824-CB02AFC2322F}"/>
-              </a:ext>
-            </a:extLst>
-          </p:cNvPr>
-          <p:cNvSpPr txBox="1">
-            <a:spLocks noGrp="1"/>
-          </p:cNvSpPr>
-          <p:nvPr>
-            <p:ph type="body" idx="1"/>
-          </p:nvPr>
-        </p:nvSpPr>
-        <p:spPr>
-          <a:xfrm>
-            <a:off x="914400" y="3257550"/>
-            <a:ext cx="7315200" cy="3086100"/>
-          </a:xfrm>
-          <a:prstGeom prst="rect">
-            <a:avLst/>
-          </a:prstGeom>
-          <a:noFill/>
-          <a:ln>
-            <a:noFill/>
-          </a:ln>
-        </p:spPr>
-        <p:txBody>
-          <a:bodyPr spcFirstLastPara="1" wrap="square" lIns="91425" tIns="45700" rIns="91425" bIns="45700" anchor="t" anchorCtr="0">
-            <a:noAutofit/>
-          </a:bodyPr>
-          <a:lstStyle/>
-          <a:p>
-            <a:pPr algn="just"/>
-            <a:r>
-              <a:rPr lang="en-US" sz="1200" b="0" i="0" u="none" strike="noStrike" cap="none" dirty="0">
-                <a:solidFill>
-                  <a:schemeClr val="dk1"/>
-                </a:solidFill>
-                <a:effectLst/>
-                <a:latin typeface="Calibri"/>
-                <a:ea typeface="Calibri"/>
-                <a:cs typeface="Calibri"/>
-                <a:sym typeface="Calibri"/>
-              </a:rPr>
-              <a:t>Things to notice about the diagram above:</a:t>
-            </a:r>
-          </a:p>
-          <a:p>
-            <a:pPr algn="just">
-              <a:buFontTx/>
-              <a:buChar char="-"/>
-            </a:pPr>
-            <a:r>
-              <a:rPr lang="en-US" sz="1200" b="0" i="0" u="none" strike="noStrike" cap="none" dirty="0">
-                <a:solidFill>
-                  <a:schemeClr val="dk1"/>
-                </a:solidFill>
-                <a:effectLst/>
-                <a:latin typeface="Calibri"/>
-                <a:ea typeface="Calibri"/>
-                <a:cs typeface="Calibri"/>
-                <a:sym typeface="Calibri"/>
-              </a:rPr>
-              <a:t>There is a </a:t>
-            </a:r>
-            <a:r>
-              <a:rPr lang="en-US" sz="1200" b="0" i="0" u="none" strike="noStrike" cap="none" dirty="0">
-                <a:solidFill>
-                  <a:schemeClr val="dk1"/>
-                </a:solidFill>
-                <a:effectLst/>
-                <a:latin typeface="Calibri"/>
-                <a:ea typeface="Calibri"/>
-                <a:cs typeface="Calibri"/>
-                <a:sym typeface="Calibri"/>
-                <a:hlinkClick r:id="rId3"/>
-              </a:rPr>
-              <a:t>Renderer</a:t>
-            </a:r>
-            <a:r>
-              <a:rPr lang="en-US" sz="1200" b="0" i="0" u="none" strike="noStrike" cap="none" dirty="0">
-                <a:solidFill>
-                  <a:schemeClr val="dk1"/>
-                </a:solidFill>
-                <a:effectLst/>
-                <a:latin typeface="Calibri"/>
-                <a:ea typeface="Calibri"/>
-                <a:cs typeface="Calibri"/>
-                <a:sym typeface="Calibri"/>
-              </a:rPr>
-              <a:t>. This is arguably the main object of three.js. You pass a </a:t>
-            </a:r>
-            <a:r>
-              <a:rPr lang="en-US" sz="1200" b="0" i="0" u="none" strike="noStrike" cap="none" dirty="0">
-                <a:solidFill>
-                  <a:schemeClr val="dk1"/>
-                </a:solidFill>
-                <a:effectLst/>
-                <a:latin typeface="Calibri"/>
-                <a:ea typeface="Calibri"/>
-                <a:cs typeface="Calibri"/>
-                <a:sym typeface="Calibri"/>
-                <a:hlinkClick r:id="rId4"/>
-              </a:rPr>
-              <a:t>Scene</a:t>
-            </a:r>
-            <a:r>
-              <a:rPr lang="en-US" sz="1200" b="0" i="0" u="none" strike="noStrike" cap="none" dirty="0">
-                <a:solidFill>
-                  <a:schemeClr val="dk1"/>
-                </a:solidFill>
-                <a:effectLst/>
-                <a:latin typeface="Calibri"/>
-                <a:ea typeface="Calibri"/>
-                <a:cs typeface="Calibri"/>
-                <a:sym typeface="Calibri"/>
-              </a:rPr>
-              <a:t> and a </a:t>
-            </a:r>
-            <a:r>
-              <a:rPr lang="en-US" sz="1200" b="0" i="0" u="none" strike="noStrike" cap="none" dirty="0">
-                <a:solidFill>
-                  <a:schemeClr val="dk1"/>
-                </a:solidFill>
-                <a:effectLst/>
-                <a:latin typeface="Calibri"/>
-                <a:ea typeface="Calibri"/>
-                <a:cs typeface="Calibri"/>
-                <a:sym typeface="Calibri"/>
-                <a:hlinkClick r:id="rId5"/>
-              </a:rPr>
-              <a:t>Camera</a:t>
-            </a:r>
-            <a:r>
-              <a:rPr lang="en-US" sz="1200" b="0" i="0" u="none" strike="noStrike" cap="none" dirty="0">
-                <a:solidFill>
-                  <a:schemeClr val="dk1"/>
-                </a:solidFill>
-                <a:effectLst/>
-                <a:latin typeface="Calibri"/>
-                <a:ea typeface="Calibri"/>
-                <a:cs typeface="Calibri"/>
-                <a:sym typeface="Calibri"/>
-              </a:rPr>
-              <a:t> to a </a:t>
-            </a:r>
-            <a:r>
-              <a:rPr lang="en-US" sz="1200" b="0" i="0" u="none" strike="noStrike" cap="none" dirty="0">
-                <a:solidFill>
-                  <a:schemeClr val="dk1"/>
-                </a:solidFill>
-                <a:effectLst/>
-                <a:latin typeface="Calibri"/>
-                <a:ea typeface="Calibri"/>
-                <a:cs typeface="Calibri"/>
-                <a:sym typeface="Calibri"/>
-                <a:hlinkClick r:id="rId3"/>
-              </a:rPr>
-              <a:t>Renderer</a:t>
-            </a:r>
-            <a:r>
-              <a:rPr lang="en-US" sz="1200" b="0" i="0" u="none" strike="noStrike" cap="none" dirty="0">
-                <a:solidFill>
-                  <a:schemeClr val="dk1"/>
-                </a:solidFill>
-                <a:effectLst/>
-                <a:latin typeface="Calibri"/>
-                <a:ea typeface="Calibri"/>
-                <a:cs typeface="Calibri"/>
-                <a:sym typeface="Calibri"/>
-              </a:rPr>
-              <a:t> and it renders (draws) the portion of the 3D scene that is inside the </a:t>
-            </a:r>
-            <a:r>
-              <a:rPr lang="en-US" sz="1200" b="0" i="1" u="none" strike="noStrike" cap="none" dirty="0">
-                <a:solidFill>
-                  <a:schemeClr val="dk1"/>
-                </a:solidFill>
-                <a:effectLst/>
-                <a:latin typeface="Calibri"/>
-                <a:ea typeface="Calibri"/>
-                <a:cs typeface="Calibri"/>
-                <a:sym typeface="Calibri"/>
-              </a:rPr>
-              <a:t>frustum</a:t>
-            </a:r>
-            <a:r>
-              <a:rPr lang="en-US" sz="1200" b="0" i="0" u="none" strike="noStrike" cap="none" dirty="0">
-                <a:solidFill>
-                  <a:schemeClr val="dk1"/>
-                </a:solidFill>
-                <a:effectLst/>
-                <a:latin typeface="Calibri"/>
-                <a:ea typeface="Calibri"/>
-                <a:cs typeface="Calibri"/>
-                <a:sym typeface="Calibri"/>
-              </a:rPr>
-              <a:t> of the camera as a 2D image to a canvas.</a:t>
-            </a:r>
-          </a:p>
-          <a:p>
-            <a:pPr algn="just">
-              <a:buFontTx/>
-              <a:buChar char="-"/>
-            </a:pPr>
-            <a:endParaRPr lang="en-US" sz="1200" b="0" i="0" u="none" strike="noStrike" cap="none" dirty="0">
-              <a:solidFill>
-                <a:schemeClr val="dk1"/>
-              </a:solidFill>
-              <a:effectLst/>
-              <a:latin typeface="Calibri"/>
-              <a:ea typeface="Calibri"/>
-              <a:cs typeface="Calibri"/>
-              <a:sym typeface="Calibri"/>
-            </a:endParaRPr>
-          </a:p>
-          <a:p>
-            <a:pPr algn="just">
-              <a:buFontTx/>
-              <a:buChar char="-"/>
-            </a:pPr>
-            <a:r>
-              <a:rPr lang="en-US" sz="1200" b="0" i="0" u="none" strike="noStrike" cap="none" dirty="0">
-                <a:solidFill>
-                  <a:schemeClr val="dk1"/>
-                </a:solidFill>
-                <a:effectLst/>
-                <a:latin typeface="Calibri"/>
-                <a:ea typeface="Calibri"/>
-                <a:cs typeface="Calibri"/>
-                <a:sym typeface="Calibri"/>
-              </a:rPr>
-              <a:t>There is a </a:t>
-            </a:r>
-            <a:r>
-              <a:rPr lang="en-US" sz="1200" b="0" i="0" u="none" strike="noStrike" cap="none" dirty="0" err="1">
-                <a:solidFill>
-                  <a:schemeClr val="dk1"/>
-                </a:solidFill>
-                <a:effectLst/>
-                <a:latin typeface="Calibri"/>
-                <a:ea typeface="Calibri"/>
-                <a:cs typeface="Calibri"/>
-                <a:sym typeface="Calibri"/>
-                <a:hlinkClick r:id="rId6"/>
-              </a:rPr>
-              <a:t>scenegraph</a:t>
-            </a:r>
-            <a:r>
-              <a:rPr lang="en-US" sz="1200" b="0" i="0" u="none" strike="noStrike" cap="none" dirty="0">
-                <a:solidFill>
-                  <a:schemeClr val="dk1"/>
-                </a:solidFill>
-                <a:effectLst/>
-                <a:latin typeface="Calibri"/>
-                <a:ea typeface="Calibri"/>
-                <a:cs typeface="Calibri"/>
-                <a:sym typeface="Calibri"/>
-              </a:rPr>
-              <a:t> which is a tree like structure, consisting of various objects like a </a:t>
-            </a:r>
-            <a:r>
-              <a:rPr lang="en-US" sz="1200" b="0" i="0" u="none" strike="noStrike" cap="none" dirty="0">
-                <a:solidFill>
-                  <a:schemeClr val="dk1"/>
-                </a:solidFill>
-                <a:effectLst/>
-                <a:latin typeface="Calibri"/>
-                <a:ea typeface="Calibri"/>
-                <a:cs typeface="Calibri"/>
-                <a:sym typeface="Calibri"/>
-                <a:hlinkClick r:id="rId4"/>
-              </a:rPr>
-              <a:t>Scene</a:t>
-            </a:r>
-            <a:r>
-              <a:rPr lang="en-US" sz="1200" b="0" i="0" u="none" strike="noStrike" cap="none" dirty="0">
-                <a:solidFill>
-                  <a:schemeClr val="dk1"/>
-                </a:solidFill>
-                <a:effectLst/>
-                <a:latin typeface="Calibri"/>
-                <a:ea typeface="Calibri"/>
-                <a:cs typeface="Calibri"/>
-                <a:sym typeface="Calibri"/>
-              </a:rPr>
-              <a:t> object, multiple </a:t>
-            </a:r>
-            <a:r>
-              <a:rPr lang="en-US" sz="1200" b="0" i="0" u="none" strike="noStrike" cap="none" dirty="0">
-                <a:solidFill>
-                  <a:schemeClr val="dk1"/>
-                </a:solidFill>
-                <a:effectLst/>
-                <a:latin typeface="Calibri"/>
-                <a:ea typeface="Calibri"/>
-                <a:cs typeface="Calibri"/>
-                <a:sym typeface="Calibri"/>
-                <a:hlinkClick r:id="rId7"/>
-              </a:rPr>
-              <a:t>Mesh</a:t>
-            </a:r>
-            <a:r>
-              <a:rPr lang="en-US" sz="1200" b="0" i="0" u="none" strike="noStrike" cap="none" dirty="0">
-                <a:solidFill>
-                  <a:schemeClr val="dk1"/>
-                </a:solidFill>
-                <a:effectLst/>
-                <a:latin typeface="Calibri"/>
-                <a:ea typeface="Calibri"/>
-                <a:cs typeface="Calibri"/>
-                <a:sym typeface="Calibri"/>
-              </a:rPr>
-              <a:t> objects, </a:t>
-            </a:r>
-            <a:r>
-              <a:rPr lang="en-US" sz="1200" b="0" i="0" u="none" strike="noStrike" cap="none" dirty="0">
-                <a:solidFill>
-                  <a:schemeClr val="dk1"/>
-                </a:solidFill>
-                <a:effectLst/>
-                <a:latin typeface="Calibri"/>
-                <a:ea typeface="Calibri"/>
-                <a:cs typeface="Calibri"/>
-                <a:sym typeface="Calibri"/>
-                <a:hlinkClick r:id="rId8"/>
-              </a:rPr>
-              <a:t>Light</a:t>
-            </a:r>
-            <a:r>
-              <a:rPr lang="en-US" sz="1200" b="0" i="0" u="none" strike="noStrike" cap="none" dirty="0">
-                <a:solidFill>
-                  <a:schemeClr val="dk1"/>
-                </a:solidFill>
-                <a:effectLst/>
-                <a:latin typeface="Calibri"/>
-                <a:ea typeface="Calibri"/>
-                <a:cs typeface="Calibri"/>
-                <a:sym typeface="Calibri"/>
-              </a:rPr>
-              <a:t> objects, </a:t>
-            </a:r>
-            <a:r>
-              <a:rPr lang="en-US" sz="1200" b="0" i="0" u="none" strike="noStrike" cap="none" dirty="0">
-                <a:solidFill>
-                  <a:schemeClr val="dk1"/>
-                </a:solidFill>
-                <a:effectLst/>
-                <a:latin typeface="Calibri"/>
-                <a:ea typeface="Calibri"/>
-                <a:cs typeface="Calibri"/>
-                <a:sym typeface="Calibri"/>
-                <a:hlinkClick r:id="rId9"/>
-              </a:rPr>
-              <a:t>Group</a:t>
-            </a:r>
-            <a:r>
-              <a:rPr lang="en-US" sz="1200" b="0" i="0" u="none" strike="noStrike" cap="none" dirty="0">
-                <a:solidFill>
-                  <a:schemeClr val="dk1"/>
-                </a:solidFill>
-                <a:effectLst/>
-                <a:latin typeface="Calibri"/>
-                <a:ea typeface="Calibri"/>
-                <a:cs typeface="Calibri"/>
-                <a:sym typeface="Calibri"/>
-              </a:rPr>
-              <a:t>, </a:t>
-            </a:r>
-            <a:r>
-              <a:rPr lang="en-US" sz="1200" b="0" i="0" u="none" strike="noStrike" cap="none" dirty="0">
-                <a:solidFill>
-                  <a:schemeClr val="dk1"/>
-                </a:solidFill>
-                <a:effectLst/>
-                <a:latin typeface="Calibri"/>
-                <a:ea typeface="Calibri"/>
-                <a:cs typeface="Calibri"/>
-                <a:sym typeface="Calibri"/>
-                <a:hlinkClick r:id="rId10"/>
-              </a:rPr>
-              <a:t>Object3D</a:t>
-            </a:r>
-            <a:r>
-              <a:rPr lang="en-US" sz="1200" b="0" i="0" u="none" strike="noStrike" cap="none" dirty="0">
-                <a:solidFill>
-                  <a:schemeClr val="dk1"/>
-                </a:solidFill>
-                <a:effectLst/>
-                <a:latin typeface="Calibri"/>
-                <a:ea typeface="Calibri"/>
-                <a:cs typeface="Calibri"/>
-                <a:sym typeface="Calibri"/>
-              </a:rPr>
-              <a:t>, and </a:t>
-            </a:r>
-            <a:r>
-              <a:rPr lang="en-US" sz="1200" b="0" i="0" u="none" strike="noStrike" cap="none" dirty="0">
-                <a:solidFill>
-                  <a:schemeClr val="dk1"/>
-                </a:solidFill>
-                <a:effectLst/>
-                <a:latin typeface="Calibri"/>
-                <a:ea typeface="Calibri"/>
-                <a:cs typeface="Calibri"/>
-                <a:sym typeface="Calibri"/>
-                <a:hlinkClick r:id="rId5"/>
-              </a:rPr>
-              <a:t>Camera</a:t>
-            </a:r>
-            <a:r>
-              <a:rPr lang="en-US" sz="1200" b="0" i="0" u="none" strike="noStrike" cap="none" dirty="0">
-                <a:solidFill>
-                  <a:schemeClr val="dk1"/>
-                </a:solidFill>
-                <a:effectLst/>
-                <a:latin typeface="Calibri"/>
-                <a:ea typeface="Calibri"/>
-                <a:cs typeface="Calibri"/>
-                <a:sym typeface="Calibri"/>
-              </a:rPr>
-              <a:t> objects. A </a:t>
-            </a:r>
-            <a:r>
-              <a:rPr lang="en-US" sz="1200" b="0" i="0" u="none" strike="noStrike" cap="none" dirty="0">
-                <a:solidFill>
-                  <a:schemeClr val="dk1"/>
-                </a:solidFill>
-                <a:effectLst/>
-                <a:latin typeface="Calibri"/>
-                <a:ea typeface="Calibri"/>
-                <a:cs typeface="Calibri"/>
-                <a:sym typeface="Calibri"/>
-                <a:hlinkClick r:id="rId4"/>
-              </a:rPr>
-              <a:t>Scene</a:t>
-            </a:r>
-            <a:r>
-              <a:rPr lang="en-US" sz="1200" b="0" i="0" u="none" strike="noStrike" cap="none" dirty="0">
-                <a:solidFill>
-                  <a:schemeClr val="dk1"/>
-                </a:solidFill>
-                <a:effectLst/>
-                <a:latin typeface="Calibri"/>
-                <a:ea typeface="Calibri"/>
-                <a:cs typeface="Calibri"/>
-                <a:sym typeface="Calibri"/>
-              </a:rPr>
-              <a:t> object defines the root of the </a:t>
-            </a:r>
-            <a:r>
-              <a:rPr lang="en-US" sz="1200" b="0" i="0" u="none" strike="noStrike" cap="none" dirty="0" err="1">
-                <a:solidFill>
-                  <a:schemeClr val="dk1"/>
-                </a:solidFill>
-                <a:effectLst/>
-                <a:latin typeface="Calibri"/>
-                <a:ea typeface="Calibri"/>
-                <a:cs typeface="Calibri"/>
-                <a:sym typeface="Calibri"/>
-              </a:rPr>
-              <a:t>scenegraph</a:t>
-            </a:r>
-            <a:r>
-              <a:rPr lang="en-US" sz="1200" b="0" i="0" u="none" strike="noStrike" cap="none" dirty="0">
-                <a:solidFill>
-                  <a:schemeClr val="dk1"/>
-                </a:solidFill>
-                <a:effectLst/>
-                <a:latin typeface="Calibri"/>
-                <a:ea typeface="Calibri"/>
-                <a:cs typeface="Calibri"/>
-                <a:sym typeface="Calibri"/>
-              </a:rPr>
-              <a:t> and contains properties like the background color and fog. These objects define a hierarchical parent/child tree like structure and represent where objects appear and how they are oriented. Children are positioned and oriented relative to their parent. For example the wheels on a car might be children of the car so that moving and orienting the car's object automatically moves the wheels. You can read more about this in </a:t>
-            </a:r>
-            <a:r>
-              <a:rPr lang="en-US" sz="1200" b="0" i="0" u="none" strike="noStrike" cap="none" dirty="0">
-                <a:solidFill>
-                  <a:schemeClr val="dk1"/>
-                </a:solidFill>
-                <a:effectLst/>
-                <a:latin typeface="Calibri"/>
-                <a:ea typeface="Calibri"/>
-                <a:cs typeface="Calibri"/>
-                <a:sym typeface="Calibri"/>
-                <a:hlinkClick r:id="rId6"/>
-              </a:rPr>
-              <a:t>the article on </a:t>
-            </a:r>
-            <a:r>
-              <a:rPr lang="en-US" sz="1200" b="0" i="0" u="none" strike="noStrike" cap="none" dirty="0" err="1">
-                <a:solidFill>
-                  <a:schemeClr val="dk1"/>
-                </a:solidFill>
-                <a:effectLst/>
-                <a:latin typeface="Calibri"/>
-                <a:ea typeface="Calibri"/>
-                <a:cs typeface="Calibri"/>
-                <a:sym typeface="Calibri"/>
-                <a:hlinkClick r:id="rId6"/>
-              </a:rPr>
-              <a:t>scenegraphs</a:t>
-            </a:r>
-            <a:r>
-              <a:rPr lang="en-US" sz="1200" b="0" i="0" u="none" strike="noStrike" cap="none" dirty="0">
-                <a:solidFill>
-                  <a:schemeClr val="dk1"/>
-                </a:solidFill>
-                <a:effectLst/>
-                <a:latin typeface="Calibri"/>
-                <a:ea typeface="Calibri"/>
-                <a:cs typeface="Calibri"/>
-                <a:sym typeface="Calibri"/>
-              </a:rPr>
-              <a:t>.</a:t>
-            </a:r>
-          </a:p>
-          <a:p>
-            <a:pPr algn="just">
-              <a:buFontTx/>
-              <a:buChar char="-"/>
-            </a:pPr>
-            <a:endParaRPr lang="en-US" sz="1200" b="0" i="0" u="none" strike="noStrike" cap="none" dirty="0">
-              <a:solidFill>
-                <a:schemeClr val="dk1"/>
-              </a:solidFill>
-              <a:effectLst/>
-              <a:latin typeface="Calibri"/>
-              <a:ea typeface="Calibri"/>
-              <a:cs typeface="Calibri"/>
-              <a:sym typeface="Calibri"/>
-            </a:endParaRPr>
-          </a:p>
-          <a:p>
-            <a:pPr algn="just">
-              <a:buFontTx/>
-              <a:buChar char="-"/>
-            </a:pPr>
-            <a:r>
-              <a:rPr lang="en-US" sz="1200" b="0" i="0" u="none" strike="noStrike" cap="none" dirty="0">
-                <a:solidFill>
-                  <a:schemeClr val="dk1"/>
-                </a:solidFill>
-                <a:effectLst/>
-                <a:latin typeface="Calibri"/>
-                <a:ea typeface="Calibri"/>
-                <a:cs typeface="Calibri"/>
-                <a:sym typeface="Calibri"/>
-              </a:rPr>
-              <a:t>Note in the diagram </a:t>
-            </a:r>
-            <a:r>
-              <a:rPr lang="en-US" sz="1200" b="0" i="0" u="none" strike="noStrike" cap="none" dirty="0">
-                <a:solidFill>
-                  <a:schemeClr val="dk1"/>
-                </a:solidFill>
-                <a:effectLst/>
-                <a:latin typeface="Calibri"/>
-                <a:ea typeface="Calibri"/>
-                <a:cs typeface="Calibri"/>
-                <a:sym typeface="Calibri"/>
-                <a:hlinkClick r:id="rId5"/>
-              </a:rPr>
-              <a:t>Camera</a:t>
-            </a:r>
-            <a:r>
-              <a:rPr lang="en-US" sz="1200" b="0" i="0" u="none" strike="noStrike" cap="none" dirty="0">
-                <a:solidFill>
-                  <a:schemeClr val="dk1"/>
-                </a:solidFill>
-                <a:effectLst/>
-                <a:latin typeface="Calibri"/>
-                <a:ea typeface="Calibri"/>
-                <a:cs typeface="Calibri"/>
-                <a:sym typeface="Calibri"/>
-              </a:rPr>
-              <a:t> is half in half out of the </a:t>
-            </a:r>
-            <a:r>
-              <a:rPr lang="en-US" sz="1200" b="0" i="0" u="none" strike="noStrike" cap="none" dirty="0" err="1">
-                <a:solidFill>
-                  <a:schemeClr val="dk1"/>
-                </a:solidFill>
-                <a:effectLst/>
-                <a:latin typeface="Calibri"/>
-                <a:ea typeface="Calibri"/>
-                <a:cs typeface="Calibri"/>
-                <a:sym typeface="Calibri"/>
-              </a:rPr>
-              <a:t>scenegraph</a:t>
-            </a:r>
-            <a:r>
-              <a:rPr lang="en-US" sz="1200" b="0" i="0" u="none" strike="noStrike" cap="none" dirty="0">
-                <a:solidFill>
-                  <a:schemeClr val="dk1"/>
-                </a:solidFill>
-                <a:effectLst/>
-                <a:latin typeface="Calibri"/>
-                <a:ea typeface="Calibri"/>
-                <a:cs typeface="Calibri"/>
-                <a:sym typeface="Calibri"/>
-              </a:rPr>
-              <a:t>. This is to represent that in three.js, unlike the other objects, a </a:t>
-            </a:r>
-            <a:r>
-              <a:rPr lang="en-US" sz="1200" b="0" i="0" u="none" strike="noStrike" cap="none" dirty="0">
-                <a:solidFill>
-                  <a:schemeClr val="dk1"/>
-                </a:solidFill>
-                <a:effectLst/>
-                <a:latin typeface="Calibri"/>
-                <a:ea typeface="Calibri"/>
-                <a:cs typeface="Calibri"/>
-                <a:sym typeface="Calibri"/>
-                <a:hlinkClick r:id="rId5"/>
-              </a:rPr>
-              <a:t>Camera</a:t>
-            </a:r>
-            <a:r>
-              <a:rPr lang="en-US" sz="1200" b="0" i="0" u="none" strike="noStrike" cap="none" dirty="0">
-                <a:solidFill>
-                  <a:schemeClr val="dk1"/>
-                </a:solidFill>
-                <a:effectLst/>
-                <a:latin typeface="Calibri"/>
-                <a:ea typeface="Calibri"/>
-                <a:cs typeface="Calibri"/>
-                <a:sym typeface="Calibri"/>
-              </a:rPr>
-              <a:t> does not have to be in the </a:t>
-            </a:r>
-            <a:r>
-              <a:rPr lang="en-US" sz="1200" b="0" i="0" u="none" strike="noStrike" cap="none" dirty="0" err="1">
-                <a:solidFill>
-                  <a:schemeClr val="dk1"/>
-                </a:solidFill>
-                <a:effectLst/>
-                <a:latin typeface="Calibri"/>
-                <a:ea typeface="Calibri"/>
-                <a:cs typeface="Calibri"/>
-                <a:sym typeface="Calibri"/>
-              </a:rPr>
-              <a:t>scenegraph</a:t>
-            </a:r>
-            <a:r>
-              <a:rPr lang="en-US" sz="1200" b="0" i="0" u="none" strike="noStrike" cap="none" dirty="0">
-                <a:solidFill>
-                  <a:schemeClr val="dk1"/>
-                </a:solidFill>
-                <a:effectLst/>
-                <a:latin typeface="Calibri"/>
-                <a:ea typeface="Calibri"/>
-                <a:cs typeface="Calibri"/>
-                <a:sym typeface="Calibri"/>
-              </a:rPr>
-              <a:t> to function. Just like other objects, a </a:t>
-            </a:r>
-            <a:r>
-              <a:rPr lang="en-US" sz="1200" b="0" i="0" u="none" strike="noStrike" cap="none" dirty="0">
-                <a:solidFill>
-                  <a:schemeClr val="dk1"/>
-                </a:solidFill>
-                <a:effectLst/>
-                <a:latin typeface="Calibri"/>
-                <a:ea typeface="Calibri"/>
-                <a:cs typeface="Calibri"/>
-                <a:sym typeface="Calibri"/>
-                <a:hlinkClick r:id="rId5"/>
-              </a:rPr>
-              <a:t>Camera</a:t>
-            </a:r>
-            <a:r>
-              <a:rPr lang="en-US" sz="1200" b="0" i="0" u="none" strike="noStrike" cap="none" dirty="0">
-                <a:solidFill>
-                  <a:schemeClr val="dk1"/>
-                </a:solidFill>
-                <a:effectLst/>
-                <a:latin typeface="Calibri"/>
-                <a:ea typeface="Calibri"/>
-                <a:cs typeface="Calibri"/>
-                <a:sym typeface="Calibri"/>
-              </a:rPr>
-              <a:t>, as a child of some other object, will move and orient relative to its parent object. There is an example of putting multiple </a:t>
-            </a:r>
-            <a:r>
-              <a:rPr lang="en-US" sz="1200" b="0" i="0" u="none" strike="noStrike" cap="none" dirty="0">
-                <a:solidFill>
-                  <a:schemeClr val="dk1"/>
-                </a:solidFill>
-                <a:effectLst/>
-                <a:latin typeface="Calibri"/>
-                <a:ea typeface="Calibri"/>
-                <a:cs typeface="Calibri"/>
-                <a:sym typeface="Calibri"/>
-                <a:hlinkClick r:id="rId5"/>
-              </a:rPr>
-              <a:t>Camera</a:t>
-            </a:r>
-            <a:r>
-              <a:rPr lang="en-US" sz="1200" b="0" i="0" u="none" strike="noStrike" cap="none" dirty="0">
-                <a:solidFill>
-                  <a:schemeClr val="dk1"/>
-                </a:solidFill>
-                <a:effectLst/>
-                <a:latin typeface="Calibri"/>
-                <a:ea typeface="Calibri"/>
-                <a:cs typeface="Calibri"/>
-                <a:sym typeface="Calibri"/>
-              </a:rPr>
-              <a:t> objects in a </a:t>
-            </a:r>
-            <a:r>
-              <a:rPr lang="en-US" sz="1200" b="0" i="0" u="none" strike="noStrike" cap="none" dirty="0" err="1">
-                <a:solidFill>
-                  <a:schemeClr val="dk1"/>
-                </a:solidFill>
-                <a:effectLst/>
-                <a:latin typeface="Calibri"/>
-                <a:ea typeface="Calibri"/>
-                <a:cs typeface="Calibri"/>
-                <a:sym typeface="Calibri"/>
-              </a:rPr>
-              <a:t>scenegraph</a:t>
-            </a:r>
-            <a:r>
-              <a:rPr lang="en-US" sz="1200" b="0" i="0" u="none" strike="noStrike" cap="none" dirty="0">
-                <a:solidFill>
-                  <a:schemeClr val="dk1"/>
-                </a:solidFill>
-                <a:effectLst/>
-                <a:latin typeface="Calibri"/>
-                <a:ea typeface="Calibri"/>
-                <a:cs typeface="Calibri"/>
-                <a:sym typeface="Calibri"/>
-              </a:rPr>
-              <a:t> at the end of </a:t>
-            </a:r>
-            <a:r>
-              <a:rPr lang="en-US" sz="1200" b="0" i="0" u="none" strike="noStrike" cap="none" dirty="0">
-                <a:solidFill>
-                  <a:schemeClr val="dk1"/>
-                </a:solidFill>
-                <a:effectLst/>
-                <a:latin typeface="Calibri"/>
-                <a:ea typeface="Calibri"/>
-                <a:cs typeface="Calibri"/>
-                <a:sym typeface="Calibri"/>
-                <a:hlinkClick r:id="rId6"/>
-              </a:rPr>
-              <a:t>the article on </a:t>
-            </a:r>
-            <a:r>
-              <a:rPr lang="en-US" sz="1200" b="0" i="0" u="none" strike="noStrike" cap="none" dirty="0" err="1">
-                <a:solidFill>
-                  <a:schemeClr val="dk1"/>
-                </a:solidFill>
-                <a:effectLst/>
-                <a:latin typeface="Calibri"/>
-                <a:ea typeface="Calibri"/>
-                <a:cs typeface="Calibri"/>
-                <a:sym typeface="Calibri"/>
-                <a:hlinkClick r:id="rId6"/>
-              </a:rPr>
-              <a:t>scenegraphs</a:t>
-            </a:r>
-            <a:r>
-              <a:rPr lang="en-US" sz="1200" b="0" i="0" u="none" strike="noStrike" cap="none" dirty="0">
-                <a:solidFill>
-                  <a:schemeClr val="dk1"/>
-                </a:solidFill>
-                <a:effectLst/>
-                <a:latin typeface="Calibri"/>
-                <a:ea typeface="Calibri"/>
-                <a:cs typeface="Calibri"/>
-                <a:sym typeface="Calibri"/>
-              </a:rPr>
-              <a:t>.</a:t>
-            </a:r>
-          </a:p>
-          <a:p>
-            <a:pPr algn="just">
-              <a:buFontTx/>
-              <a:buChar char="-"/>
-            </a:pPr>
-            <a:endParaRPr lang="en-US" sz="1200" b="0" i="0" u="none" strike="noStrike" cap="none" dirty="0">
-              <a:solidFill>
-                <a:schemeClr val="dk1"/>
-              </a:solidFill>
-              <a:effectLst/>
-              <a:latin typeface="Calibri"/>
-              <a:ea typeface="Calibri"/>
-              <a:cs typeface="Calibri"/>
-              <a:sym typeface="Calibri"/>
-              <a:hlinkClick r:id="rId7"/>
-            </a:endParaRPr>
-          </a:p>
-          <a:p>
-            <a:pPr algn="just">
-              <a:buFontTx/>
-              <a:buChar char="-"/>
-            </a:pPr>
-            <a:r>
-              <a:rPr lang="en-US" sz="1200" b="0" i="0" u="none" strike="noStrike" cap="none" dirty="0">
-                <a:solidFill>
-                  <a:schemeClr val="dk1"/>
-                </a:solidFill>
-                <a:effectLst/>
-                <a:latin typeface="Calibri"/>
-                <a:ea typeface="Calibri"/>
-                <a:cs typeface="Calibri"/>
-                <a:sym typeface="Calibri"/>
-                <a:hlinkClick r:id="rId7"/>
-              </a:rPr>
-              <a:t>Mesh</a:t>
-            </a:r>
-            <a:r>
-              <a:rPr lang="en-US" sz="1200" b="0" i="0" u="none" strike="noStrike" cap="none" dirty="0">
-                <a:solidFill>
-                  <a:schemeClr val="dk1"/>
-                </a:solidFill>
-                <a:effectLst/>
-                <a:latin typeface="Calibri"/>
-                <a:ea typeface="Calibri"/>
-                <a:cs typeface="Calibri"/>
-                <a:sym typeface="Calibri"/>
-              </a:rPr>
-              <a:t> objects represent drawing a specific Geometry with a specific </a:t>
-            </a:r>
-            <a:r>
-              <a:rPr lang="en-US" sz="1200" b="0" i="0" u="none" strike="noStrike" cap="none" dirty="0">
-                <a:solidFill>
-                  <a:schemeClr val="dk1"/>
-                </a:solidFill>
-                <a:effectLst/>
-                <a:latin typeface="Calibri"/>
-                <a:ea typeface="Calibri"/>
-                <a:cs typeface="Calibri"/>
-                <a:sym typeface="Calibri"/>
-                <a:hlinkClick r:id="rId11"/>
-              </a:rPr>
-              <a:t>Material</a:t>
-            </a:r>
-            <a:r>
-              <a:rPr lang="en-US" sz="1200" b="0" i="0" u="none" strike="noStrike" cap="none" dirty="0">
-                <a:solidFill>
-                  <a:schemeClr val="dk1"/>
-                </a:solidFill>
-                <a:effectLst/>
-                <a:latin typeface="Calibri"/>
-                <a:ea typeface="Calibri"/>
-                <a:cs typeface="Calibri"/>
-                <a:sym typeface="Calibri"/>
-              </a:rPr>
-              <a:t>. Both </a:t>
-            </a:r>
-            <a:r>
-              <a:rPr lang="en-US" sz="1200" b="0" i="0" u="none" strike="noStrike" cap="none" dirty="0">
-                <a:solidFill>
-                  <a:schemeClr val="dk1"/>
-                </a:solidFill>
-                <a:effectLst/>
-                <a:latin typeface="Calibri"/>
-                <a:ea typeface="Calibri"/>
-                <a:cs typeface="Calibri"/>
-                <a:sym typeface="Calibri"/>
-                <a:hlinkClick r:id="rId11"/>
-              </a:rPr>
-              <a:t>Material</a:t>
-            </a:r>
-            <a:r>
-              <a:rPr lang="en-US" sz="1200" b="0" i="0" u="none" strike="noStrike" cap="none" dirty="0">
-                <a:solidFill>
-                  <a:schemeClr val="dk1"/>
-                </a:solidFill>
-                <a:effectLst/>
-                <a:latin typeface="Calibri"/>
-                <a:ea typeface="Calibri"/>
-                <a:cs typeface="Calibri"/>
-                <a:sym typeface="Calibri"/>
-              </a:rPr>
-              <a:t> objects and Geometry objects can be used by multiple </a:t>
-            </a:r>
-            <a:r>
-              <a:rPr lang="en-US" sz="1200" b="0" i="0" u="none" strike="noStrike" cap="none" dirty="0">
-                <a:solidFill>
-                  <a:schemeClr val="dk1"/>
-                </a:solidFill>
-                <a:effectLst/>
-                <a:latin typeface="Calibri"/>
-                <a:ea typeface="Calibri"/>
-                <a:cs typeface="Calibri"/>
-                <a:sym typeface="Calibri"/>
-                <a:hlinkClick r:id="rId7"/>
-              </a:rPr>
-              <a:t>Mesh</a:t>
-            </a:r>
-            <a:r>
-              <a:rPr lang="en-US" sz="1200" b="0" i="0" u="none" strike="noStrike" cap="none" dirty="0">
-                <a:solidFill>
-                  <a:schemeClr val="dk1"/>
-                </a:solidFill>
-                <a:effectLst/>
-                <a:latin typeface="Calibri"/>
-                <a:ea typeface="Calibri"/>
-                <a:cs typeface="Calibri"/>
-                <a:sym typeface="Calibri"/>
-              </a:rPr>
-              <a:t> objects. For example to draw two blue cubes in different locations we could need two </a:t>
-            </a:r>
-            <a:r>
-              <a:rPr lang="en-US" sz="1200" b="0" i="0" u="none" strike="noStrike" cap="none" dirty="0">
-                <a:solidFill>
-                  <a:schemeClr val="dk1"/>
-                </a:solidFill>
-                <a:effectLst/>
-                <a:latin typeface="Calibri"/>
-                <a:ea typeface="Calibri"/>
-                <a:cs typeface="Calibri"/>
-                <a:sym typeface="Calibri"/>
-                <a:hlinkClick r:id="rId7"/>
-              </a:rPr>
-              <a:t>Mesh</a:t>
-            </a:r>
-            <a:r>
-              <a:rPr lang="en-US" sz="1200" b="0" i="0" u="none" strike="noStrike" cap="none" dirty="0">
-                <a:solidFill>
-                  <a:schemeClr val="dk1"/>
-                </a:solidFill>
-                <a:effectLst/>
-                <a:latin typeface="Calibri"/>
-                <a:ea typeface="Calibri"/>
-                <a:cs typeface="Calibri"/>
-                <a:sym typeface="Calibri"/>
-              </a:rPr>
-              <a:t> objects to represent the position and orientation of each cube. We would only need one Geometry to hold the vertex data for a cube and we would only need one </a:t>
-            </a:r>
-            <a:r>
-              <a:rPr lang="en-US" sz="1200" b="0" i="0" u="none" strike="noStrike" cap="none" dirty="0">
-                <a:solidFill>
-                  <a:schemeClr val="dk1"/>
-                </a:solidFill>
-                <a:effectLst/>
-                <a:latin typeface="Calibri"/>
-                <a:ea typeface="Calibri"/>
-                <a:cs typeface="Calibri"/>
-                <a:sym typeface="Calibri"/>
-                <a:hlinkClick r:id="rId11"/>
-              </a:rPr>
-              <a:t>Material</a:t>
-            </a:r>
-            <a:r>
-              <a:rPr lang="en-US" sz="1200" b="0" i="0" u="none" strike="noStrike" cap="none" dirty="0">
-                <a:solidFill>
-                  <a:schemeClr val="dk1"/>
-                </a:solidFill>
-                <a:effectLst/>
-                <a:latin typeface="Calibri"/>
-                <a:ea typeface="Calibri"/>
-                <a:cs typeface="Calibri"/>
-                <a:sym typeface="Calibri"/>
-              </a:rPr>
-              <a:t> to specify the color blue. Both </a:t>
-            </a:r>
-            <a:r>
-              <a:rPr lang="en-US" sz="1200" b="0" i="0" u="none" strike="noStrike" cap="none" dirty="0">
-                <a:solidFill>
-                  <a:schemeClr val="dk1"/>
-                </a:solidFill>
-                <a:effectLst/>
-                <a:latin typeface="Calibri"/>
-                <a:ea typeface="Calibri"/>
-                <a:cs typeface="Calibri"/>
-                <a:sym typeface="Calibri"/>
-                <a:hlinkClick r:id="rId7"/>
-              </a:rPr>
-              <a:t>Mesh</a:t>
-            </a:r>
-            <a:r>
-              <a:rPr lang="en-US" sz="1200" b="0" i="0" u="none" strike="noStrike" cap="none" dirty="0">
-                <a:solidFill>
-                  <a:schemeClr val="dk1"/>
-                </a:solidFill>
-                <a:effectLst/>
-                <a:latin typeface="Calibri"/>
-                <a:ea typeface="Calibri"/>
-                <a:cs typeface="Calibri"/>
-                <a:sym typeface="Calibri"/>
-              </a:rPr>
-              <a:t> objects could reference the same Geometry object and the same </a:t>
-            </a:r>
-            <a:r>
-              <a:rPr lang="en-US" sz="1200" b="0" i="0" u="none" strike="noStrike" cap="none" dirty="0">
-                <a:solidFill>
-                  <a:schemeClr val="dk1"/>
-                </a:solidFill>
-                <a:effectLst/>
-                <a:latin typeface="Calibri"/>
-                <a:ea typeface="Calibri"/>
-                <a:cs typeface="Calibri"/>
-                <a:sym typeface="Calibri"/>
-                <a:hlinkClick r:id="rId11"/>
-              </a:rPr>
-              <a:t>Material</a:t>
-            </a:r>
-            <a:r>
-              <a:rPr lang="en-US" sz="1200" b="0" i="0" u="none" strike="noStrike" cap="none" dirty="0">
-                <a:solidFill>
-                  <a:schemeClr val="dk1"/>
-                </a:solidFill>
-                <a:effectLst/>
-                <a:latin typeface="Calibri"/>
-                <a:ea typeface="Calibri"/>
-                <a:cs typeface="Calibri"/>
-                <a:sym typeface="Calibri"/>
-              </a:rPr>
-              <a:t> object.</a:t>
-            </a:r>
-          </a:p>
-          <a:p>
-            <a:pPr algn="just"/>
-            <a:endParaRPr lang="en-US" sz="1200" b="0" i="0" u="none" strike="noStrike" cap="none" dirty="0">
-              <a:solidFill>
-                <a:schemeClr val="dk1"/>
-              </a:solidFill>
-              <a:effectLst/>
-              <a:latin typeface="Calibri"/>
-              <a:ea typeface="Calibri"/>
-              <a:cs typeface="Calibri"/>
-              <a:sym typeface="Calibri"/>
-            </a:endParaRPr>
-          </a:p>
-          <a:p>
-            <a:pPr algn="just">
-              <a:buFontTx/>
-              <a:buChar char="-"/>
-            </a:pPr>
-            <a:r>
-              <a:rPr lang="en-US" sz="1200" b="0" i="0" u="none" strike="noStrike" cap="none" dirty="0">
-                <a:solidFill>
-                  <a:schemeClr val="dk1"/>
-                </a:solidFill>
-                <a:effectLst/>
-                <a:latin typeface="Calibri"/>
-                <a:ea typeface="Calibri"/>
-                <a:cs typeface="Calibri"/>
-                <a:sym typeface="Calibri"/>
-              </a:rPr>
-              <a:t>Geometry objects represent the vertex data of some piece of geometry like a sphere, cube, plane, dog, cat, human, tree, building, etc... Three.js provides many kinds of built in </a:t>
-            </a:r>
-            <a:r>
-              <a:rPr lang="en-US" sz="1200" b="0" i="0" u="none" strike="noStrike" cap="none" dirty="0">
-                <a:solidFill>
-                  <a:schemeClr val="dk1"/>
-                </a:solidFill>
-                <a:effectLst/>
-                <a:latin typeface="Calibri"/>
-                <a:ea typeface="Calibri"/>
-                <a:cs typeface="Calibri"/>
-                <a:sym typeface="Calibri"/>
-                <a:hlinkClick r:id="rId12"/>
-              </a:rPr>
-              <a:t>geometry primitives</a:t>
-            </a:r>
-            <a:r>
-              <a:rPr lang="en-US" sz="1200" b="0" i="0" u="none" strike="noStrike" cap="none" dirty="0">
-                <a:solidFill>
-                  <a:schemeClr val="dk1"/>
-                </a:solidFill>
-                <a:effectLst/>
-                <a:latin typeface="Calibri"/>
-                <a:ea typeface="Calibri"/>
-                <a:cs typeface="Calibri"/>
-                <a:sym typeface="Calibri"/>
-              </a:rPr>
-              <a:t>. You can also </a:t>
-            </a:r>
-            <a:r>
-              <a:rPr lang="en-US" sz="1200" b="0" i="0" u="none" strike="noStrike" cap="none" dirty="0">
-                <a:solidFill>
-                  <a:schemeClr val="dk1"/>
-                </a:solidFill>
-                <a:effectLst/>
-                <a:latin typeface="Calibri"/>
-                <a:ea typeface="Calibri"/>
-                <a:cs typeface="Calibri"/>
-                <a:sym typeface="Calibri"/>
-                <a:hlinkClick r:id="rId13"/>
-              </a:rPr>
-              <a:t>create custom geometry</a:t>
-            </a:r>
-            <a:r>
-              <a:rPr lang="en-US" sz="1200" b="0" i="0" u="none" strike="noStrike" cap="none" dirty="0">
-                <a:solidFill>
-                  <a:schemeClr val="dk1"/>
-                </a:solidFill>
-                <a:effectLst/>
-                <a:latin typeface="Calibri"/>
-                <a:ea typeface="Calibri"/>
-                <a:cs typeface="Calibri"/>
-                <a:sym typeface="Calibri"/>
-              </a:rPr>
-              <a:t> as well as </a:t>
-            </a:r>
-            <a:r>
-              <a:rPr lang="en-US" sz="1200" b="0" i="0" u="none" strike="noStrike" cap="none" dirty="0">
-                <a:solidFill>
-                  <a:schemeClr val="dk1"/>
-                </a:solidFill>
-                <a:effectLst/>
-                <a:latin typeface="Calibri"/>
-                <a:ea typeface="Calibri"/>
-                <a:cs typeface="Calibri"/>
-                <a:sym typeface="Calibri"/>
-                <a:hlinkClick r:id="rId14"/>
-              </a:rPr>
-              <a:t>load geometry from files</a:t>
-            </a:r>
-            <a:r>
-              <a:rPr lang="en-US" sz="1200" b="0" i="0" u="none" strike="noStrike" cap="none" dirty="0">
-                <a:solidFill>
-                  <a:schemeClr val="dk1"/>
-                </a:solidFill>
-                <a:effectLst/>
-                <a:latin typeface="Calibri"/>
-                <a:ea typeface="Calibri"/>
-                <a:cs typeface="Calibri"/>
-                <a:sym typeface="Calibri"/>
-              </a:rPr>
-              <a:t>.</a:t>
-            </a:r>
-          </a:p>
-          <a:p>
-            <a:pPr algn="just">
-              <a:buFontTx/>
-              <a:buChar char="-"/>
-            </a:pPr>
-            <a:endParaRPr lang="en-US" sz="1200" b="0" i="0" u="none" strike="noStrike" cap="none" dirty="0">
-              <a:solidFill>
-                <a:schemeClr val="dk1"/>
-              </a:solidFill>
-              <a:effectLst/>
-              <a:latin typeface="Calibri"/>
-              <a:ea typeface="Calibri"/>
-              <a:cs typeface="Calibri"/>
-              <a:sym typeface="Calibri"/>
-            </a:endParaRPr>
-          </a:p>
-          <a:p>
-            <a:pPr algn="just">
-              <a:buFontTx/>
-              <a:buChar char="-"/>
-            </a:pPr>
-            <a:r>
-              <a:rPr lang="en-US" sz="1200" b="0" i="0" u="none" strike="noStrike" cap="none" dirty="0">
-                <a:solidFill>
-                  <a:schemeClr val="dk1"/>
-                </a:solidFill>
-                <a:effectLst/>
-                <a:latin typeface="Calibri"/>
-                <a:ea typeface="Calibri"/>
-                <a:cs typeface="Calibri"/>
-                <a:sym typeface="Calibri"/>
-                <a:hlinkClick r:id="rId11"/>
-              </a:rPr>
-              <a:t>Material</a:t>
-            </a:r>
-            <a:r>
-              <a:rPr lang="en-US" sz="1200" b="0" i="0" u="none" strike="noStrike" cap="none" dirty="0">
-                <a:solidFill>
-                  <a:schemeClr val="dk1"/>
-                </a:solidFill>
-                <a:effectLst/>
-                <a:latin typeface="Calibri"/>
-                <a:ea typeface="Calibri"/>
-                <a:cs typeface="Calibri"/>
-                <a:sym typeface="Calibri"/>
-              </a:rPr>
-              <a:t> objects represent </a:t>
-            </a:r>
-            <a:r>
-              <a:rPr lang="en-US" sz="1200" b="0" i="0" u="none" strike="noStrike" cap="none" dirty="0">
-                <a:solidFill>
-                  <a:schemeClr val="dk1"/>
-                </a:solidFill>
-                <a:effectLst/>
-                <a:latin typeface="Calibri"/>
-                <a:ea typeface="Calibri"/>
-                <a:cs typeface="Calibri"/>
-                <a:sym typeface="Calibri"/>
-                <a:hlinkClick r:id="rId15"/>
-              </a:rPr>
-              <a:t>the surface properties used to draw geometry</a:t>
-            </a:r>
-            <a:r>
-              <a:rPr lang="en-US" sz="1200" b="0" i="0" u="none" strike="noStrike" cap="none" dirty="0">
-                <a:solidFill>
-                  <a:schemeClr val="dk1"/>
-                </a:solidFill>
-                <a:effectLst/>
-                <a:latin typeface="Calibri"/>
-                <a:ea typeface="Calibri"/>
-                <a:cs typeface="Calibri"/>
-                <a:sym typeface="Calibri"/>
-              </a:rPr>
-              <a:t> including things like the color to use and how shiny it is. A </a:t>
-            </a:r>
-            <a:r>
-              <a:rPr lang="en-US" sz="1200" b="0" i="0" u="none" strike="noStrike" cap="none" dirty="0">
-                <a:solidFill>
-                  <a:schemeClr val="dk1"/>
-                </a:solidFill>
-                <a:effectLst/>
-                <a:latin typeface="Calibri"/>
-                <a:ea typeface="Calibri"/>
-                <a:cs typeface="Calibri"/>
-                <a:sym typeface="Calibri"/>
-                <a:hlinkClick r:id="rId11"/>
-              </a:rPr>
-              <a:t>Material</a:t>
-            </a:r>
-            <a:r>
-              <a:rPr lang="en-US" sz="1200" b="0" i="0" u="none" strike="noStrike" cap="none" dirty="0">
-                <a:solidFill>
-                  <a:schemeClr val="dk1"/>
-                </a:solidFill>
-                <a:effectLst/>
-                <a:latin typeface="Calibri"/>
-                <a:ea typeface="Calibri"/>
-                <a:cs typeface="Calibri"/>
-                <a:sym typeface="Calibri"/>
-              </a:rPr>
-              <a:t> can also reference one or more </a:t>
-            </a:r>
-            <a:r>
-              <a:rPr lang="en-US" sz="1200" b="0" i="0" u="none" strike="noStrike" cap="none" dirty="0">
-                <a:solidFill>
-                  <a:schemeClr val="dk1"/>
-                </a:solidFill>
-                <a:effectLst/>
-                <a:latin typeface="Calibri"/>
-                <a:ea typeface="Calibri"/>
-                <a:cs typeface="Calibri"/>
-                <a:sym typeface="Calibri"/>
-                <a:hlinkClick r:id="rId16"/>
-              </a:rPr>
-              <a:t>Texture</a:t>
-            </a:r>
-            <a:r>
-              <a:rPr lang="en-US" sz="1200" b="0" i="0" u="none" strike="noStrike" cap="none" dirty="0">
-                <a:solidFill>
-                  <a:schemeClr val="dk1"/>
-                </a:solidFill>
-                <a:effectLst/>
-                <a:latin typeface="Calibri"/>
-                <a:ea typeface="Calibri"/>
-                <a:cs typeface="Calibri"/>
-                <a:sym typeface="Calibri"/>
-              </a:rPr>
-              <a:t> objects which can be used, for example, to wrap an image onto the surface of a geometry.</a:t>
-            </a:r>
-          </a:p>
-          <a:p>
-            <a:pPr algn="just">
-              <a:buFontTx/>
-              <a:buChar char="-"/>
-            </a:pPr>
-            <a:endParaRPr lang="en-US" sz="1200" b="0" i="0" u="none" strike="noStrike" cap="none" dirty="0">
-              <a:solidFill>
-                <a:schemeClr val="dk1"/>
-              </a:solidFill>
-              <a:effectLst/>
-              <a:latin typeface="Calibri"/>
-              <a:ea typeface="Calibri"/>
-              <a:cs typeface="Calibri"/>
-              <a:sym typeface="Calibri"/>
-              <a:hlinkClick r:id="rId16"/>
-            </a:endParaRPr>
-          </a:p>
-          <a:p>
-            <a:pPr algn="just">
-              <a:buFontTx/>
-              <a:buChar char="-"/>
-            </a:pPr>
-            <a:r>
-              <a:rPr lang="en-US" sz="1200" b="0" i="0" u="none" strike="noStrike" cap="none" dirty="0">
-                <a:solidFill>
-                  <a:schemeClr val="dk1"/>
-                </a:solidFill>
-                <a:effectLst/>
-                <a:latin typeface="Calibri"/>
-                <a:ea typeface="Calibri"/>
-                <a:cs typeface="Calibri"/>
-                <a:sym typeface="Calibri"/>
-                <a:hlinkClick r:id="rId16"/>
-              </a:rPr>
-              <a:t>Texture</a:t>
-            </a:r>
-            <a:r>
-              <a:rPr lang="en-US" sz="1200" b="0" i="0" u="none" strike="noStrike" cap="none" dirty="0">
-                <a:solidFill>
-                  <a:schemeClr val="dk1"/>
-                </a:solidFill>
-                <a:effectLst/>
-                <a:latin typeface="Calibri"/>
-                <a:ea typeface="Calibri"/>
-                <a:cs typeface="Calibri"/>
-                <a:sym typeface="Calibri"/>
-              </a:rPr>
-              <a:t> objects generally represent images either </a:t>
-            </a:r>
-            <a:r>
-              <a:rPr lang="en-US" sz="1200" b="0" i="0" u="none" strike="noStrike" cap="none" dirty="0">
-                <a:solidFill>
-                  <a:schemeClr val="dk1"/>
-                </a:solidFill>
-                <a:effectLst/>
-                <a:latin typeface="Calibri"/>
-                <a:ea typeface="Calibri"/>
-                <a:cs typeface="Calibri"/>
-                <a:sym typeface="Calibri"/>
-                <a:hlinkClick r:id="rId17"/>
-              </a:rPr>
-              <a:t>loaded from image files</a:t>
-            </a:r>
-            <a:r>
-              <a:rPr lang="en-US" sz="1200" b="0" i="0" u="none" strike="noStrike" cap="none" dirty="0">
-                <a:solidFill>
-                  <a:schemeClr val="dk1"/>
-                </a:solidFill>
-                <a:effectLst/>
-                <a:latin typeface="Calibri"/>
-                <a:ea typeface="Calibri"/>
-                <a:cs typeface="Calibri"/>
-                <a:sym typeface="Calibri"/>
-              </a:rPr>
-              <a:t>, </a:t>
-            </a:r>
-            <a:r>
-              <a:rPr lang="en-US" sz="1200" b="0" i="0" u="none" strike="noStrike" cap="none" dirty="0">
-                <a:solidFill>
-                  <a:schemeClr val="dk1"/>
-                </a:solidFill>
-                <a:effectLst/>
-                <a:latin typeface="Calibri"/>
-                <a:ea typeface="Calibri"/>
-                <a:cs typeface="Calibri"/>
-                <a:sym typeface="Calibri"/>
-                <a:hlinkClick r:id="rId18"/>
-              </a:rPr>
-              <a:t>generated from a canvas</a:t>
-            </a:r>
-            <a:r>
-              <a:rPr lang="en-US" sz="1200" b="0" i="0" u="none" strike="noStrike" cap="none" dirty="0">
-                <a:solidFill>
-                  <a:schemeClr val="dk1"/>
-                </a:solidFill>
-                <a:effectLst/>
-                <a:latin typeface="Calibri"/>
-                <a:ea typeface="Calibri"/>
-                <a:cs typeface="Calibri"/>
-                <a:sym typeface="Calibri"/>
-              </a:rPr>
-              <a:t> or </a:t>
-            </a:r>
-            <a:r>
-              <a:rPr lang="en-US" sz="1200" b="0" i="0" u="none" strike="noStrike" cap="none" dirty="0">
-                <a:solidFill>
-                  <a:schemeClr val="dk1"/>
-                </a:solidFill>
-                <a:effectLst/>
-                <a:latin typeface="Calibri"/>
-                <a:ea typeface="Calibri"/>
-                <a:cs typeface="Calibri"/>
-                <a:sym typeface="Calibri"/>
-                <a:hlinkClick r:id="rId19"/>
-              </a:rPr>
-              <a:t>rendered from another scene</a:t>
-            </a:r>
-            <a:r>
-              <a:rPr lang="en-US" sz="1200" b="0" i="0" u="none" strike="noStrike" cap="none" dirty="0">
-                <a:solidFill>
-                  <a:schemeClr val="dk1"/>
-                </a:solidFill>
-                <a:effectLst/>
-                <a:latin typeface="Calibri"/>
-                <a:ea typeface="Calibri"/>
-                <a:cs typeface="Calibri"/>
-                <a:sym typeface="Calibri"/>
-              </a:rPr>
-              <a:t>.</a:t>
-            </a:r>
-          </a:p>
-          <a:p>
-            <a:pPr algn="just">
-              <a:buFontTx/>
-              <a:buChar char="-"/>
-            </a:pPr>
-            <a:endParaRPr lang="en-US" sz="1200" b="0" i="0" u="none" strike="noStrike" cap="none" dirty="0">
-              <a:solidFill>
-                <a:schemeClr val="dk1"/>
-              </a:solidFill>
-              <a:effectLst/>
-              <a:latin typeface="Calibri"/>
-              <a:ea typeface="Calibri"/>
-              <a:cs typeface="Calibri"/>
-              <a:sym typeface="Calibri"/>
-              <a:hlinkClick r:id="rId8"/>
-            </a:endParaRPr>
-          </a:p>
-          <a:p>
-            <a:pPr algn="just">
-              <a:buFontTx/>
-              <a:buChar char="-"/>
-            </a:pPr>
-            <a:r>
-              <a:rPr lang="en-US" sz="1200" b="0" i="0" u="none" strike="noStrike" cap="none" dirty="0">
-                <a:solidFill>
-                  <a:schemeClr val="dk1"/>
-                </a:solidFill>
-                <a:effectLst/>
-                <a:latin typeface="Calibri"/>
-                <a:ea typeface="Calibri"/>
-                <a:cs typeface="Calibri"/>
-                <a:sym typeface="Calibri"/>
-                <a:hlinkClick r:id="rId8"/>
-              </a:rPr>
-              <a:t>Light</a:t>
-            </a:r>
-            <a:r>
-              <a:rPr lang="en-US" sz="1200" b="0" i="0" u="none" strike="noStrike" cap="none" dirty="0">
-                <a:solidFill>
-                  <a:schemeClr val="dk1"/>
-                </a:solidFill>
-                <a:effectLst/>
-                <a:latin typeface="Calibri"/>
-                <a:ea typeface="Calibri"/>
-                <a:cs typeface="Calibri"/>
-                <a:sym typeface="Calibri"/>
-              </a:rPr>
-              <a:t> objects represent </a:t>
-            </a:r>
-            <a:r>
-              <a:rPr lang="en-US" sz="1200" b="0" i="0" u="none" strike="noStrike" cap="none" dirty="0">
-                <a:solidFill>
-                  <a:schemeClr val="dk1"/>
-                </a:solidFill>
-                <a:effectLst/>
-                <a:latin typeface="Calibri"/>
-                <a:ea typeface="Calibri"/>
-                <a:cs typeface="Calibri"/>
-                <a:sym typeface="Calibri"/>
-                <a:hlinkClick r:id="rId20"/>
-              </a:rPr>
-              <a:t>different kinds of lights</a:t>
-            </a:r>
-            <a:r>
-              <a:rPr lang="en-US" sz="1200" b="0" i="0" u="none" strike="noStrike" cap="none" dirty="0">
-                <a:solidFill>
-                  <a:schemeClr val="dk1"/>
-                </a:solidFill>
-                <a:effectLst/>
-                <a:latin typeface="Calibri"/>
-                <a:ea typeface="Calibri"/>
-                <a:cs typeface="Calibri"/>
-                <a:sym typeface="Calibri"/>
-              </a:rPr>
-              <a:t>.</a:t>
-            </a:r>
-          </a:p>
-          <a:p>
-            <a:pPr marL="0" lvl="0" indent="0" algn="l" rtl="0">
-              <a:spcBef>
-                <a:spcPts val="0"/>
-              </a:spcBef>
-              <a:spcAft>
-                <a:spcPts val="0"/>
-              </a:spcAft>
-              <a:buNone/>
-            </a:pPr>
-            <a:endParaRPr dirty="0"/>
-          </a:p>
-        </p:txBody>
-      </p:sp>
-      <p:sp>
-        <p:nvSpPr>
-          <p:cNvPr id="132" name="Google Shape;132;p3:notes">
-            <a:extLst>
-              <a:ext uri="{FF2B5EF4-FFF2-40B4-BE49-F238E27FC236}">
-                <a16:creationId xmlns:a16="http://schemas.microsoft.com/office/drawing/2014/main" id="{C0DAEBE7-F9B7-0A88-13C9-07F7E4DD2744}"/>
-              </a:ext>
-            </a:extLst>
-          </p:cNvPr>
-          <p:cNvSpPr txBox="1">
-            <a:spLocks noGrp="1"/>
-          </p:cNvSpPr>
-          <p:nvPr>
-            <p:ph type="dt" idx="10"/>
-          </p:nvPr>
-        </p:nvSpPr>
-        <p:spPr>
-          <a:xfrm>
-            <a:off x="5179484" y="0"/>
-            <a:ext cx="3962400" cy="342900"/>
-          </a:xfrm>
-          <a:prstGeom prst="rect">
-            <a:avLst/>
-          </a:prstGeom>
-          <a:noFill/>
-          <a:ln>
-            <a:noFill/>
-          </a:ln>
-        </p:spPr>
-        <p:txBody>
-          <a:bodyPr spcFirstLastPara="1" wrap="square" lIns="91425" tIns="45700" rIns="91425" bIns="45700" anchor="t" anchorCtr="0">
-            <a:noAutofit/>
-          </a:bodyPr>
-          <a:lstStyle/>
-          <a:p>
-            <a:pPr marL="0" lvl="0" indent="0" algn="r" rtl="0">
-              <a:spcBef>
-                <a:spcPts val="0"/>
-              </a:spcBef>
-              <a:spcAft>
-                <a:spcPts val="0"/>
-              </a:spcAft>
-              <a:buNone/>
-            </a:pPr>
-            <a:endParaRPr/>
-          </a:p>
-        </p:txBody>
-      </p:sp>
-      <p:sp>
-        <p:nvSpPr>
-          <p:cNvPr id="133" name="Google Shape;133;p3:notes">
-            <a:extLst>
-              <a:ext uri="{FF2B5EF4-FFF2-40B4-BE49-F238E27FC236}">
-                <a16:creationId xmlns:a16="http://schemas.microsoft.com/office/drawing/2014/main" id="{6E32A4AA-4EE5-C432-DFFB-A235B5E4FB64}"/>
-              </a:ext>
-            </a:extLst>
-          </p:cNvPr>
-          <p:cNvSpPr txBox="1">
-            <a:spLocks noGrp="1"/>
-          </p:cNvSpPr>
-          <p:nvPr>
-            <p:ph type="sldNum" idx="12"/>
-          </p:nvPr>
-        </p:nvSpPr>
-        <p:spPr>
-          <a:xfrm>
-            <a:off x="5179484" y="6513910"/>
-            <a:ext cx="3962400" cy="342900"/>
-          </a:xfrm>
-          <a:prstGeom prst="rect">
-            <a:avLst/>
-          </a:prstGeom>
-          <a:noFill/>
-          <a:ln>
-            <a:noFill/>
-          </a:ln>
-        </p:spPr>
-        <p:txBody>
-          <a:bodyPr spcFirstLastPara="1" wrap="square" lIns="91425" tIns="45700" rIns="91425" bIns="45700" anchor="b" anchorCtr="0">
-            <a:noAutofit/>
-          </a:bodyPr>
-          <a:lstStyle/>
-          <a:p>
-            <a:pPr marL="0" lvl="0" indent="0" algn="r" rtl="0">
-              <a:spcBef>
-                <a:spcPts val="0"/>
-              </a:spcBef>
-              <a:spcAft>
-                <a:spcPts val="0"/>
-              </a:spcAft>
-              <a:buNone/>
-            </a:pPr>
-            <a:fld id="{00000000-1234-1234-1234-123412341234}" type="slidenum">
-              <a:rPr lang="en-US"/>
-              <a:t>6</a:t>
-            </a:fld>
-            <a:endParaRPr/>
-          </a:p>
-        </p:txBody>
-      </p:sp>
-    </p:spTree>
-    <p:extLst>
-      <p:ext uri="{BB962C8B-B14F-4D97-AF65-F5344CB8AC3E}">
-        <p14:creationId xmlns:p14="http://schemas.microsoft.com/office/powerpoint/2010/main" val="1371247825"/>
       </p:ext>
     </p:extLst>
   </p:cSld>
@@ -17681,7 +17681,7 @@
         </p:blipFill>
         <p:spPr>
           <a:xfrm>
-            <a:off x="457200" y="1330960"/>
+            <a:off x="457200" y="1169142"/>
             <a:ext cx="2403548" cy="2259858"/>
           </a:xfrm>
           <a:prstGeom prst="rect">
@@ -17773,7 +17773,7 @@
         </p:blipFill>
         <p:spPr>
           <a:xfrm>
-            <a:off x="6131024" y="1440610"/>
+            <a:off x="6131023" y="1230408"/>
             <a:ext cx="2403548" cy="1988390"/>
           </a:xfrm>
           <a:prstGeom prst="rect">
@@ -17818,7 +17818,7 @@
         </p:blipFill>
         <p:spPr>
           <a:xfrm>
-            <a:off x="3368028" y="1440610"/>
+            <a:off x="3368028" y="1169142"/>
             <a:ext cx="2255715" cy="2110923"/>
           </a:xfrm>
           <a:prstGeom prst="rect">
@@ -17906,6 +17906,1583 @@
           </a:prstGeom>
         </p:spPr>
       </p:pic>
+      <p:sp>
+        <p:nvSpPr>
+          <p:cNvPr id="2" name="Google Shape;138;p3">
+            <a:extLst>
+              <a:ext uri="{FF2B5EF4-FFF2-40B4-BE49-F238E27FC236}">
+                <a16:creationId xmlns:a16="http://schemas.microsoft.com/office/drawing/2014/main" id="{C64F16E3-027D-C8BD-209E-C0B07348A921}"/>
+              </a:ext>
+            </a:extLst>
+          </p:cNvPr>
+          <p:cNvSpPr txBox="1">
+            <a:spLocks noGrp="1"/>
+          </p:cNvSpPr>
+          <p:nvPr>
+            <p:ph type="body" idx="1"/>
+          </p:nvPr>
+        </p:nvSpPr>
+        <p:spPr>
+          <a:xfrm>
+            <a:off x="793575" y="3218798"/>
+            <a:ext cx="1951318" cy="592015"/>
+          </a:xfrm>
+          <a:prstGeom prst="rect">
+            <a:avLst/>
+          </a:prstGeom>
+          <a:noFill/>
+          <a:ln>
+            <a:noFill/>
+          </a:ln>
+        </p:spPr>
+        <p:txBody>
+          <a:bodyPr spcFirstLastPara="1" wrap="square" lIns="91425" tIns="45700" rIns="91425" bIns="45700" anchor="t" anchorCtr="0">
+            <a:normAutofit/>
+          </a:bodyPr>
+          <a:lstStyle/>
+          <a:p>
+            <a:pPr marL="0" lvl="0" indent="0" algn="ctr" rtl="0">
+              <a:lnSpc>
+                <a:spcPct val="130000"/>
+              </a:lnSpc>
+              <a:spcAft>
+                <a:spcPts val="0"/>
+              </a:spcAft>
+              <a:buClr>
+                <a:schemeClr val="accent4">
+                  <a:lumMod val="75000"/>
+                </a:schemeClr>
+              </a:buClr>
+              <a:buSzPts val="1976"/>
+              <a:buNone/>
+            </a:pPr>
+            <a:r>
+              <a:rPr lang="en-US" sz="2000" b="1" dirty="0"/>
+              <a:t>Box Geometry</a:t>
+            </a:r>
+          </a:p>
+        </p:txBody>
+      </p:sp>
+      <p:sp>
+        <p:nvSpPr>
+          <p:cNvPr id="3" name="Google Shape;138;p3">
+            <a:extLst>
+              <a:ext uri="{FF2B5EF4-FFF2-40B4-BE49-F238E27FC236}">
+                <a16:creationId xmlns:a16="http://schemas.microsoft.com/office/drawing/2014/main" id="{6E043E2D-E7D1-9AC6-E83C-2F3D4A657018}"/>
+              </a:ext>
+            </a:extLst>
+          </p:cNvPr>
+          <p:cNvSpPr txBox="1">
+            <a:spLocks/>
+          </p:cNvSpPr>
+          <p:nvPr/>
+        </p:nvSpPr>
+        <p:spPr>
+          <a:xfrm>
+            <a:off x="3368028" y="3216278"/>
+            <a:ext cx="2255715" cy="592015"/>
+          </a:xfrm>
+          <a:prstGeom prst="rect">
+            <a:avLst/>
+          </a:prstGeom>
+          <a:noFill/>
+          <a:ln>
+            <a:noFill/>
+          </a:ln>
+        </p:spPr>
+        <p:txBody>
+          <a:bodyPr spcFirstLastPara="1" wrap="square" lIns="91425" tIns="45700" rIns="91425" bIns="45700" anchor="t" anchorCtr="0">
+            <a:normAutofit fontScale="92500"/>
+          </a:bodyPr>
+          <a:lstStyle>
+            <a:defPPr marR="0" lvl="0" algn="l" rtl="0">
+              <a:lnSpc>
+                <a:spcPct val="100000"/>
+              </a:lnSpc>
+              <a:spcBef>
+                <a:spcPts val="0"/>
+              </a:spcBef>
+              <a:spcAft>
+                <a:spcPts val="0"/>
+              </a:spcAft>
+            </a:defPPr>
+            <a:lvl1pPr marL="457200" marR="0" lvl="0" indent="-315468" algn="l" rtl="0">
+              <a:lnSpc>
+                <a:spcPct val="100000"/>
+              </a:lnSpc>
+              <a:spcBef>
+                <a:spcPts val="600"/>
+              </a:spcBef>
+              <a:spcAft>
+                <a:spcPts val="0"/>
+              </a:spcAft>
+              <a:buClr>
+                <a:schemeClr val="accent1"/>
+              </a:buClr>
+              <a:buSzPts val="1368"/>
+              <a:buFont typeface="Noto Sans Symbols"/>
+              <a:buChar char="🞂"/>
+              <a:defRPr sz="2600" b="0" i="0" u="none" strike="noStrike" cap="none">
+                <a:solidFill>
+                  <a:schemeClr val="dk1"/>
+                </a:solidFill>
+                <a:latin typeface="Gill Sans"/>
+                <a:ea typeface="Gill Sans"/>
+                <a:cs typeface="Gill Sans"/>
+                <a:sym typeface="Gill Sans"/>
+              </a:defRPr>
+            </a:lvl1pPr>
+            <a:lvl2pPr marL="914400" marR="0" lvl="1" indent="-315468" algn="l" rtl="0">
+              <a:lnSpc>
+                <a:spcPct val="100000"/>
+              </a:lnSpc>
+              <a:spcBef>
+                <a:spcPts val="500"/>
+              </a:spcBef>
+              <a:spcAft>
+                <a:spcPts val="0"/>
+              </a:spcAft>
+              <a:buClr>
+                <a:schemeClr val="accent2"/>
+              </a:buClr>
+              <a:buSzPts val="1368"/>
+              <a:buFont typeface="Noto Sans Symbols"/>
+              <a:buChar char="🞂"/>
+              <a:defRPr sz="2300" b="0" i="0" u="none" strike="noStrike" cap="none">
+                <a:solidFill>
+                  <a:schemeClr val="dk2"/>
+                </a:solidFill>
+                <a:latin typeface="Gill Sans"/>
+                <a:ea typeface="Gill Sans"/>
+                <a:cs typeface="Gill Sans"/>
+                <a:sym typeface="Gill Sans"/>
+              </a:defRPr>
+            </a:lvl2pPr>
+            <a:lvl3pPr marL="1371600" marR="0" lvl="2" indent="-315467" algn="l" rtl="0">
+              <a:lnSpc>
+                <a:spcPct val="100000"/>
+              </a:lnSpc>
+              <a:spcBef>
+                <a:spcPts val="500"/>
+              </a:spcBef>
+              <a:spcAft>
+                <a:spcPts val="0"/>
+              </a:spcAft>
+              <a:buClr>
+                <a:srgbClr val="BABABA"/>
+              </a:buClr>
+              <a:buSzPts val="1368"/>
+              <a:buFont typeface="Noto Sans Symbols"/>
+              <a:buChar char="🞂"/>
+              <a:defRPr sz="2000" b="0" i="0" u="none" strike="noStrike" cap="none">
+                <a:solidFill>
+                  <a:schemeClr val="dk1"/>
+                </a:solidFill>
+                <a:latin typeface="Gill Sans"/>
+                <a:ea typeface="Gill Sans"/>
+                <a:cs typeface="Gill Sans"/>
+                <a:sym typeface="Gill Sans"/>
+              </a:defRPr>
+            </a:lvl3pPr>
+            <a:lvl4pPr marL="1828800" marR="0" lvl="3" indent="-308610" algn="l" rtl="0">
+              <a:lnSpc>
+                <a:spcPct val="100000"/>
+              </a:lnSpc>
+              <a:spcBef>
+                <a:spcPts val="400"/>
+              </a:spcBef>
+              <a:spcAft>
+                <a:spcPts val="0"/>
+              </a:spcAft>
+              <a:buClr>
+                <a:srgbClr val="8BA1B3"/>
+              </a:buClr>
+              <a:buSzPts val="1260"/>
+              <a:buFont typeface="Noto Sans Symbols"/>
+              <a:buChar char="◻"/>
+              <a:defRPr sz="1800" b="0" i="0" u="none" strike="noStrike" cap="none">
+                <a:solidFill>
+                  <a:schemeClr val="dk1"/>
+                </a:solidFill>
+                <a:latin typeface="Gill Sans"/>
+                <a:ea typeface="Gill Sans"/>
+                <a:cs typeface="Gill Sans"/>
+                <a:sym typeface="Gill Sans"/>
+              </a:defRPr>
+            </a:lvl4pPr>
+            <a:lvl5pPr marL="2286000" marR="0" lvl="4" indent="-308610" algn="l" rtl="0">
+              <a:lnSpc>
+                <a:spcPct val="100000"/>
+              </a:lnSpc>
+              <a:spcBef>
+                <a:spcPts val="300"/>
+              </a:spcBef>
+              <a:spcAft>
+                <a:spcPts val="0"/>
+              </a:spcAft>
+              <a:buClr>
+                <a:schemeClr val="accent2"/>
+              </a:buClr>
+              <a:buSzPts val="1260"/>
+              <a:buFont typeface="Noto Sans Symbols"/>
+              <a:buChar char="◻"/>
+              <a:defRPr sz="1600" b="0" i="0" u="none" strike="noStrike" cap="none">
+                <a:solidFill>
+                  <a:schemeClr val="dk1"/>
+                </a:solidFill>
+                <a:latin typeface="Gill Sans"/>
+                <a:ea typeface="Gill Sans"/>
+                <a:cs typeface="Gill Sans"/>
+                <a:sym typeface="Gill Sans"/>
+              </a:defRPr>
+            </a:lvl5pPr>
+            <a:lvl6pPr marL="2743200" marR="0" lvl="5" indent="-314325" algn="l" rtl="0">
+              <a:lnSpc>
+                <a:spcPct val="100000"/>
+              </a:lnSpc>
+              <a:spcBef>
+                <a:spcPts val="300"/>
+              </a:spcBef>
+              <a:spcAft>
+                <a:spcPts val="0"/>
+              </a:spcAft>
+              <a:buClr>
+                <a:srgbClr val="8BA1B3"/>
+              </a:buClr>
+              <a:buSzPts val="1350"/>
+              <a:buFont typeface="Noto Sans Symbols"/>
+              <a:buChar char="🞂"/>
+              <a:defRPr sz="1600" b="0" i="0" u="none" strike="noStrike" cap="none">
+                <a:solidFill>
+                  <a:schemeClr val="dk1"/>
+                </a:solidFill>
+                <a:latin typeface="Gill Sans"/>
+                <a:ea typeface="Gill Sans"/>
+                <a:cs typeface="Gill Sans"/>
+                <a:sym typeface="Gill Sans"/>
+              </a:defRPr>
+            </a:lvl6pPr>
+            <a:lvl7pPr marL="3200400" marR="0" lvl="6" indent="-314325" algn="l" rtl="0">
+              <a:lnSpc>
+                <a:spcPct val="100000"/>
+              </a:lnSpc>
+              <a:spcBef>
+                <a:spcPts val="300"/>
+              </a:spcBef>
+              <a:spcAft>
+                <a:spcPts val="0"/>
+              </a:spcAft>
+              <a:buClr>
+                <a:srgbClr val="646C8F"/>
+              </a:buClr>
+              <a:buSzPts val="1350"/>
+              <a:buFont typeface="Noto Sans Symbols"/>
+              <a:buChar char="🞂"/>
+              <a:defRPr sz="1400" b="0" i="0" u="none" strike="noStrike" cap="none">
+                <a:solidFill>
+                  <a:schemeClr val="dk1"/>
+                </a:solidFill>
+                <a:latin typeface="Gill Sans"/>
+                <a:ea typeface="Gill Sans"/>
+                <a:cs typeface="Gill Sans"/>
+                <a:sym typeface="Gill Sans"/>
+              </a:defRPr>
+            </a:lvl7pPr>
+            <a:lvl8pPr marL="3657600" marR="0" lvl="7" indent="-314325" algn="l" rtl="0">
+              <a:lnSpc>
+                <a:spcPct val="100000"/>
+              </a:lnSpc>
+              <a:spcBef>
+                <a:spcPts val="300"/>
+              </a:spcBef>
+              <a:spcAft>
+                <a:spcPts val="0"/>
+              </a:spcAft>
+              <a:buClr>
+                <a:srgbClr val="BABABA"/>
+              </a:buClr>
+              <a:buSzPts val="1350"/>
+              <a:buFont typeface="Noto Sans Symbols"/>
+              <a:buChar char="🞂"/>
+              <a:defRPr sz="1400" b="0" i="0" u="none" strike="noStrike" cap="none">
+                <a:solidFill>
+                  <a:schemeClr val="dk1"/>
+                </a:solidFill>
+                <a:latin typeface="Gill Sans"/>
+                <a:ea typeface="Gill Sans"/>
+                <a:cs typeface="Gill Sans"/>
+                <a:sym typeface="Gill Sans"/>
+              </a:defRPr>
+            </a:lvl8pPr>
+            <a:lvl9pPr marL="4114800" marR="0" lvl="8" indent="-314325" algn="l" rtl="0">
+              <a:lnSpc>
+                <a:spcPct val="100000"/>
+              </a:lnSpc>
+              <a:spcBef>
+                <a:spcPts val="300"/>
+              </a:spcBef>
+              <a:spcAft>
+                <a:spcPts val="0"/>
+              </a:spcAft>
+              <a:buClr>
+                <a:srgbClr val="9FB8CD"/>
+              </a:buClr>
+              <a:buSzPts val="1350"/>
+              <a:buFont typeface="Noto Sans Symbols"/>
+              <a:buChar char="🞂"/>
+              <a:defRPr sz="1200" b="0" i="0" u="none" strike="noStrike" cap="none">
+                <a:solidFill>
+                  <a:schemeClr val="dk1"/>
+                </a:solidFill>
+                <a:latin typeface="Gill Sans"/>
+                <a:ea typeface="Gill Sans"/>
+                <a:cs typeface="Gill Sans"/>
+                <a:sym typeface="Gill Sans"/>
+              </a:defRPr>
+            </a:lvl9pPr>
+          </a:lstStyle>
+          <a:p>
+            <a:pPr marL="0" indent="0" algn="ctr">
+              <a:lnSpc>
+                <a:spcPct val="130000"/>
+              </a:lnSpc>
+              <a:buClr>
+                <a:schemeClr val="accent4">
+                  <a:lumMod val="75000"/>
+                </a:schemeClr>
+              </a:buClr>
+              <a:buSzPts val="1976"/>
+              <a:buFont typeface="Noto Sans Symbols"/>
+              <a:buNone/>
+            </a:pPr>
+            <a:r>
+              <a:rPr lang="en-US" sz="2000" b="1" dirty="0"/>
+              <a:t>Sphere Geometry</a:t>
+            </a:r>
+          </a:p>
+        </p:txBody>
+      </p:sp>
+      <p:sp>
+        <p:nvSpPr>
+          <p:cNvPr id="4" name="Google Shape;138;p3">
+            <a:extLst>
+              <a:ext uri="{FF2B5EF4-FFF2-40B4-BE49-F238E27FC236}">
+                <a16:creationId xmlns:a16="http://schemas.microsoft.com/office/drawing/2014/main" id="{7F203319-B04E-353E-13BE-28C5C06B1ED3}"/>
+              </a:ext>
+            </a:extLst>
+          </p:cNvPr>
+          <p:cNvSpPr txBox="1">
+            <a:spLocks/>
+          </p:cNvSpPr>
+          <p:nvPr/>
+        </p:nvSpPr>
+        <p:spPr>
+          <a:xfrm>
+            <a:off x="6131023" y="3200382"/>
+            <a:ext cx="2487426" cy="592015"/>
+          </a:xfrm>
+          <a:prstGeom prst="rect">
+            <a:avLst/>
+          </a:prstGeom>
+          <a:noFill/>
+          <a:ln>
+            <a:noFill/>
+          </a:ln>
+        </p:spPr>
+        <p:txBody>
+          <a:bodyPr spcFirstLastPara="1" wrap="square" lIns="91425" tIns="45700" rIns="91425" bIns="45700" anchor="t" anchorCtr="0">
+            <a:normAutofit fontScale="92500"/>
+          </a:bodyPr>
+          <a:lstStyle>
+            <a:defPPr marR="0" lvl="0" algn="l" rtl="0">
+              <a:lnSpc>
+                <a:spcPct val="100000"/>
+              </a:lnSpc>
+              <a:spcBef>
+                <a:spcPts val="0"/>
+              </a:spcBef>
+              <a:spcAft>
+                <a:spcPts val="0"/>
+              </a:spcAft>
+            </a:defPPr>
+            <a:lvl1pPr marL="457200" marR="0" lvl="0" indent="-315468" algn="l" rtl="0">
+              <a:lnSpc>
+                <a:spcPct val="100000"/>
+              </a:lnSpc>
+              <a:spcBef>
+                <a:spcPts val="600"/>
+              </a:spcBef>
+              <a:spcAft>
+                <a:spcPts val="0"/>
+              </a:spcAft>
+              <a:buClr>
+                <a:schemeClr val="accent1"/>
+              </a:buClr>
+              <a:buSzPts val="1368"/>
+              <a:buFont typeface="Noto Sans Symbols"/>
+              <a:buChar char="🞂"/>
+              <a:defRPr sz="2600" b="0" i="0" u="none" strike="noStrike" cap="none">
+                <a:solidFill>
+                  <a:schemeClr val="dk1"/>
+                </a:solidFill>
+                <a:latin typeface="Gill Sans"/>
+                <a:ea typeface="Gill Sans"/>
+                <a:cs typeface="Gill Sans"/>
+                <a:sym typeface="Gill Sans"/>
+              </a:defRPr>
+            </a:lvl1pPr>
+            <a:lvl2pPr marL="914400" marR="0" lvl="1" indent="-315468" algn="l" rtl="0">
+              <a:lnSpc>
+                <a:spcPct val="100000"/>
+              </a:lnSpc>
+              <a:spcBef>
+                <a:spcPts val="500"/>
+              </a:spcBef>
+              <a:spcAft>
+                <a:spcPts val="0"/>
+              </a:spcAft>
+              <a:buClr>
+                <a:schemeClr val="accent2"/>
+              </a:buClr>
+              <a:buSzPts val="1368"/>
+              <a:buFont typeface="Noto Sans Symbols"/>
+              <a:buChar char="🞂"/>
+              <a:defRPr sz="2300" b="0" i="0" u="none" strike="noStrike" cap="none">
+                <a:solidFill>
+                  <a:schemeClr val="dk2"/>
+                </a:solidFill>
+                <a:latin typeface="Gill Sans"/>
+                <a:ea typeface="Gill Sans"/>
+                <a:cs typeface="Gill Sans"/>
+                <a:sym typeface="Gill Sans"/>
+              </a:defRPr>
+            </a:lvl2pPr>
+            <a:lvl3pPr marL="1371600" marR="0" lvl="2" indent="-315467" algn="l" rtl="0">
+              <a:lnSpc>
+                <a:spcPct val="100000"/>
+              </a:lnSpc>
+              <a:spcBef>
+                <a:spcPts val="500"/>
+              </a:spcBef>
+              <a:spcAft>
+                <a:spcPts val="0"/>
+              </a:spcAft>
+              <a:buClr>
+                <a:srgbClr val="BABABA"/>
+              </a:buClr>
+              <a:buSzPts val="1368"/>
+              <a:buFont typeface="Noto Sans Symbols"/>
+              <a:buChar char="🞂"/>
+              <a:defRPr sz="2000" b="0" i="0" u="none" strike="noStrike" cap="none">
+                <a:solidFill>
+                  <a:schemeClr val="dk1"/>
+                </a:solidFill>
+                <a:latin typeface="Gill Sans"/>
+                <a:ea typeface="Gill Sans"/>
+                <a:cs typeface="Gill Sans"/>
+                <a:sym typeface="Gill Sans"/>
+              </a:defRPr>
+            </a:lvl3pPr>
+            <a:lvl4pPr marL="1828800" marR="0" lvl="3" indent="-308610" algn="l" rtl="0">
+              <a:lnSpc>
+                <a:spcPct val="100000"/>
+              </a:lnSpc>
+              <a:spcBef>
+                <a:spcPts val="400"/>
+              </a:spcBef>
+              <a:spcAft>
+                <a:spcPts val="0"/>
+              </a:spcAft>
+              <a:buClr>
+                <a:srgbClr val="8BA1B3"/>
+              </a:buClr>
+              <a:buSzPts val="1260"/>
+              <a:buFont typeface="Noto Sans Symbols"/>
+              <a:buChar char="◻"/>
+              <a:defRPr sz="1800" b="0" i="0" u="none" strike="noStrike" cap="none">
+                <a:solidFill>
+                  <a:schemeClr val="dk1"/>
+                </a:solidFill>
+                <a:latin typeface="Gill Sans"/>
+                <a:ea typeface="Gill Sans"/>
+                <a:cs typeface="Gill Sans"/>
+                <a:sym typeface="Gill Sans"/>
+              </a:defRPr>
+            </a:lvl4pPr>
+            <a:lvl5pPr marL="2286000" marR="0" lvl="4" indent="-308610" algn="l" rtl="0">
+              <a:lnSpc>
+                <a:spcPct val="100000"/>
+              </a:lnSpc>
+              <a:spcBef>
+                <a:spcPts val="300"/>
+              </a:spcBef>
+              <a:spcAft>
+                <a:spcPts val="0"/>
+              </a:spcAft>
+              <a:buClr>
+                <a:schemeClr val="accent2"/>
+              </a:buClr>
+              <a:buSzPts val="1260"/>
+              <a:buFont typeface="Noto Sans Symbols"/>
+              <a:buChar char="◻"/>
+              <a:defRPr sz="1600" b="0" i="0" u="none" strike="noStrike" cap="none">
+                <a:solidFill>
+                  <a:schemeClr val="dk1"/>
+                </a:solidFill>
+                <a:latin typeface="Gill Sans"/>
+                <a:ea typeface="Gill Sans"/>
+                <a:cs typeface="Gill Sans"/>
+                <a:sym typeface="Gill Sans"/>
+              </a:defRPr>
+            </a:lvl5pPr>
+            <a:lvl6pPr marL="2743200" marR="0" lvl="5" indent="-314325" algn="l" rtl="0">
+              <a:lnSpc>
+                <a:spcPct val="100000"/>
+              </a:lnSpc>
+              <a:spcBef>
+                <a:spcPts val="300"/>
+              </a:spcBef>
+              <a:spcAft>
+                <a:spcPts val="0"/>
+              </a:spcAft>
+              <a:buClr>
+                <a:srgbClr val="8BA1B3"/>
+              </a:buClr>
+              <a:buSzPts val="1350"/>
+              <a:buFont typeface="Noto Sans Symbols"/>
+              <a:buChar char="🞂"/>
+              <a:defRPr sz="1600" b="0" i="0" u="none" strike="noStrike" cap="none">
+                <a:solidFill>
+                  <a:schemeClr val="dk1"/>
+                </a:solidFill>
+                <a:latin typeface="Gill Sans"/>
+                <a:ea typeface="Gill Sans"/>
+                <a:cs typeface="Gill Sans"/>
+                <a:sym typeface="Gill Sans"/>
+              </a:defRPr>
+            </a:lvl6pPr>
+            <a:lvl7pPr marL="3200400" marR="0" lvl="6" indent="-314325" algn="l" rtl="0">
+              <a:lnSpc>
+                <a:spcPct val="100000"/>
+              </a:lnSpc>
+              <a:spcBef>
+                <a:spcPts val="300"/>
+              </a:spcBef>
+              <a:spcAft>
+                <a:spcPts val="0"/>
+              </a:spcAft>
+              <a:buClr>
+                <a:srgbClr val="646C8F"/>
+              </a:buClr>
+              <a:buSzPts val="1350"/>
+              <a:buFont typeface="Noto Sans Symbols"/>
+              <a:buChar char="🞂"/>
+              <a:defRPr sz="1400" b="0" i="0" u="none" strike="noStrike" cap="none">
+                <a:solidFill>
+                  <a:schemeClr val="dk1"/>
+                </a:solidFill>
+                <a:latin typeface="Gill Sans"/>
+                <a:ea typeface="Gill Sans"/>
+                <a:cs typeface="Gill Sans"/>
+                <a:sym typeface="Gill Sans"/>
+              </a:defRPr>
+            </a:lvl7pPr>
+            <a:lvl8pPr marL="3657600" marR="0" lvl="7" indent="-314325" algn="l" rtl="0">
+              <a:lnSpc>
+                <a:spcPct val="100000"/>
+              </a:lnSpc>
+              <a:spcBef>
+                <a:spcPts val="300"/>
+              </a:spcBef>
+              <a:spcAft>
+                <a:spcPts val="0"/>
+              </a:spcAft>
+              <a:buClr>
+                <a:srgbClr val="BABABA"/>
+              </a:buClr>
+              <a:buSzPts val="1350"/>
+              <a:buFont typeface="Noto Sans Symbols"/>
+              <a:buChar char="🞂"/>
+              <a:defRPr sz="1400" b="0" i="0" u="none" strike="noStrike" cap="none">
+                <a:solidFill>
+                  <a:schemeClr val="dk1"/>
+                </a:solidFill>
+                <a:latin typeface="Gill Sans"/>
+                <a:ea typeface="Gill Sans"/>
+                <a:cs typeface="Gill Sans"/>
+                <a:sym typeface="Gill Sans"/>
+              </a:defRPr>
+            </a:lvl8pPr>
+            <a:lvl9pPr marL="4114800" marR="0" lvl="8" indent="-314325" algn="l" rtl="0">
+              <a:lnSpc>
+                <a:spcPct val="100000"/>
+              </a:lnSpc>
+              <a:spcBef>
+                <a:spcPts val="300"/>
+              </a:spcBef>
+              <a:spcAft>
+                <a:spcPts val="0"/>
+              </a:spcAft>
+              <a:buClr>
+                <a:srgbClr val="9FB8CD"/>
+              </a:buClr>
+              <a:buSzPts val="1350"/>
+              <a:buFont typeface="Noto Sans Symbols"/>
+              <a:buChar char="🞂"/>
+              <a:defRPr sz="1200" b="0" i="0" u="none" strike="noStrike" cap="none">
+                <a:solidFill>
+                  <a:schemeClr val="dk1"/>
+                </a:solidFill>
+                <a:latin typeface="Gill Sans"/>
+                <a:ea typeface="Gill Sans"/>
+                <a:cs typeface="Gill Sans"/>
+                <a:sym typeface="Gill Sans"/>
+              </a:defRPr>
+            </a:lvl9pPr>
+          </a:lstStyle>
+          <a:p>
+            <a:pPr marL="0" indent="0" algn="ctr">
+              <a:lnSpc>
+                <a:spcPct val="130000"/>
+              </a:lnSpc>
+              <a:buClr>
+                <a:schemeClr val="accent4">
+                  <a:lumMod val="75000"/>
+                </a:schemeClr>
+              </a:buClr>
+              <a:buSzPts val="1976"/>
+              <a:buFont typeface="Noto Sans Symbols"/>
+              <a:buNone/>
+            </a:pPr>
+            <a:r>
+              <a:rPr lang="en-US" sz="2000" b="1" dirty="0"/>
+              <a:t>Cylinder Geometry</a:t>
+            </a:r>
+          </a:p>
+        </p:txBody>
+      </p:sp>
+      <p:sp>
+        <p:nvSpPr>
+          <p:cNvPr id="6" name="Google Shape;138;p3">
+            <a:extLst>
+              <a:ext uri="{FF2B5EF4-FFF2-40B4-BE49-F238E27FC236}">
+                <a16:creationId xmlns:a16="http://schemas.microsoft.com/office/drawing/2014/main" id="{476690B3-26E6-6C9D-2D02-677E97A2C4AF}"/>
+              </a:ext>
+            </a:extLst>
+          </p:cNvPr>
+          <p:cNvSpPr txBox="1">
+            <a:spLocks/>
+          </p:cNvSpPr>
+          <p:nvPr/>
+        </p:nvSpPr>
+        <p:spPr>
+          <a:xfrm>
+            <a:off x="525521" y="5590852"/>
+            <a:ext cx="2487426" cy="592015"/>
+          </a:xfrm>
+          <a:prstGeom prst="rect">
+            <a:avLst/>
+          </a:prstGeom>
+          <a:noFill/>
+          <a:ln>
+            <a:noFill/>
+          </a:ln>
+        </p:spPr>
+        <p:txBody>
+          <a:bodyPr spcFirstLastPara="1" wrap="square" lIns="91425" tIns="45700" rIns="91425" bIns="45700" anchor="t" anchorCtr="0">
+            <a:normAutofit/>
+          </a:bodyPr>
+          <a:lstStyle>
+            <a:defPPr marR="0" lvl="0" algn="l" rtl="0">
+              <a:lnSpc>
+                <a:spcPct val="100000"/>
+              </a:lnSpc>
+              <a:spcBef>
+                <a:spcPts val="0"/>
+              </a:spcBef>
+              <a:spcAft>
+                <a:spcPts val="0"/>
+              </a:spcAft>
+            </a:defPPr>
+            <a:lvl1pPr marL="457200" marR="0" lvl="0" indent="-315468" algn="l" rtl="0">
+              <a:lnSpc>
+                <a:spcPct val="100000"/>
+              </a:lnSpc>
+              <a:spcBef>
+                <a:spcPts val="600"/>
+              </a:spcBef>
+              <a:spcAft>
+                <a:spcPts val="0"/>
+              </a:spcAft>
+              <a:buClr>
+                <a:schemeClr val="accent1"/>
+              </a:buClr>
+              <a:buSzPts val="1368"/>
+              <a:buFont typeface="Noto Sans Symbols"/>
+              <a:buChar char="🞂"/>
+              <a:defRPr sz="2600" b="0" i="0" u="none" strike="noStrike" cap="none">
+                <a:solidFill>
+                  <a:schemeClr val="dk1"/>
+                </a:solidFill>
+                <a:latin typeface="Gill Sans"/>
+                <a:ea typeface="Gill Sans"/>
+                <a:cs typeface="Gill Sans"/>
+                <a:sym typeface="Gill Sans"/>
+              </a:defRPr>
+            </a:lvl1pPr>
+            <a:lvl2pPr marL="914400" marR="0" lvl="1" indent="-315468" algn="l" rtl="0">
+              <a:lnSpc>
+                <a:spcPct val="100000"/>
+              </a:lnSpc>
+              <a:spcBef>
+                <a:spcPts val="500"/>
+              </a:spcBef>
+              <a:spcAft>
+                <a:spcPts val="0"/>
+              </a:spcAft>
+              <a:buClr>
+                <a:schemeClr val="accent2"/>
+              </a:buClr>
+              <a:buSzPts val="1368"/>
+              <a:buFont typeface="Noto Sans Symbols"/>
+              <a:buChar char="🞂"/>
+              <a:defRPr sz="2300" b="0" i="0" u="none" strike="noStrike" cap="none">
+                <a:solidFill>
+                  <a:schemeClr val="dk2"/>
+                </a:solidFill>
+                <a:latin typeface="Gill Sans"/>
+                <a:ea typeface="Gill Sans"/>
+                <a:cs typeface="Gill Sans"/>
+                <a:sym typeface="Gill Sans"/>
+              </a:defRPr>
+            </a:lvl2pPr>
+            <a:lvl3pPr marL="1371600" marR="0" lvl="2" indent="-315467" algn="l" rtl="0">
+              <a:lnSpc>
+                <a:spcPct val="100000"/>
+              </a:lnSpc>
+              <a:spcBef>
+                <a:spcPts val="500"/>
+              </a:spcBef>
+              <a:spcAft>
+                <a:spcPts val="0"/>
+              </a:spcAft>
+              <a:buClr>
+                <a:srgbClr val="BABABA"/>
+              </a:buClr>
+              <a:buSzPts val="1368"/>
+              <a:buFont typeface="Noto Sans Symbols"/>
+              <a:buChar char="🞂"/>
+              <a:defRPr sz="2000" b="0" i="0" u="none" strike="noStrike" cap="none">
+                <a:solidFill>
+                  <a:schemeClr val="dk1"/>
+                </a:solidFill>
+                <a:latin typeface="Gill Sans"/>
+                <a:ea typeface="Gill Sans"/>
+                <a:cs typeface="Gill Sans"/>
+                <a:sym typeface="Gill Sans"/>
+              </a:defRPr>
+            </a:lvl3pPr>
+            <a:lvl4pPr marL="1828800" marR="0" lvl="3" indent="-308610" algn="l" rtl="0">
+              <a:lnSpc>
+                <a:spcPct val="100000"/>
+              </a:lnSpc>
+              <a:spcBef>
+                <a:spcPts val="400"/>
+              </a:spcBef>
+              <a:spcAft>
+                <a:spcPts val="0"/>
+              </a:spcAft>
+              <a:buClr>
+                <a:srgbClr val="8BA1B3"/>
+              </a:buClr>
+              <a:buSzPts val="1260"/>
+              <a:buFont typeface="Noto Sans Symbols"/>
+              <a:buChar char="◻"/>
+              <a:defRPr sz="1800" b="0" i="0" u="none" strike="noStrike" cap="none">
+                <a:solidFill>
+                  <a:schemeClr val="dk1"/>
+                </a:solidFill>
+                <a:latin typeface="Gill Sans"/>
+                <a:ea typeface="Gill Sans"/>
+                <a:cs typeface="Gill Sans"/>
+                <a:sym typeface="Gill Sans"/>
+              </a:defRPr>
+            </a:lvl4pPr>
+            <a:lvl5pPr marL="2286000" marR="0" lvl="4" indent="-308610" algn="l" rtl="0">
+              <a:lnSpc>
+                <a:spcPct val="100000"/>
+              </a:lnSpc>
+              <a:spcBef>
+                <a:spcPts val="300"/>
+              </a:spcBef>
+              <a:spcAft>
+                <a:spcPts val="0"/>
+              </a:spcAft>
+              <a:buClr>
+                <a:schemeClr val="accent2"/>
+              </a:buClr>
+              <a:buSzPts val="1260"/>
+              <a:buFont typeface="Noto Sans Symbols"/>
+              <a:buChar char="◻"/>
+              <a:defRPr sz="1600" b="0" i="0" u="none" strike="noStrike" cap="none">
+                <a:solidFill>
+                  <a:schemeClr val="dk1"/>
+                </a:solidFill>
+                <a:latin typeface="Gill Sans"/>
+                <a:ea typeface="Gill Sans"/>
+                <a:cs typeface="Gill Sans"/>
+                <a:sym typeface="Gill Sans"/>
+              </a:defRPr>
+            </a:lvl5pPr>
+            <a:lvl6pPr marL="2743200" marR="0" lvl="5" indent="-314325" algn="l" rtl="0">
+              <a:lnSpc>
+                <a:spcPct val="100000"/>
+              </a:lnSpc>
+              <a:spcBef>
+                <a:spcPts val="300"/>
+              </a:spcBef>
+              <a:spcAft>
+                <a:spcPts val="0"/>
+              </a:spcAft>
+              <a:buClr>
+                <a:srgbClr val="8BA1B3"/>
+              </a:buClr>
+              <a:buSzPts val="1350"/>
+              <a:buFont typeface="Noto Sans Symbols"/>
+              <a:buChar char="🞂"/>
+              <a:defRPr sz="1600" b="0" i="0" u="none" strike="noStrike" cap="none">
+                <a:solidFill>
+                  <a:schemeClr val="dk1"/>
+                </a:solidFill>
+                <a:latin typeface="Gill Sans"/>
+                <a:ea typeface="Gill Sans"/>
+                <a:cs typeface="Gill Sans"/>
+                <a:sym typeface="Gill Sans"/>
+              </a:defRPr>
+            </a:lvl6pPr>
+            <a:lvl7pPr marL="3200400" marR="0" lvl="6" indent="-314325" algn="l" rtl="0">
+              <a:lnSpc>
+                <a:spcPct val="100000"/>
+              </a:lnSpc>
+              <a:spcBef>
+                <a:spcPts val="300"/>
+              </a:spcBef>
+              <a:spcAft>
+                <a:spcPts val="0"/>
+              </a:spcAft>
+              <a:buClr>
+                <a:srgbClr val="646C8F"/>
+              </a:buClr>
+              <a:buSzPts val="1350"/>
+              <a:buFont typeface="Noto Sans Symbols"/>
+              <a:buChar char="🞂"/>
+              <a:defRPr sz="1400" b="0" i="0" u="none" strike="noStrike" cap="none">
+                <a:solidFill>
+                  <a:schemeClr val="dk1"/>
+                </a:solidFill>
+                <a:latin typeface="Gill Sans"/>
+                <a:ea typeface="Gill Sans"/>
+                <a:cs typeface="Gill Sans"/>
+                <a:sym typeface="Gill Sans"/>
+              </a:defRPr>
+            </a:lvl7pPr>
+            <a:lvl8pPr marL="3657600" marR="0" lvl="7" indent="-314325" algn="l" rtl="0">
+              <a:lnSpc>
+                <a:spcPct val="100000"/>
+              </a:lnSpc>
+              <a:spcBef>
+                <a:spcPts val="300"/>
+              </a:spcBef>
+              <a:spcAft>
+                <a:spcPts val="0"/>
+              </a:spcAft>
+              <a:buClr>
+                <a:srgbClr val="BABABA"/>
+              </a:buClr>
+              <a:buSzPts val="1350"/>
+              <a:buFont typeface="Noto Sans Symbols"/>
+              <a:buChar char="🞂"/>
+              <a:defRPr sz="1400" b="0" i="0" u="none" strike="noStrike" cap="none">
+                <a:solidFill>
+                  <a:schemeClr val="dk1"/>
+                </a:solidFill>
+                <a:latin typeface="Gill Sans"/>
+                <a:ea typeface="Gill Sans"/>
+                <a:cs typeface="Gill Sans"/>
+                <a:sym typeface="Gill Sans"/>
+              </a:defRPr>
+            </a:lvl8pPr>
+            <a:lvl9pPr marL="4114800" marR="0" lvl="8" indent="-314325" algn="l" rtl="0">
+              <a:lnSpc>
+                <a:spcPct val="100000"/>
+              </a:lnSpc>
+              <a:spcBef>
+                <a:spcPts val="300"/>
+              </a:spcBef>
+              <a:spcAft>
+                <a:spcPts val="0"/>
+              </a:spcAft>
+              <a:buClr>
+                <a:srgbClr val="9FB8CD"/>
+              </a:buClr>
+              <a:buSzPts val="1350"/>
+              <a:buFont typeface="Noto Sans Symbols"/>
+              <a:buChar char="🞂"/>
+              <a:defRPr sz="1200" b="0" i="0" u="none" strike="noStrike" cap="none">
+                <a:solidFill>
+                  <a:schemeClr val="dk1"/>
+                </a:solidFill>
+                <a:latin typeface="Gill Sans"/>
+                <a:ea typeface="Gill Sans"/>
+                <a:cs typeface="Gill Sans"/>
+                <a:sym typeface="Gill Sans"/>
+              </a:defRPr>
+            </a:lvl9pPr>
+          </a:lstStyle>
+          <a:p>
+            <a:pPr marL="0" indent="0" algn="ctr">
+              <a:lnSpc>
+                <a:spcPct val="130000"/>
+              </a:lnSpc>
+              <a:buClr>
+                <a:schemeClr val="accent4">
+                  <a:lumMod val="75000"/>
+                </a:schemeClr>
+              </a:buClr>
+              <a:buSzPts val="1976"/>
+              <a:buFont typeface="Noto Sans Symbols"/>
+              <a:buNone/>
+            </a:pPr>
+            <a:r>
+              <a:rPr lang="en-US" sz="2000" b="1" dirty="0"/>
+              <a:t>Torus Geometry</a:t>
+            </a:r>
+          </a:p>
+        </p:txBody>
+      </p:sp>
+      <p:sp>
+        <p:nvSpPr>
+          <p:cNvPr id="8" name="Google Shape;138;p3">
+            <a:extLst>
+              <a:ext uri="{FF2B5EF4-FFF2-40B4-BE49-F238E27FC236}">
+                <a16:creationId xmlns:a16="http://schemas.microsoft.com/office/drawing/2014/main" id="{A673CCF0-2C19-BA09-AA9B-C9F55AE40914}"/>
+              </a:ext>
+            </a:extLst>
+          </p:cNvPr>
+          <p:cNvSpPr txBox="1">
+            <a:spLocks/>
+          </p:cNvSpPr>
+          <p:nvPr/>
+        </p:nvSpPr>
+        <p:spPr>
+          <a:xfrm>
+            <a:off x="3297446" y="5588624"/>
+            <a:ext cx="2487426" cy="592015"/>
+          </a:xfrm>
+          <a:prstGeom prst="rect">
+            <a:avLst/>
+          </a:prstGeom>
+          <a:noFill/>
+          <a:ln>
+            <a:noFill/>
+          </a:ln>
+        </p:spPr>
+        <p:txBody>
+          <a:bodyPr spcFirstLastPara="1" wrap="square" lIns="91425" tIns="45700" rIns="91425" bIns="45700" anchor="t" anchorCtr="0">
+            <a:normAutofit/>
+          </a:bodyPr>
+          <a:lstStyle>
+            <a:defPPr marR="0" lvl="0" algn="l" rtl="0">
+              <a:lnSpc>
+                <a:spcPct val="100000"/>
+              </a:lnSpc>
+              <a:spcBef>
+                <a:spcPts val="0"/>
+              </a:spcBef>
+              <a:spcAft>
+                <a:spcPts val="0"/>
+              </a:spcAft>
+            </a:defPPr>
+            <a:lvl1pPr marL="457200" marR="0" lvl="0" indent="-315468" algn="l" rtl="0">
+              <a:lnSpc>
+                <a:spcPct val="100000"/>
+              </a:lnSpc>
+              <a:spcBef>
+                <a:spcPts val="600"/>
+              </a:spcBef>
+              <a:spcAft>
+                <a:spcPts val="0"/>
+              </a:spcAft>
+              <a:buClr>
+                <a:schemeClr val="accent1"/>
+              </a:buClr>
+              <a:buSzPts val="1368"/>
+              <a:buFont typeface="Noto Sans Symbols"/>
+              <a:buChar char="🞂"/>
+              <a:defRPr sz="2600" b="0" i="0" u="none" strike="noStrike" cap="none">
+                <a:solidFill>
+                  <a:schemeClr val="dk1"/>
+                </a:solidFill>
+                <a:latin typeface="Gill Sans"/>
+                <a:ea typeface="Gill Sans"/>
+                <a:cs typeface="Gill Sans"/>
+                <a:sym typeface="Gill Sans"/>
+              </a:defRPr>
+            </a:lvl1pPr>
+            <a:lvl2pPr marL="914400" marR="0" lvl="1" indent="-315468" algn="l" rtl="0">
+              <a:lnSpc>
+                <a:spcPct val="100000"/>
+              </a:lnSpc>
+              <a:spcBef>
+                <a:spcPts val="500"/>
+              </a:spcBef>
+              <a:spcAft>
+                <a:spcPts val="0"/>
+              </a:spcAft>
+              <a:buClr>
+                <a:schemeClr val="accent2"/>
+              </a:buClr>
+              <a:buSzPts val="1368"/>
+              <a:buFont typeface="Noto Sans Symbols"/>
+              <a:buChar char="🞂"/>
+              <a:defRPr sz="2300" b="0" i="0" u="none" strike="noStrike" cap="none">
+                <a:solidFill>
+                  <a:schemeClr val="dk2"/>
+                </a:solidFill>
+                <a:latin typeface="Gill Sans"/>
+                <a:ea typeface="Gill Sans"/>
+                <a:cs typeface="Gill Sans"/>
+                <a:sym typeface="Gill Sans"/>
+              </a:defRPr>
+            </a:lvl2pPr>
+            <a:lvl3pPr marL="1371600" marR="0" lvl="2" indent="-315467" algn="l" rtl="0">
+              <a:lnSpc>
+                <a:spcPct val="100000"/>
+              </a:lnSpc>
+              <a:spcBef>
+                <a:spcPts val="500"/>
+              </a:spcBef>
+              <a:spcAft>
+                <a:spcPts val="0"/>
+              </a:spcAft>
+              <a:buClr>
+                <a:srgbClr val="BABABA"/>
+              </a:buClr>
+              <a:buSzPts val="1368"/>
+              <a:buFont typeface="Noto Sans Symbols"/>
+              <a:buChar char="🞂"/>
+              <a:defRPr sz="2000" b="0" i="0" u="none" strike="noStrike" cap="none">
+                <a:solidFill>
+                  <a:schemeClr val="dk1"/>
+                </a:solidFill>
+                <a:latin typeface="Gill Sans"/>
+                <a:ea typeface="Gill Sans"/>
+                <a:cs typeface="Gill Sans"/>
+                <a:sym typeface="Gill Sans"/>
+              </a:defRPr>
+            </a:lvl3pPr>
+            <a:lvl4pPr marL="1828800" marR="0" lvl="3" indent="-308610" algn="l" rtl="0">
+              <a:lnSpc>
+                <a:spcPct val="100000"/>
+              </a:lnSpc>
+              <a:spcBef>
+                <a:spcPts val="400"/>
+              </a:spcBef>
+              <a:spcAft>
+                <a:spcPts val="0"/>
+              </a:spcAft>
+              <a:buClr>
+                <a:srgbClr val="8BA1B3"/>
+              </a:buClr>
+              <a:buSzPts val="1260"/>
+              <a:buFont typeface="Noto Sans Symbols"/>
+              <a:buChar char="◻"/>
+              <a:defRPr sz="1800" b="0" i="0" u="none" strike="noStrike" cap="none">
+                <a:solidFill>
+                  <a:schemeClr val="dk1"/>
+                </a:solidFill>
+                <a:latin typeface="Gill Sans"/>
+                <a:ea typeface="Gill Sans"/>
+                <a:cs typeface="Gill Sans"/>
+                <a:sym typeface="Gill Sans"/>
+              </a:defRPr>
+            </a:lvl4pPr>
+            <a:lvl5pPr marL="2286000" marR="0" lvl="4" indent="-308610" algn="l" rtl="0">
+              <a:lnSpc>
+                <a:spcPct val="100000"/>
+              </a:lnSpc>
+              <a:spcBef>
+                <a:spcPts val="300"/>
+              </a:spcBef>
+              <a:spcAft>
+                <a:spcPts val="0"/>
+              </a:spcAft>
+              <a:buClr>
+                <a:schemeClr val="accent2"/>
+              </a:buClr>
+              <a:buSzPts val="1260"/>
+              <a:buFont typeface="Noto Sans Symbols"/>
+              <a:buChar char="◻"/>
+              <a:defRPr sz="1600" b="0" i="0" u="none" strike="noStrike" cap="none">
+                <a:solidFill>
+                  <a:schemeClr val="dk1"/>
+                </a:solidFill>
+                <a:latin typeface="Gill Sans"/>
+                <a:ea typeface="Gill Sans"/>
+                <a:cs typeface="Gill Sans"/>
+                <a:sym typeface="Gill Sans"/>
+              </a:defRPr>
+            </a:lvl5pPr>
+            <a:lvl6pPr marL="2743200" marR="0" lvl="5" indent="-314325" algn="l" rtl="0">
+              <a:lnSpc>
+                <a:spcPct val="100000"/>
+              </a:lnSpc>
+              <a:spcBef>
+                <a:spcPts val="300"/>
+              </a:spcBef>
+              <a:spcAft>
+                <a:spcPts val="0"/>
+              </a:spcAft>
+              <a:buClr>
+                <a:srgbClr val="8BA1B3"/>
+              </a:buClr>
+              <a:buSzPts val="1350"/>
+              <a:buFont typeface="Noto Sans Symbols"/>
+              <a:buChar char="🞂"/>
+              <a:defRPr sz="1600" b="0" i="0" u="none" strike="noStrike" cap="none">
+                <a:solidFill>
+                  <a:schemeClr val="dk1"/>
+                </a:solidFill>
+                <a:latin typeface="Gill Sans"/>
+                <a:ea typeface="Gill Sans"/>
+                <a:cs typeface="Gill Sans"/>
+                <a:sym typeface="Gill Sans"/>
+              </a:defRPr>
+            </a:lvl6pPr>
+            <a:lvl7pPr marL="3200400" marR="0" lvl="6" indent="-314325" algn="l" rtl="0">
+              <a:lnSpc>
+                <a:spcPct val="100000"/>
+              </a:lnSpc>
+              <a:spcBef>
+                <a:spcPts val="300"/>
+              </a:spcBef>
+              <a:spcAft>
+                <a:spcPts val="0"/>
+              </a:spcAft>
+              <a:buClr>
+                <a:srgbClr val="646C8F"/>
+              </a:buClr>
+              <a:buSzPts val="1350"/>
+              <a:buFont typeface="Noto Sans Symbols"/>
+              <a:buChar char="🞂"/>
+              <a:defRPr sz="1400" b="0" i="0" u="none" strike="noStrike" cap="none">
+                <a:solidFill>
+                  <a:schemeClr val="dk1"/>
+                </a:solidFill>
+                <a:latin typeface="Gill Sans"/>
+                <a:ea typeface="Gill Sans"/>
+                <a:cs typeface="Gill Sans"/>
+                <a:sym typeface="Gill Sans"/>
+              </a:defRPr>
+            </a:lvl7pPr>
+            <a:lvl8pPr marL="3657600" marR="0" lvl="7" indent="-314325" algn="l" rtl="0">
+              <a:lnSpc>
+                <a:spcPct val="100000"/>
+              </a:lnSpc>
+              <a:spcBef>
+                <a:spcPts val="300"/>
+              </a:spcBef>
+              <a:spcAft>
+                <a:spcPts val="0"/>
+              </a:spcAft>
+              <a:buClr>
+                <a:srgbClr val="BABABA"/>
+              </a:buClr>
+              <a:buSzPts val="1350"/>
+              <a:buFont typeface="Noto Sans Symbols"/>
+              <a:buChar char="🞂"/>
+              <a:defRPr sz="1400" b="0" i="0" u="none" strike="noStrike" cap="none">
+                <a:solidFill>
+                  <a:schemeClr val="dk1"/>
+                </a:solidFill>
+                <a:latin typeface="Gill Sans"/>
+                <a:ea typeface="Gill Sans"/>
+                <a:cs typeface="Gill Sans"/>
+                <a:sym typeface="Gill Sans"/>
+              </a:defRPr>
+            </a:lvl8pPr>
+            <a:lvl9pPr marL="4114800" marR="0" lvl="8" indent="-314325" algn="l" rtl="0">
+              <a:lnSpc>
+                <a:spcPct val="100000"/>
+              </a:lnSpc>
+              <a:spcBef>
+                <a:spcPts val="300"/>
+              </a:spcBef>
+              <a:spcAft>
+                <a:spcPts val="0"/>
+              </a:spcAft>
+              <a:buClr>
+                <a:srgbClr val="9FB8CD"/>
+              </a:buClr>
+              <a:buSzPts val="1350"/>
+              <a:buFont typeface="Noto Sans Symbols"/>
+              <a:buChar char="🞂"/>
+              <a:defRPr sz="1200" b="0" i="0" u="none" strike="noStrike" cap="none">
+                <a:solidFill>
+                  <a:schemeClr val="dk1"/>
+                </a:solidFill>
+                <a:latin typeface="Gill Sans"/>
+                <a:ea typeface="Gill Sans"/>
+                <a:cs typeface="Gill Sans"/>
+                <a:sym typeface="Gill Sans"/>
+              </a:defRPr>
+            </a:lvl9pPr>
+          </a:lstStyle>
+          <a:p>
+            <a:pPr marL="0" indent="0" algn="ctr">
+              <a:lnSpc>
+                <a:spcPct val="130000"/>
+              </a:lnSpc>
+              <a:buClr>
+                <a:schemeClr val="accent4">
+                  <a:lumMod val="75000"/>
+                </a:schemeClr>
+              </a:buClr>
+              <a:buSzPts val="1976"/>
+              <a:buFont typeface="Noto Sans Symbols"/>
+              <a:buNone/>
+            </a:pPr>
+            <a:r>
+              <a:rPr lang="en-US" sz="2000" b="1" dirty="0"/>
+              <a:t>Cone Geometry</a:t>
+            </a:r>
+          </a:p>
+        </p:txBody>
+      </p:sp>
+      <p:sp>
+        <p:nvSpPr>
+          <p:cNvPr id="10" name="Google Shape;138;p3">
+            <a:extLst>
+              <a:ext uri="{FF2B5EF4-FFF2-40B4-BE49-F238E27FC236}">
+                <a16:creationId xmlns:a16="http://schemas.microsoft.com/office/drawing/2014/main" id="{C0C9EA6F-C4E8-DDE2-300D-A42761DB4477}"/>
+              </a:ext>
+            </a:extLst>
+          </p:cNvPr>
+          <p:cNvSpPr txBox="1">
+            <a:spLocks/>
+          </p:cNvSpPr>
+          <p:nvPr/>
+        </p:nvSpPr>
+        <p:spPr>
+          <a:xfrm>
+            <a:off x="6246879" y="5586396"/>
+            <a:ext cx="2250360" cy="990600"/>
+          </a:xfrm>
+          <a:prstGeom prst="rect">
+            <a:avLst/>
+          </a:prstGeom>
+          <a:noFill/>
+          <a:ln>
+            <a:noFill/>
+          </a:ln>
+        </p:spPr>
+        <p:txBody>
+          <a:bodyPr spcFirstLastPara="1" wrap="square" lIns="91425" tIns="45700" rIns="91425" bIns="45700" anchor="t" anchorCtr="0">
+            <a:normAutofit/>
+          </a:bodyPr>
+          <a:lstStyle>
+            <a:defPPr marR="0" lvl="0" algn="l" rtl="0">
+              <a:lnSpc>
+                <a:spcPct val="100000"/>
+              </a:lnSpc>
+              <a:spcBef>
+                <a:spcPts val="0"/>
+              </a:spcBef>
+              <a:spcAft>
+                <a:spcPts val="0"/>
+              </a:spcAft>
+            </a:defPPr>
+            <a:lvl1pPr marL="457200" marR="0" lvl="0" indent="-315468" algn="l" rtl="0">
+              <a:lnSpc>
+                <a:spcPct val="100000"/>
+              </a:lnSpc>
+              <a:spcBef>
+                <a:spcPts val="600"/>
+              </a:spcBef>
+              <a:spcAft>
+                <a:spcPts val="0"/>
+              </a:spcAft>
+              <a:buClr>
+                <a:schemeClr val="accent1"/>
+              </a:buClr>
+              <a:buSzPts val="1368"/>
+              <a:buFont typeface="Noto Sans Symbols"/>
+              <a:buChar char="🞂"/>
+              <a:defRPr sz="2600" b="0" i="0" u="none" strike="noStrike" cap="none">
+                <a:solidFill>
+                  <a:schemeClr val="dk1"/>
+                </a:solidFill>
+                <a:latin typeface="Gill Sans"/>
+                <a:ea typeface="Gill Sans"/>
+                <a:cs typeface="Gill Sans"/>
+                <a:sym typeface="Gill Sans"/>
+              </a:defRPr>
+            </a:lvl1pPr>
+            <a:lvl2pPr marL="914400" marR="0" lvl="1" indent="-315468" algn="l" rtl="0">
+              <a:lnSpc>
+                <a:spcPct val="100000"/>
+              </a:lnSpc>
+              <a:spcBef>
+                <a:spcPts val="500"/>
+              </a:spcBef>
+              <a:spcAft>
+                <a:spcPts val="0"/>
+              </a:spcAft>
+              <a:buClr>
+                <a:schemeClr val="accent2"/>
+              </a:buClr>
+              <a:buSzPts val="1368"/>
+              <a:buFont typeface="Noto Sans Symbols"/>
+              <a:buChar char="🞂"/>
+              <a:defRPr sz="2300" b="0" i="0" u="none" strike="noStrike" cap="none">
+                <a:solidFill>
+                  <a:schemeClr val="dk2"/>
+                </a:solidFill>
+                <a:latin typeface="Gill Sans"/>
+                <a:ea typeface="Gill Sans"/>
+                <a:cs typeface="Gill Sans"/>
+                <a:sym typeface="Gill Sans"/>
+              </a:defRPr>
+            </a:lvl2pPr>
+            <a:lvl3pPr marL="1371600" marR="0" lvl="2" indent="-315467" algn="l" rtl="0">
+              <a:lnSpc>
+                <a:spcPct val="100000"/>
+              </a:lnSpc>
+              <a:spcBef>
+                <a:spcPts val="500"/>
+              </a:spcBef>
+              <a:spcAft>
+                <a:spcPts val="0"/>
+              </a:spcAft>
+              <a:buClr>
+                <a:srgbClr val="BABABA"/>
+              </a:buClr>
+              <a:buSzPts val="1368"/>
+              <a:buFont typeface="Noto Sans Symbols"/>
+              <a:buChar char="🞂"/>
+              <a:defRPr sz="2000" b="0" i="0" u="none" strike="noStrike" cap="none">
+                <a:solidFill>
+                  <a:schemeClr val="dk1"/>
+                </a:solidFill>
+                <a:latin typeface="Gill Sans"/>
+                <a:ea typeface="Gill Sans"/>
+                <a:cs typeface="Gill Sans"/>
+                <a:sym typeface="Gill Sans"/>
+              </a:defRPr>
+            </a:lvl3pPr>
+            <a:lvl4pPr marL="1828800" marR="0" lvl="3" indent="-308610" algn="l" rtl="0">
+              <a:lnSpc>
+                <a:spcPct val="100000"/>
+              </a:lnSpc>
+              <a:spcBef>
+                <a:spcPts val="400"/>
+              </a:spcBef>
+              <a:spcAft>
+                <a:spcPts val="0"/>
+              </a:spcAft>
+              <a:buClr>
+                <a:srgbClr val="8BA1B3"/>
+              </a:buClr>
+              <a:buSzPts val="1260"/>
+              <a:buFont typeface="Noto Sans Symbols"/>
+              <a:buChar char="◻"/>
+              <a:defRPr sz="1800" b="0" i="0" u="none" strike="noStrike" cap="none">
+                <a:solidFill>
+                  <a:schemeClr val="dk1"/>
+                </a:solidFill>
+                <a:latin typeface="Gill Sans"/>
+                <a:ea typeface="Gill Sans"/>
+                <a:cs typeface="Gill Sans"/>
+                <a:sym typeface="Gill Sans"/>
+              </a:defRPr>
+            </a:lvl4pPr>
+            <a:lvl5pPr marL="2286000" marR="0" lvl="4" indent="-308610" algn="l" rtl="0">
+              <a:lnSpc>
+                <a:spcPct val="100000"/>
+              </a:lnSpc>
+              <a:spcBef>
+                <a:spcPts val="300"/>
+              </a:spcBef>
+              <a:spcAft>
+                <a:spcPts val="0"/>
+              </a:spcAft>
+              <a:buClr>
+                <a:schemeClr val="accent2"/>
+              </a:buClr>
+              <a:buSzPts val="1260"/>
+              <a:buFont typeface="Noto Sans Symbols"/>
+              <a:buChar char="◻"/>
+              <a:defRPr sz="1600" b="0" i="0" u="none" strike="noStrike" cap="none">
+                <a:solidFill>
+                  <a:schemeClr val="dk1"/>
+                </a:solidFill>
+                <a:latin typeface="Gill Sans"/>
+                <a:ea typeface="Gill Sans"/>
+                <a:cs typeface="Gill Sans"/>
+                <a:sym typeface="Gill Sans"/>
+              </a:defRPr>
+            </a:lvl5pPr>
+            <a:lvl6pPr marL="2743200" marR="0" lvl="5" indent="-314325" algn="l" rtl="0">
+              <a:lnSpc>
+                <a:spcPct val="100000"/>
+              </a:lnSpc>
+              <a:spcBef>
+                <a:spcPts val="300"/>
+              </a:spcBef>
+              <a:spcAft>
+                <a:spcPts val="0"/>
+              </a:spcAft>
+              <a:buClr>
+                <a:srgbClr val="8BA1B3"/>
+              </a:buClr>
+              <a:buSzPts val="1350"/>
+              <a:buFont typeface="Noto Sans Symbols"/>
+              <a:buChar char="🞂"/>
+              <a:defRPr sz="1600" b="0" i="0" u="none" strike="noStrike" cap="none">
+                <a:solidFill>
+                  <a:schemeClr val="dk1"/>
+                </a:solidFill>
+                <a:latin typeface="Gill Sans"/>
+                <a:ea typeface="Gill Sans"/>
+                <a:cs typeface="Gill Sans"/>
+                <a:sym typeface="Gill Sans"/>
+              </a:defRPr>
+            </a:lvl6pPr>
+            <a:lvl7pPr marL="3200400" marR="0" lvl="6" indent="-314325" algn="l" rtl="0">
+              <a:lnSpc>
+                <a:spcPct val="100000"/>
+              </a:lnSpc>
+              <a:spcBef>
+                <a:spcPts val="300"/>
+              </a:spcBef>
+              <a:spcAft>
+                <a:spcPts val="0"/>
+              </a:spcAft>
+              <a:buClr>
+                <a:srgbClr val="646C8F"/>
+              </a:buClr>
+              <a:buSzPts val="1350"/>
+              <a:buFont typeface="Noto Sans Symbols"/>
+              <a:buChar char="🞂"/>
+              <a:defRPr sz="1400" b="0" i="0" u="none" strike="noStrike" cap="none">
+                <a:solidFill>
+                  <a:schemeClr val="dk1"/>
+                </a:solidFill>
+                <a:latin typeface="Gill Sans"/>
+                <a:ea typeface="Gill Sans"/>
+                <a:cs typeface="Gill Sans"/>
+                <a:sym typeface="Gill Sans"/>
+              </a:defRPr>
+            </a:lvl7pPr>
+            <a:lvl8pPr marL="3657600" marR="0" lvl="7" indent="-314325" algn="l" rtl="0">
+              <a:lnSpc>
+                <a:spcPct val="100000"/>
+              </a:lnSpc>
+              <a:spcBef>
+                <a:spcPts val="300"/>
+              </a:spcBef>
+              <a:spcAft>
+                <a:spcPts val="0"/>
+              </a:spcAft>
+              <a:buClr>
+                <a:srgbClr val="BABABA"/>
+              </a:buClr>
+              <a:buSzPts val="1350"/>
+              <a:buFont typeface="Noto Sans Symbols"/>
+              <a:buChar char="🞂"/>
+              <a:defRPr sz="1400" b="0" i="0" u="none" strike="noStrike" cap="none">
+                <a:solidFill>
+                  <a:schemeClr val="dk1"/>
+                </a:solidFill>
+                <a:latin typeface="Gill Sans"/>
+                <a:ea typeface="Gill Sans"/>
+                <a:cs typeface="Gill Sans"/>
+                <a:sym typeface="Gill Sans"/>
+              </a:defRPr>
+            </a:lvl8pPr>
+            <a:lvl9pPr marL="4114800" marR="0" lvl="8" indent="-314325" algn="l" rtl="0">
+              <a:lnSpc>
+                <a:spcPct val="100000"/>
+              </a:lnSpc>
+              <a:spcBef>
+                <a:spcPts val="300"/>
+              </a:spcBef>
+              <a:spcAft>
+                <a:spcPts val="0"/>
+              </a:spcAft>
+              <a:buClr>
+                <a:srgbClr val="9FB8CD"/>
+              </a:buClr>
+              <a:buSzPts val="1350"/>
+              <a:buFont typeface="Noto Sans Symbols"/>
+              <a:buChar char="🞂"/>
+              <a:defRPr sz="1200" b="0" i="0" u="none" strike="noStrike" cap="none">
+                <a:solidFill>
+                  <a:schemeClr val="dk1"/>
+                </a:solidFill>
+                <a:latin typeface="Gill Sans"/>
+                <a:ea typeface="Gill Sans"/>
+                <a:cs typeface="Gill Sans"/>
+                <a:sym typeface="Gill Sans"/>
+              </a:defRPr>
+            </a:lvl9pPr>
+          </a:lstStyle>
+          <a:p>
+            <a:pPr marL="0" indent="0" algn="ctr">
+              <a:lnSpc>
+                <a:spcPct val="110000"/>
+              </a:lnSpc>
+              <a:spcBef>
+                <a:spcPts val="0"/>
+              </a:spcBef>
+              <a:buClr>
+                <a:schemeClr val="accent4">
+                  <a:lumMod val="75000"/>
+                </a:schemeClr>
+              </a:buClr>
+              <a:buSzPts val="1976"/>
+              <a:buFont typeface="Noto Sans Symbols"/>
+              <a:buNone/>
+            </a:pPr>
+            <a:r>
+              <a:rPr lang="en-US" sz="2000" b="1" dirty="0"/>
+              <a:t>Can you guess </a:t>
+            </a:r>
+          </a:p>
+          <a:p>
+            <a:pPr marL="0" indent="0" algn="ctr">
+              <a:lnSpc>
+                <a:spcPct val="110000"/>
+              </a:lnSpc>
+              <a:spcBef>
+                <a:spcPts val="0"/>
+              </a:spcBef>
+              <a:buClr>
+                <a:schemeClr val="accent4">
+                  <a:lumMod val="75000"/>
+                </a:schemeClr>
+              </a:buClr>
+              <a:buSzPts val="1976"/>
+              <a:buFont typeface="Noto Sans Symbols"/>
+              <a:buNone/>
+            </a:pPr>
+            <a:r>
+              <a:rPr lang="en-US" sz="2000" b="1" dirty="0"/>
+              <a:t>what is this?</a:t>
+            </a:r>
+          </a:p>
+        </p:txBody>
+      </p:sp>
     </p:spTree>
     <p:extLst>
       <p:ext uri="{BB962C8B-B14F-4D97-AF65-F5344CB8AC3E}">
@@ -19665,15 +21242,7 @@
             </a:pPr>
             <a:r>
               <a:rPr lang="en-US" sz="1800" b="1" dirty="0"/>
-              <a:t>Installing Node.js and </a:t>
-            </a:r>
-            <a:r>
-              <a:rPr lang="en-US" sz="1800" b="1" dirty="0" err="1"/>
-              <a:t>npm</a:t>
-            </a:r>
-            <a:r>
-              <a:rPr lang="en-US" sz="1800" b="1" dirty="0"/>
-              <a:t>: </a:t>
+              <a:t>Installing Node.js: </a:t>
             </a:r>
             <a:r>
               <a:rPr lang="en-US" sz="1800" dirty="0">
@@ -19704,8 +21273,38 @@
               <a:buChar char="q"/>
             </a:pPr>
             <a:r>
+              <a:rPr lang="en-US" sz="1800" dirty="0"/>
+              <a:t>Open </a:t>
+            </a:r>
+            <a:r>
+              <a:rPr lang="en-US" sz="1800" dirty="0" err="1"/>
+              <a:t>VSCode</a:t>
+            </a:r>
+            <a:r>
+              <a:rPr lang="en-US" sz="1800" dirty="0"/>
+              <a:t>, create a new folder, enable AutoSave option and open a Terminal</a:t>
+            </a:r>
+          </a:p>
+          <a:p>
+            <a:pPr lvl="0" indent="-457200" algn="just" rtl="0">
+              <a:lnSpc>
+                <a:spcPct val="150000"/>
+              </a:lnSpc>
+              <a:spcAft>
+                <a:spcPts val="0"/>
+              </a:spcAft>
+              <a:buClr>
+                <a:schemeClr val="accent4">
+                  <a:lumMod val="75000"/>
+                </a:schemeClr>
+              </a:buClr>
+              <a:buSzPts val="1976"/>
+              <a:buFont typeface="Wingdings" panose="05000000000000000000" pitchFamily="2" charset="2"/>
+              <a:buChar char="q"/>
+            </a:pPr>
+            <a:r>
               <a:rPr lang="en-US" sz="1800" b="1" dirty="0"/>
-              <a:t>Check installation: Open Command Prompt and type these commands</a:t>
+              <a:t>Check installation: Type these commands in the terminal</a:t>
             </a:r>
           </a:p>
           <a:p>
@@ -19724,7 +21323,7 @@
             </a:pPr>
             <a:r>
               <a:rPr lang="en-US" sz="1700" dirty="0"/>
-              <a:t>node --version</a:t>
+              <a:t>node --version =&gt; You should see a version number</a:t>
             </a:r>
           </a:p>
           <a:p>
@@ -19747,7 +21346,7 @@
             </a:r>
             <a:r>
               <a:rPr lang="en-US" sz="1700" dirty="0"/>
-              <a:t> --version</a:t>
+              <a:t> --version =&gt; You should see a version number</a:t>
             </a:r>
           </a:p>
           <a:p>
@@ -19764,7 +21363,7 @@
             </a:pPr>
             <a:r>
               <a:rPr lang="en-US" sz="1800" b="1" dirty="0"/>
-              <a:t>Installing Three.js: Type these commands in Command Prompt</a:t>
+              <a:t>Installing Three.js: Type these commands in the terminal</a:t>
             </a:r>
           </a:p>
           <a:p>
@@ -19826,6 +21425,10 @@
               <a:buFont typeface="Wingdings" panose="05000000000000000000" pitchFamily="2" charset="2"/>
               <a:buChar char="q"/>
             </a:pPr>
+            <a:r>
+              <a:rPr lang="en-US" sz="1800" b="1" dirty="0"/>
+              <a:t>Installing </a:t>
+            </a:r>
             <a:r>
               <a:rPr lang="en-US" sz="1800" b="1" dirty="0" err="1"/>
               <a:t>VSCode</a:t>
@@ -20149,7 +21752,7 @@
             </a:pPr>
             <a:r>
               <a:rPr lang="en-US" sz="1700" dirty="0"/>
-              <a:t>From your html file, “go live” with Live Server Extension.</a:t>
+              <a:t>From your html file, “Go Live” with Live Server Extension.</a:t>
             </a:r>
           </a:p>
           <a:p>
@@ -20182,7 +21785,7 @@
             </a:pPr>
             <a:r>
               <a:rPr lang="en-US" sz="1400" dirty="0"/>
-              <a:t>(It should be a blank page at this point).</a:t>
+              <a:t>(It should be a page with a green cube in the middle and a dark background at this point).</a:t>
             </a:r>
             <a:r>
               <a:rPr lang="en-US" sz="1100" dirty="0"/>
@@ -20242,6 +21845,319 @@
 </file>
 
 <file path=ppt/slides/slide6.xml><?xml version="1.0" encoding="utf-8"?>
+<p:sld xmlns:a="http://schemas.openxmlformats.org/drawingml/2006/main" xmlns:r="http://schemas.openxmlformats.org/officeDocument/2006/relationships" xmlns:p="http://schemas.openxmlformats.org/presentationml/2006/main">
+  <p:cSld>
+    <p:spTree>
+      <p:nvGrpSpPr>
+        <p:cNvPr id="1" name="Shape 134">
+          <a:extLst>
+            <a:ext uri="{FF2B5EF4-FFF2-40B4-BE49-F238E27FC236}">
+              <a16:creationId xmlns:a16="http://schemas.microsoft.com/office/drawing/2014/main" id="{A34DA155-682B-6458-9AAB-3E8B19744FD6}"/>
+            </a:ext>
+          </a:extLst>
+        </p:cNvPr>
+        <p:cNvGrpSpPr/>
+        <p:nvPr/>
+      </p:nvGrpSpPr>
+      <p:grpSpPr>
+        <a:xfrm>
+          <a:off x="0" y="0"/>
+          <a:ext cx="0" cy="0"/>
+          <a:chOff x="0" y="0"/>
+          <a:chExt cx="0" cy="0"/>
+        </a:xfrm>
+      </p:grpSpPr>
+      <p:sp>
+        <p:nvSpPr>
+          <p:cNvPr id="135" name="Google Shape;135;p3">
+            <a:extLst>
+              <a:ext uri="{FF2B5EF4-FFF2-40B4-BE49-F238E27FC236}">
+                <a16:creationId xmlns:a16="http://schemas.microsoft.com/office/drawing/2014/main" id="{6EA9D752-8745-84D7-FA36-5C73A03693A8}"/>
+              </a:ext>
+            </a:extLst>
+          </p:cNvPr>
+          <p:cNvSpPr txBox="1">
+            <a:spLocks noGrp="1"/>
+          </p:cNvSpPr>
+          <p:nvPr>
+            <p:ph type="title"/>
+          </p:nvPr>
+        </p:nvSpPr>
+        <p:spPr>
+          <a:xfrm>
+            <a:off x="457200" y="152400"/>
+            <a:ext cx="8229600" cy="990600"/>
+          </a:xfrm>
+          <a:prstGeom prst="rect">
+            <a:avLst/>
+          </a:prstGeom>
+          <a:noFill/>
+          <a:ln>
+            <a:noFill/>
+          </a:ln>
+        </p:spPr>
+        <p:txBody>
+          <a:bodyPr spcFirstLastPara="1" wrap="square" lIns="91425" tIns="45700" rIns="91425" bIns="45700" anchor="b" anchorCtr="0">
+            <a:normAutofit/>
+          </a:bodyPr>
+          <a:lstStyle/>
+          <a:p>
+            <a:pPr marL="0" lvl="0" indent="0" algn="l" rtl="0">
+              <a:spcBef>
+                <a:spcPts val="0"/>
+              </a:spcBef>
+              <a:spcAft>
+                <a:spcPts val="0"/>
+              </a:spcAft>
+              <a:buClr>
+                <a:schemeClr val="dk2"/>
+              </a:buClr>
+              <a:buSzPts val="3200"/>
+              <a:buFont typeface="Bookman Old Style"/>
+              <a:buNone/>
+            </a:pPr>
+            <a:r>
+              <a:rPr lang="en-US" dirty="0"/>
+              <a:t>Structure of a Three.js app</a:t>
+            </a:r>
+            <a:endParaRPr dirty="0"/>
+          </a:p>
+        </p:txBody>
+      </p:sp>
+      <p:sp>
+        <p:nvSpPr>
+          <p:cNvPr id="138" name="Google Shape;138;p3">
+            <a:extLst>
+              <a:ext uri="{FF2B5EF4-FFF2-40B4-BE49-F238E27FC236}">
+                <a16:creationId xmlns:a16="http://schemas.microsoft.com/office/drawing/2014/main" id="{8EAF8A50-D4EE-3E0D-B76C-301F0E0E08A0}"/>
+              </a:ext>
+            </a:extLst>
+          </p:cNvPr>
+          <p:cNvSpPr txBox="1">
+            <a:spLocks noGrp="1"/>
+          </p:cNvSpPr>
+          <p:nvPr>
+            <p:ph type="body" idx="1"/>
+          </p:nvPr>
+        </p:nvSpPr>
+        <p:spPr>
+          <a:xfrm>
+            <a:off x="457200" y="1219200"/>
+            <a:ext cx="6459415" cy="592015"/>
+          </a:xfrm>
+          <a:prstGeom prst="rect">
+            <a:avLst/>
+          </a:prstGeom>
+          <a:noFill/>
+          <a:ln>
+            <a:noFill/>
+          </a:ln>
+        </p:spPr>
+        <p:txBody>
+          <a:bodyPr spcFirstLastPara="1" wrap="square" lIns="91425" tIns="45700" rIns="91425" bIns="45700" anchor="t" anchorCtr="0">
+            <a:normAutofit fontScale="92500"/>
+          </a:bodyPr>
+          <a:lstStyle/>
+          <a:p>
+            <a:pPr lvl="0" indent="-457200" algn="just" rtl="0">
+              <a:lnSpc>
+                <a:spcPct val="130000"/>
+              </a:lnSpc>
+              <a:spcAft>
+                <a:spcPts val="0"/>
+              </a:spcAft>
+              <a:buClr>
+                <a:schemeClr val="accent4">
+                  <a:lumMod val="75000"/>
+                </a:schemeClr>
+              </a:buClr>
+              <a:buSzPts val="1976"/>
+              <a:buFont typeface="Wingdings" panose="05000000000000000000" pitchFamily="2" charset="2"/>
+              <a:buChar char="q"/>
+            </a:pPr>
+            <a:r>
+              <a:rPr lang="en-US" sz="2000" dirty="0"/>
+              <a:t>Here is a diagram that represents a </a:t>
+            </a:r>
+            <a:r>
+              <a:rPr lang="en-US" sz="2000" b="1" dirty="0"/>
+              <a:t>small three.js app:</a:t>
+            </a:r>
+            <a:endParaRPr lang="en-US" sz="2000" dirty="0"/>
+          </a:p>
+        </p:txBody>
+      </p:sp>
+      <p:sp>
+        <p:nvSpPr>
+          <p:cNvPr id="3" name="Slide Number Placeholder 2">
+            <a:extLst>
+              <a:ext uri="{FF2B5EF4-FFF2-40B4-BE49-F238E27FC236}">
+                <a16:creationId xmlns:a16="http://schemas.microsoft.com/office/drawing/2014/main" id="{DCC86340-7733-3D13-FF52-495052B5A848}"/>
+              </a:ext>
+            </a:extLst>
+          </p:cNvPr>
+          <p:cNvSpPr>
+            <a:spLocks noGrp="1"/>
+          </p:cNvSpPr>
+          <p:nvPr>
+            <p:ph type="sldNum" idx="12"/>
+          </p:nvPr>
+        </p:nvSpPr>
+        <p:spPr/>
+        <p:txBody>
+          <a:bodyPr/>
+          <a:lstStyle/>
+          <a:p>
+            <a:pPr marL="0" lvl="0" indent="0" algn="r" rtl="0">
+              <a:spcBef>
+                <a:spcPts val="0"/>
+              </a:spcBef>
+              <a:spcAft>
+                <a:spcPts val="0"/>
+              </a:spcAft>
+              <a:buNone/>
+            </a:pPr>
+            <a:r>
+              <a:rPr lang="en-US" dirty="0"/>
+              <a:t>4</a:t>
+            </a:r>
+          </a:p>
+        </p:txBody>
+      </p:sp>
+      <p:sp>
+        <p:nvSpPr>
+          <p:cNvPr id="4" name="AutoShape 4">
+            <a:extLst>
+              <a:ext uri="{FF2B5EF4-FFF2-40B4-BE49-F238E27FC236}">
+                <a16:creationId xmlns:a16="http://schemas.microsoft.com/office/drawing/2014/main" id="{882087C9-D99E-C848-CF97-2A71D40DC925}"/>
+              </a:ext>
+            </a:extLst>
+          </p:cNvPr>
+          <p:cNvSpPr>
+            <a:spLocks noChangeAspect="1" noChangeArrowheads="1"/>
+          </p:cNvSpPr>
+          <p:nvPr/>
+        </p:nvSpPr>
+        <p:spPr bwMode="auto">
+          <a:xfrm>
+            <a:off x="4419599" y="3276599"/>
+            <a:ext cx="2497015" cy="2497015"/>
+          </a:xfrm>
+          <a:prstGeom prst="rect">
+            <a:avLst/>
+          </a:prstGeom>
+          <a:noFill/>
+          <a:extLst>
+            <a:ext uri="{909E8E84-426E-40DD-AFC4-6F175D3DCCD1}">
+              <a14:hiddenFill xmlns:a14="http://schemas.microsoft.com/office/drawing/2010/main">
+                <a:solidFill>
+                  <a:srgbClr val="FFFFFF"/>
+                </a:solidFill>
+              </a14:hiddenFill>
+            </a:ext>
+          </a:extLst>
+        </p:spPr>
+        <p:txBody>
+          <a:bodyPr vert="horz" wrap="square" lIns="91440" tIns="45720" rIns="91440" bIns="45720" numCol="1" anchor="t" anchorCtr="0" compatLnSpc="1">
+            <a:prstTxWarp prst="textNoShape">
+              <a:avLst/>
+            </a:prstTxWarp>
+          </a:bodyPr>
+          <a:lstStyle/>
+          <a:p>
+            <a:endParaRPr lang="en-US"/>
+          </a:p>
+        </p:txBody>
+      </p:sp>
+      <p:sp>
+        <p:nvSpPr>
+          <p:cNvPr id="6" name="AutoShape 8">
+            <a:extLst>
+              <a:ext uri="{FF2B5EF4-FFF2-40B4-BE49-F238E27FC236}">
+                <a16:creationId xmlns:a16="http://schemas.microsoft.com/office/drawing/2014/main" id="{8ACD2EB8-2159-DFD2-3ABF-45973B7895BE}"/>
+              </a:ext>
+            </a:extLst>
+          </p:cNvPr>
+          <p:cNvSpPr>
+            <a:spLocks noChangeAspect="1" noChangeArrowheads="1"/>
+          </p:cNvSpPr>
+          <p:nvPr/>
+        </p:nvSpPr>
+        <p:spPr bwMode="auto">
+          <a:xfrm>
+            <a:off x="4572000" y="3429000"/>
+            <a:ext cx="304800" cy="304800"/>
+          </a:xfrm>
+          <a:prstGeom prst="rect">
+            <a:avLst/>
+          </a:prstGeom>
+          <a:noFill/>
+          <a:extLst>
+            <a:ext uri="{909E8E84-426E-40DD-AFC4-6F175D3DCCD1}">
+              <a14:hiddenFill xmlns:a14="http://schemas.microsoft.com/office/drawing/2010/main">
+                <a:solidFill>
+                  <a:srgbClr val="FFFFFF"/>
+                </a:solidFill>
+              </a14:hiddenFill>
+            </a:ext>
+          </a:extLst>
+        </p:spPr>
+        <p:txBody>
+          <a:bodyPr vert="horz" wrap="square" lIns="91440" tIns="45720" rIns="91440" bIns="45720" numCol="1" anchor="t" anchorCtr="0" compatLnSpc="1">
+            <a:prstTxWarp prst="textNoShape">
+              <a:avLst/>
+            </a:prstTxWarp>
+          </a:bodyPr>
+          <a:lstStyle/>
+          <a:p>
+            <a:endParaRPr lang="en-US"/>
+          </a:p>
+        </p:txBody>
+      </p:sp>
+      <p:pic>
+        <p:nvPicPr>
+          <p:cNvPr id="8" name="Picture 7">
+            <a:extLst>
+              <a:ext uri="{FF2B5EF4-FFF2-40B4-BE49-F238E27FC236}">
+                <a16:creationId xmlns:a16="http://schemas.microsoft.com/office/drawing/2014/main" id="{5CEA6011-A2FD-27AB-4198-60B769D8B52A}"/>
+              </a:ext>
+            </a:extLst>
+          </p:cNvPr>
+          <p:cNvPicPr>
+            <a:picLocks noChangeAspect="1"/>
+          </p:cNvPicPr>
+          <p:nvPr/>
+        </p:nvPicPr>
+        <p:blipFill>
+          <a:blip r:embed="rId3"/>
+          <a:stretch>
+            <a:fillRect/>
+          </a:stretch>
+        </p:blipFill>
+        <p:spPr>
+          <a:xfrm>
+            <a:off x="1745043" y="1811215"/>
+            <a:ext cx="5653914" cy="4058703"/>
+          </a:xfrm>
+          <a:prstGeom prst="rect">
+            <a:avLst/>
+          </a:prstGeom>
+        </p:spPr>
+      </p:pic>
+    </p:spTree>
+    <p:extLst>
+      <p:ext uri="{BB962C8B-B14F-4D97-AF65-F5344CB8AC3E}">
+        <p14:creationId xmlns:p14="http://schemas.microsoft.com/office/powerpoint/2010/main" val="3473373116"/>
+      </p:ext>
+    </p:extLst>
+  </p:cSld>
+  <p:clrMapOvr>
+    <a:masterClrMapping/>
+  </p:clrMapOvr>
+</p:sld>
+</file>
+
+<file path=ppt/slides/slide7.xml><?xml version="1.0" encoding="utf-8"?>
 <p:sld xmlns:a="http://schemas.openxmlformats.org/drawingml/2006/main" xmlns:r="http://schemas.openxmlformats.org/officeDocument/2006/relationships" xmlns:p="http://schemas.openxmlformats.org/presentationml/2006/main">
   <p:cSld>
     <p:spTree>
@@ -20315,7 +22231,7 @@
             </a:pPr>
             <a:r>
               <a:rPr lang="en-US" dirty="0"/>
-              <a:t>Creating a Scene</a:t>
+              <a:t>“Hello Cube” Setup</a:t>
             </a:r>
             <a:endParaRPr dirty="0"/>
           </a:p>
@@ -21160,319 +23076,6 @@
     <p:extLst>
       <p:ext uri="{BB962C8B-B14F-4D97-AF65-F5344CB8AC3E}">
         <p14:creationId xmlns:p14="http://schemas.microsoft.com/office/powerpoint/2010/main" val="1238948432"/>
-      </p:ext>
-    </p:extLst>
-  </p:cSld>
-  <p:clrMapOvr>
-    <a:masterClrMapping/>
-  </p:clrMapOvr>
-</p:sld>
-</file>
-
-<file path=ppt/slides/slide7.xml><?xml version="1.0" encoding="utf-8"?>
-<p:sld xmlns:a="http://schemas.openxmlformats.org/drawingml/2006/main" xmlns:r="http://schemas.openxmlformats.org/officeDocument/2006/relationships" xmlns:p="http://schemas.openxmlformats.org/presentationml/2006/main">
-  <p:cSld>
-    <p:spTree>
-      <p:nvGrpSpPr>
-        <p:cNvPr id="1" name="Shape 134">
-          <a:extLst>
-            <a:ext uri="{FF2B5EF4-FFF2-40B4-BE49-F238E27FC236}">
-              <a16:creationId xmlns:a16="http://schemas.microsoft.com/office/drawing/2014/main" id="{A34DA155-682B-6458-9AAB-3E8B19744FD6}"/>
-            </a:ext>
-          </a:extLst>
-        </p:cNvPr>
-        <p:cNvGrpSpPr/>
-        <p:nvPr/>
-      </p:nvGrpSpPr>
-      <p:grpSpPr>
-        <a:xfrm>
-          <a:off x="0" y="0"/>
-          <a:ext cx="0" cy="0"/>
-          <a:chOff x="0" y="0"/>
-          <a:chExt cx="0" cy="0"/>
-        </a:xfrm>
-      </p:grpSpPr>
-      <p:sp>
-        <p:nvSpPr>
-          <p:cNvPr id="135" name="Google Shape;135;p3">
-            <a:extLst>
-              <a:ext uri="{FF2B5EF4-FFF2-40B4-BE49-F238E27FC236}">
-                <a16:creationId xmlns:a16="http://schemas.microsoft.com/office/drawing/2014/main" id="{6EA9D752-8745-84D7-FA36-5C73A03693A8}"/>
-              </a:ext>
-            </a:extLst>
-          </p:cNvPr>
-          <p:cNvSpPr txBox="1">
-            <a:spLocks noGrp="1"/>
-          </p:cNvSpPr>
-          <p:nvPr>
-            <p:ph type="title"/>
-          </p:nvPr>
-        </p:nvSpPr>
-        <p:spPr>
-          <a:xfrm>
-            <a:off x="457200" y="152400"/>
-            <a:ext cx="8229600" cy="990600"/>
-          </a:xfrm>
-          <a:prstGeom prst="rect">
-            <a:avLst/>
-          </a:prstGeom>
-          <a:noFill/>
-          <a:ln>
-            <a:noFill/>
-          </a:ln>
-        </p:spPr>
-        <p:txBody>
-          <a:bodyPr spcFirstLastPara="1" wrap="square" lIns="91425" tIns="45700" rIns="91425" bIns="45700" anchor="b" anchorCtr="0">
-            <a:normAutofit/>
-          </a:bodyPr>
-          <a:lstStyle/>
-          <a:p>
-            <a:pPr marL="0" lvl="0" indent="0" algn="l" rtl="0">
-              <a:spcBef>
-                <a:spcPts val="0"/>
-              </a:spcBef>
-              <a:spcAft>
-                <a:spcPts val="0"/>
-              </a:spcAft>
-              <a:buClr>
-                <a:schemeClr val="dk2"/>
-              </a:buClr>
-              <a:buSzPts val="3200"/>
-              <a:buFont typeface="Bookman Old Style"/>
-              <a:buNone/>
-            </a:pPr>
-            <a:r>
-              <a:rPr lang="en-US" dirty="0"/>
-              <a:t>Structure of a Three.js app</a:t>
-            </a:r>
-            <a:endParaRPr dirty="0"/>
-          </a:p>
-        </p:txBody>
-      </p:sp>
-      <p:sp>
-        <p:nvSpPr>
-          <p:cNvPr id="138" name="Google Shape;138;p3">
-            <a:extLst>
-              <a:ext uri="{FF2B5EF4-FFF2-40B4-BE49-F238E27FC236}">
-                <a16:creationId xmlns:a16="http://schemas.microsoft.com/office/drawing/2014/main" id="{8EAF8A50-D4EE-3E0D-B76C-301F0E0E08A0}"/>
-              </a:ext>
-            </a:extLst>
-          </p:cNvPr>
-          <p:cNvSpPr txBox="1">
-            <a:spLocks noGrp="1"/>
-          </p:cNvSpPr>
-          <p:nvPr>
-            <p:ph type="body" idx="1"/>
-          </p:nvPr>
-        </p:nvSpPr>
-        <p:spPr>
-          <a:xfrm>
-            <a:off x="457200" y="1219200"/>
-            <a:ext cx="6459415" cy="592015"/>
-          </a:xfrm>
-          <a:prstGeom prst="rect">
-            <a:avLst/>
-          </a:prstGeom>
-          <a:noFill/>
-          <a:ln>
-            <a:noFill/>
-          </a:ln>
-        </p:spPr>
-        <p:txBody>
-          <a:bodyPr spcFirstLastPara="1" wrap="square" lIns="91425" tIns="45700" rIns="91425" bIns="45700" anchor="t" anchorCtr="0">
-            <a:normAutofit fontScale="92500"/>
-          </a:bodyPr>
-          <a:lstStyle/>
-          <a:p>
-            <a:pPr lvl="0" indent="-457200" algn="just" rtl="0">
-              <a:lnSpc>
-                <a:spcPct val="130000"/>
-              </a:lnSpc>
-              <a:spcAft>
-                <a:spcPts val="0"/>
-              </a:spcAft>
-              <a:buClr>
-                <a:schemeClr val="accent4">
-                  <a:lumMod val="75000"/>
-                </a:schemeClr>
-              </a:buClr>
-              <a:buSzPts val="1976"/>
-              <a:buFont typeface="Wingdings" panose="05000000000000000000" pitchFamily="2" charset="2"/>
-              <a:buChar char="q"/>
-            </a:pPr>
-            <a:r>
-              <a:rPr lang="en-US" sz="2000" dirty="0"/>
-              <a:t>Here is a diagram that represents a </a:t>
-            </a:r>
-            <a:r>
-              <a:rPr lang="en-US" sz="2000" b="1" dirty="0"/>
-              <a:t>small three.js app:</a:t>
-            </a:r>
-            <a:endParaRPr lang="en-US" sz="2000" dirty="0"/>
-          </a:p>
-        </p:txBody>
-      </p:sp>
-      <p:sp>
-        <p:nvSpPr>
-          <p:cNvPr id="3" name="Slide Number Placeholder 2">
-            <a:extLst>
-              <a:ext uri="{FF2B5EF4-FFF2-40B4-BE49-F238E27FC236}">
-                <a16:creationId xmlns:a16="http://schemas.microsoft.com/office/drawing/2014/main" id="{DCC86340-7733-3D13-FF52-495052B5A848}"/>
-              </a:ext>
-            </a:extLst>
-          </p:cNvPr>
-          <p:cNvSpPr>
-            <a:spLocks noGrp="1"/>
-          </p:cNvSpPr>
-          <p:nvPr>
-            <p:ph type="sldNum" idx="12"/>
-          </p:nvPr>
-        </p:nvSpPr>
-        <p:spPr/>
-        <p:txBody>
-          <a:bodyPr/>
-          <a:lstStyle/>
-          <a:p>
-            <a:pPr marL="0" lvl="0" indent="0" algn="r" rtl="0">
-              <a:spcBef>
-                <a:spcPts val="0"/>
-              </a:spcBef>
-              <a:spcAft>
-                <a:spcPts val="0"/>
-              </a:spcAft>
-              <a:buNone/>
-            </a:pPr>
-            <a:r>
-              <a:rPr lang="en-US" dirty="0"/>
-              <a:t>4</a:t>
-            </a:r>
-          </a:p>
-        </p:txBody>
-      </p:sp>
-      <p:sp>
-        <p:nvSpPr>
-          <p:cNvPr id="4" name="AutoShape 4">
-            <a:extLst>
-              <a:ext uri="{FF2B5EF4-FFF2-40B4-BE49-F238E27FC236}">
-                <a16:creationId xmlns:a16="http://schemas.microsoft.com/office/drawing/2014/main" id="{882087C9-D99E-C848-CF97-2A71D40DC925}"/>
-              </a:ext>
-            </a:extLst>
-          </p:cNvPr>
-          <p:cNvSpPr>
-            <a:spLocks noChangeAspect="1" noChangeArrowheads="1"/>
-          </p:cNvSpPr>
-          <p:nvPr/>
-        </p:nvSpPr>
-        <p:spPr bwMode="auto">
-          <a:xfrm>
-            <a:off x="4419599" y="3276599"/>
-            <a:ext cx="2497015" cy="2497015"/>
-          </a:xfrm>
-          <a:prstGeom prst="rect">
-            <a:avLst/>
-          </a:prstGeom>
-          <a:noFill/>
-          <a:extLst>
-            <a:ext uri="{909E8E84-426E-40DD-AFC4-6F175D3DCCD1}">
-              <a14:hiddenFill xmlns:a14="http://schemas.microsoft.com/office/drawing/2010/main">
-                <a:solidFill>
-                  <a:srgbClr val="FFFFFF"/>
-                </a:solidFill>
-              </a14:hiddenFill>
-            </a:ext>
-          </a:extLst>
-        </p:spPr>
-        <p:txBody>
-          <a:bodyPr vert="horz" wrap="square" lIns="91440" tIns="45720" rIns="91440" bIns="45720" numCol="1" anchor="t" anchorCtr="0" compatLnSpc="1">
-            <a:prstTxWarp prst="textNoShape">
-              <a:avLst/>
-            </a:prstTxWarp>
-          </a:bodyPr>
-          <a:lstStyle/>
-          <a:p>
-            <a:endParaRPr lang="en-US"/>
-          </a:p>
-        </p:txBody>
-      </p:sp>
-      <p:sp>
-        <p:nvSpPr>
-          <p:cNvPr id="6" name="AutoShape 8">
-            <a:extLst>
-              <a:ext uri="{FF2B5EF4-FFF2-40B4-BE49-F238E27FC236}">
-                <a16:creationId xmlns:a16="http://schemas.microsoft.com/office/drawing/2014/main" id="{8ACD2EB8-2159-DFD2-3ABF-45973B7895BE}"/>
-              </a:ext>
-            </a:extLst>
-          </p:cNvPr>
-          <p:cNvSpPr>
-            <a:spLocks noChangeAspect="1" noChangeArrowheads="1"/>
-          </p:cNvSpPr>
-          <p:nvPr/>
-        </p:nvSpPr>
-        <p:spPr bwMode="auto">
-          <a:xfrm>
-            <a:off x="4572000" y="3429000"/>
-            <a:ext cx="304800" cy="304800"/>
-          </a:xfrm>
-          <a:prstGeom prst="rect">
-            <a:avLst/>
-          </a:prstGeom>
-          <a:noFill/>
-          <a:extLst>
-            <a:ext uri="{909E8E84-426E-40DD-AFC4-6F175D3DCCD1}">
-              <a14:hiddenFill xmlns:a14="http://schemas.microsoft.com/office/drawing/2010/main">
-                <a:solidFill>
-                  <a:srgbClr val="FFFFFF"/>
-                </a:solidFill>
-              </a14:hiddenFill>
-            </a:ext>
-          </a:extLst>
-        </p:spPr>
-        <p:txBody>
-          <a:bodyPr vert="horz" wrap="square" lIns="91440" tIns="45720" rIns="91440" bIns="45720" numCol="1" anchor="t" anchorCtr="0" compatLnSpc="1">
-            <a:prstTxWarp prst="textNoShape">
-              <a:avLst/>
-            </a:prstTxWarp>
-          </a:bodyPr>
-          <a:lstStyle/>
-          <a:p>
-            <a:endParaRPr lang="en-US"/>
-          </a:p>
-        </p:txBody>
-      </p:sp>
-      <p:pic>
-        <p:nvPicPr>
-          <p:cNvPr id="8" name="Picture 7">
-            <a:extLst>
-              <a:ext uri="{FF2B5EF4-FFF2-40B4-BE49-F238E27FC236}">
-                <a16:creationId xmlns:a16="http://schemas.microsoft.com/office/drawing/2014/main" id="{5CEA6011-A2FD-27AB-4198-60B769D8B52A}"/>
-              </a:ext>
-            </a:extLst>
-          </p:cNvPr>
-          <p:cNvPicPr>
-            <a:picLocks noChangeAspect="1"/>
-          </p:cNvPicPr>
-          <p:nvPr/>
-        </p:nvPicPr>
-        <p:blipFill>
-          <a:blip r:embed="rId3"/>
-          <a:stretch>
-            <a:fillRect/>
-          </a:stretch>
-        </p:blipFill>
-        <p:spPr>
-          <a:xfrm>
-            <a:off x="1745043" y="1811215"/>
-            <a:ext cx="5653914" cy="4058703"/>
-          </a:xfrm>
-          <a:prstGeom prst="rect">
-            <a:avLst/>
-          </a:prstGeom>
-        </p:spPr>
-      </p:pic>
-    </p:spTree>
-    <p:extLst>
-      <p:ext uri="{BB962C8B-B14F-4D97-AF65-F5344CB8AC3E}">
-        <p14:creationId xmlns:p14="http://schemas.microsoft.com/office/powerpoint/2010/main" val="3473373116"/>
       </p:ext>
     </p:extLst>
   </p:cSld>

--- a/Slides/Lec1 - Scene & Primitives.pptx
+++ b/Slides/Lec1 - Scene & Primitives.pptx
@@ -5,10 +5,10 @@
     <p:sldMasterId id="2147483648" r:id="rId1"/>
   </p:sldMasterIdLst>
   <p:notesMasterIdLst>
-    <p:notesMasterId r:id="rId16"/>
+    <p:notesMasterId r:id="rId17"/>
   </p:notesMasterIdLst>
   <p:handoutMasterIdLst>
-    <p:handoutMasterId r:id="rId17"/>
+    <p:handoutMasterId r:id="rId18"/>
   </p:handoutMasterIdLst>
   <p:sldIdLst>
     <p:sldId id="256" r:id="rId2"/>
@@ -16,42 +16,43 @@
     <p:sldId id="305" r:id="rId4"/>
     <p:sldId id="314" r:id="rId5"/>
     <p:sldId id="329" r:id="rId6"/>
-    <p:sldId id="306" r:id="rId7"/>
-    <p:sldId id="330" r:id="rId8"/>
-    <p:sldId id="332" r:id="rId9"/>
-    <p:sldId id="331" r:id="rId10"/>
-    <p:sldId id="315" r:id="rId11"/>
-    <p:sldId id="333" r:id="rId12"/>
-    <p:sldId id="334" r:id="rId13"/>
-    <p:sldId id="311" r:id="rId14"/>
-    <p:sldId id="328" r:id="rId15"/>
+    <p:sldId id="335" r:id="rId7"/>
+    <p:sldId id="306" r:id="rId8"/>
+    <p:sldId id="330" r:id="rId9"/>
+    <p:sldId id="332" r:id="rId10"/>
+    <p:sldId id="331" r:id="rId11"/>
+    <p:sldId id="315" r:id="rId12"/>
+    <p:sldId id="333" r:id="rId13"/>
+    <p:sldId id="334" r:id="rId14"/>
+    <p:sldId id="311" r:id="rId15"/>
+    <p:sldId id="328" r:id="rId16"/>
   </p:sldIdLst>
   <p:sldSz cx="9144000" cy="6858000" type="screen4x3"/>
   <p:notesSz cx="9144000" cy="6858000"/>
   <p:embeddedFontLst>
     <p:embeddedFont>
       <p:font typeface="Bookman Old Style" panose="02050604050505020204" pitchFamily="18" charset="0"/>
-      <p:regular r:id="rId18"/>
-      <p:bold r:id="rId19"/>
-      <p:italic r:id="rId20"/>
-      <p:boldItalic r:id="rId21"/>
+      <p:regular r:id="rId19"/>
+      <p:bold r:id="rId20"/>
+      <p:italic r:id="rId21"/>
+      <p:boldItalic r:id="rId22"/>
     </p:embeddedFont>
     <p:embeddedFont>
       <p:font typeface="Cambria" panose="02040503050406030204" pitchFamily="18" charset="0"/>
-      <p:regular r:id="rId22"/>
-      <p:bold r:id="rId23"/>
-      <p:italic r:id="rId24"/>
-      <p:boldItalic r:id="rId25"/>
+      <p:regular r:id="rId23"/>
+      <p:bold r:id="rId24"/>
+      <p:italic r:id="rId25"/>
+      <p:boldItalic r:id="rId26"/>
     </p:embeddedFont>
     <p:embeddedFont>
       <p:font typeface="Gill Sans" panose="020B0604020202020204" charset="0"/>
-      <p:regular r:id="rId26"/>
-      <p:bold r:id="rId27"/>
+      <p:regular r:id="rId27"/>
+      <p:bold r:id="rId28"/>
     </p:embeddedFont>
     <p:embeddedFont>
-      <p:font typeface="Noto Sans Symbols" pitchFamily="2" charset="0"/>
-      <p:regular r:id="rId28"/>
-      <p:bold r:id="rId29"/>
+      <p:font typeface="Noto Sans Symbols" panose="020B0604020202020204" charset="0"/>
+      <p:regular r:id="rId29"/>
+      <p:bold r:id="rId30"/>
     </p:embeddedFont>
   </p:embeddedFontLst>
   <p:defaultTextStyle>
@@ -301,6 +302,7 @@
         </p14:section>
         <p14:section name="Fundamentals" id="{311EEC78-3BDD-4F8C-AF8E-F1696CC6520F}">
           <p14:sldIdLst>
+            <p14:sldId id="335"/>
             <p14:sldId id="306"/>
             <p14:sldId id="330"/>
             <p14:sldId id="332"/>
@@ -351,7 +353,7 @@
       </p15:notesGuideLst>
     </p:ext>
     <p:ext uri="GoogleSlidesCustomDataVersion2">
-      <go:slidesCustomData xmlns:go="http://customooxmlschemas.google.com/" xmlns:ahyp="http://schemas.microsoft.com/office/drawing/2018/hyperlinkcolor" xmlns:p15="http://schemas.microsoft.com/office/powerpoint/2012/main" xmlns:p14="http://schemas.microsoft.com/office/powerpoint/2010/main" xmlns:com="http://schemas.openxmlformats.org/drawingml/2006/compatibility" xmlns:pvml="urn:schemas-microsoft-com:office:powerpoint" xmlns:v="urn:schemas-microsoft-com:vml" xmlns:o="urn:schemas-microsoft-com:office:office" xmlns:dgm="http://schemas.openxmlformats.org/drawingml/2006/diagram" xmlns:c="http://schemas.openxmlformats.org/drawingml/2006/chart" xmlns:mv="urn:schemas-microsoft-com:mac:vml" xmlns:mc="http://schemas.openxmlformats.org/markup-compatibility/2006" xmlns="" r:id="rId85" roundtripDataSignature="AMtx7mjnchW9jt+BL3pINn0mejfXPXn+WA=="/>
+      <go:slidesCustomData xmlns="" xmlns:mc="http://schemas.openxmlformats.org/markup-compatibility/2006" xmlns:mv="urn:schemas-microsoft-com:mac:vml" xmlns:c="http://schemas.openxmlformats.org/drawingml/2006/chart" xmlns:dgm="http://schemas.openxmlformats.org/drawingml/2006/diagram" xmlns:o="urn:schemas-microsoft-com:office:office" xmlns:v="urn:schemas-microsoft-com:vml" xmlns:pvml="urn:schemas-microsoft-com:office:powerpoint" xmlns:com="http://schemas.openxmlformats.org/drawingml/2006/compatibility" xmlns:p14="http://schemas.microsoft.com/office/powerpoint/2010/main" xmlns:p15="http://schemas.microsoft.com/office/powerpoint/2012/main" xmlns:ahyp="http://schemas.microsoft.com/office/drawing/2018/hyperlinkcolor" xmlns:go="http://customooxmlschemas.google.com/" r:id="rId85" roundtripDataSignature="AMtx7mjnchW9jt+BL3pINn0mejfXPXn+WA=="/>
     </p:ext>
   </p:extLst>
 </p:presentation>
@@ -451,7 +453,7 @@
           <a:p>
             <a:fld id="{C5083AF9-D621-4D22-98A6-93B8FF1F7E4E}" type="datetimeFigureOut">
               <a:rPr lang="en-US" smtClean="0"/>
-              <a:t>3/8/2026</a:t>
+              <a:t>3/13/2026</a:t>
             </a:fld>
             <a:endParaRPr lang="en-US"/>
           </a:p>
@@ -545,6 +547,238 @@
   <p:clrMap bg1="lt1" tx1="dk1" bg2="lt2" tx2="dk2" accent1="accent1" accent2="accent2" accent3="accent3" accent4="accent4" accent5="accent5" accent6="accent6" hlink="hlink" folHlink="folHlink"/>
   <p:hf hdr="0" ftr="0" dt="0"/>
 </p:handoutMaster>
+</file>
+
+<file path=ppt/ink/ink1.xml><?xml version="1.0" encoding="utf-8"?>
+<inkml:ink xmlns:inkml="http://www.w3.org/2003/InkML">
+  <inkml:definitions>
+    <inkml:context xml:id="ctx0">
+      <inkml:inkSource xml:id="inkSrc0">
+        <inkml:traceFormat>
+          <inkml:channel name="X" type="integer" max="3840" units="cm"/>
+          <inkml:channel name="Y" type="integer" max="2400" units="cm"/>
+          <inkml:channel name="T" type="integer" max="2.14748E9" units="dev"/>
+        </inkml:traceFormat>
+        <inkml:channelProperties>
+          <inkml:channelProperty channel="X" name="resolution" value="111.62791" units="1/cm"/>
+          <inkml:channelProperty channel="Y" name="resolution" value="111.62791" units="1/cm"/>
+          <inkml:channelProperty channel="T" name="resolution" value="1" units="1/dev"/>
+        </inkml:channelProperties>
+      </inkml:inkSource>
+      <inkml:timestamp xml:id="ts0" timeString="2026-03-13T03:17:19.343"/>
+    </inkml:context>
+    <inkml:brush xml:id="br0">
+      <inkml:brushProperty name="width" value="0.05292" units="cm"/>
+      <inkml:brushProperty name="height" value="0.05292" units="cm"/>
+      <inkml:brushProperty name="color" value="#FF0000"/>
+    </inkml:brush>
+  </inkml:definitions>
+  <inkml:trace contextRef="#ctx0" brushRef="#br0">6723 8178 0,'-94'0'203,"-31"0"-187,0-21-16,10 21 15,-10 0-15,10 0 0,-52 21 16,73-21-16,-21 0 16,31 0-16,22 21 15,-53-21-15,42 21 16,-42 0-16,21 0 15,31-1-15,1 1 0,-1 0 16,0 0-16,22-21 16,-1 21-16,-21 0 15,22 0-15,-1 0 16,31 0-16,-30-1 16,9-9-16,11 10 0,1-21 15,-12 21-15,11-11 16,11-10-16,-11 21 15,0 0-15,11-21 16,-11 10-16,10-10 0,-10 21 16,11-21-16,-32 21 15,21-10-15,11-11 16,-32 0-16,32 20 16,-32-9-16,32-11 15,-11 21-15,10-21 0,-10 21 16,-10-21-16,10 10 15,0 11 1,11-21-16,-11 0 16,11 10-16,-11-10 15,0 21-15,21 0 16,-11-10 0,11 10-1,-21-21-15,21 10 16,0 11-16,11 0 15,-11-11 1,10 11-16,-10-10 16,0 9-16,21 1 0,0-10 15,-10 10-15,-11-11 16,41 11-16,-30 0 16,31 10-16,-32-10 15,53 0-15,-22 21 16,1-21-16,0 20 0,20-20 15,1 21-15,31-21 16,-10 0-16,20 31 16,-20-31-16,9 0 15,1 31-15,32-52 16,-43 21-16,53 0 0,-53-21 16,1 21-16,10-21 15,-11 0-15,32 0 16,-21 0-16,-10 0 15,-22-11-15,32 11 0,-10 0 16,-21-21-16,30 21 16,-9-20-16,10-1 15,-11 21-15,-20-21 16,10 0-16,-21 21 16,-10-21-16,21 0 0,-1 21 15,-20-21-15,0 21 16,21 0-16,-22-21 15,22 21-15,-32 0 16,11-21-16,21 21 0,-22 0 16,22 0-16,0-20 15,-32 20-15,32 0 16,-1-21-16,-20 21 16,21 0-16,-21 0 15,20 0-15,-31-21 0,11 21 16,0 0-16,-11 0 15,-10 0-15,31-21 16,-10 21-16,0-21 16,-11 11-16,11 10 0,-21-21 15,10 0-15,-10 21 16,-11-11-16,32-10 16,-31 21-16,10-41 15,-1 30-15,-9 11 0,10-21 16,0-10-16,0-11 15,-11 21 1,-10-10 0,21 31-16,-21-21 15,0 11-15,0-11 0,0 0 16,-11 10-16,11-30 16,-10 30-16,-11-10 15,21 11-15,-21-11 16,-10-10-16,10 31 0,0-42 15,-10 21-15,-11 0 16,21 11-16,-10-11 16,-11 0-16,0 0 15,1 0-15,-1 0 16,31 11-16,-30-11 0,9 0 16,-9 0-16,20 21 15,-11-21-15,11 11 16,-10 10-16,-11-21 15,1 21-15,-1-21 0,31 21 16,-30-21-16,9 21 16,-9-21-16,-1 0 15,0 21-15,-21 0 16,32-21-16,-11 1 16,-20 20-16,20-11 0,-21 11 15,22 0-15,-22-31 16,0 31-16,-20 0 15,20-21-15,0 21 16,1 0-16,-1 0 0,1 0 16,-1 0-16,21 0 15,11 0-15,-32 0 16,21 0-16,11 0 16,-11 0-16,1-11 0,30 11 15,-10 0-15,0 0 16,11 0-16,-11 0 15,11 0 1,-11 0 0,0 0-1,10 0 17,-9 0-1</inkml:trace>
+  <inkml:trace contextRef="#ctx0" brushRef="#br0" timeOffset="1939.22">6201 8136 0,'11'-21'328,"10"-10"-297,20-53-31,1 43 0,-42 20 0,31-11 16,-31 12-16,42-12 16,-21 11-16,-11 0 15,11 11-15,-10-11 0,-11-10 16,21 31-16,0-21 15,-21 10-15,10-9 16,11 9-16,-11-10 16,-10 0-16,21 11 0,-10 10 15,9-21-15,1-10 16,-10 31-16,-11-21 16,21 0-16,0 10 15,-11-9-15,11 9 16,-11-10-1,11 21-15,0-10 16,-21-11-16,11 21 16,9-21-16,-9 11 15,10-11-15,0 21 16,-11-11 0,11-10-16,-11 21 15,-10-21 1,21 21-16,-21-10 0,11 10 15,10-21-15,-1 21 16,-9-10 0,10-11 15,-11 21-31,11-21 16,0 21-16,-11-11 15,11 11 1,-10 0-16,10-20 15,10 20-15,-10 0 0,0-11 16,10 11-16,11-21 16,-32 21-16,32 0 15,0-21-15,20 21 16,-30-21-16,30 21 0,1 0 16,10-20-16,-42 20 15,53 0-15,-21 0 16,-1 0-16,32 0 15,-31-21-15,20 21 16,-20 0-16,0 0 0,-1 0 16,1 0-16,-1 10 15,1-10-15,-21 0 16,20 0-16,-20 0 16,-10 0-16,9 0 15,-30 11-15,31-11 0,20 0 16,-31 20-16,-10-20 15,32 0-15,-33 21 16,12-21-16,10 0 16,-1 21-16,-30-21 0,30 21 15,-20-21-15,11 0 16,-11 11-16,10 9 16,11-20-16,-32 21 15,53-21-15,-53 11 0,32 10 16,-11-21-16,11 21 15,0-21-15,-11 20 16,11 1-16,0-21 16,-32 11-16,32-11 15,0 21-15,-32-21 0,32 21 16,0-1-16,-11-20 16,-10 11-16,-11-11 15,11 0-15,0 0 16,-11 21-16,11-21 15,-10 0 1,10 0-16,-21 21 16,20-21-1,-9 0 17</inkml:trace>
+  <inkml:trace contextRef="#ctx0" brushRef="#br0" timeOffset="3147.4">9939 7374 0,'-21'0'500,"21"-11"-485,-11 11 16,11-21 16,-21 21 0,21-10-16,-20 10-15,9 0-16,11-21 16,-21 21-16,11-21 15,-11 21 1,21-10-16,-21 10 0,11-21 16,-11 10-16,10 11 15,-10-20 1,1 20-1,20-21-15,-11 21 16,-10 0-16,21-11 16,-10 11-16</inkml:trace>
+  <inkml:trace contextRef="#ctx0" brushRef="#br0" timeOffset="4777.93">9866 7510 0,'0'10'297,"-32"11"-235,-30 62-62,41-83 0,10 0 0,11 21 16,-21-21 0,1 11-1,9-11 16,-10 0 16,11 0 47,10 21-78,-21-21-1,10 0 63</inkml:trace>
+  <inkml:trace contextRef="#ctx0" brushRef="#br0" timeOffset="11680.51">12194 7186 0,'114'0'297,"43"0"-265,240 0-32,-241 0 0,1 0 15,0 0-15,-32 0 0,31 0 16,-30 0-16,72 0 15,-41 0-15,-42 0 16,10 0-16,-42 0 16,11 0-16,21 0 15,-52 0-15,20 0 0,11 0 16,-31 0-16,0 0 16,-32 0-16,31 0 15,-20 0-15,-10 0 16,9 0-16,-30 0 0,31 0 15,-32 0-15,32 0 16,-32 0-16,11 0 16,0 0-16,-11 0 15,32 0-15,-31 0 0,9 0 16,12 0-16,10 0 16,-32 0-1,11 0-15,10 0 16,11 0-1,-11 0-15,-10 0 0,0 0 16,10 0-16,-10 0 16,-10 0-16,30 0 15,-30 0-15,31 0 16,-11 0-16,-10 0 0,10 0 16,11 0-16,-32 0 15,11 0-15,-10 0 16,9 10-16,12-10 15,-11 0-15,0 0 16,-11 0-16,11 0 16,-11 0-16,11 0 15,0 0 1,-10 0-16,9 0 16,-9 0-16,10 0 0,0 0 15,10 0-15,-10 0 16,10 0-16,-10 0 15,31 0-15,-10 21 16,-32-21-16,53 0 16,-32 0-16,11 0 0,-11 0 15,11 0-15,-21 0 16,31 0-16,-31 0 16,10 0-16,-10 0 15,11 0-15,9 0 0,-30 0 16,10 0-16,10 0 15,-10 0-15,-11 0 16,11 0-16,-10 0 16,10 0-1,-1 0-15,-9 0 16,10 0-16,-11 0 16,11 0-1,0 0-15,-11 0 16,11 0-16,-10 0 15,10 0-15,0 0 16,-11 0 0,11 0-16,-11 0 15,11 0-15,0 0 16,-11 0-16,11 0 16,-10 0-16,10 0 31,0 0-31,-11 0 15,11 0 64,-11 0-48,11 0-16,-10 0 1,-11-10 0,21 10-16,-1 0 15,-9 0 1,10 0 0,-11 0-1,11 0 16</inkml:trace>
+  <inkml:trace contextRef="#ctx0" brushRef="#br0" timeOffset="14352.74">17403 6904 0,'11'10'453,"-1"11"-422,11-21-15,-21 11 15,10 9 125,11-9-140,-10 10-1,-11 0 1,21-11 0,-1 11 15,-20-11-16,11-10-15,-11 21 32,0 0-1,21-21-15,-21 11-1,10-11 1,11 21 46,-21-11 1,21-10-32,-21 21-15,0-11 77,0 11-77,10-21 0,-10 21-16,21-10 15,-21 9 1,0-9 0,11 10-16,-11 0 0,0-11 15,0 11-15,0-11 16,0 11-16,0 11 15,0-11-15,0-1 16,0-9-16,0 10 16,0-11-16,0 11 15,0 0 1,0-11-16,0 11 16,-21-21-1,21 11-15,0 10 16,-11-21-16,11 21 15,0-11 17,-21 11-17,1-11 63,9 11-15</inkml:trace>
+  <inkml:trace contextRef="#ctx0" brushRef="#br0" timeOffset="17038.05">18186 6601 0,'-73'-42'281,"-63"-10"-249,-292-84-32,303 115 0,-11-31 15,53 31-15,-84-41 16,73 41-16,-42-32 16,53 53-16,-11-52 15,10 52-15,-10-21 16,31 0-16,-31 1 0,32 20 15,-1-21-15,1 21 16,-1-21-16,0 21 16,-31-21-16,32 21 15,-1 0-15,0 0 0,32-21 16,-11 21-16,1-21 16,-22 21-16,32 0 15,-11 0-15,11 0 16,-11 0-16,0-21 15,11 21-15,-11 0 0,0 0 16,11-21-16,10 21 16,-10 0-16,-11 0 15,0 0-15,11 0 16,10 0-16,-10 0 0,10 0 16,10 0-16,-10 0 15,1 0-15,-12 0 16,11 0-16,11 0 15,-11 0-15,11 0 16,-11 0 0,10 0-1,-10 0 17,1 0-17,9 0 16,-10 0 1,11 0-17,-11 0 1,0 0 15,11 0-31,-11 0 16,10 0-1,-10 0 1,0 0-16,11 0 16,-11 0-16,11 0 15,-11 0 1,0 0-16,11-10 16,-11 10-16,10 0 15,-10 0-15,0 0 16,-10 0-16,10 0 0,11 0 15,-22 0-15,-9 0 16,20 0-16,-10 0 16,-11 0-16,10-21 15,-9 21-15,-1 0 0,11 0 16,-11 0-16,11 0 16,-11 0-16,0 0 15,11-21-15,-11 21 16,0 0-16,32 0 15,-32 0-15,32 0 0,-22 0 16,-10 0-16,22-21 16,-12 21-16,11 0 15,11 0-15,-11 0 16,11 0-16,-11 0 0,-11 0 16,12 0-16,-1 0 15,10 0-15,-10 0 16,11 0-1,-11 0-15,0 0 16,11 0-16,-11 0 16,10 0-1,-9 0-15,20-10 16,-21 10-16,10 0 16,-10 0-16,11 0 15,10-21 1,-21 21-16,11 0 15,-11 0 1,0 0 0,10 0 15,-10 0 16,21-21 0</inkml:trace>
+  <inkml:trace contextRef="#ctx0" brushRef="#br0" timeOffset="18581.78">13091 5755 0,'11'0'797,"-1"0"-782,-10-10 16,21 10-15,0 0 15,-21-21-31,11 21 32,9 0-1,-20-11 0,11 11-15,10 0-1,-21-21 17,10 21-17,11 0 16,0 0 1,-21-21-32,10 21 31,-10-10 0,21-11 32</inkml:trace>
+  <inkml:trace contextRef="#ctx0" brushRef="#br0" timeOffset="21192.58">13029 5755 0,'21'0'656,"-21"10"-625,21-10-31,-21 21 16,10-21-16,11 11 31,-11 10-15,11-11-1,0 11 17,-10 0-1,-11-11-15,20-10-1,-9 21 16,10-10 1,-11-11-1,-10 21-31,21-1 47,0-9-16,-11 10 0,11-11 16,-10 11 16</inkml:trace>
+  <inkml:trace contextRef="#ctx0" brushRef="#br0" timeOffset="198885.34">6671 8251 0,'0'52'313,"10"63"-282,11 136-31,0-188 0,-21-1 16,0 1-16,0 0 15,0-1-15,0-20 0,0-11 16,0 11-16,0 0 16,0-11-16,0-10 15,0 10-15,0-10 16,0 11-16,0-11 0,0-11 16,0 11-16,0-11 15,0 11 1,0 0-1,0-10 1,0 9 0,0-9-1,0-32 63,0 11-62</inkml:trace>
+  <inkml:trace contextRef="#ctx0" brushRef="#br0" timeOffset="200411.25">5585 8408 0,'0'52'141,"0"42"-141,0-10 15,0-22-15,0-30 16,0 9-16,-21-20 0,21-10 16,0 30-16,0-30 15,0 10-15,0-11 16,0 11 0,0 0-16,0-11 15,0 11 16,0-10-15,0 10 0,0 0-1</inkml:trace>
+  <inkml:trace contextRef="#ctx0" brushRef="#br0" timeOffset="-207372.44">7579 16053 0,'63'0'172,"52"0"-125,490 94-47,-511-94 0,-31 21 15,52-21-15,-53 21 0,1-21 16,0 0-16,31 21 15,-32-1-15,-30-20 16,9 0-16,1 0 16,-11 21-16,11-21 0,0 21 15,-11-21-15,11 0 16,0 0-16,-11 21 16,-10-21-16,21 21 15,-11-21-15,-10 10 16,-11-10-16,11 0 0,-10 0 15,10 0-15,-1 0 16,-9 0-16,10 0 16,-11 0 15,11 0-15,0 0-1,-32 0 126,-9 0-126</inkml:trace>
+  <inkml:trace contextRef="#ctx0" brushRef="#br0" timeOffset="-205532.83">12308 16377 0,'147'0'172,"51"21"-94,1190 177-78,-1304-167 0,-21-31 0,31 0 16,-32 0-16,1 0 0,-32 0 15,11 0-15,-11 0 16,11 0-16,0 0 16,-32 0-16,11 0 15,-10 0-15,30 0 0,-30 0 16,10 0 0,-11 0-16,11 0 15,0 0-15,-11-10 16,11 10-1,-10 0 1,9 0 0,1 0-1,-10 0 1,10 0 15,-21-21 79,-11 21-110,1-11 15</inkml:trace>
+  <inkml:trace contextRef="#ctx0" brushRef="#br0" timeOffset="-96249.98">14334 6340 0</inkml:trace>
+</inkml:ink>
+</file>
+
+<file path=ppt/ink/ink2.xml><?xml version="1.0" encoding="utf-8"?>
+<inkml:ink xmlns:inkml="http://www.w3.org/2003/InkML">
+  <inkml:definitions>
+    <inkml:context xml:id="ctx0">
+      <inkml:inkSource xml:id="inkSrc0">
+        <inkml:traceFormat>
+          <inkml:channel name="X" type="integer" max="5120" units="cm"/>
+          <inkml:channel name="Y" type="integer" max="2400" units="cm"/>
+          <inkml:channel name="T" type="integer" max="2.14748E9" units="dev"/>
+        </inkml:traceFormat>
+        <inkml:channelProperties>
+          <inkml:channelProperty channel="X" name="resolution" value="148.8372" units="1/cm"/>
+          <inkml:channelProperty channel="Y" name="resolution" value="111.62791" units="1/cm"/>
+          <inkml:channelProperty channel="T" name="resolution" value="1" units="1/dev"/>
+        </inkml:channelProperties>
+      </inkml:inkSource>
+      <inkml:timestamp xml:id="ts0" timeString="2026-03-10T01:38:00.774"/>
+    </inkml:context>
+    <inkml:brush xml:id="br0">
+      <inkml:brushProperty name="width" value="0.05292" units="cm"/>
+      <inkml:brushProperty name="height" value="0.05292" units="cm"/>
+      <inkml:brushProperty name="color" value="#FF0000"/>
+    </inkml:brush>
+  </inkml:definitions>
+  <inkml:trace contextRef="#ctx0" brushRef="#br0">11024 7687 0,'11'0'62,"51"0"-46,1-21-16,-21 11 15,21 10-15,-32 0 16,0-21 0,-20 21-16</inkml:trace>
+  <inkml:trace contextRef="#ctx0" brushRef="#br0" timeOffset="909.35">12183 7760 0,'11'0'62,"-1"0"-62,11 0 0,94 0 16,-32 11-16,63-11 15,126 21-15,-74-21 16,136 0 0,126 0-16,51 0 15,-260 0-15,125 0 16,-178 0-16,53 0 16,-168 0-16,-41 0 15,-21 0 32,-11 0-31,1-11-1,-1 11-15,0 0 47,1 0-47,-1 0 0,22 0 16,-22 0-16,1 0 15</inkml:trace>
+  <inkml:trace contextRef="#ctx0" brushRef="#br0" timeOffset="1864.35">1848 8387 0,'10'0'46,"42"0"-46,32 0 16,52 0-16,146 0 16,-95 0-16,168-31 15,53 10 1,166 21-16,-271-21 16,114 21-16,-219-32 15,-20 12-15,-168 20 16</inkml:trace>
+  <inkml:trace contextRef="#ctx0" brushRef="#br0" timeOffset="2676.19">5805 8178 0,'10'0'63,"0"0"-63,11 0 47,-10 0-47,-1 0 0,32 0 15,-21 0 1,31 10-16,-31 1 15,52 10-15,-31-11 16,-11 11-16,73-10 16,-62-11-16,94 0 15,-73 0 1,-1 0-16</inkml:trace>
+  <inkml:trace contextRef="#ctx0" brushRef="#br0" timeOffset="3455.12">7277 8262 0,'10'0'78,"21"0"-78,11 0 15,21 0 1,20 0-16,32 0 16,21 0-16,-105 0 15,188 0-15,-31 0 16,-73 0-16,0 0 16,-105 0-16</inkml:trace>
+  <inkml:trace contextRef="#ctx0" brushRef="#br0" timeOffset="29904.3">11484 7102 0,'0'-21'94,"-21"21"-79,10 0 1,1 0-16,-11 0 16,-10 11-1,-1-1-15,22 22 16,-63 20-16,0 21 16,0 0-1,0-21-15,41 0 0,-20-20 16,42-1-1,10-20-15,0-1 32,0 0-17,0 1-15,0-1 16,0 11 0,0-10-1,10-11-15,22 21 16,-1-1-16,-10-9 15,10-1-15,0 22 16,11-1-16,31-10 16,-10-21-1,-21 0-15,41 0 16,1 0-16,-43-11 16,-41-9-16,0 9 15,0-20-15,0-11 16,-31-31-16,10 10 15,-10 21 1,20-10-16,11 10 16,0 11-16,0 21 15</inkml:trace>
+  <inkml:trace contextRef="#ctx0" brushRef="#br0" timeOffset="35913.47">20337 11959 0,'10'0'93,"1"0"-93,9 0 0,33 0 16,-12 0-16,-9 0 16,9 0-1,-20 0-15,32 0 16,-33 0-16,43 0 15,0 0-15,-22 0 16,-9 0-16,-22 0 16,1 0 234,-1 0-219,11 0-15,-11 0-1,1-21-15,-1 21 16,1 0-16,-11-11 15,10 11-15</inkml:trace>
+  <inkml:trace contextRef="#ctx0" brushRef="#br0" timeOffset="47599.85">21328 10591 0,'0'10'62,"0"11"-62,-20 62 0,20-20 0,0-11 16,0 32 0,0-21-16,0-1 15,0 1-15,10-21 16,-10-11-16,0-10 15,10 31-15,-10-41 16,0-1 0,0 32 140,0-32-156,0 11 0,0 21 16,0-11-1,21 1-15</inkml:trace>
+  <inkml:trace contextRef="#ctx0" brushRef="#br0" timeOffset="49443.41">19919 9818 0,'21'0'109,"-11"0"-109,63 31 0,-20-20 16,51 9-16,-41 1 15,31-10-15,-53 10 16,22-11 0,-11 11-16,-10-11 15,-11-10-15,11 21 16,0-21-16,-11 0 16,-10 0-16,31 0 15,-31 0 1,10 0-16,-10 0 15,11 0-15,30 0 16,-20 0-16,0 0 16,10 0-16,-10 11 15,-32-11 1,32 0-16,-11 0 16,-20 10-16</inkml:trace>
+  <inkml:trace contextRef="#ctx0" brushRef="#br0" timeOffset="57219.59">19293 9880 0,'0'-10'78,"-94"-126"-78,62 105 0,22 31 16,-21-31-16,10 20 16,10 11-1,-10 0-15,11 0 16,-32-21-16,32 21 15,-32 0 1,-62-10-16,20 10 16,22 0-16,20 0 15,-10 0-15,31 0 16,-11 0-16,-51 0 16,20 21-16,-31 0 15,-52 20 1,73-9-16,52-22 15,0 21-15,11 1 16,10-11-16,0 10 16,0-21-16,0 1 15,0-1 1,0 1 0,0 10-1,0-11-15,62 32 16,12 10-16,19 11 15,33-22 1,-11-20-16,31 21 16,-11-42-16,-20 0 15,-52 0-15,73 0 16,-21-10-16,-53-11 16,-20 10-1,10-20-15,-21 10 16,-20 11-16,10-1 15,10 1-15,-20 10 16,-1-21-16,-10 11 78,0-1-78,0 1 0,10-1 16,-10 1-1,0-1 1,0-10-16,0 1 16,21-12-1,-21 22-15</inkml:trace>
+  <inkml:trace contextRef="#ctx0" brushRef="#br0" timeOffset="59068.81">17758 9839 0,'-10'-11'78,"-63"-20"-78,31 20 0,-21 11 16,1-20-16,9 20 16,-51-11-16,-126-20 15,-114 10-15,-63-10 16,-126-1-16,-615-83 16,386 42-16,-554-63 15,1 53 1,344 10-16,94 0 15,230 0-15,20 41 16,345 32-16,32-21 16,187 21-16,53 0 15,-1 0 79,-30 0-78,9 0-16,-9 0 15,-64 0-15,-10 11 16,-31-11-16,31 0 16,-52 0-16,84 0 15,72-11-15,-10 1 16,-10-21-1,0-1-15,10 11 16,0 0-16,11 11 16,10-11-16,-21 11 15,10-1-15,1-10 16,10 11 0,-11-1-16,1 1 15,0 0-15,-1-22 16,-20 22-16,-1-1 15,-51-10-15,31 1 16,10-12 0,32 32-1,10-10 17</inkml:trace>
+  <inkml:trace contextRef="#ctx0" brushRef="#br0" timeOffset="59469.95">6243 8575 0,'0'10'79,"0"22"-79,0-22 15,-10 21-15,-11-20 16,21-1-16,-11 11 15,43-63 110,-32 32-125</inkml:trace>
+  <inkml:trace contextRef="#ctx0" brushRef="#br0" timeOffset="59981.58">6253 8627 0,'11'0'94,"10"0"-79,10 0-15,32 0 16,-1-21-16,32 21 15,-52 0-15,0 0 16,-11 0-16</inkml:trace>
+  <inkml:trace contextRef="#ctx0" brushRef="#br0" timeOffset="61511.68">19898 8846 0,'-31'-20'16,"0"9"-16,10-10 0,-11 11 16,22-1-16,-63-10 15,42 11 1,-11 10-16,10 0 16,-9 0-16,-1 0 31,-52 21-31,73-21 0,0 10 15,0 11-15,11-10 47,10-1-47,-11 1 16,11-1-16,-20 21 16,9 11-16,11-11 15,0-20 1,0-1-16,0 1 15,0-1 1,0 1-16,21 20 16,21 0-16,10 11 15,-10-11 1,52 11-16,-53-31 16,85 10-16,20-21 15,-83 0-15,83-74 16,-73 43-16,-63 21 15,1-1-15,-1 1 16,-10-1 31,0-20-47,0-11 16,0 11-16,0 20 31,0 1-16</inkml:trace>
+  <inkml:trace contextRef="#ctx0" brushRef="#br0" timeOffset="63218.51">19251 8773 0,'-21'0'125,"-21"11"-125,-10-11 16,-73 10-16,-94-10 15,20 0-15,-312 32 16,-53-32-16,42 0 16,-334 41-16,177-41 15,1 0-15,-398 0 16,774 0-1,-252-21-15,85-10 16,103 10-16,147-31 16,104 52-16,52-10 15,11-11-15,31 21 16,11 0 0,0 0-16,-11-11 15,0 11-15,-21 0 16,-10 0-16,-11 0 15,42 0-15,-10 0 16,-11 0 0,11 0-16,-42 0 15,21 0-15,-11 0 32,0 0-32,-20 0 15,20 0-15,1 0 16,51-10-16,-41 10 15,21-11 1,-1-10-16,22 21 16,-1 0-1,1-10-15,-11 10 32,0 0-32,-104-10 15,62 10-15,-20 0 16,-63 0-16,31-21 15,52 21-15,-62-21 16,0 0-16,72 21 16,-41-21-1,53 21-15,30-10 78,-20 10-62,-53 0-16,-20 0 16,-11 0-16,52 0 15,1 0-15,51 0 16,1 0-16</inkml:trace>
+  <inkml:trace contextRef="#ctx0" brushRef="#br0" timeOffset="63633.62">9020 8533 0,'0'-10'79,"0"-1"-79,0 1 15,0-1-15,10-10 31,1 11-31,-1 0 16,22-1 0,-22 1-16,-10-1 31,0 32 16,0-10-47,0-1 15,0 11 17</inkml:trace>
+  <inkml:trace contextRef="#ctx0" brushRef="#br0" timeOffset="64337.61">8968 8523 0,'0'10'94,"0"1"-94,42 20 16,-11 0-16,-10-20 15,10 10-15,0-11 16,-20 0 0,-1-10-1,1 0-15,-1 11 16</inkml:trace>
+  <inkml:trace contextRef="#ctx0" brushRef="#br0" timeOffset="72675.07">4635 8993 0,'0'-11'31,"-10"-31"-15,-53 11-16,21 21 0,-62-11 15,10 0-15,31 10 16,-31 11-16,32-20 16,41 20-1,-31 0-15,41 0 32,-10 0-17,-10 0-15,-11 0 16,-20 0-16,-1 0 31,-41 10-31,10 11 0,0 0 16,31-21-16,42 0 15,21 10 1,-10-10 15,-1 0-31,-51 0 16,41 11-16,-10-11 15,20 0-15,1 0 16,10 10-16,-11-10 16,-10 0-1,0 11 1,-20-11-16,9 20 16,-51-9-16,52 10 15,-11-11-15,21-10 16,10 11-16,1-11 78,10 21-78,-10-21 16,10 10-1,0 0 1,-11-10-16,11 21 15,-10-10 1,-11 20-16,10 0 16,1-10-1,10 0 1,0-10-16,0 10 16,0 10-1,31 11-15,-20-32 16,-1 21-16,11-31 15,0 21-15,10-21 16,11 21-16,-11-10 16,32-11-1,-21 0-15,-11 0 16,32 0-16,-42 0 16,20 0-16,-9 0 15,30 0-15,22 0 16,31 0-1,-53 0-15,64 0 16,20-21-16,-84 0 16,-9 21-16,-33 0 15,-9 0-15,-1 0 16,22 0 0,-22 0-16,42 0 15,11 0-15,-1-21 16,53 21-16,-62-10 15,-33 10-15,12 0 16,-11 0 0,-11 0-16,0 0 15,11 0 1,-10-11-16,10 1 16,-11-11-16,21 10 15,-20 1-15,-11-1 16,10 11-1,-10-10 1,0 0-16,0-1 16,11-31-16,10-20 15,-21 41-15,10-21 16,1 32 0,-11-1-16,20 1 15,-20-1 63,0 1-78,-10-1 16,0 1 0,10-11-16,-11 21 15,11-10-15,-10 10 16,10-11-16,-11 1 15,1 10-15,-1-11 16,-20 1 0</inkml:trace>
+  <inkml:trace contextRef="#ctx0" brushRef="#br0" timeOffset="86522.19">1702 12878 0</inkml:trace>
+  <inkml:trace contextRef="#ctx0" brushRef="#br0" timeOffset="88464.9">1702 13024 0</inkml:trace>
+  <inkml:trace contextRef="#ctx0" brushRef="#br0" timeOffset="89444.78">1775 12909 0,'-21'0'94,"0"0"-94,0 0 15,11 0 1,-22 0-16,22 0 16,-1 0-1,1 11-15,-21 20 16,20-21-16,1 11 16,-42 32-1,31-22-15,0 11 16,10 20-16,-9-51 15,20 10-15,0 0 16,0-11 31</inkml:trace>
+  <inkml:trace contextRef="#ctx0" brushRef="#br0" timeOffset="90879.1">6775 15646 0,'0'31'32,"42"94"-32,-31-62 15,-11-11-15,0 11 16,0-1-16,0 1 15,-21-21-15,0-11 16,0 1 0,11-12-16,10 1 15,-11-21 1,11-10 78,0-11-94,0 11 15</inkml:trace>
+  <inkml:trace contextRef="#ctx0" brushRef="#br0" timeOffset="92485.43">1848 12679 0,'-31'0'16,"10"0"-16,-11 11 16,-30-1-16,9 11 15,33 11-15,-1-22 16,10 11 0,1 10-16,10-20 15,-11 20-15,11-21 16,-20 1-16,20 10 15,-11 10-15,1 0 32,10-20-32,-21 10 15,21 10-15,-11 11 16,11-11-16,0 1 16,0-12-16,0-9 15,0 20 1,0-20-16,0-1 15,0 1 48,0-1-16,11 0 15,-1 1-30</inkml:trace>
+  <inkml:trace contextRef="#ctx0" brushRef="#br0" timeOffset="97618.74">10200 13358 0,'41'-10'109,"-9"10"-93,30-21-16,-20 21 16,42 0-16,30 0 15,-30 0-15,62 0 16,-62 0-16,-22 0 15,1 0-15,0 10 16,-1-10-16,-20 11 16,10-11-16,11 21 15,-21-21 1,-11 0 0,-10 10-16,0-10 0,-11 0 15,1 0 1,-1 0-16,0 0 15,1 0 1,20 0-16,-10 0 16,-10 0-16,9 0 15,-9 0-15,10 0 16,-11 0-16,1 0 16,20 0-16,-10 0 15,10 0-15,-10 0 16,10 0-16,1 0 15,-22 0-15</inkml:trace>
+  <inkml:trace contextRef="#ctx0" brushRef="#br0" timeOffset="101754.66">11713 12721 0,'-31'0'0,"-73"0"16,62 0-16,-21 0 16,-83 21-16,84 0 15,-1-11-15,-83 11 16,83-21-16,0 0 15,1 21 1,-137 0-16,137-21 16,10 11-16,10 9 15,-73 33-15,105-43 16,-11 11-16,-11-11 16,22 1-16,-1-11 15,1 31 1,-11-31-16,11 11 15,-1-1-15,1-10 16,-21 11-16,20 20 16,-72 0-16,51 1 15,1-22-15,0 11 16,-1 10-16,32-20 16,-10-11-16,10 10 31,0 1 31,0-1-62,0 0 32,0 11-17,21 0-15,-11-21 16,1 31-16,20-20 15,0-1-15,-10-10 16,73 42-16,52 0 16,21-21-16,84 21 15,-105-22 1,52-20-16,-93 0 16,-43 0-16,22 0 15,-32 0-15,-10 0 16,-11 0-1,32-20-15,-21 9 16,20-10-16,11 11 16,-10-11-16,0 10 15,-32-9-15,-10 20 16,10-11-16,-20 1 16,-1 10-16,0-32 15,43 1 1,-12 0-16,-9 20 15,20-10-15,-42 1 16,-10-1 31,0 10-47,0 1 0,0-11 16,0 10-16,-10-20 15,10 10-15,-31-31 16,-1 42-16,1-22 15,-63-41-15,63 63 16,-32-32 0,53 31-16,-22 1 15,22 10-15,10-10 94,-11 10-94,1-11 0,0 11 16,-1 0-1,11-10-15</inkml:trace>
+  <inkml:trace contextRef="#ctx0" brushRef="#br0" timeOffset="103780.16">12068 14058 0,'21'0'94,"42"0"-79,-11 0-15,73 10 16,22-10-1,20 0-15,135 0 16,-82 0-16,51 0 16,11-10-16,-32-11 15,32-10-15,-167 10 16,-104 21 0,-1 0 15,0 0-31,22 0 15,10-11-15,20 11 16,-10-10 0,-31 10-16,11 0 31,-22 0-31,0 0 16,1 0-16,-1 0 15,1 0-15,51 0 16,-20-21-16,63 0 15,-43 21 1,-10-10-16,-31 10 16,-10 0 62,-11-11 47</inkml:trace>
+  <inkml:trace contextRef="#ctx0" brushRef="#br0" timeOffset="115772.78">4573 14559 0,'0'-10'62,"10"10"-31,11 0-31,10 0 16,53 0 0,-42 0-16,-1 21 15,95-11-15,-73-10 16,114 21-16,42 0 15,-72-21-15,20 0 16,0 0-16,0 0 16,-32 0-16,11 0 15,-83 0 1,-21 0-16,-32 0 16,1 0-1,-1 0 1,1 0-16,30 0 15,-30 0 1,31 0-16,-11 0 16,-21 0-16,1 0 15,-1 0-15,1 0 16,20 0 0,-31-10-16,42 10 15,-21 0 1,10-11-16,-10 11 15,0 0-15,0 0 16,10 0-16,-21 0 16,32 0-16,-21 0 15,21 0 1,-21 0-16,-11 0 16,1 0 109,-1 0-125,0 0 15,1 0 1,20 0-16,-20 0 15,-1 0-15,0-10 16,11 10-16,11 0 16,-1-21-1,-10 21-15,-11 0 16,11 0-16,0 0 16,-10 0-16,-1 0 15,0 0 1,11 0 15,-10 0-15,-1-11-16,11 11 15,-11 0-15,-10-10 16</inkml:trace>
+  <inkml:trace contextRef="#ctx0" brushRef="#br0" timeOffset="117061.56">7485 14048 0,'-10'-11'0,"-1"11"15,1-10-15,0 10 16,-22-21-16,22 21 15,-1-11 1,1 11-16,-1 0 16,1-10-16,0-1 15,-22 11-15,-9-10 16,-12-11-16,-51 0 16,62 21-1,-94-10-15,1 10 16,-11 0-16,31-21 15,73 21-15,-42 0 16,22 0-16,30 0 16,-9 0-1,9 0-15,12 31 16,-1 11-16,10-21 16,11 10-16,-10-10 15,10 0-15,0-11 16,-11 22-16,-10-22 15,21 11 1,0-10-16,-10 51 16,0 1-16,10 0 15,0-22-15,0 1 16,0 10-16,20 11 16,-9-32-1,20-10-15,1 11 16,-22-22-16,32 21 15,20 1-15,32 9 16,52-20-16,-31 0 16,31-21-16,-104 0 15,84-31 1,-1-32-16,-73 53 31,11-63-31,-11 20 16,-42 33-16,42-33 15,22-20-15,-43 42 16,21-21 0,-31 31-16,-21 0 31,0 10-15,0 1-16,-10-11 15,10 0 1,-11 11-16,11-1 15,-10-10-15,10 11 16,-11-11-16,11 11 16,-21-1-16,21 1 15,0-1 1,-10 11 0</inkml:trace>
+  <inkml:trace contextRef="#ctx0" brushRef="#br0" timeOffset="119630.97">8112 14518 0,'10'0'125,"21"0"-125,-10 0 16,63 0-16,-53 0 15,11 0 1,83 0-1,-73 0-15,-10 0 0,0 0 16,52 10-16,-52-10 16,-21 0-16,10 10 15,0-10-15,11 0 32,-21 0-32,0 0 0,0 0 15,-11 0-15,0 0 16,1 0 31,10 0-47,0 0 0,-11 0 15,21 0-15,-20 0 16,-1-10-16,1 10 16,-1 0 15,1 0-16,-1-10-15,11 10 32</inkml:trace>
+  <inkml:trace contextRef="#ctx0" brushRef="#br0" timeOffset="120911.65">10273 14528 0,'10'0'94,"1"10"-94,30 1 16,43 10-16,62 21 15,0-1-15,53 1 16,30 0-16,-114-21 15,136 10 1,-105-31-16,42 0 16,-126 0-16,1 0 15,-53 0 63,-10-10-78,11 10 16,-11-11-16</inkml:trace>
+  <inkml:trace contextRef="#ctx0" brushRef="#br0" timeOffset="135892.65">7538 13369 0,'10'0'94,"0"0"-94,84 0 0,0-11 31,-52 11-31,21 0 16,-1-21-16,22 21 16,10 0-16,-11 0 15,1 0 1,10 11-16,21-11 15,-32 21-15,11 0 16,-10-21-16,-22 0 16,-10 10-16,-10-10 15,-31 0-15,-1 0 16,21 0 0,-20 10-16,-1-10 15,32 0-15,0 21 16,-11-21-16,11 0 15,21 0-15,-43 0 16,12 0-16,-1 0 16,11 0-1,-21 0-15,41 0 16,-30 11-16,9-11 16,-9 0-16,-22 0 15,1-11 1032,-11 1-1031</inkml:trace>
+  <inkml:trace contextRef="#ctx0" brushRef="#br0" timeOffset="140243.49">7631 14006 0,'32'0'78,"30"0"-78,64 0 16,41 0-16,52 0 15,0 0-15,32 0 16,-1 0 0,-83-21-16,-52 21 15,63-21-15,-74 21 16,-10 0-16,-31 0 16,20 10-16,11 1 15,-31-11 1,-1 0-16,-41 0 15,21 0-15,-21 0 16,0 0-16,21 0 16,-11 0-16,11 0 15,20 0-15,1 0 16,0 0 0,-22 0-16,-20 0 15,-10 0-15,-1 0 47,11 0-47,21 0 16,-21-11-16,10 11 15,-10 0-15,-11 0 78</inkml:trace>
+  <inkml:trace contextRef="#ctx0" brushRef="#br0" timeOffset="146030.1">7600 14162 0,'0'-10'31,"0"0"-15</inkml:trace>
+  <inkml:trace contextRef="#ctx0" brushRef="#br0" timeOffset="147661.62">6796 14528 0,'0'10'62,"0"11"-62,-10 21 0,10-11 16,-11 11 0,11-31-16,-31 20 15,10 0-15,-10 1 16,20-22-16,-51 21 15,-11 22-15,41-43 16,-30 21 0,30 1-16,-30-1 15,30-31-15,-30 21 16,20-11-16,-41-10 16,51 0-16,-93 0 15,73 0 1,-73 0-16,83 0 15,-21 0-15,32 0 16,20 0 31,1 0-31,-1 0-16,-20 0 15,21 0-15,-1 0 16</inkml:trace>
+  <inkml:trace contextRef="#ctx0" brushRef="#br0" timeOffset="148156.53">5575 14977 0,'-11'11'63,"1"20"-48,0-21-15,-11-10 16,21 11-16,0-1 16,-11-10-1,1 11 1,-1-11-16,11-11 78,0 1-62</inkml:trace>
+  <inkml:trace contextRef="#ctx0" brushRef="#br0" timeOffset="148859.76">5544 14967 0,'0'10'16,"10"-10"93,0-21-109,43-10 16,-12-21-16,-9 20 15,-22 22-15,1-1 16,-11 22 31,0 10-32,0 0-15,0-11 16,-11 1-16</inkml:trace>
+  <inkml:trace contextRef="#ctx0" brushRef="#br0" timeOffset="149658.43">5512 15019 0,'0'10'62,"21"1"-62,10-1 16,-20 1-16,-1 10 15,32-1-15,-32-9 16,1-11 0,-1 10-16,22 32 15,-22-21-15,1-21 16,-1 10-16</inkml:trace>
+  <inkml:trace contextRef="#ctx0" brushRef="#br0" timeOffset="179550.24">1754 15698 0,'-21'0'94,"11"0"-63,-1 0-31,-10 0 0,-10 0 16,20 10-16,-9-10 31,-12 21-16,22-21-15,-1 21 16,-9-21 0,20 10 15,-11 11-15,11 11-16,-10-1 15,-1-21-15,11 1 16,0 10-16,-10-11 15,10 22-15,0-12 32,0-9-32,0 20 15,0 11-15,0-11 16,0-10-16,0 11 16,0-22-16,0 0 15,0 1 1,10 10 124,-10-11-140,11 1 16,-11-1 0,10-10 46,1 0-46,82 0-1,-30 0-15,94 0 16,-22 0-16,64-31 16,-105 10-16,-53 10 15</inkml:trace>
+  <inkml:trace contextRef="#ctx0" brushRef="#br0" timeOffset="182067.97">6400 15625 0,'10'0'63,"-10"10"-16,10 1-32,-10-1 1,11-10 0,-11 10-16,0 1 31,10-11-31,11 0 31,-10 0 16,-11 10-47,10-10 16,1 0-16,-1 11 15,0-11-15,1 21 16,10-11-16,-11 1 31,-10-1-15,0 0-16,0 32 15,0-10-15,0-22 16,0 11-16,0-11 16,0 1-16,0 10 15,0 0 1,0-1-16,0 1 16,-10 0-16,-1 11 15,1-1-15,10-10 16,-21 10-16,21-10 31,0 0 16,0-11-31,0 1 15,0-1 78,0 1-62,-10-11-47,-1 10 16,-10 11-16,0-21 15,0 10-15,21 1 16,-10-11-16,0 0 16,-1 10-1,-10-10-15,11 0 16,-42 0-16,20 0 15,-9 0-15,9 0 16,22 0 0,-11-21-1,10 21-15,1 0 16,-21-10-16,20 0 0,-20-1 16,-32-10-16,53 21 15,-1-10-15</inkml:trace>
+  <inkml:trace contextRef="#ctx0" brushRef="#br0" timeOffset="212934.63">21955 16251 0,'0'21'78,"-21"230"-78,0-199 0,11-31 16,10 10-16,0-20 15,0-1 1,-11 1-1,11 9-15,-21 1 16,21-10-16,0 20 16,0-20-16</inkml:trace>
+  <inkml:trace contextRef="#ctx0" brushRef="#br0" timeOffset="213634.98">21767 16679 0,'0'11'78,"0"31"-63,0-32-15,10 1 16,22 30-16,-22-30 16,21-11-16,-10 10 15,-10 11-15,10-21 16,-11 0-1,1 0 17,-1 0-17,21-21-15,-20-21 16,20-10-16,-21 21 16,-10-11-1,21 11-15,-10 10 31</inkml:trace>
+  <inkml:trace contextRef="#ctx0" brushRef="#br0" timeOffset="-214187.9">22205 13682 0,'-10'-21'47,"10"-21"-47,0-10 15,0 10-15,0-20 16,0 30-1,-21-9-15,21-1 16,0 0-16,0-10 16,0 31-16,0-10 15,0 10-15,0-11 16,0 22 0,0 0 15,0-1-31,0-10 47,0 11-47,0-1 15</inkml:trace>
+  <inkml:trace contextRef="#ctx0" brushRef="#br0" timeOffset="-213696.33">22174 13045 0,'-10'21'78,"10"0"-78,-11-11 0,1-10 16,10 11-16,0-1 31,-21-10-31,10 11 31,1-1-31,10 0 16,-10 11-16</inkml:trace>
+  <inkml:trace contextRef="#ctx0" brushRef="#br0" timeOffset="-212823.1">22174 13024 0,'11'0'47,"9"0"-47,-9 0 16,-1 0-16,11 11 31,-10-1-31,9-10 15,-9 10-15,-1 1 16,1 20-16,-1-20 16,22 30-16,-22-9 15,21-11-15,-20 10 16,-11-21 0</inkml:trace>
+  <inkml:trace contextRef="#ctx0" brushRef="#br0" timeOffset="-210163.7">22821 15593 0,'11'-10'141,"-1"10"-141,63-21 16,-52 21-16,31 0 15,-10-10-15,0 10 16,-11 0-16,1 0 15,-12 0-15,22 0 16,-10 0 0,9 0-16,1 0 15,21 0-15,-32 0 16,11-21-16,-21 21 16,-11 0 46,32 0-62,-21 0 16,10 0-16,-10 0 15,-11 0-15</inkml:trace>
+  <inkml:trace contextRef="#ctx0" brushRef="#br0" timeOffset="-208460.22">23510 15405 0,'11'11'78,"-1"-11"-78,1 10 16,-1 1-16,11-1 15,-11 1-15,1 20 16,20 0-16,-20-10 16,-1-10-16,-10 20 15,21-21 1,-11-10-16,-10 11 16,0-1 109,0 1-94,0 10-31,-31-1 15,0-9 1,-1 10-16,-30-11 16,-32 32-16,52-32 15,-21 11-15,32-10 16</inkml:trace>
+  <inkml:trace contextRef="#ctx0" brushRef="#br0" timeOffset="-206866.68">19220 15865 0,'0'-11'62,"10"1"-62,1 10 0,41-31 16,42 10-16,-11 21 15,63-21-15,-83 21 16,94 0-16,-22 0 16,-93 0-16,42 0 15</inkml:trace>
+  <inkml:trace contextRef="#ctx0" brushRef="#br0" timeOffset="-206038.32">19334 15750 0,'0'-10'93,"0"-1"-93,0-31 0,11 11 16,10 0 0,-11 20-16,-10-10 0,11 21 15,-11-10-15</inkml:trace>
+  <inkml:trace contextRef="#ctx0" brushRef="#br0" timeOffset="-205495.48">19230 15760 0,'0'11'31,"0"20"-15,31 11-16,-10-11 0,-10-20 15,-1-1 1,21 22-16,-20-22 16,10 0-16,-11 11 15,1-10 1,30 10-16,-9 0 15,-1-11-15,-20 0 16,20 22 0</inkml:trace>
+  <inkml:trace contextRef="#ctx0" brushRef="#br0" timeOffset="-203299.92">22414 14685 0,'0'-11'62,"0"1"-62,0-32 0,0 0 31,0 21-31,21-31 16,-10-11-16,-11 22 16,20-43-16,-20 32 15,0-32 1,11 22-16,-11-1 15,0 42-15,0 0 16</inkml:trace>
+  <inkml:trace contextRef="#ctx0" brushRef="#br0" timeOffset="-202789.31">22508 13985 0,'-10'0'78,"-42"52"-78,41-31 15,11-11-15,-10 1 16,10-1 156</inkml:trace>
+</inkml:ink>
+</file>
+
+<file path=ppt/ink/ink3.xml><?xml version="1.0" encoding="utf-8"?>
+<inkml:ink xmlns:inkml="http://www.w3.org/2003/InkML">
+  <inkml:definitions>
+    <inkml:context xml:id="ctx0">
+      <inkml:inkSource xml:id="inkSrc0">
+        <inkml:traceFormat>
+          <inkml:channel name="X" type="integer" max="5120" units="cm"/>
+          <inkml:channel name="Y" type="integer" max="2400" units="cm"/>
+          <inkml:channel name="T" type="integer" max="2.14748E9" units="dev"/>
+        </inkml:traceFormat>
+        <inkml:channelProperties>
+          <inkml:channelProperty channel="X" name="resolution" value="148.8372" units="1/cm"/>
+          <inkml:channelProperty channel="Y" name="resolution" value="111.62791" units="1/cm"/>
+          <inkml:channelProperty channel="T" name="resolution" value="1" units="1/dev"/>
+        </inkml:channelProperties>
+      </inkml:inkSource>
+      <inkml:timestamp xml:id="ts0" timeString="2026-03-10T01:46:51.371"/>
+    </inkml:context>
+    <inkml:brush xml:id="br0">
+      <inkml:brushProperty name="width" value="0.05292" units="cm"/>
+      <inkml:brushProperty name="height" value="0.05292" units="cm"/>
+      <inkml:brushProperty name="color" value="#FF0000"/>
+    </inkml:brush>
+  </inkml:definitions>
+  <inkml:trace contextRef="#ctx0" brushRef="#br0">21224 6841 0,'11'0'31,"-1"0"0,0 0-31,11 0 0,0 0 16,10 0 0,1 0-16,51 0 15,1 0-15,-22 0 16,22 11-16,10 10 16,52-1-16,-62-20 15,-53 11 1,-10-11-16</inkml:trace>
+  <inkml:trace contextRef="#ctx0" brushRef="#br0" timeOffset="862.92">22717 6705 0,'0'11'63,"10"-11"-63,84 0 0,53 0 15,-33 21-15,1-21 16,52 0-16,-83 0 15,-42 0 1,-22 0 0,1 0-1,-10 0-15,-1 0 78</inkml:trace>
+  <inkml:trace contextRef="#ctx0" brushRef="#br0" timeOffset="2903.95">21266 6956 0,'-11'0'63,"-30"0"-63,-43 21 15,-146 42 1,84-43-16,-52 22 16,20 10-16,32-10 15,-21 0-15,115-32 16,31-10-16,11 0 16,-22 0-16,22 0 15,-32 0 1,21-20-16,-31 9 15,-31-10-15,20 11 16,11-11-16,-11-10 16,1 20-16,-32-31 15,0 1 1,-11-12-16,11 12 16,11 20-16,31 10 15,20 1-15,22-11 16,-1 11 31,1-11-47,-21-11 15,31 22-15,-11-1 16</inkml:trace>
+  <inkml:trace contextRef="#ctx0" brushRef="#br0" timeOffset="3413.21">18875 6737 0,'0'42'94,"-10"20"-94,10-41 0,0 0 16,0-11-16,0 1 109,0-1-109,-11 1 16,11 20-16,0-10 15,0-11-15,0 1 16,0 10-16,0-11 15</inkml:trace>
+  <inkml:trace contextRef="#ctx0" brushRef="#br0" timeOffset="4050.16">18927 6841 0,'11'-10'47,"-11"-1"-31,31 11-16,-20-10 16,9 10-16,64-21 15,10 11-15,-11 10 16,11 0-16,-52-21 15,0 21-15,-32 0 16</inkml:trace>
+  <inkml:trace contextRef="#ctx0" brushRef="#br0" timeOffset="14112.98">21067 6110 0,'21'0'125,"-10"0"-125,10 0 15,-11 0-15,1 0 16,30 0-16,-20 0 16,63 0-1,-43 0-15,95 21 16,-63 21-16,63-21 16,62 0-16,-125-11 15,11-10-15,-63 0 16,-21-10 171,0-1-109,-11 11-78</inkml:trace>
+  <inkml:trace contextRef="#ctx0" brushRef="#br0" timeOffset="15864.69">21965 5859 0,'0'-20'78,"-10"9"-62,-11 1-16,11-1 15,10-10-15,-11 11 16,1-11-1,10 11-15,-11-1 16,1-20-16,-22 20 16,12-20-16,-1 21 15,-32-11 1,33 21-16,9 0 16,-10 0-16,11 0 15,-1 0-15,-9 0 16,9 0-16,1 0 15,-11 0-15,0 0 16,10 0 0,1 0-16,-21 0 15,10 0-15,-10 0 16,10 0-16,-11 0 16,1 0-16,-11 0 15,32 0 1,-11 0-16,-31 10 15,41-10-15,-30 11 16,9-1-16,22 0 16,-11 11-16,21-10 15,-31-1-15,-1 22 16,22-22 0,-11 21-16,-10-10 31,20 0-31,-20-10 15,20-1 1,11 0 78,0 1-63,0-1-15,0 22-1,0-22-15,0 1 16,0 30-16,0-20 16,0 0-1,0 0-15,11 10 16,-1-20-16,1-1 15,-11 1 1,21 20-16,-11-21 31,11 1-31,-11 20 16,1-20-16,-11-1 16,10-10-16,-10 11 15,11-11 48,-1 0-48,11 10-15,10 0 16,1-10-16,-1 0 16,-21 0-16,11 0 15,-10 0 1,20 0-16,-10 0 15,0 0-15,10 0 16,0 0-16,32 0 16,41-20-16,-51 9 15,-32 11 1,10-21-16,11 11 16,-22 10-1,-20-11 63,11-20-62,-11 21-16,31-43 16,-20 32-16,-1 1 15,1-12 1,-1 22-16,-10-1 15</inkml:trace>
+</inkml:ink>
+</file>
+
+<file path=ppt/ink/ink4.xml><?xml version="1.0" encoding="utf-8"?>
+<inkml:ink xmlns:inkml="http://www.w3.org/2003/InkML">
+  <inkml:definitions>
+    <inkml:context xml:id="ctx0">
+      <inkml:inkSource xml:id="inkSrc0">
+        <inkml:traceFormat>
+          <inkml:channel name="X" type="integer" max="5120" units="cm"/>
+          <inkml:channel name="Y" type="integer" max="2400" units="cm"/>
+          <inkml:channel name="T" type="integer" max="2.14748E9" units="dev"/>
+        </inkml:traceFormat>
+        <inkml:channelProperties>
+          <inkml:channelProperty channel="X" name="resolution" value="148.8372" units="1/cm"/>
+          <inkml:channelProperty channel="Y" name="resolution" value="111.62791" units="1/cm"/>
+          <inkml:channelProperty channel="T" name="resolution" value="1" units="1/dev"/>
+        </inkml:channelProperties>
+      </inkml:inkSource>
+      <inkml:timestamp xml:id="ts0" timeString="2026-03-10T01:47:50.592"/>
+    </inkml:context>
+    <inkml:brush xml:id="br0">
+      <inkml:brushProperty name="width" value="0.05292" units="cm"/>
+      <inkml:brushProperty name="height" value="0.05292" units="cm"/>
+      <inkml:brushProperty name="color" value="#FF0000"/>
+    </inkml:brush>
+  </inkml:definitions>
+  <inkml:trace contextRef="#ctx0" brushRef="#br0">8133 7060 0,'10'0'78,"658"84"-78,-386-84 0,-31 0 15,-32 0 1,0 0-16,-52 0 0,-104 0 16,-1 0-16,-30 0 15,-11 0-15,10 0 16,-21 0-16,1 0 16</inkml:trace>
+  <inkml:trace contextRef="#ctx0" brushRef="#br0" timeOffset="950.13">16725 7102 0,'31'0'31,"31"21"-15,85 0-16,20 0 15,31 0 1,0 0-16,105 10 15,42-10-15,-63 0 16,-11-21-16,32 0 16,-21 0-16,-32 0 15,-52-11 1,-135 11-16,-63-10 16</inkml:trace>
+  <inkml:trace contextRef="#ctx0" brushRef="#br0" timeOffset="4802.01">13196 11708 0,'0'-10'15,"0"-22"-15,-21-9 16,21 20-16,0 0 16,-10-11-16,-11 12 15,21-12-15,-32-10 16,22 22 0,-11-22-16,0 21 15,-10-10-15,20 20 16,-30-31-16,30 32 15,-51-42-15,41 41 16,-115-51-16,-10 20 16,-105 0-1,42 0-15,-93 21 16,30-10-16,-10 31 16,-93 0-16,30 0 15,147 0-15,-116 42 16,116-21-1,83 20-15,42-9 16,42-1 0,20 0-16,-20 32 0,10 0 15,-41 62-15,51-83 16,-31 73 0,32-53-16,10 1 15,0 21-15,0-53 16,0-10-16,0 10 15,10 1-15,11-12 16,11 33-16,30-1 16,43 31-1,20 1-15,52 0 16,1-22-16,177 22 16,-125-63-16,20-21 15,22 0-15,-22 0 16,1-11-1,-22-41-15,-30 10 16,-22 0-16,-62-20 16,-42 30-16,-31 12 15,-11-1-15,21-32 16,-41 43-16,51-53 16,11 11-1,21-31-15,-41 51 16,9-20-16,11 0 15,-62 41-15,20-10 16,-31 11-16,11 10 16,-11-10 93,0-1-78</inkml:trace>
+  <inkml:trace contextRef="#ctx0" brushRef="#br0" timeOffset="6377.44">11609 12136 0,'0'21'47,"-10"31"-31,-43 74-16,-9-22 15,-22 22-15,-41 30 32,10-10-32,11 11 15,-32 21-15,94-105 16,-41 52-16,-1 53 15,-31 30-15,1-30 16,-22-21 0,-21-22-16,32-9 15,94-95-15,-63 42 16</inkml:trace>
+  <inkml:trace contextRef="#ctx0" brushRef="#br0" timeOffset="6845.46">9772 14392 0,'0'63'0,"21"-21"47,52 73-47,-21-63 0,125 104 15,-125-124-15,-10-22 16,-10 11-16,-1-10 16,-10-11-1,41-21-15,-41 10 16,31-20-1,53-53-15,20-20 16,32-1-16,-32-30 16,-21 30-16,-51 32 31,-43 63-31,11-11 0,-21 10 16</inkml:trace>
+  <inkml:trace contextRef="#ctx0" brushRef="#br0" timeOffset="7782.69">12016 12575 0,'11'0'79,"20"10"-64,11 43-15,20 41 16,32-11-16,-21-31 15,63 53-15,-73-74 16,114 84-16,-52-31 0,32-1 16,135 42-1,-83-31-15,21-31 16,20 10-16,11 0 16,-41-31-1,-22-21-15,-135-21 0</inkml:trace>
+  <inkml:trace contextRef="#ctx0" brushRef="#br0" timeOffset="8437.9">14710 13692 0,'0'21'31,"52"136"-31,-21-126 16,-31 1-16,11-22 15,-11 1-15,0-1 16,0 0-1,0 1 1,0-1 0,-21 22-16,-21-1 15,-31 21-15,0 0 16,31-20 0,11-22-16,-1 22 15,22-32-15,0 0 47,-1 0-31,11-11 62,11 11-16</inkml:trace>
+</inkml:ink>
+</file>
+
+<file path=ppt/ink/ink5.xml><?xml version="1.0" encoding="utf-8"?>
+<inkml:ink xmlns:inkml="http://www.w3.org/2003/InkML">
+  <inkml:definitions>
+    <inkml:context xml:id="ctx0">
+      <inkml:inkSource xml:id="inkSrc0">
+        <inkml:traceFormat>
+          <inkml:channel name="X" type="integer" max="5120" units="cm"/>
+          <inkml:channel name="Y" type="integer" max="2400" units="cm"/>
+          <inkml:channel name="T" type="integer" max="2.14748E9" units="dev"/>
+        </inkml:traceFormat>
+        <inkml:channelProperties>
+          <inkml:channelProperty channel="X" name="resolution" value="148.8372" units="1/cm"/>
+          <inkml:channelProperty channel="Y" name="resolution" value="111.62791" units="1/cm"/>
+          <inkml:channelProperty channel="T" name="resolution" value="1" units="1/dev"/>
+        </inkml:channelProperties>
+      </inkml:inkSource>
+      <inkml:timestamp xml:id="ts0" timeString="2026-03-10T01:48:22.411"/>
+    </inkml:context>
+    <inkml:brush xml:id="br0">
+      <inkml:brushProperty name="width" value="0.05292" units="cm"/>
+      <inkml:brushProperty name="height" value="0.05292" units="cm"/>
+      <inkml:brushProperty name="color" value="#FF0000"/>
+    </inkml:brush>
+  </inkml:definitions>
+  <inkml:trace contextRef="#ctx0" brushRef="#br0">9354 7384 0,'10'0'63,"32"0"-32,63 0-31,-43 0 16,84 0-16,-31 0 0,0 0 0,-31 0 15,62 0-15,-104 0 32,-1 0-17,-9 0-15,-1 11 16,11-11-16,-21 0 15,10 0-15,-21 0 32</inkml:trace>
+  <inkml:trace contextRef="#ctx0" brushRef="#br0" timeOffset="2591.06">11181 7322 0,'10'0'125,"22"0"-125,10 0 15,62 0 1,-62 0-1,20 0-15,1 0 16,-11-21-16,-10 10 0,21 11 16,-32 0-16,52 0 15,22 0-15,-11 11 16,-42-1 0,-42 1-16,11-11 15,11 0-15,-32 10 16,10-10-16</inkml:trace>
+  <inkml:trace contextRef="#ctx0" brushRef="#br0" timeOffset="3739.53">11839 7520 0,'31'0'94,"136"0"-94,115 21 16,-63-21-16,167 0 15,-145 0-15,40-21 16,-30 21-1,-32 0-15,-52 0 16,-21 0-16,-104-10 16,-11 10-16,-20 0 15</inkml:trace>
+  <inkml:trace contextRef="#ctx0" brushRef="#br0" timeOffset="4505.02">15159 7457 0,'20'0'62,"179"73"-62,124 1 16,105-22-16,53 10 15,156-30-15,-293-32 16,230 0-16,-302-11 16,-74-10-1,-52 1-15</inkml:trace>
+  <inkml:trace contextRef="#ctx0" brushRef="#br0" timeOffset="21680.8">12423 7781 0</inkml:trace>
+  <inkml:trace contextRef="#ctx0" brushRef="#br0" timeOffset="22126.64">15503 7677 0</inkml:trace>
+  <inkml:trace contextRef="#ctx0" brushRef="#br0" timeOffset="32709.27">5022 14622 0,'0'-10'0,"20"10"172,22 0-172,136 10 47,291 53-47,-458-63 0,-11 10 63</inkml:trace>
+  <inkml:trace contextRef="#ctx0" brushRef="#br0" timeOffset="34205.85">6003 14653 0,'0'-10'31,"10"-11"-31,-10 0 16,-21-10-1,11 20 1,-84 1 0,-21-11-16,0 21 15,53 0-15,-64 0 16,32 0-16,-41 0 15,51 0-15,32 0 16,10 0-16,1 0 16,-12 0-1,12 0-15,-1 21 16,-10-11-16,-11 11 16,21 11-16,32-22 15,-22 0-15,-9 22 16,30-22-1,-10 1-15,0 10 16,11-11-16,-21 0 16,-1 1-16,22-1 15,-32 11-15,0-10 16,32-1 0,10 1-1,0 9-15,-10-9 16,10-1-16,-11 1 15,1-1-15,-11 1 16,21-1-16,-21 11 16,10-11-1,-20 1-15,21-1 16,-1 1 0,11-1-16,-10 11 15,-1 21-15,11-21 16,0 10-1,-20-10-15,20 0 16,0-11-16,0 1 31,31-1-15,31 22-16,64-12 16,-105-20-1,93 42-15,22-21 16,42 0-16,72-21 15,1 0-15,125 0 16,-157 0-16,136-42 16,-157 42-1,-10 0-15,63-21 16,-157 0-16,-11 21 16,-83-10 15,11 0-31,-11-22 15,20-10 1,-20-20-16,0 20 16,11-31-16,-11 31 15,0 0-15,0 1 16,0-12-16,0 32 16,0-10-1,0 21-15,0-1 16,0 1-16,0-1 15,0 1 1,-21-11-16,-73-10 16,-104-11-16,-53-10 15,-31 31 1,32 21-16,-53 0 31,115 0-31,125 10 16,43-10-16</inkml:trace>
+  <inkml:trace contextRef="#ctx0" brushRef="#br0" timeOffset="36036.91">7016 15228 0,'0'-11'125,"20"11"-125,12-21 0,62 11 16,-32 10 0,22 0-16,31-21 15,0 21-15,-32-21 16,32 21-16,-32 0 15,11 0-15,21 0 16,21 0 0,10 11-16,21-11 15,0 0-15,0 0 0,-104 0 16,41 0-16,11 0 16,-94 0 15,0 0-31,-11 0 15,1 10-15,10-10 16,-11 0-16,11 0 16,0 0-16,-11 0 15,22 0 1,-12 0-16,-9 0 16,20-10-16,11 10 15,21 0-15,20 0 16,-41 0-16,114 0 15,11 0-15,-125 0 16,94 0 0,-73 0-16,-43 0 15</inkml:trace>
+  <inkml:trace contextRef="#ctx0" brushRef="#br0" timeOffset="39160.43">11097 15332 0,'21'0'63,"115"0"-63,0 0 0,62 0 15,-83 0 1,104 0-16,0-10 16,-104 10-16,31 0 15,-104-21-15,21 21 16,-21 0-16,-32 0 16,21 0-1,-20 0-15,-1-11 16,1 11-1,-1 0 1,11 0-16,-11-10 47,1 10-47,-1 0 16,1 0-16</inkml:trace>
+  <inkml:trace contextRef="#ctx0" brushRef="#br0" timeOffset="41523.4">15033 5661 0,'21'0'157,"73"21"-157,-31-21 0,41 21 15,-83-21-15,115 0 16,-1 0-16,-93 0 15,115 0-15,41 0 16,-114 0 0,104 0-16,-21 0 15,-115 0-15,52 0 16,-62 0-16,62 0 31,-51 0-31,51 10 16,-62-10-16,41 21 15,-51-21 1,51 0-16,-62 0 16,31 0-16,-31 0 15,-10 0-15,9 0 16,-9 0-16,-1 0 16,1 0-1,10 0 1,-1 0-16,1 0 15,-10-10-15,-1 10 32</inkml:trace>
+  <inkml:trace contextRef="#ctx0" brushRef="#br0" timeOffset="44236.03">14866 4951 0,'0'-11'62,"-73"-30"-62,42 41 16,20-11-16,-30 11 16,30 0-16,-10 0 15,11 0-15,-11 0 16,11 0-1,-1 0-15,1 11 0,-1-1 16,-20 11 0,31-11-16,0 1 15,-11-11 1,11 10-16,0 11 16,0 0-16,-10 0 15,10 62 1,0-41-16,0-10 15,0 9-15,0 43 16,0-42-16,0-21 16,0-11-16,0 0 31,0 1-31,0-1 16,0 1-16,0-1 15,0 11 1,0-10 156,0 9-157,0-9-15,10-11 16,-10 10-16,0 1 16,11 10-16,-11 0 15,21 20 1,-11 12-16,-10-33 15,21 54-15,-10-64 16,-1-10 62,0 0-15,1 0-63,31-10 0</inkml:trace>
+  <inkml:trace contextRef="#ctx0" brushRef="#br0" timeOffset="45482.56">17121 4919 0,'11'0'62,"-1"0"-62,21 0 0,-20 0 16,10 0-16,10 0 16,-20 0-16,20 0 15,-10 0-15,10 11 16,-21-11-1,11 10-15,0-10 16,-21 21 31,0-10-47,0 10 0,0-11 16,11 21-16,-11-10 15,10 42-15,11 10 16,-21-31-1,10 0-15,-10 10 16,0-31-16,21-11 16,-21 21-16,0-20 15,0-1 1,0 1 0,0 20-1,0-20-15,0 30 16,0-30-16,0 31 15,0-1-15,0-20 16,0-10 0,0 10-1,-10-11 157,-11-10-172,11 0 47,-1 0-31</inkml:trace>
+  <inkml:trace contextRef="#ctx0" brushRef="#br0" timeOffset="47916.53">17309 4815 0,'-146'-42'0,"104"21"16,-114-10-1,93 10-15,-114-21 16,83 21-16,-105 1 16,137 9-16,-74-10 15,73 21-15,-93-21 16,93 21-1,-114 0-15,114 0 16,-21 0-16,-114 53 16,104-43-16,31 32 15,-145 0-15,114-1 16,31-30-16,-188 41 16,157-42-1,-20 11-15,-137 32 16,157-43-16,31 32 15,-62-21-15,104-11 16,0 21-16,11-20 16,0-1-1,-1 1-15,1 20 16,-11 11-16,10-11 16,-9 11-16,9 0 15,11 41-15,0-20 16,0-42-1,0 73-15,42-31 16,10 10-16,0 0 16,-20-42-16,30 21 15,11 1-15,53 9 16,20 1 0,136 10-16,-1-52 15,64 0-15,125 10 16,41-31-16,116 0 15,-262-10-15,324-32 16,-104 11-16,-387-11 16,126-31-1,-209 31-15,-11-42 16,-73 63-16,1-52 16,-22 11-16,11 20 15,-21-10-15,0 31 16,10-11-1,-10 22-15,0 0 16,0-22-16,0 22 16,0-11-16,0-10 15,0-32-15,-21 32 16,11 20 0,0-10-16,-22-10 15,-20 0-15,10-1 16,11 22-16,-32-32 15,-31 32-15,0-32 16,-52 21-16,63 21 16,-116 0-1,-20 0-15,-31 0 32,30 0-32,53 0 15,84 0-15,-32 0 16</inkml:trace>
+  <inkml:trace contextRef="#ctx0" brushRef="#br0" timeOffset="55332.04">6577 7583 0,'-10'0'47,"-32"-21"-47,21 10 0,-31-10 0,31 11 16,-31 10-1,10-10-15,11-11 16,10 21-16,-31-11 15,10 11-15,0-21 16,-21 21-16,-51 0 16,-22 0-1,-31 0-15,73 11 16,-125 10-16,20-21 16,53 21-16,31-1 15,-31 1-15,104-10 16,11-11-16,21 21 15,-1-21 1,1 10-16,-1 1 16,1 41-16,-11 0 15,10-10-15,11-11 16,-20 11-16,20-32 16,0 1-1,0 20-15,0-10 16,10 42-16,21-11 15,22 11-15,20 41 16,31-41-16,-73-32 16,74 21-1,20-10-15,42 0 16,31-21-16,1 0 16,-137-21-16,116 0 31,-42 0-31,-74 0 15,1 0 1,-11-21-16,-31-11 16,52 22-16,-31-42 15,31 20-15,0-20 16,21-11-16,0 22 16,10-12-16,-41 12 15,10 9-15,-31 22 16,-32-1-1,-10-9 17,0-1-32,21-21 15,-21-21-15,0 32 16,0-32-16,-10 32 16,-1 20-1,-10 1-15,-31-11 16,-31 21-1,20 0-15,0 0 16,22 0-16,-43 0 16,21 11-16,32-11 15,21 0-15</inkml:trace>
+  <inkml:trace contextRef="#ctx0" brushRef="#br0" timeOffset="56622.47">5303 8376 0,'0'11'78,"0"-1"-78,0 22 0,-10-1 15,0-21-15,-32 32 16,-10 0 0,-22 21-16,-19-11 15,-12 11-15,11-32 16,-21-10-16,0 0 16,1 0-16,-1-21 15,0 0-15,73 0 16,-73-11-1,74 11-15,-1-10 16,11-11-16,31 10 16,-11 1-16,-20-11 15,-1-10-15,1-1 16,10 22 0,-31-21-16,42 10 15,10 10 32,0 1-47,0-1 0,0 1 16,0-1-1,-11 1 204,-20-11-172,-126-42-31,126 63-16,-11-10 0,32 10 15,-1-10-15,1 10 16,-11 0-1</inkml:trace>
+  <inkml:trace contextRef="#ctx0" brushRef="#br0" timeOffset="57054.58">3550 8356 0,'0'10'46,"0"0"-46,-42 32 0,21-21 0,10 0 16,-9 10 0,-1 1-16,21-22 15,-11 11-15,11-11 78,0 1-62,-10-1-16,10 1 16,0-22 46,21-30-62</inkml:trace>
+  <inkml:trace contextRef="#ctx0" brushRef="#br0" timeOffset="57500.28">3487 8418 0,'10'0'79,"43"0"-79,9 0 15,22 0-15,-1 0 16,-10 11-1,-52-11-15,-10 0 16,-1 10 15,0-10-15,11 0 0</inkml:trace>
+</inkml:ink>
 </file>
 
 <file path=ppt/notesMasters/notesMaster1.xml><?xml version="1.0" encoding="utf-8"?>
@@ -1952,6 +2186,187 @@
   <p:cSld>
     <p:spTree>
       <p:nvGrpSpPr>
+        <p:cNvPr id="1" name="Shape 121">
+          <a:extLst>
+            <a:ext uri="{FF2B5EF4-FFF2-40B4-BE49-F238E27FC236}">
+              <a16:creationId xmlns:a16="http://schemas.microsoft.com/office/drawing/2014/main" id="{869C29C0-1EDE-E6EB-A583-B639F9CEC6F3}"/>
+            </a:ext>
+          </a:extLst>
+        </p:cNvPr>
+        <p:cNvGrpSpPr/>
+        <p:nvPr/>
+      </p:nvGrpSpPr>
+      <p:grpSpPr>
+        <a:xfrm>
+          <a:off x="0" y="0"/>
+          <a:ext cx="0" cy="0"/>
+          <a:chOff x="0" y="0"/>
+          <a:chExt cx="0" cy="0"/>
+        </a:xfrm>
+      </p:grpSpPr>
+      <p:sp>
+        <p:nvSpPr>
+          <p:cNvPr id="122" name="Google Shape;122;p2:notes">
+            <a:extLst>
+              <a:ext uri="{FF2B5EF4-FFF2-40B4-BE49-F238E27FC236}">
+                <a16:creationId xmlns:a16="http://schemas.microsoft.com/office/drawing/2014/main" id="{32318B2D-C694-E16D-1FC9-D908E9E9F585}"/>
+              </a:ext>
+            </a:extLst>
+          </p:cNvPr>
+          <p:cNvSpPr txBox="1">
+            <a:spLocks noGrp="1"/>
+          </p:cNvSpPr>
+          <p:nvPr>
+            <p:ph type="body" idx="1"/>
+          </p:nvPr>
+        </p:nvSpPr>
+        <p:spPr>
+          <a:xfrm>
+            <a:off x="914400" y="3257550"/>
+            <a:ext cx="7315200" cy="3086100"/>
+          </a:xfrm>
+          <a:prstGeom prst="rect">
+            <a:avLst/>
+          </a:prstGeom>
+        </p:spPr>
+        <p:txBody>
+          <a:bodyPr spcFirstLastPara="1" wrap="square" lIns="91425" tIns="45700" rIns="91425" bIns="45700" anchor="t" anchorCtr="0">
+            <a:noAutofit/>
+          </a:bodyPr>
+          <a:lstStyle/>
+          <a:p>
+            <a:pPr marL="0" lvl="0" indent="0" algn="l" rtl="0">
+              <a:spcBef>
+                <a:spcPts val="0"/>
+              </a:spcBef>
+              <a:spcAft>
+                <a:spcPts val="0"/>
+              </a:spcAft>
+              <a:buNone/>
+            </a:pPr>
+            <a:endParaRPr/>
+          </a:p>
+        </p:txBody>
+      </p:sp>
+      <p:sp>
+        <p:nvSpPr>
+          <p:cNvPr id="123" name="Google Shape;123;p2:notes">
+            <a:extLst>
+              <a:ext uri="{FF2B5EF4-FFF2-40B4-BE49-F238E27FC236}">
+                <a16:creationId xmlns:a16="http://schemas.microsoft.com/office/drawing/2014/main" id="{2AD9BA31-65E1-72B9-A96D-C2EE81F91F88}"/>
+              </a:ext>
+            </a:extLst>
+          </p:cNvPr>
+          <p:cNvSpPr>
+            <a:spLocks noGrp="1" noRot="1" noChangeAspect="1"/>
+          </p:cNvSpPr>
+          <p:nvPr>
+            <p:ph type="sldImg" idx="2"/>
+          </p:nvPr>
+        </p:nvSpPr>
+        <p:spPr>
+          <a:xfrm>
+            <a:off x="2857500" y="514350"/>
+            <a:ext cx="3429000" cy="2571750"/>
+          </a:xfrm>
+          <a:custGeom>
+            <a:avLst/>
+            <a:gdLst/>
+            <a:ahLst/>
+            <a:cxnLst/>
+            <a:rect l="l" t="t" r="r" b="b"/>
+            <a:pathLst>
+              <a:path w="120000" h="120000" extrusionOk="0">
+                <a:moveTo>
+                  <a:pt x="0" y="0"/>
+                </a:moveTo>
+                <a:lnTo>
+                  <a:pt x="120000" y="0"/>
+                </a:lnTo>
+                <a:lnTo>
+                  <a:pt x="120000" y="120000"/>
+                </a:lnTo>
+                <a:lnTo>
+                  <a:pt x="0" y="120000"/>
+                </a:lnTo>
+                <a:close/>
+              </a:path>
+            </a:pathLst>
+          </a:custGeom>
+        </p:spPr>
+      </p:sp>
+      <p:sp>
+        <p:nvSpPr>
+          <p:cNvPr id="2" name="Slide Number Placeholder 1">
+            <a:extLst>
+              <a:ext uri="{FF2B5EF4-FFF2-40B4-BE49-F238E27FC236}">
+                <a16:creationId xmlns:a16="http://schemas.microsoft.com/office/drawing/2014/main" id="{DD7BA5CB-CDB3-3636-B010-D750980B3C08}"/>
+              </a:ext>
+            </a:extLst>
+          </p:cNvPr>
+          <p:cNvSpPr>
+            <a:spLocks noGrp="1"/>
+          </p:cNvSpPr>
+          <p:nvPr>
+            <p:ph type="sldNum" idx="12"/>
+          </p:nvPr>
+        </p:nvSpPr>
+        <p:spPr/>
+        <p:txBody>
+          <a:bodyPr/>
+          <a:lstStyle/>
+          <a:p>
+            <a:pPr marL="0" marR="0" lvl="0" indent="0" algn="r" rtl="0">
+              <a:spcBef>
+                <a:spcPts val="0"/>
+              </a:spcBef>
+              <a:spcAft>
+                <a:spcPts val="0"/>
+              </a:spcAft>
+              <a:buNone/>
+            </a:pPr>
+            <a:fld id="{00000000-1234-1234-1234-123412341234}" type="slidenum">
+              <a:rPr lang="en-US" sz="1200" b="0" i="0" u="none" strike="noStrike" cap="none" smtClean="0">
+                <a:solidFill>
+                  <a:schemeClr val="dk1"/>
+                </a:solidFill>
+                <a:latin typeface="Calibri"/>
+                <a:ea typeface="Calibri"/>
+                <a:cs typeface="Calibri"/>
+                <a:sym typeface="Calibri"/>
+              </a:rPr>
+              <a:t>9</a:t>
+            </a:fld>
+            <a:endParaRPr lang="en-US" sz="1200" b="0" i="0" u="none" strike="noStrike" cap="none">
+              <a:solidFill>
+                <a:schemeClr val="dk1"/>
+              </a:solidFill>
+              <a:latin typeface="Calibri"/>
+              <a:ea typeface="Calibri"/>
+              <a:cs typeface="Calibri"/>
+              <a:sym typeface="Calibri"/>
+            </a:endParaRPr>
+          </a:p>
+        </p:txBody>
+      </p:sp>
+    </p:spTree>
+    <p:extLst>
+      <p:ext uri="{BB962C8B-B14F-4D97-AF65-F5344CB8AC3E}">
+        <p14:creationId xmlns:p14="http://schemas.microsoft.com/office/powerpoint/2010/main" val="1645442999"/>
+      </p:ext>
+    </p:extLst>
+  </p:cSld>
+  <p:clrMapOvr>
+    <a:masterClrMapping/>
+  </p:clrMapOvr>
+</p:notes>
+</file>
+
+<file path=ppt/notesSlides/notesSlide11.xml><?xml version="1.0" encoding="utf-8"?>
+<p:notes xmlns:a="http://schemas.openxmlformats.org/drawingml/2006/main" xmlns:r="http://schemas.openxmlformats.org/officeDocument/2006/relationships" xmlns:p="http://schemas.openxmlformats.org/presentationml/2006/main" showMasterSp="0" showMasterPhAnim="0">
+  <p:cSld>
+    <p:spTree>
+      <p:nvGrpSpPr>
         <p:cNvPr id="1" name="Shape 140">
           <a:extLst>
             <a:ext uri="{FF2B5EF4-FFF2-40B4-BE49-F238E27FC236}">
@@ -2169,7 +2584,7 @@
             </a:pPr>
             <a:fld id="{00000000-1234-1234-1234-123412341234}" type="slidenum">
               <a:rPr lang="en-US"/>
-              <a:t>9</a:t>
+              <a:t>10</a:t>
             </a:fld>
             <a:endParaRPr/>
           </a:p>
@@ -2188,7 +2603,7 @@
 </p:notes>
 </file>
 
-<file path=ppt/notesSlides/notesSlide11.xml><?xml version="1.0" encoding="utf-8"?>
+<file path=ppt/notesSlides/notesSlide12.xml><?xml version="1.0" encoding="utf-8"?>
 <p:notes xmlns:a="http://schemas.openxmlformats.org/drawingml/2006/main" xmlns:r="http://schemas.openxmlformats.org/officeDocument/2006/relationships" xmlns:p="http://schemas.openxmlformats.org/presentationml/2006/main" showMasterSp="0" showMasterPhAnim="0">
   <p:cSld>
     <p:spTree>
@@ -2558,7 +2973,7 @@
             </a:pPr>
             <a:fld id="{00000000-1234-1234-1234-123412341234}" type="slidenum">
               <a:rPr lang="en-US"/>
-              <a:t>10</a:t>
+              <a:t>11</a:t>
             </a:fld>
             <a:endParaRPr/>
           </a:p>
@@ -2577,7 +2992,7 @@
 </p:notes>
 </file>
 
-<file path=ppt/notesSlides/notesSlide12.xml><?xml version="1.0" encoding="utf-8"?>
+<file path=ppt/notesSlides/notesSlide13.xml><?xml version="1.0" encoding="utf-8"?>
 <p:notes xmlns:a="http://schemas.openxmlformats.org/drawingml/2006/main" xmlns:r="http://schemas.openxmlformats.org/officeDocument/2006/relationships" xmlns:p="http://schemas.openxmlformats.org/presentationml/2006/main" showMasterSp="0" showMasterPhAnim="0">
   <p:cSld>
     <p:spTree>
@@ -2799,7 +3214,7 @@
             </a:pPr>
             <a:fld id="{00000000-1234-1234-1234-123412341234}" type="slidenum">
               <a:rPr lang="en-US"/>
-              <a:t>11</a:t>
+              <a:t>12</a:t>
             </a:fld>
             <a:endParaRPr/>
           </a:p>
@@ -2818,7 +3233,7 @@
 </p:notes>
 </file>
 
-<file path=ppt/notesSlides/notesSlide13.xml><?xml version="1.0" encoding="utf-8"?>
+<file path=ppt/notesSlides/notesSlide14.xml><?xml version="1.0" encoding="utf-8"?>
 <p:notes xmlns:a="http://schemas.openxmlformats.org/drawingml/2006/main" xmlns:r="http://schemas.openxmlformats.org/officeDocument/2006/relationships" xmlns:p="http://schemas.openxmlformats.org/presentationml/2006/main" showMasterSp="0" showMasterPhAnim="0">
   <p:cSld>
     <p:spTree>
@@ -2972,7 +3387,7 @@
                 <a:cs typeface="Calibri"/>
                 <a:sym typeface="Calibri"/>
               </a:rPr>
-              <a:t>12</a:t>
+              <a:t>13</a:t>
             </a:fld>
             <a:endParaRPr lang="en-US" sz="1200" b="0" i="0" u="none" strike="noStrike" cap="none">
               <a:solidFill>
@@ -2999,7 +3414,7 @@
 </p:notes>
 </file>
 
-<file path=ppt/notesSlides/notesSlide14.xml><?xml version="1.0" encoding="utf-8"?>
+<file path=ppt/notesSlides/notesSlide15.xml><?xml version="1.0" encoding="utf-8"?>
 <p:notes xmlns:a="http://schemas.openxmlformats.org/drawingml/2006/main" xmlns:r="http://schemas.openxmlformats.org/officeDocument/2006/relationships" xmlns:p="http://schemas.openxmlformats.org/presentationml/2006/main" showMasterSp="0" showMasterPhAnim="0">
   <p:cSld>
     <p:spTree>
@@ -3221,7 +3636,7 @@
             </a:pPr>
             <a:fld id="{00000000-1234-1234-1234-123412341234}" type="slidenum">
               <a:rPr lang="en-US"/>
-              <a:t>13</a:t>
+              <a:t>14</a:t>
             </a:fld>
             <a:endParaRPr/>
           </a:p>
@@ -3927,6 +4342,378 @@
           </a:bodyPr>
           <a:lstStyle/>
           <a:p>
+            <a:r>
+              <a:rPr lang="vi-VN" b="1" dirty="0"/>
+              <a:t>1. HTML File (Tệp HTML)</a:t>
+            </a:r>
+          </a:p>
+          <a:p>
+            <a:r>
+              <a:rPr lang="vi-VN" dirty="0"/>
+              <a:t>Đây đóng vai trò là </a:t>
+            </a:r>
+            <a:r>
+              <a:rPr lang="vi-VN" b="1" dirty="0"/>
+              <a:t>"bộ khung"</a:t>
+            </a:r>
+            <a:r>
+              <a:rPr lang="vi-VN" dirty="0"/>
+              <a:t> hoặc cái sân khấu để trình diễn.</a:t>
+            </a:r>
+          </a:p>
+          <a:p>
+            <a:r>
+              <a:rPr lang="vi-VN" b="1" dirty="0"/>
+              <a:t>Nhiệm vụ:</a:t>
+            </a:r>
+            <a:r>
+              <a:rPr lang="vi-VN" dirty="0"/>
+              <a:t> Tạo ra một môi trường để trình duyệt web có thể hiển thị nội dung.</a:t>
+            </a:r>
+          </a:p>
+          <a:p>
+            <a:r>
+              <a:rPr lang="vi-VN" b="1" dirty="0"/>
+              <a:t>Thành phần quan trọng:</a:t>
+            </a:r>
+            <a:r>
+              <a:rPr lang="vi-VN" dirty="0"/>
+              <a:t> Trong file này, bạn thường sẽ có một thẻ </a:t>
+            </a:r>
+            <a:r>
+              <a:rPr lang="vi-VN" sz="1200" b="0" i="0" u="none" strike="noStrike" cap="none" dirty="0">
+                <a:solidFill>
+                  <a:schemeClr val="dk1"/>
+                </a:solidFill>
+                <a:latin typeface="Calibri"/>
+                <a:ea typeface="Calibri"/>
+                <a:cs typeface="Calibri"/>
+                <a:sym typeface="Calibri"/>
+              </a:rPr>
+              <a:t>&lt;canvas&gt;</a:t>
+            </a:r>
+            <a:r>
+              <a:rPr lang="vi-VN" dirty="0"/>
+              <a:t> (đây là nơi Three.js sẽ vẽ các hình ảnh 3D lên đó) hoặc chỉ đơn giản là một thẻ </a:t>
+            </a:r>
+            <a:r>
+              <a:rPr lang="vi-VN" sz="1200" b="0" i="0" u="none" strike="noStrike" cap="none" dirty="0">
+                <a:solidFill>
+                  <a:schemeClr val="dk1"/>
+                </a:solidFill>
+                <a:latin typeface="Calibri"/>
+                <a:ea typeface="Calibri"/>
+                <a:cs typeface="Calibri"/>
+                <a:sym typeface="Calibri"/>
+              </a:rPr>
+              <a:t>&lt;div&gt;</a:t>
+            </a:r>
+            <a:r>
+              <a:rPr lang="vi-VN" dirty="0"/>
+              <a:t> để nhúng mã JavaScript vào.</a:t>
+            </a:r>
+          </a:p>
+          <a:p>
+            <a:r>
+              <a:rPr lang="vi-VN" b="1" dirty="0"/>
+              <a:t>Ví dụ:</a:t>
+            </a:r>
+            <a:r>
+              <a:rPr lang="vi-VN" dirty="0"/>
+              <a:t> </a:t>
+            </a:r>
+            <a:r>
+              <a:rPr lang="vi-VN" sz="1200" b="0" i="0" u="none" strike="noStrike" cap="none" dirty="0">
+                <a:solidFill>
+                  <a:schemeClr val="dk1"/>
+                </a:solidFill>
+                <a:latin typeface="Calibri"/>
+                <a:ea typeface="Calibri"/>
+                <a:cs typeface="Calibri"/>
+                <a:sym typeface="Calibri"/>
+              </a:rPr>
+              <a:t>index.html</a:t>
+            </a:r>
+            <a:r>
+              <a:rPr lang="vi-VN" dirty="0"/>
+              <a:t>.</a:t>
+            </a:r>
+            <a:endParaRPr lang="en-US" dirty="0"/>
+          </a:p>
+          <a:p>
+            <a:endParaRPr lang="vi-VN" dirty="0"/>
+          </a:p>
+          <a:p>
+            <a:r>
+              <a:rPr lang="vi-VN" b="1" dirty="0"/>
+              <a:t>2. JavaScript File (Tệp JavaScript)</a:t>
+            </a:r>
+          </a:p>
+          <a:p>
+            <a:r>
+              <a:rPr lang="vi-VN" dirty="0"/>
+              <a:t>Đây chính là </a:t>
+            </a:r>
+            <a:r>
+              <a:rPr lang="vi-VN" b="1" dirty="0"/>
+              <a:t>"bộ não"</a:t>
+            </a:r>
+            <a:r>
+              <a:rPr lang="vi-VN" dirty="0"/>
+              <a:t> và là nơi phép màu thực sự xảy ra.</a:t>
+            </a:r>
+          </a:p>
+          <a:p>
+            <a:r>
+              <a:rPr lang="vi-VN" b="1" dirty="0"/>
+              <a:t>Nhiệm vụ:</a:t>
+            </a:r>
+            <a:r>
+              <a:rPr lang="vi-VN" dirty="0"/>
+              <a:t> Chứa toàn bộ logic của Three.js để điều khiển các đối tượng 3D.</a:t>
+            </a:r>
+          </a:p>
+          <a:p>
+            <a:r>
+              <a:rPr lang="vi-VN" b="1" dirty="0"/>
+              <a:t>Các thành phần bạn sẽ viết trong này:</a:t>
+            </a:r>
+            <a:endParaRPr lang="vi-VN" dirty="0"/>
+          </a:p>
+          <a:p>
+            <a:pPr lvl="1"/>
+            <a:r>
+              <a:rPr lang="vi-VN" b="1" dirty="0"/>
+              <a:t>Scene (Cảnh):</a:t>
+            </a:r>
+            <a:r>
+              <a:rPr lang="vi-VN" dirty="0"/>
+              <a:t> Không gian 3D nơi mọi thứ tồn tại.</a:t>
+            </a:r>
+          </a:p>
+          <a:p>
+            <a:pPr lvl="1"/>
+            <a:r>
+              <a:rPr lang="vi-VN" b="1" dirty="0"/>
+              <a:t>Camera:</a:t>
+            </a:r>
+            <a:r>
+              <a:rPr lang="vi-VN" dirty="0"/>
+              <a:t> Góc nhìn của người dùng vào thế giới 3D.</a:t>
+            </a:r>
+          </a:p>
+          <a:p>
+            <a:pPr lvl="1"/>
+            <a:r>
+              <a:rPr lang="vi-VN" b="1" dirty="0"/>
+              <a:t>Renderer (Trình kết xuất):</a:t>
+            </a:r>
+            <a:r>
+              <a:rPr lang="vi-VN" dirty="0"/>
+              <a:t> Công cụ biến các dữ liệu toán học 3D thành hình ảnh pixel trên màn hình.</a:t>
+            </a:r>
+          </a:p>
+          <a:p>
+            <a:pPr lvl="1"/>
+            <a:r>
+              <a:rPr lang="vi-VN" b="1" dirty="0"/>
+              <a:t>Animation Loop:</a:t>
+            </a:r>
+            <a:r>
+              <a:rPr lang="vi-VN" dirty="0"/>
+              <a:t> Vòng lặp để tạo ra chuyển động.</a:t>
+            </a:r>
+          </a:p>
+          <a:p>
+            <a:r>
+              <a:rPr lang="vi-VN" b="1" dirty="0"/>
+              <a:t>Ví dụ:</a:t>
+            </a:r>
+            <a:r>
+              <a:rPr lang="vi-VN" dirty="0"/>
+              <a:t> </a:t>
+            </a:r>
+            <a:r>
+              <a:rPr lang="vi-VN" sz="1200" b="0" i="0" u="none" strike="noStrike" cap="none" dirty="0">
+                <a:solidFill>
+                  <a:schemeClr val="dk1"/>
+                </a:solidFill>
+                <a:latin typeface="Calibri"/>
+                <a:ea typeface="Calibri"/>
+                <a:cs typeface="Calibri"/>
+                <a:sym typeface="Calibri"/>
+              </a:rPr>
+              <a:t>script.js</a:t>
+            </a:r>
+            <a:r>
+              <a:rPr lang="vi-VN" dirty="0"/>
+              <a:t> hoặc </a:t>
+            </a:r>
+            <a:r>
+              <a:rPr lang="vi-VN" sz="1200" b="0" i="0" u="none" strike="noStrike" cap="none" dirty="0">
+                <a:solidFill>
+                  <a:schemeClr val="dk1"/>
+                </a:solidFill>
+                <a:latin typeface="Calibri"/>
+                <a:ea typeface="Calibri"/>
+                <a:cs typeface="Calibri"/>
+                <a:sym typeface="Calibri"/>
+              </a:rPr>
+              <a:t>main.js</a:t>
+            </a:r>
+            <a:r>
+              <a:rPr lang="vi-VN" dirty="0"/>
+              <a:t>.</a:t>
+            </a:r>
+            <a:endParaRPr lang="en-US" dirty="0"/>
+          </a:p>
+          <a:p>
+            <a:endParaRPr lang="vi-VN" dirty="0"/>
+          </a:p>
+          <a:p>
+            <a:r>
+              <a:rPr lang="vi-VN" b="1" dirty="0"/>
+              <a:t>3. Static Folder (Thư mục tài nguyên tĩnh)</a:t>
+            </a:r>
+          </a:p>
+          <a:p>
+            <a:r>
+              <a:rPr lang="vi-VN" dirty="0"/>
+              <a:t>Hãy coi đây là </a:t>
+            </a:r>
+            <a:r>
+              <a:rPr lang="vi-VN" b="1" dirty="0"/>
+              <a:t>"kho chứa đồ"</a:t>
+            </a:r>
+            <a:r>
+              <a:rPr lang="vi-VN" dirty="0"/>
+              <a:t> của bạn.</a:t>
+            </a:r>
+          </a:p>
+          <a:p>
+            <a:r>
+              <a:rPr lang="vi-VN" b="1" dirty="0"/>
+              <a:t>Nhiệm vụ:</a:t>
+            </a:r>
+            <a:r>
+              <a:rPr lang="vi-VN" dirty="0"/>
+              <a:t> Lưu trữ các tệp tin bên ngoài mà mã JavaScript cần gọi đến để làm cho thế giới 3D sinh động hơn.</a:t>
+            </a:r>
+          </a:p>
+          <a:p>
+            <a:r>
+              <a:rPr lang="vi-VN" b="1" dirty="0"/>
+              <a:t>Bên trong thường có:</a:t>
+            </a:r>
+            <a:endParaRPr lang="vi-VN" dirty="0"/>
+          </a:p>
+          <a:p>
+            <a:pPr lvl="1"/>
+            <a:r>
+              <a:rPr lang="vi-VN" b="1" dirty="0"/>
+              <a:t>Textures (Vân bề mặt):</a:t>
+            </a:r>
+            <a:r>
+              <a:rPr lang="vi-VN" dirty="0"/>
+              <a:t> Các file ảnh (.jpg, .png) để dán lên bề mặt vật thể (ví dụ: hình ảnh mặt đất, vỏ Trái Đất).</a:t>
+            </a:r>
+          </a:p>
+          <a:p>
+            <a:pPr lvl="1"/>
+            <a:r>
+              <a:rPr lang="vi-VN" b="1" dirty="0"/>
+              <a:t>3D Models:</a:t>
+            </a:r>
+            <a:r>
+              <a:rPr lang="vi-VN" dirty="0"/>
+              <a:t> Các tệp mô hình được làm từ phần mềm khác như Blender (.gltf, .obj).</a:t>
+            </a:r>
+          </a:p>
+          <a:p>
+            <a:pPr lvl="1"/>
+            <a:r>
+              <a:rPr lang="vi-VN" b="1" dirty="0"/>
+              <a:t>Audio:</a:t>
+            </a:r>
+            <a:r>
+              <a:rPr lang="vi-VN" dirty="0"/>
+              <a:t> Âm thanh nền hoặc hiệu ứng tiếng động.</a:t>
+            </a:r>
+          </a:p>
+          <a:p>
+            <a:r>
+              <a:rPr lang="vi-VN" b="1" dirty="0"/>
+              <a:t>Lưu ý:</a:t>
+            </a:r>
+            <a:r>
+              <a:rPr lang="vi-VN" dirty="0"/>
+              <a:t> Việc tách riêng thư mục này giúp quản lý dự án gọn gàng và tránh lỗi đường dẫn khi load tài nguyên.</a:t>
+            </a:r>
+            <a:endParaRPr lang="en-US" dirty="0"/>
+          </a:p>
+          <a:p>
+            <a:endParaRPr lang="en-US" dirty="0"/>
+          </a:p>
+          <a:p>
+            <a:r>
+              <a:rPr lang="vi-VN" b="1" dirty="0"/>
+              <a:t>Tóm tắt cách chúng phối hợp:</a:t>
+            </a:r>
+          </a:p>
+          <a:p>
+            <a:r>
+              <a:rPr lang="vi-VN" dirty="0"/>
+              <a:t>Trình duyệt mở file </a:t>
+            </a:r>
+            <a:r>
+              <a:rPr lang="vi-VN" b="1" dirty="0"/>
+              <a:t>HTML</a:t>
+            </a:r>
+            <a:r>
+              <a:rPr lang="vi-VN" dirty="0"/>
+              <a:t>.</a:t>
+            </a:r>
+          </a:p>
+          <a:p>
+            <a:r>
+              <a:rPr lang="vi-VN" dirty="0"/>
+              <a:t>File HTML gọi file </a:t>
+            </a:r>
+            <a:r>
+              <a:rPr lang="vi-VN" b="1" dirty="0"/>
+              <a:t>JavaScript</a:t>
+            </a:r>
+            <a:r>
+              <a:rPr lang="vi-VN" dirty="0"/>
+              <a:t>.</a:t>
+            </a:r>
+          </a:p>
+          <a:p>
+            <a:r>
+              <a:rPr lang="vi-VN" dirty="0"/>
+              <a:t>File </a:t>
+            </a:r>
+            <a:r>
+              <a:rPr lang="vi-VN" b="1" dirty="0"/>
+              <a:t>JavaScript</a:t>
+            </a:r>
+            <a:r>
+              <a:rPr lang="vi-VN" dirty="0"/>
+              <a:t> khởi tạo Three.js và tìm đến thư mục </a:t>
+            </a:r>
+            <a:r>
+              <a:rPr lang="vi-VN" b="1" dirty="0"/>
+              <a:t>Static</a:t>
+            </a:r>
+            <a:r>
+              <a:rPr lang="vi-VN" dirty="0"/>
+              <a:t> để lấy mô hình hoặc hình ảnh nhằm hiển thị lên màn hình.</a:t>
+            </a:r>
+          </a:p>
+          <a:p>
+            <a:endParaRPr lang="vi-VN" dirty="0"/>
+          </a:p>
+          <a:p>
             <a:pPr marL="0" lvl="0" indent="0" algn="l" rtl="0">
               <a:spcBef>
                 <a:spcPts val="0"/>
@@ -3936,7 +4723,7 @@
               </a:spcAft>
               <a:buNone/>
             </a:pPr>
-            <a:endParaRPr/>
+            <a:endParaRPr dirty="0"/>
           </a:p>
         </p:txBody>
       </p:sp>
@@ -4054,6 +4841,187 @@
 </file>
 
 <file path=ppt/notesSlides/notesSlide6.xml><?xml version="1.0" encoding="utf-8"?>
+<p:notes xmlns:a="http://schemas.openxmlformats.org/drawingml/2006/main" xmlns:r="http://schemas.openxmlformats.org/officeDocument/2006/relationships" xmlns:p="http://schemas.openxmlformats.org/presentationml/2006/main" showMasterSp="0" showMasterPhAnim="0">
+  <p:cSld>
+    <p:spTree>
+      <p:nvGrpSpPr>
+        <p:cNvPr id="1" name="Shape 121">
+          <a:extLst>
+            <a:ext uri="{FF2B5EF4-FFF2-40B4-BE49-F238E27FC236}">
+              <a16:creationId xmlns:a16="http://schemas.microsoft.com/office/drawing/2014/main" id="{85D95634-090A-254B-BDC5-A170C55B52B7}"/>
+            </a:ext>
+          </a:extLst>
+        </p:cNvPr>
+        <p:cNvGrpSpPr/>
+        <p:nvPr/>
+      </p:nvGrpSpPr>
+      <p:grpSpPr>
+        <a:xfrm>
+          <a:off x="0" y="0"/>
+          <a:ext cx="0" cy="0"/>
+          <a:chOff x="0" y="0"/>
+          <a:chExt cx="0" cy="0"/>
+        </a:xfrm>
+      </p:grpSpPr>
+      <p:sp>
+        <p:nvSpPr>
+          <p:cNvPr id="122" name="Google Shape;122;p2:notes">
+            <a:extLst>
+              <a:ext uri="{FF2B5EF4-FFF2-40B4-BE49-F238E27FC236}">
+                <a16:creationId xmlns:a16="http://schemas.microsoft.com/office/drawing/2014/main" id="{E579B98D-683D-5195-F445-A29FC598C4F0}"/>
+              </a:ext>
+            </a:extLst>
+          </p:cNvPr>
+          <p:cNvSpPr txBox="1">
+            <a:spLocks noGrp="1"/>
+          </p:cNvSpPr>
+          <p:nvPr>
+            <p:ph type="body" idx="1"/>
+          </p:nvPr>
+        </p:nvSpPr>
+        <p:spPr>
+          <a:xfrm>
+            <a:off x="914400" y="3257550"/>
+            <a:ext cx="7315200" cy="3086100"/>
+          </a:xfrm>
+          <a:prstGeom prst="rect">
+            <a:avLst/>
+          </a:prstGeom>
+        </p:spPr>
+        <p:txBody>
+          <a:bodyPr spcFirstLastPara="1" wrap="square" lIns="91425" tIns="45700" rIns="91425" bIns="45700" anchor="t" anchorCtr="0">
+            <a:noAutofit/>
+          </a:bodyPr>
+          <a:lstStyle/>
+          <a:p>
+            <a:pPr marL="0" lvl="0" indent="0" algn="l" rtl="0">
+              <a:spcBef>
+                <a:spcPts val="0"/>
+              </a:spcBef>
+              <a:spcAft>
+                <a:spcPts val="0"/>
+              </a:spcAft>
+              <a:buNone/>
+            </a:pPr>
+            <a:endParaRPr/>
+          </a:p>
+        </p:txBody>
+      </p:sp>
+      <p:sp>
+        <p:nvSpPr>
+          <p:cNvPr id="123" name="Google Shape;123;p2:notes">
+            <a:extLst>
+              <a:ext uri="{FF2B5EF4-FFF2-40B4-BE49-F238E27FC236}">
+                <a16:creationId xmlns:a16="http://schemas.microsoft.com/office/drawing/2014/main" id="{95E97010-4F1F-119F-E6EF-A3FBAFC7B250}"/>
+              </a:ext>
+            </a:extLst>
+          </p:cNvPr>
+          <p:cNvSpPr>
+            <a:spLocks noGrp="1" noRot="1" noChangeAspect="1"/>
+          </p:cNvSpPr>
+          <p:nvPr>
+            <p:ph type="sldImg" idx="2"/>
+          </p:nvPr>
+        </p:nvSpPr>
+        <p:spPr>
+          <a:xfrm>
+            <a:off x="2857500" y="514350"/>
+            <a:ext cx="3429000" cy="2571750"/>
+          </a:xfrm>
+          <a:custGeom>
+            <a:avLst/>
+            <a:gdLst/>
+            <a:ahLst/>
+            <a:cxnLst/>
+            <a:rect l="l" t="t" r="r" b="b"/>
+            <a:pathLst>
+              <a:path w="120000" h="120000" extrusionOk="0">
+                <a:moveTo>
+                  <a:pt x="0" y="0"/>
+                </a:moveTo>
+                <a:lnTo>
+                  <a:pt x="120000" y="0"/>
+                </a:lnTo>
+                <a:lnTo>
+                  <a:pt x="120000" y="120000"/>
+                </a:lnTo>
+                <a:lnTo>
+                  <a:pt x="0" y="120000"/>
+                </a:lnTo>
+                <a:close/>
+              </a:path>
+            </a:pathLst>
+          </a:custGeom>
+        </p:spPr>
+      </p:sp>
+      <p:sp>
+        <p:nvSpPr>
+          <p:cNvPr id="2" name="Slide Number Placeholder 1">
+            <a:extLst>
+              <a:ext uri="{FF2B5EF4-FFF2-40B4-BE49-F238E27FC236}">
+                <a16:creationId xmlns:a16="http://schemas.microsoft.com/office/drawing/2014/main" id="{9931AA56-055E-85F7-4327-B0CD8231DBFB}"/>
+              </a:ext>
+            </a:extLst>
+          </p:cNvPr>
+          <p:cNvSpPr>
+            <a:spLocks noGrp="1"/>
+          </p:cNvSpPr>
+          <p:nvPr>
+            <p:ph type="sldNum" idx="12"/>
+          </p:nvPr>
+        </p:nvSpPr>
+        <p:spPr/>
+        <p:txBody>
+          <a:bodyPr/>
+          <a:lstStyle/>
+          <a:p>
+            <a:pPr marL="0" marR="0" lvl="0" indent="0" algn="r" rtl="0">
+              <a:spcBef>
+                <a:spcPts val="0"/>
+              </a:spcBef>
+              <a:spcAft>
+                <a:spcPts val="0"/>
+              </a:spcAft>
+              <a:buNone/>
+            </a:pPr>
+            <a:fld id="{00000000-1234-1234-1234-123412341234}" type="slidenum">
+              <a:rPr lang="en-US" sz="1200" b="0" i="0" u="none" strike="noStrike" cap="none" smtClean="0">
+                <a:solidFill>
+                  <a:schemeClr val="dk1"/>
+                </a:solidFill>
+                <a:latin typeface="Calibri"/>
+                <a:ea typeface="Calibri"/>
+                <a:cs typeface="Calibri"/>
+                <a:sym typeface="Calibri"/>
+              </a:rPr>
+              <a:t>5</a:t>
+            </a:fld>
+            <a:endParaRPr lang="en-US" sz="1200" b="0" i="0" u="none" strike="noStrike" cap="none">
+              <a:solidFill>
+                <a:schemeClr val="dk1"/>
+              </a:solidFill>
+              <a:latin typeface="Calibri"/>
+              <a:ea typeface="Calibri"/>
+              <a:cs typeface="Calibri"/>
+              <a:sym typeface="Calibri"/>
+            </a:endParaRPr>
+          </a:p>
+        </p:txBody>
+      </p:sp>
+    </p:spTree>
+    <p:extLst>
+      <p:ext uri="{BB962C8B-B14F-4D97-AF65-F5344CB8AC3E}">
+        <p14:creationId xmlns:p14="http://schemas.microsoft.com/office/powerpoint/2010/main" val="3994377467"/>
+      </p:ext>
+    </p:extLst>
+  </p:cSld>
+  <p:clrMapOvr>
+    <a:masterClrMapping/>
+  </p:clrMapOvr>
+</p:notes>
+</file>
+
+<file path=ppt/notesSlides/notesSlide7.xml><?xml version="1.0" encoding="utf-8"?>
 <p:notes xmlns:a="http://schemas.openxmlformats.org/drawingml/2006/main" xmlns:r="http://schemas.openxmlformats.org/officeDocument/2006/relationships" xmlns:p="http://schemas.openxmlformats.org/presentationml/2006/main" showMasterSp="0" showMasterPhAnim="0">
   <p:cSld>
     <p:spTree>
@@ -5714,7 +6682,7 @@
             </a:pPr>
             <a:fld id="{00000000-1234-1234-1234-123412341234}" type="slidenum">
               <a:rPr lang="en-US"/>
-              <a:t>5</a:t>
+              <a:t>6</a:t>
             </a:fld>
             <a:endParaRPr/>
           </a:p>
@@ -5733,7 +6701,7 @@
 </p:notes>
 </file>
 
-<file path=ppt/notesSlides/notesSlide7.xml><?xml version="1.0" encoding="utf-8"?>
+<file path=ppt/notesSlides/notesSlide8.xml><?xml version="1.0" encoding="utf-8"?>
 <p:notes xmlns:a="http://schemas.openxmlformats.org/drawingml/2006/main" xmlns:r="http://schemas.openxmlformats.org/officeDocument/2006/relationships" xmlns:p="http://schemas.openxmlformats.org/presentationml/2006/main" showMasterSp="0" showMasterPhAnim="0">
   <p:cSld>
     <p:spTree>
@@ -6027,6 +6995,316 @@
             </a:endParaRPr>
           </a:p>
           <a:p>
+            <a:pPr marL="0" lvl="0" indent="0" algn="l" rtl="0">
+              <a:spcBef>
+                <a:spcPts val="0"/>
+              </a:spcBef>
+              <a:spcAft>
+                <a:spcPts val="0"/>
+              </a:spcAft>
+              <a:buNone/>
+            </a:pPr>
+            <a:r>
+              <a:rPr lang="en-US" dirty="0"/>
+              <a:t>Camera parameters:</a:t>
+            </a:r>
+          </a:p>
+          <a:p>
+            <a:pPr>
+              <a:buFontTx/>
+              <a:buChar char="-"/>
+            </a:pPr>
+            <a:r>
+              <a:rPr lang="en-US" sz="1200" b="1" i="0" u="none" strike="noStrike" cap="none" dirty="0" err="1">
+                <a:solidFill>
+                  <a:schemeClr val="dk1"/>
+                </a:solidFill>
+                <a:effectLst/>
+                <a:latin typeface="Calibri"/>
+                <a:ea typeface="Calibri"/>
+                <a:cs typeface="Calibri"/>
+                <a:sym typeface="Calibri"/>
+              </a:rPr>
+              <a:t>fov</a:t>
+            </a:r>
+            <a:r>
+              <a:rPr lang="en-US" sz="1200" b="1" i="0" u="none" strike="noStrike" cap="none" dirty="0">
+                <a:solidFill>
+                  <a:schemeClr val="dk1"/>
+                </a:solidFill>
+                <a:effectLst/>
+                <a:latin typeface="Calibri"/>
+                <a:ea typeface="Calibri"/>
+                <a:cs typeface="Calibri"/>
+                <a:sym typeface="Calibri"/>
+              </a:rPr>
+              <a:t> </a:t>
+            </a:r>
+            <a:r>
+              <a:rPr lang="en-US" sz="1200" b="0" i="0" u="none" strike="noStrike" cap="none" dirty="0">
+                <a:solidFill>
+                  <a:schemeClr val="dk1"/>
+                </a:solidFill>
+                <a:effectLst/>
+                <a:latin typeface="Calibri"/>
+                <a:ea typeface="Calibri"/>
+                <a:cs typeface="Calibri"/>
+                <a:sym typeface="Calibri"/>
+              </a:rPr>
+              <a:t>is short for field of view. In this case 75 degrees in the vertical dimension. Note that most angles in three.js are in radians but for some reason the perspective camera takes degrees.</a:t>
+            </a:r>
+          </a:p>
+          <a:p>
+            <a:pPr>
+              <a:buFontTx/>
+              <a:buChar char="-"/>
+            </a:pPr>
+            <a:r>
+              <a:rPr lang="en-US" sz="1200" b="1" i="0" u="none" strike="noStrike" cap="none" dirty="0">
+                <a:solidFill>
+                  <a:schemeClr val="dk1"/>
+                </a:solidFill>
+                <a:effectLst/>
+                <a:latin typeface="Calibri"/>
+                <a:ea typeface="Calibri"/>
+                <a:cs typeface="Calibri"/>
+                <a:sym typeface="Calibri"/>
+              </a:rPr>
+              <a:t>aspect </a:t>
+            </a:r>
+            <a:r>
+              <a:rPr lang="en-US" sz="1200" b="0" i="0" u="none" strike="noStrike" cap="none" dirty="0">
+                <a:solidFill>
+                  <a:schemeClr val="dk1"/>
+                </a:solidFill>
+                <a:effectLst/>
+                <a:latin typeface="Calibri"/>
+                <a:ea typeface="Calibri"/>
+                <a:cs typeface="Calibri"/>
+                <a:sym typeface="Calibri"/>
+              </a:rPr>
+              <a:t>is the display aspect of the canvas. We'll go over the details </a:t>
+            </a:r>
+            <a:r>
+              <a:rPr lang="en-US" sz="1200" b="0" i="0" u="none" strike="noStrike" cap="none" dirty="0">
+                <a:solidFill>
+                  <a:schemeClr val="dk1"/>
+                </a:solidFill>
+                <a:effectLst/>
+                <a:latin typeface="Calibri"/>
+                <a:ea typeface="Calibri"/>
+                <a:cs typeface="Calibri"/>
+                <a:sym typeface="Calibri"/>
+                <a:hlinkClick r:id="rId3"/>
+              </a:rPr>
+              <a:t>in another article</a:t>
+            </a:r>
+            <a:r>
+              <a:rPr lang="en-US" sz="1200" b="0" i="0" u="none" strike="noStrike" cap="none" dirty="0">
+                <a:solidFill>
+                  <a:schemeClr val="dk1"/>
+                </a:solidFill>
+                <a:effectLst/>
+                <a:latin typeface="Calibri"/>
+                <a:ea typeface="Calibri"/>
+                <a:cs typeface="Calibri"/>
+                <a:sym typeface="Calibri"/>
+              </a:rPr>
+              <a:t> but by default a canvas is 300x150 pixels which makes the aspect 300/150 or 2.</a:t>
+            </a:r>
+          </a:p>
+          <a:p>
+            <a:pPr>
+              <a:buFontTx/>
+              <a:buChar char="-"/>
+            </a:pPr>
+            <a:r>
+              <a:rPr lang="en-US" sz="1200" b="1" i="0" u="none" strike="noStrike" cap="none" dirty="0">
+                <a:solidFill>
+                  <a:schemeClr val="dk1"/>
+                </a:solidFill>
+                <a:effectLst/>
+                <a:latin typeface="Calibri"/>
+                <a:ea typeface="Calibri"/>
+                <a:cs typeface="Calibri"/>
+                <a:sym typeface="Calibri"/>
+              </a:rPr>
+              <a:t>near </a:t>
+            </a:r>
+            <a:r>
+              <a:rPr lang="en-US" sz="1200" b="0" i="0" u="none" strike="noStrike" cap="none" dirty="0">
+                <a:solidFill>
+                  <a:schemeClr val="dk1"/>
+                </a:solidFill>
+                <a:effectLst/>
+                <a:latin typeface="Calibri"/>
+                <a:ea typeface="Calibri"/>
+                <a:cs typeface="Calibri"/>
+                <a:sym typeface="Calibri"/>
+              </a:rPr>
+              <a:t>and </a:t>
+            </a:r>
+            <a:r>
+              <a:rPr lang="en-US" sz="1200" b="1" i="0" u="none" strike="noStrike" cap="none" dirty="0">
+                <a:solidFill>
+                  <a:schemeClr val="dk1"/>
+                </a:solidFill>
+                <a:effectLst/>
+                <a:latin typeface="Calibri"/>
+                <a:ea typeface="Calibri"/>
+                <a:cs typeface="Calibri"/>
+                <a:sym typeface="Calibri"/>
+              </a:rPr>
+              <a:t>far </a:t>
+            </a:r>
+            <a:r>
+              <a:rPr lang="en-US" sz="1200" b="0" i="0" u="none" strike="noStrike" cap="none" dirty="0">
+                <a:solidFill>
+                  <a:schemeClr val="dk1"/>
+                </a:solidFill>
+                <a:effectLst/>
+                <a:latin typeface="Calibri"/>
+                <a:ea typeface="Calibri"/>
+                <a:cs typeface="Calibri"/>
+                <a:sym typeface="Calibri"/>
+              </a:rPr>
+              <a:t>represent the space in front of the camera that will be rendered. Anything before that range or after that range will be clipped (not drawn).</a:t>
+            </a:r>
+          </a:p>
+          <a:p>
+            <a:pPr>
+              <a:buFontTx/>
+              <a:buChar char="-"/>
+            </a:pPr>
+            <a:r>
+              <a:rPr lang="en-US" sz="1200" b="0" i="0" u="none" strike="noStrike" cap="none" dirty="0">
+                <a:solidFill>
+                  <a:schemeClr val="dk1"/>
+                </a:solidFill>
+                <a:effectLst/>
+                <a:latin typeface="Calibri"/>
+                <a:ea typeface="Calibri"/>
+                <a:cs typeface="Calibri"/>
+                <a:sym typeface="Calibri"/>
+              </a:rPr>
+              <a:t>The height of the near and far planes are determined by the field of view. The width of both planes is determined by the field of view and the aspect.</a:t>
+            </a:r>
+          </a:p>
+          <a:p>
+            <a:pPr>
+              <a:buFontTx/>
+              <a:buChar char="-"/>
+            </a:pPr>
+            <a:r>
+              <a:rPr lang="en-US" sz="1200" b="0" i="0" u="none" strike="noStrike" cap="none" dirty="0">
+                <a:solidFill>
+                  <a:schemeClr val="dk1"/>
+                </a:solidFill>
+                <a:effectLst/>
+                <a:latin typeface="Calibri"/>
+                <a:ea typeface="Calibri"/>
+                <a:cs typeface="Calibri"/>
+                <a:sym typeface="Calibri"/>
+              </a:rPr>
+              <a:t>Anything inside the defined frustum will be drawn. Anything outside will not.</a:t>
+            </a:r>
+          </a:p>
+          <a:p>
+            <a:pPr>
+              <a:buFontTx/>
+              <a:buChar char="-"/>
+            </a:pPr>
+            <a:r>
+              <a:rPr lang="en-US" sz="1200" b="0" i="0" u="none" strike="noStrike" cap="none" dirty="0">
+                <a:solidFill>
+                  <a:schemeClr val="dk1"/>
+                </a:solidFill>
+                <a:effectLst/>
+                <a:latin typeface="Calibri"/>
+                <a:ea typeface="Calibri"/>
+                <a:cs typeface="Calibri"/>
+                <a:sym typeface="Calibri"/>
+              </a:rPr>
+              <a:t>The camera defaults to looking down the -Z axis with +Y up. We'll put our cube at the origin so we need to move the camera back a little from the origin in order to see anything.</a:t>
+            </a:r>
+          </a:p>
+          <a:p>
+            <a:pPr marL="0" lvl="0" indent="0" algn="l" rtl="0">
+              <a:spcBef>
+                <a:spcPts val="0"/>
+              </a:spcBef>
+              <a:spcAft>
+                <a:spcPts val="0"/>
+              </a:spcAft>
+              <a:buNone/>
+            </a:pPr>
+            <a:endParaRPr lang="en-US" dirty="0"/>
+          </a:p>
+          <a:p>
+            <a:pPr marL="0" lvl="0" indent="0" algn="l" rtl="0">
+              <a:spcBef>
+                <a:spcPts val="0"/>
+              </a:spcBef>
+              <a:spcAft>
+                <a:spcPts val="0"/>
+              </a:spcAft>
+              <a:buNone/>
+            </a:pPr>
+            <a:r>
+              <a:rPr lang="en-US" dirty="0"/>
+              <a:t>Coordinate system:</a:t>
+            </a:r>
+          </a:p>
+          <a:p>
+            <a:pPr marL="0" lvl="0" indent="0" algn="l" rtl="0">
+              <a:spcBef>
+                <a:spcPts val="0"/>
+              </a:spcBef>
+              <a:spcAft>
+                <a:spcPts val="0"/>
+              </a:spcAft>
+              <a:buNone/>
+            </a:pPr>
+            <a:r>
+              <a:rPr lang="en-US" sz="1200" b="0" i="0" u="none" strike="noStrike" cap="none" dirty="0">
+                <a:solidFill>
+                  <a:schemeClr val="dk1"/>
+                </a:solidFill>
+                <a:effectLst/>
+                <a:latin typeface="Calibri"/>
+                <a:ea typeface="Calibri"/>
+                <a:cs typeface="Calibri"/>
+                <a:sym typeface="Calibri"/>
+              </a:rPr>
+              <a:t>In the diagram above we can see our camera is at z = 2. It's looking down the -Z axis. Our frustum starts 0.1 units from the front of the camera and goes to 5 units in front of the camera. Because in this diagram we are looking down, the field of view is affected by the aspect. Our canvas is twice as wide as it is tall so across the canvas the field of view will be much wider than our specified 75 degrees which is the vertical field of view.</a:t>
+            </a:r>
+            <a:endParaRPr lang="en-US" dirty="0"/>
+          </a:p>
+          <a:p>
+            <a:endParaRPr lang="en-US" sz="1200" b="0" i="0" u="none" strike="noStrike" cap="none" dirty="0">
+              <a:solidFill>
+                <a:schemeClr val="dk1"/>
+              </a:solidFill>
+              <a:effectLst/>
+              <a:latin typeface="Calibri"/>
+              <a:ea typeface="Calibri"/>
+              <a:cs typeface="Calibri"/>
+              <a:sym typeface="Calibri"/>
+            </a:endParaRPr>
+          </a:p>
+          <a:p>
+            <a:endParaRPr lang="en-US" sz="1200" b="0" i="0" u="none" strike="noStrike" cap="none" dirty="0">
+              <a:solidFill>
+                <a:schemeClr val="dk1"/>
+              </a:solidFill>
+              <a:effectLst/>
+              <a:latin typeface="Calibri"/>
+              <a:ea typeface="Calibri"/>
+              <a:cs typeface="Calibri"/>
+              <a:sym typeface="Calibri"/>
+            </a:endParaRPr>
+          </a:p>
+          <a:p>
             <a:r>
               <a:rPr lang="en-US" sz="1200" b="0" i="0" u="none" strike="noStrike" cap="none" dirty="0">
                 <a:solidFill>
@@ -6842,7 +8120,7 @@
             </a:pPr>
             <a:fld id="{00000000-1234-1234-1234-123412341234}" type="slidenum">
               <a:rPr lang="en-US"/>
-              <a:t>6</a:t>
+              <a:t>7</a:t>
             </a:fld>
             <a:endParaRPr/>
           </a:p>
@@ -6861,7 +8139,7 @@
 </p:notes>
 </file>
 
-<file path=ppt/notesSlides/notesSlide8.xml><?xml version="1.0" encoding="utf-8"?>
+<file path=ppt/notesSlides/notesSlide9.xml><?xml version="1.0" encoding="utf-8"?>
 <p:notes xmlns:a="http://schemas.openxmlformats.org/drawingml/2006/main" xmlns:r="http://schemas.openxmlformats.org/officeDocument/2006/relationships" xmlns:p="http://schemas.openxmlformats.org/presentationml/2006/main" showMasterSp="0" showMasterPhAnim="0">
   <p:cSld>
     <p:spTree>
@@ -7357,7 +8635,7 @@
             </a:pPr>
             <a:fld id="{00000000-1234-1234-1234-123412341234}" type="slidenum">
               <a:rPr lang="en-US"/>
-              <a:t>7</a:t>
+              <a:t>8</a:t>
             </a:fld>
             <a:endParaRPr/>
           </a:p>
@@ -7367,187 +8645,6 @@
     <p:extLst>
       <p:ext uri="{BB962C8B-B14F-4D97-AF65-F5344CB8AC3E}">
         <p14:creationId xmlns:p14="http://schemas.microsoft.com/office/powerpoint/2010/main" val="3698332446"/>
-      </p:ext>
-    </p:extLst>
-  </p:cSld>
-  <p:clrMapOvr>
-    <a:masterClrMapping/>
-  </p:clrMapOvr>
-</p:notes>
-</file>
-
-<file path=ppt/notesSlides/notesSlide9.xml><?xml version="1.0" encoding="utf-8"?>
-<p:notes xmlns:a="http://schemas.openxmlformats.org/drawingml/2006/main" xmlns:r="http://schemas.openxmlformats.org/officeDocument/2006/relationships" xmlns:p="http://schemas.openxmlformats.org/presentationml/2006/main" showMasterSp="0" showMasterPhAnim="0">
-  <p:cSld>
-    <p:spTree>
-      <p:nvGrpSpPr>
-        <p:cNvPr id="1" name="Shape 121">
-          <a:extLst>
-            <a:ext uri="{FF2B5EF4-FFF2-40B4-BE49-F238E27FC236}">
-              <a16:creationId xmlns:a16="http://schemas.microsoft.com/office/drawing/2014/main" id="{869C29C0-1EDE-E6EB-A583-B639F9CEC6F3}"/>
-            </a:ext>
-          </a:extLst>
-        </p:cNvPr>
-        <p:cNvGrpSpPr/>
-        <p:nvPr/>
-      </p:nvGrpSpPr>
-      <p:grpSpPr>
-        <a:xfrm>
-          <a:off x="0" y="0"/>
-          <a:ext cx="0" cy="0"/>
-          <a:chOff x="0" y="0"/>
-          <a:chExt cx="0" cy="0"/>
-        </a:xfrm>
-      </p:grpSpPr>
-      <p:sp>
-        <p:nvSpPr>
-          <p:cNvPr id="122" name="Google Shape;122;p2:notes">
-            <a:extLst>
-              <a:ext uri="{FF2B5EF4-FFF2-40B4-BE49-F238E27FC236}">
-                <a16:creationId xmlns:a16="http://schemas.microsoft.com/office/drawing/2014/main" id="{32318B2D-C694-E16D-1FC9-D908E9E9F585}"/>
-              </a:ext>
-            </a:extLst>
-          </p:cNvPr>
-          <p:cNvSpPr txBox="1">
-            <a:spLocks noGrp="1"/>
-          </p:cNvSpPr>
-          <p:nvPr>
-            <p:ph type="body" idx="1"/>
-          </p:nvPr>
-        </p:nvSpPr>
-        <p:spPr>
-          <a:xfrm>
-            <a:off x="914400" y="3257550"/>
-            <a:ext cx="7315200" cy="3086100"/>
-          </a:xfrm>
-          <a:prstGeom prst="rect">
-            <a:avLst/>
-          </a:prstGeom>
-        </p:spPr>
-        <p:txBody>
-          <a:bodyPr spcFirstLastPara="1" wrap="square" lIns="91425" tIns="45700" rIns="91425" bIns="45700" anchor="t" anchorCtr="0">
-            <a:noAutofit/>
-          </a:bodyPr>
-          <a:lstStyle/>
-          <a:p>
-            <a:pPr marL="0" lvl="0" indent="0" algn="l" rtl="0">
-              <a:spcBef>
-                <a:spcPts val="0"/>
-              </a:spcBef>
-              <a:spcAft>
-                <a:spcPts val="0"/>
-              </a:spcAft>
-              <a:buNone/>
-            </a:pPr>
-            <a:endParaRPr/>
-          </a:p>
-        </p:txBody>
-      </p:sp>
-      <p:sp>
-        <p:nvSpPr>
-          <p:cNvPr id="123" name="Google Shape;123;p2:notes">
-            <a:extLst>
-              <a:ext uri="{FF2B5EF4-FFF2-40B4-BE49-F238E27FC236}">
-                <a16:creationId xmlns:a16="http://schemas.microsoft.com/office/drawing/2014/main" id="{2AD9BA31-65E1-72B9-A96D-C2EE81F91F88}"/>
-              </a:ext>
-            </a:extLst>
-          </p:cNvPr>
-          <p:cNvSpPr>
-            <a:spLocks noGrp="1" noRot="1" noChangeAspect="1"/>
-          </p:cNvSpPr>
-          <p:nvPr>
-            <p:ph type="sldImg" idx="2"/>
-          </p:nvPr>
-        </p:nvSpPr>
-        <p:spPr>
-          <a:xfrm>
-            <a:off x="2857500" y="514350"/>
-            <a:ext cx="3429000" cy="2571750"/>
-          </a:xfrm>
-          <a:custGeom>
-            <a:avLst/>
-            <a:gdLst/>
-            <a:ahLst/>
-            <a:cxnLst/>
-            <a:rect l="l" t="t" r="r" b="b"/>
-            <a:pathLst>
-              <a:path w="120000" h="120000" extrusionOk="0">
-                <a:moveTo>
-                  <a:pt x="0" y="0"/>
-                </a:moveTo>
-                <a:lnTo>
-                  <a:pt x="120000" y="0"/>
-                </a:lnTo>
-                <a:lnTo>
-                  <a:pt x="120000" y="120000"/>
-                </a:lnTo>
-                <a:lnTo>
-                  <a:pt x="0" y="120000"/>
-                </a:lnTo>
-                <a:close/>
-              </a:path>
-            </a:pathLst>
-          </a:custGeom>
-        </p:spPr>
-      </p:sp>
-      <p:sp>
-        <p:nvSpPr>
-          <p:cNvPr id="2" name="Slide Number Placeholder 1">
-            <a:extLst>
-              <a:ext uri="{FF2B5EF4-FFF2-40B4-BE49-F238E27FC236}">
-                <a16:creationId xmlns:a16="http://schemas.microsoft.com/office/drawing/2014/main" id="{DD7BA5CB-CDB3-3636-B010-D750980B3C08}"/>
-              </a:ext>
-            </a:extLst>
-          </p:cNvPr>
-          <p:cNvSpPr>
-            <a:spLocks noGrp="1"/>
-          </p:cNvSpPr>
-          <p:nvPr>
-            <p:ph type="sldNum" idx="12"/>
-          </p:nvPr>
-        </p:nvSpPr>
-        <p:spPr/>
-        <p:txBody>
-          <a:bodyPr/>
-          <a:lstStyle/>
-          <a:p>
-            <a:pPr marL="0" marR="0" lvl="0" indent="0" algn="r" rtl="0">
-              <a:spcBef>
-                <a:spcPts val="0"/>
-              </a:spcBef>
-              <a:spcAft>
-                <a:spcPts val="0"/>
-              </a:spcAft>
-              <a:buNone/>
-            </a:pPr>
-            <a:fld id="{00000000-1234-1234-1234-123412341234}" type="slidenum">
-              <a:rPr lang="en-US" sz="1200" b="0" i="0" u="none" strike="noStrike" cap="none" smtClean="0">
-                <a:solidFill>
-                  <a:schemeClr val="dk1"/>
-                </a:solidFill>
-                <a:latin typeface="Calibri"/>
-                <a:ea typeface="Calibri"/>
-                <a:cs typeface="Calibri"/>
-                <a:sym typeface="Calibri"/>
-              </a:rPr>
-              <a:t>8</a:t>
-            </a:fld>
-            <a:endParaRPr lang="en-US" sz="1200" b="0" i="0" u="none" strike="noStrike" cap="none">
-              <a:solidFill>
-                <a:schemeClr val="dk1"/>
-              </a:solidFill>
-              <a:latin typeface="Calibri"/>
-              <a:ea typeface="Calibri"/>
-              <a:cs typeface="Calibri"/>
-              <a:sym typeface="Calibri"/>
-            </a:endParaRPr>
-          </a:p>
-        </p:txBody>
-      </p:sp>
-    </p:spTree>
-    <p:extLst>
-      <p:ext uri="{BB962C8B-B14F-4D97-AF65-F5344CB8AC3E}">
-        <p14:creationId xmlns:p14="http://schemas.microsoft.com/office/powerpoint/2010/main" val="1645442999"/>
       </p:ext>
     </p:extLst>
   </p:cSld>
@@ -16989,6 +18086,186 @@
   <p:cSld>
     <p:spTree>
       <p:nvGrpSpPr>
+        <p:cNvPr id="1" name="Shape 124">
+          <a:extLst>
+            <a:ext uri="{FF2B5EF4-FFF2-40B4-BE49-F238E27FC236}">
+              <a16:creationId xmlns:a16="http://schemas.microsoft.com/office/drawing/2014/main" id="{7065FD35-E86A-5FD5-06D1-1F1C4EE73A58}"/>
+            </a:ext>
+          </a:extLst>
+        </p:cNvPr>
+        <p:cNvGrpSpPr/>
+        <p:nvPr/>
+      </p:nvGrpSpPr>
+      <p:grpSpPr>
+        <a:xfrm>
+          <a:off x="0" y="0"/>
+          <a:ext cx="0" cy="0"/>
+          <a:chOff x="0" y="0"/>
+          <a:chExt cx="0" cy="0"/>
+        </a:xfrm>
+      </p:grpSpPr>
+      <p:sp>
+        <p:nvSpPr>
+          <p:cNvPr id="125" name="Google Shape;125;p2">
+            <a:extLst>
+              <a:ext uri="{FF2B5EF4-FFF2-40B4-BE49-F238E27FC236}">
+                <a16:creationId xmlns:a16="http://schemas.microsoft.com/office/drawing/2014/main" id="{888B1380-106D-6975-2288-4CA700F15FE5}"/>
+              </a:ext>
+            </a:extLst>
+          </p:cNvPr>
+          <p:cNvSpPr txBox="1">
+            <a:spLocks noGrp="1"/>
+          </p:cNvSpPr>
+          <p:nvPr>
+            <p:ph type="title"/>
+          </p:nvPr>
+        </p:nvSpPr>
+        <p:spPr>
+          <a:xfrm>
+            <a:off x="1219200" y="2971800"/>
+            <a:ext cx="6858000" cy="1066800"/>
+          </a:xfrm>
+          <a:prstGeom prst="rect">
+            <a:avLst/>
+          </a:prstGeom>
+          <a:noFill/>
+          <a:ln>
+            <a:noFill/>
+          </a:ln>
+        </p:spPr>
+        <p:txBody>
+          <a:bodyPr spcFirstLastPara="1" wrap="square" lIns="91425" tIns="45700" rIns="91425" bIns="45700" anchor="t" anchorCtr="0">
+            <a:normAutofit/>
+          </a:bodyPr>
+          <a:lstStyle/>
+          <a:p>
+            <a:pPr marL="0" lvl="0" indent="0" algn="r" rtl="0">
+              <a:spcBef>
+                <a:spcPts val="0"/>
+              </a:spcBef>
+              <a:spcAft>
+                <a:spcPts val="0"/>
+              </a:spcAft>
+              <a:buClr>
+                <a:schemeClr val="dk2"/>
+              </a:buClr>
+              <a:buSzPts val="3200"/>
+              <a:buFont typeface="Bookman Old Style"/>
+              <a:buNone/>
+            </a:pPr>
+            <a:r>
+              <a:rPr lang="en-US" dirty="0"/>
+              <a:t>Primitives</a:t>
+            </a:r>
+            <a:endParaRPr dirty="0"/>
+          </a:p>
+        </p:txBody>
+      </p:sp>
+      <p:sp>
+        <p:nvSpPr>
+          <p:cNvPr id="126" name="Google Shape;126;p2">
+            <a:extLst>
+              <a:ext uri="{FF2B5EF4-FFF2-40B4-BE49-F238E27FC236}">
+                <a16:creationId xmlns:a16="http://schemas.microsoft.com/office/drawing/2014/main" id="{79918B0D-05F7-92F4-7E62-FDBEEA155BF9}"/>
+              </a:ext>
+            </a:extLst>
+          </p:cNvPr>
+          <p:cNvSpPr txBox="1">
+            <a:spLocks noGrp="1"/>
+          </p:cNvSpPr>
+          <p:nvPr>
+            <p:ph type="body" idx="1"/>
+          </p:nvPr>
+        </p:nvSpPr>
+        <p:spPr>
+          <a:xfrm>
+            <a:off x="1295400" y="4267200"/>
+            <a:ext cx="6781800" cy="1143000"/>
+          </a:xfrm>
+          <a:prstGeom prst="rect">
+            <a:avLst/>
+          </a:prstGeom>
+          <a:noFill/>
+          <a:ln>
+            <a:noFill/>
+          </a:ln>
+        </p:spPr>
+        <p:txBody>
+          <a:bodyPr spcFirstLastPara="1" wrap="square" lIns="91425" tIns="45700" rIns="91425" bIns="45700" anchor="t" anchorCtr="0">
+            <a:normAutofit/>
+          </a:bodyPr>
+          <a:lstStyle/>
+          <a:p>
+            <a:pPr marL="0" lvl="0" indent="0" algn="r" rtl="0">
+              <a:spcBef>
+                <a:spcPts val="0"/>
+              </a:spcBef>
+              <a:spcAft>
+                <a:spcPts val="0"/>
+              </a:spcAft>
+              <a:buSzPts val="1520"/>
+              <a:buNone/>
+            </a:pPr>
+            <a:endParaRPr/>
+          </a:p>
+        </p:txBody>
+      </p:sp>
+      <p:sp>
+        <p:nvSpPr>
+          <p:cNvPr id="4" name="Slide Number Placeholder 3">
+            <a:extLst>
+              <a:ext uri="{FF2B5EF4-FFF2-40B4-BE49-F238E27FC236}">
+                <a16:creationId xmlns:a16="http://schemas.microsoft.com/office/drawing/2014/main" id="{12F15D5C-24CE-371F-4CAA-0CA4AE30F53D}"/>
+              </a:ext>
+            </a:extLst>
+          </p:cNvPr>
+          <p:cNvSpPr>
+            <a:spLocks noGrp="1"/>
+          </p:cNvSpPr>
+          <p:nvPr>
+            <p:ph type="sldNum" idx="12"/>
+          </p:nvPr>
+        </p:nvSpPr>
+        <p:spPr/>
+        <p:txBody>
+          <a:bodyPr/>
+          <a:lstStyle/>
+          <a:p>
+            <a:pPr marL="0" lvl="0" indent="0" algn="l" rtl="0">
+              <a:spcBef>
+                <a:spcPts val="0"/>
+              </a:spcBef>
+              <a:spcAft>
+                <a:spcPts val="0"/>
+              </a:spcAft>
+              <a:buNone/>
+            </a:pPr>
+            <a:fld id="{00000000-1234-1234-1234-123412341234}" type="slidenum">
+              <a:rPr lang="en-US" smtClean="0"/>
+              <a:t>9</a:t>
+            </a:fld>
+            <a:endParaRPr lang="en-US"/>
+          </a:p>
+        </p:txBody>
+      </p:sp>
+    </p:spTree>
+    <p:extLst>
+      <p:ext uri="{BB962C8B-B14F-4D97-AF65-F5344CB8AC3E}">
+        <p14:creationId xmlns:p14="http://schemas.microsoft.com/office/powerpoint/2010/main" val="3222352052"/>
+      </p:ext>
+    </p:extLst>
+  </p:cSld>
+  <p:clrMapOvr>
+    <a:masterClrMapping/>
+  </p:clrMapOvr>
+</p:sld>
+</file>
+
+<file path=ppt/slides/slide11.xml><?xml version="1.0" encoding="utf-8"?>
+<p:sld xmlns:a="http://schemas.openxmlformats.org/drawingml/2006/main" xmlns:r="http://schemas.openxmlformats.org/officeDocument/2006/relationships" xmlns:p="http://schemas.openxmlformats.org/presentationml/2006/main">
+  <p:cSld>
+    <p:spTree>
+      <p:nvGrpSpPr>
         <p:cNvPr id="1" name="Shape 145">
           <a:extLst>
             <a:ext uri="{FF2B5EF4-FFF2-40B4-BE49-F238E27FC236}">
@@ -17527,6 +18804,57 @@
           </a:prstGeom>
         </p:spPr>
       </p:pic>
+      <mc:AlternateContent xmlns:mc="http://schemas.openxmlformats.org/markup-compatibility/2006" xmlns:p14="http://schemas.microsoft.com/office/powerpoint/2010/main">
+        <mc:Choice Requires="p14">
+          <p:contentPart p14:bwMode="auto" r:id="rId4">
+            <p14:nvContentPartPr>
+              <p14:cNvPr id="2" name="Ink 1">
+                <a:extLst>
+                  <a:ext uri="{FF2B5EF4-FFF2-40B4-BE49-F238E27FC236}">
+                    <a16:creationId xmlns:a16="http://schemas.microsoft.com/office/drawing/2014/main" id="{ABD322BA-735D-3987-DE4A-07255F037A38}"/>
+                  </a:ext>
+                </a:extLst>
+              </p14:cNvPr>
+              <p14:cNvContentPartPr/>
+              <p14:nvPr/>
+            </p14:nvContentPartPr>
+            <p14:xfrm>
+              <a:off x="1229040" y="1643040"/>
+              <a:ext cx="5739120" cy="3876840"/>
+            </p14:xfrm>
+          </p:contentPart>
+        </mc:Choice>
+        <mc:Fallback xmlns="">
+          <p:pic>
+            <p:nvPicPr>
+              <p:cNvPr id="2" name="Ink 1">
+                <a:extLst>
+                  <a:ext uri="{FF2B5EF4-FFF2-40B4-BE49-F238E27FC236}">
+                    <a16:creationId xmlns:a16="http://schemas.microsoft.com/office/drawing/2014/main" id="{ABD322BA-735D-3987-DE4A-07255F037A38}"/>
+                  </a:ext>
+                </a:extLst>
+              </p:cNvPr>
+              <p:cNvPicPr/>
+              <p:nvPr/>
+            </p:nvPicPr>
+            <p:blipFill>
+              <a:blip r:embed="rId5"/>
+              <a:stretch>
+                <a:fillRect/>
+              </a:stretch>
+            </p:blipFill>
+            <p:spPr>
+              <a:xfrm>
+                <a:off x="1219680" y="1633680"/>
+                <a:ext cx="5757840" cy="3895560"/>
+              </a:xfrm>
+              <a:prstGeom prst="rect">
+                <a:avLst/>
+              </a:prstGeom>
+            </p:spPr>
+          </p:pic>
+        </mc:Fallback>
+      </mc:AlternateContent>
     </p:spTree>
     <p:extLst>
       <p:ext uri="{BB962C8B-B14F-4D97-AF65-F5344CB8AC3E}">
@@ -17540,7 +18868,7 @@
 </p:sld>
 </file>
 
-<file path=ppt/slides/slide11.xml><?xml version="1.0" encoding="utf-8"?>
+<file path=ppt/slides/slide12.xml><?xml version="1.0" encoding="utf-8"?>
 <p:sld xmlns:a="http://schemas.openxmlformats.org/drawingml/2006/main" xmlns:r="http://schemas.openxmlformats.org/officeDocument/2006/relationships" xmlns:p="http://schemas.openxmlformats.org/presentationml/2006/main">
   <p:cSld>
     <p:spTree>
@@ -19496,7 +20824,7 @@
 </p:sld>
 </file>
 
-<file path=ppt/slides/slide12.xml><?xml version="1.0" encoding="utf-8"?>
+<file path=ppt/slides/slide13.xml><?xml version="1.0" encoding="utf-8"?>
 <p:sld xmlns:a="http://schemas.openxmlformats.org/drawingml/2006/main" xmlns:r="http://schemas.openxmlformats.org/officeDocument/2006/relationships" xmlns:p="http://schemas.openxmlformats.org/presentationml/2006/main">
   <p:cSld>
     <p:spTree>
@@ -20146,7 +21474,7 @@
 </p:sld>
 </file>
 
-<file path=ppt/slides/slide13.xml><?xml version="1.0" encoding="utf-8"?>
+<file path=ppt/slides/slide14.xml><?xml version="1.0" encoding="utf-8"?>
 <p:sld xmlns:a="http://schemas.openxmlformats.org/drawingml/2006/main" xmlns:r="http://schemas.openxmlformats.org/officeDocument/2006/relationships" xmlns:p="http://schemas.openxmlformats.org/presentationml/2006/main">
   <p:cSld>
     <p:spTree>
@@ -20314,7 +21642,7 @@
             </a:pPr>
             <a:fld id="{00000000-1234-1234-1234-123412341234}" type="slidenum">
               <a:rPr lang="en-US" smtClean="0"/>
-              <a:t>12</a:t>
+              <a:t>13</a:t>
             </a:fld>
             <a:endParaRPr lang="en-US"/>
           </a:p>
@@ -20333,7 +21661,7 @@
 </p:sld>
 </file>
 
-<file path=ppt/slides/slide14.xml><?xml version="1.0" encoding="utf-8"?>
+<file path=ppt/slides/slide15.xml><?xml version="1.0" encoding="utf-8"?>
 <p:sld xmlns:a="http://schemas.openxmlformats.org/drawingml/2006/main" xmlns:r="http://schemas.openxmlformats.org/officeDocument/2006/relationships" xmlns:p="http://schemas.openxmlformats.org/presentationml/2006/main">
   <p:cSld>
     <p:spTree>
@@ -21568,7 +22896,7 @@
             </a:pPr>
             <a:r>
               <a:rPr lang="en-US" dirty="0"/>
-              <a:t>Creating a Scene</a:t>
+              <a:t>How to run the code?</a:t>
             </a:r>
             <a:endParaRPr dirty="0"/>
           </a:p>
@@ -21845,6 +23173,186 @@
 </file>
 
 <file path=ppt/slides/slide6.xml><?xml version="1.0" encoding="utf-8"?>
+<p:sld xmlns:a="http://schemas.openxmlformats.org/drawingml/2006/main" xmlns:r="http://schemas.openxmlformats.org/officeDocument/2006/relationships" xmlns:p="http://schemas.openxmlformats.org/presentationml/2006/main">
+  <p:cSld>
+    <p:spTree>
+      <p:nvGrpSpPr>
+        <p:cNvPr id="1" name="Shape 124">
+          <a:extLst>
+            <a:ext uri="{FF2B5EF4-FFF2-40B4-BE49-F238E27FC236}">
+              <a16:creationId xmlns:a16="http://schemas.microsoft.com/office/drawing/2014/main" id="{162E1F2C-9BE9-8CAC-89EB-F8BDB7BDCDD6}"/>
+            </a:ext>
+          </a:extLst>
+        </p:cNvPr>
+        <p:cNvGrpSpPr/>
+        <p:nvPr/>
+      </p:nvGrpSpPr>
+      <p:grpSpPr>
+        <a:xfrm>
+          <a:off x="0" y="0"/>
+          <a:ext cx="0" cy="0"/>
+          <a:chOff x="0" y="0"/>
+          <a:chExt cx="0" cy="0"/>
+        </a:xfrm>
+      </p:grpSpPr>
+      <p:sp>
+        <p:nvSpPr>
+          <p:cNvPr id="125" name="Google Shape;125;p2">
+            <a:extLst>
+              <a:ext uri="{FF2B5EF4-FFF2-40B4-BE49-F238E27FC236}">
+                <a16:creationId xmlns:a16="http://schemas.microsoft.com/office/drawing/2014/main" id="{43A76676-F320-09E4-2DE2-2284B72B1A17}"/>
+              </a:ext>
+            </a:extLst>
+          </p:cNvPr>
+          <p:cNvSpPr txBox="1">
+            <a:spLocks noGrp="1"/>
+          </p:cNvSpPr>
+          <p:nvPr>
+            <p:ph type="title"/>
+          </p:nvPr>
+        </p:nvSpPr>
+        <p:spPr>
+          <a:xfrm>
+            <a:off x="1219200" y="2971800"/>
+            <a:ext cx="6858000" cy="1066800"/>
+          </a:xfrm>
+          <a:prstGeom prst="rect">
+            <a:avLst/>
+          </a:prstGeom>
+          <a:noFill/>
+          <a:ln>
+            <a:noFill/>
+          </a:ln>
+        </p:spPr>
+        <p:txBody>
+          <a:bodyPr spcFirstLastPara="1" wrap="square" lIns="91425" tIns="45700" rIns="91425" bIns="45700" anchor="t" anchorCtr="0">
+            <a:normAutofit/>
+          </a:bodyPr>
+          <a:lstStyle/>
+          <a:p>
+            <a:pPr marL="0" lvl="0" indent="0" algn="r" rtl="0">
+              <a:spcBef>
+                <a:spcPts val="0"/>
+              </a:spcBef>
+              <a:spcAft>
+                <a:spcPts val="0"/>
+              </a:spcAft>
+              <a:buClr>
+                <a:schemeClr val="dk2"/>
+              </a:buClr>
+              <a:buSzPts val="3200"/>
+              <a:buFont typeface="Bookman Old Style"/>
+              <a:buNone/>
+            </a:pPr>
+            <a:r>
+              <a:rPr lang="en-US" dirty="0"/>
+              <a:t>Fundamentals</a:t>
+            </a:r>
+            <a:endParaRPr dirty="0"/>
+          </a:p>
+        </p:txBody>
+      </p:sp>
+      <p:sp>
+        <p:nvSpPr>
+          <p:cNvPr id="126" name="Google Shape;126;p2">
+            <a:extLst>
+              <a:ext uri="{FF2B5EF4-FFF2-40B4-BE49-F238E27FC236}">
+                <a16:creationId xmlns:a16="http://schemas.microsoft.com/office/drawing/2014/main" id="{C99817BA-0228-E677-E1DB-C013207F1A48}"/>
+              </a:ext>
+            </a:extLst>
+          </p:cNvPr>
+          <p:cNvSpPr txBox="1">
+            <a:spLocks noGrp="1"/>
+          </p:cNvSpPr>
+          <p:nvPr>
+            <p:ph type="body" idx="1"/>
+          </p:nvPr>
+        </p:nvSpPr>
+        <p:spPr>
+          <a:xfrm>
+            <a:off x="1295400" y="4267200"/>
+            <a:ext cx="6781800" cy="1143000"/>
+          </a:xfrm>
+          <a:prstGeom prst="rect">
+            <a:avLst/>
+          </a:prstGeom>
+          <a:noFill/>
+          <a:ln>
+            <a:noFill/>
+          </a:ln>
+        </p:spPr>
+        <p:txBody>
+          <a:bodyPr spcFirstLastPara="1" wrap="square" lIns="91425" tIns="45700" rIns="91425" bIns="45700" anchor="t" anchorCtr="0">
+            <a:normAutofit/>
+          </a:bodyPr>
+          <a:lstStyle/>
+          <a:p>
+            <a:pPr marL="0" lvl="0" indent="0" algn="r" rtl="0">
+              <a:spcBef>
+                <a:spcPts val="0"/>
+              </a:spcBef>
+              <a:spcAft>
+                <a:spcPts val="0"/>
+              </a:spcAft>
+              <a:buSzPts val="1520"/>
+              <a:buNone/>
+            </a:pPr>
+            <a:endParaRPr/>
+          </a:p>
+        </p:txBody>
+      </p:sp>
+      <p:sp>
+        <p:nvSpPr>
+          <p:cNvPr id="4" name="Slide Number Placeholder 3">
+            <a:extLst>
+              <a:ext uri="{FF2B5EF4-FFF2-40B4-BE49-F238E27FC236}">
+                <a16:creationId xmlns:a16="http://schemas.microsoft.com/office/drawing/2014/main" id="{8F70ADD3-4B1F-0BCB-8818-09EA4E24F478}"/>
+              </a:ext>
+            </a:extLst>
+          </p:cNvPr>
+          <p:cNvSpPr>
+            <a:spLocks noGrp="1"/>
+          </p:cNvSpPr>
+          <p:nvPr>
+            <p:ph type="sldNum" idx="12"/>
+          </p:nvPr>
+        </p:nvSpPr>
+        <p:spPr/>
+        <p:txBody>
+          <a:bodyPr/>
+          <a:lstStyle/>
+          <a:p>
+            <a:pPr marL="0" lvl="0" indent="0" algn="l" rtl="0">
+              <a:spcBef>
+                <a:spcPts val="0"/>
+              </a:spcBef>
+              <a:spcAft>
+                <a:spcPts val="0"/>
+              </a:spcAft>
+              <a:buNone/>
+            </a:pPr>
+            <a:fld id="{00000000-1234-1234-1234-123412341234}" type="slidenum">
+              <a:rPr lang="en-US" smtClean="0"/>
+              <a:t>5</a:t>
+            </a:fld>
+            <a:endParaRPr lang="en-US"/>
+          </a:p>
+        </p:txBody>
+      </p:sp>
+    </p:spTree>
+    <p:extLst>
+      <p:ext uri="{BB962C8B-B14F-4D97-AF65-F5344CB8AC3E}">
+        <p14:creationId xmlns:p14="http://schemas.microsoft.com/office/powerpoint/2010/main" val="1326700288"/>
+      </p:ext>
+    </p:extLst>
+  </p:cSld>
+  <p:clrMapOvr>
+    <a:masterClrMapping/>
+  </p:clrMapOvr>
+</p:sld>
+</file>
+
+<file path=ppt/slides/slide7.xml><?xml version="1.0" encoding="utf-8"?>
 <p:sld xmlns:a="http://schemas.openxmlformats.org/drawingml/2006/main" xmlns:r="http://schemas.openxmlformats.org/officeDocument/2006/relationships" xmlns:p="http://schemas.openxmlformats.org/presentationml/2006/main">
   <p:cSld>
     <p:spTree>
@@ -22144,6 +23652,57 @@
           </a:prstGeom>
         </p:spPr>
       </p:pic>
+      <mc:AlternateContent xmlns:mc="http://schemas.openxmlformats.org/markup-compatibility/2006">
+        <mc:Choice xmlns:p14="http://schemas.microsoft.com/office/powerpoint/2010/main" Requires="p14">
+          <p:contentPart p14:bwMode="auto" r:id="rId4">
+            <p14:nvContentPartPr>
+              <p14:cNvPr id="7" name="Ink 6">
+                <a:extLst>
+                  <a:ext uri="{FF2B5EF4-FFF2-40B4-BE49-F238E27FC236}">
+                    <a16:creationId xmlns:a16="http://schemas.microsoft.com/office/drawing/2014/main" id="{E453E216-6AA2-DCFF-4E8D-C2FF5B63E873}"/>
+                  </a:ext>
+                </a:extLst>
+              </p14:cNvPr>
+              <p14:cNvContentPartPr/>
+              <p14:nvPr/>
+            </p14:nvContentPartPr>
+            <p14:xfrm>
+              <a:off x="1405440" y="2030400"/>
+              <a:ext cx="5141880" cy="3955680"/>
+            </p14:xfrm>
+          </p:contentPart>
+        </mc:Choice>
+        <mc:Fallback>
+          <p:pic>
+            <p:nvPicPr>
+              <p:cNvPr id="7" name="Ink 6">
+                <a:extLst>
+                  <a:ext uri="{FF2B5EF4-FFF2-40B4-BE49-F238E27FC236}">
+                    <a16:creationId xmlns:a16="http://schemas.microsoft.com/office/drawing/2014/main" id="{E453E216-6AA2-DCFF-4E8D-C2FF5B63E873}"/>
+                  </a:ext>
+                </a:extLst>
+              </p:cNvPr>
+              <p:cNvPicPr/>
+              <p:nvPr/>
+            </p:nvPicPr>
+            <p:blipFill>
+              <a:blip r:embed="rId5"/>
+              <a:stretch>
+                <a:fillRect/>
+              </a:stretch>
+            </p:blipFill>
+            <p:spPr>
+              <a:xfrm>
+                <a:off x="1396080" y="2021040"/>
+                <a:ext cx="5160600" cy="3974400"/>
+              </a:xfrm>
+              <a:prstGeom prst="rect">
+                <a:avLst/>
+              </a:prstGeom>
+            </p:spPr>
+          </p:pic>
+        </mc:Fallback>
+      </mc:AlternateContent>
     </p:spTree>
     <p:extLst>
       <p:ext uri="{BB962C8B-B14F-4D97-AF65-F5344CB8AC3E}">
@@ -22157,7 +23716,7 @@
 </p:sld>
 </file>
 
-<file path=ppt/slides/slide7.xml><?xml version="1.0" encoding="utf-8"?>
+<file path=ppt/slides/slide8.xml><?xml version="1.0" encoding="utf-8"?>
 <p:sld xmlns:a="http://schemas.openxmlformats.org/drawingml/2006/main" xmlns:r="http://schemas.openxmlformats.org/officeDocument/2006/relationships" xmlns:p="http://schemas.openxmlformats.org/presentationml/2006/main">
   <p:cSld>
     <p:spTree>
@@ -23072,6 +24631,168 @@
           </a:prstGeom>
         </p:spPr>
       </p:pic>
+      <p:pic>
+        <p:nvPicPr>
+          <p:cNvPr id="2" name="Picture 1">
+            <a:extLst>
+              <a:ext uri="{FF2B5EF4-FFF2-40B4-BE49-F238E27FC236}">
+                <a16:creationId xmlns:a16="http://schemas.microsoft.com/office/drawing/2014/main" id="{BBBBEBCF-AA3E-1DD0-102B-BA919CE33AC2}"/>
+              </a:ext>
+            </a:extLst>
+          </p:cNvPr>
+          <p:cNvPicPr>
+            <a:picLocks noChangeAspect="1"/>
+          </p:cNvPicPr>
+          <p:nvPr/>
+        </p:nvPicPr>
+        <p:blipFill>
+          <a:blip r:embed="rId6"/>
+          <a:stretch>
+            <a:fillRect/>
+          </a:stretch>
+        </p:blipFill>
+        <p:spPr>
+          <a:xfrm>
+            <a:off x="6539165" y="2988193"/>
+            <a:ext cx="1725158" cy="1677094"/>
+          </a:xfrm>
+          <a:prstGeom prst="rect">
+            <a:avLst/>
+          </a:prstGeom>
+        </p:spPr>
+      </p:pic>
+      <p:pic>
+        <p:nvPicPr>
+          <p:cNvPr id="4" name="Picture 3">
+            <a:extLst>
+              <a:ext uri="{FF2B5EF4-FFF2-40B4-BE49-F238E27FC236}">
+                <a16:creationId xmlns:a16="http://schemas.microsoft.com/office/drawing/2014/main" id="{7E371241-73D3-237C-370C-9447CE609358}"/>
+              </a:ext>
+            </a:extLst>
+          </p:cNvPr>
+          <p:cNvPicPr>
+            <a:picLocks noChangeAspect="1"/>
+          </p:cNvPicPr>
+          <p:nvPr/>
+        </p:nvPicPr>
+        <p:blipFill>
+          <a:blip r:embed="rId7"/>
+          <a:stretch>
+            <a:fillRect/>
+          </a:stretch>
+        </p:blipFill>
+        <p:spPr>
+          <a:xfrm>
+            <a:off x="6640300" y="4665287"/>
+            <a:ext cx="2046499" cy="1621288"/>
+          </a:xfrm>
+          <a:prstGeom prst="rect">
+            <a:avLst/>
+          </a:prstGeom>
+        </p:spPr>
+      </p:pic>
+      <mc:AlternateContent xmlns:mc="http://schemas.openxmlformats.org/markup-compatibility/2006" xmlns:p14="http://schemas.microsoft.com/office/powerpoint/2010/main">
+        <mc:Choice Requires="p14">
+          <p:contentPart p14:bwMode="auto" r:id="rId8">
+            <p14:nvContentPartPr>
+              <p14:cNvPr id="7" name="Ink 6">
+                <a:extLst>
+                  <a:ext uri="{FF2B5EF4-FFF2-40B4-BE49-F238E27FC236}">
+                    <a16:creationId xmlns:a16="http://schemas.microsoft.com/office/drawing/2014/main" id="{F6AA1F0A-6A06-EBCF-DDE6-1B15AC888140}"/>
+                  </a:ext>
+                </a:extLst>
+              </p14:cNvPr>
+              <p14:cNvContentPartPr/>
+              <p14:nvPr/>
+            </p14:nvContentPartPr>
+            <p14:xfrm>
+              <a:off x="526320" y="2549160"/>
+              <a:ext cx="7997760" cy="3512160"/>
+            </p14:xfrm>
+          </p:contentPart>
+        </mc:Choice>
+        <mc:Fallback xmlns="">
+          <p:pic>
+            <p:nvPicPr>
+              <p:cNvPr id="7" name="Ink 6">
+                <a:extLst>
+                  <a:ext uri="{FF2B5EF4-FFF2-40B4-BE49-F238E27FC236}">
+                    <a16:creationId xmlns:a16="http://schemas.microsoft.com/office/drawing/2014/main" id="{F6AA1F0A-6A06-EBCF-DDE6-1B15AC888140}"/>
+                  </a:ext>
+                </a:extLst>
+              </p:cNvPr>
+              <p:cNvPicPr/>
+              <p:nvPr/>
+            </p:nvPicPr>
+            <p:blipFill>
+              <a:blip r:embed="rId9"/>
+              <a:stretch>
+                <a:fillRect/>
+              </a:stretch>
+            </p:blipFill>
+            <p:spPr>
+              <a:xfrm>
+                <a:off x="516960" y="2539800"/>
+                <a:ext cx="8016480" cy="3530880"/>
+              </a:xfrm>
+              <a:prstGeom prst="rect">
+                <a:avLst/>
+              </a:prstGeom>
+            </p:spPr>
+          </p:pic>
+        </mc:Fallback>
+      </mc:AlternateContent>
+      <mc:AlternateContent xmlns:mc="http://schemas.openxmlformats.org/markup-compatibility/2006" xmlns:p14="http://schemas.microsoft.com/office/powerpoint/2010/main">
+        <mc:Choice Requires="p14">
+          <p:contentPart p14:bwMode="auto" r:id="rId10">
+            <p14:nvContentPartPr>
+              <p14:cNvPr id="10" name="Ink 9">
+                <a:extLst>
+                  <a:ext uri="{FF2B5EF4-FFF2-40B4-BE49-F238E27FC236}">
+                    <a16:creationId xmlns:a16="http://schemas.microsoft.com/office/drawing/2014/main" id="{652DF4C5-645C-08F2-64D1-F1516DAE3A2A}"/>
+                  </a:ext>
+                </a:extLst>
+              </p14:cNvPr>
+              <p14:cNvContentPartPr/>
+              <p14:nvPr/>
+            </p14:nvContentPartPr>
+            <p14:xfrm>
+              <a:off x="6787440" y="2026800"/>
+              <a:ext cx="1691640" cy="582840"/>
+            </p14:xfrm>
+          </p:contentPart>
+        </mc:Choice>
+        <mc:Fallback xmlns="">
+          <p:pic>
+            <p:nvPicPr>
+              <p:cNvPr id="10" name="Ink 9">
+                <a:extLst>
+                  <a:ext uri="{FF2B5EF4-FFF2-40B4-BE49-F238E27FC236}">
+                    <a16:creationId xmlns:a16="http://schemas.microsoft.com/office/drawing/2014/main" id="{652DF4C5-645C-08F2-64D1-F1516DAE3A2A}"/>
+                  </a:ext>
+                </a:extLst>
+              </p:cNvPr>
+              <p:cNvPicPr/>
+              <p:nvPr/>
+            </p:nvPicPr>
+            <p:blipFill>
+              <a:blip r:embed="rId11"/>
+              <a:stretch>
+                <a:fillRect/>
+              </a:stretch>
+            </p:blipFill>
+            <p:spPr>
+              <a:xfrm>
+                <a:off x="6778080" y="2017440"/>
+                <a:ext cx="1710360" cy="601560"/>
+              </a:xfrm>
+              <a:prstGeom prst="rect">
+                <a:avLst/>
+              </a:prstGeom>
+            </p:spPr>
+          </p:pic>
+        </mc:Fallback>
+      </mc:AlternateContent>
     </p:spTree>
     <p:extLst>
       <p:ext uri="{BB962C8B-B14F-4D97-AF65-F5344CB8AC3E}">
@@ -23085,7 +24806,7 @@
 </p:sld>
 </file>
 
-<file path=ppt/slides/slide8.xml><?xml version="1.0" encoding="utf-8"?>
+<file path=ppt/slides/slide9.xml><?xml version="1.0" encoding="utf-8"?>
 <p:sld xmlns:a="http://schemas.openxmlformats.org/drawingml/2006/main" xmlns:r="http://schemas.openxmlformats.org/officeDocument/2006/relationships" xmlns:p="http://schemas.openxmlformats.org/presentationml/2006/main">
   <p:cSld>
     <p:spTree>
@@ -23385,258 +25106,69 @@
         </p:blipFill>
         <p:spPr>
           <a:xfrm>
-            <a:off x="599440" y="1833209"/>
-            <a:ext cx="4734560" cy="3062619"/>
+            <a:off x="1526227" y="1833209"/>
+            <a:ext cx="6091546" cy="3940405"/>
           </a:xfrm>
           <a:prstGeom prst="rect">
             <a:avLst/>
           </a:prstGeom>
         </p:spPr>
       </p:pic>
-      <p:pic>
-        <p:nvPicPr>
-          <p:cNvPr id="10" name="Picture 9">
-            <a:extLst>
-              <a:ext uri="{FF2B5EF4-FFF2-40B4-BE49-F238E27FC236}">
-                <a16:creationId xmlns:a16="http://schemas.microsoft.com/office/drawing/2014/main" id="{2915A63E-B34E-415C-C676-55AC3833EB6E}"/>
-              </a:ext>
-            </a:extLst>
-          </p:cNvPr>
-          <p:cNvPicPr>
-            <a:picLocks noChangeAspect="1"/>
-          </p:cNvPicPr>
-          <p:nvPr/>
-        </p:nvPicPr>
-        <p:blipFill>
-          <a:blip r:embed="rId4"/>
-          <a:stretch>
-            <a:fillRect/>
-          </a:stretch>
-        </p:blipFill>
-        <p:spPr>
-          <a:xfrm>
-            <a:off x="5899088" y="1298135"/>
-            <a:ext cx="2505469" cy="2435665"/>
-          </a:xfrm>
-          <a:prstGeom prst="rect">
-            <a:avLst/>
-          </a:prstGeom>
-        </p:spPr>
-      </p:pic>
-      <p:pic>
-        <p:nvPicPr>
-          <p:cNvPr id="12" name="Picture 11">
-            <a:extLst>
-              <a:ext uri="{FF2B5EF4-FFF2-40B4-BE49-F238E27FC236}">
-                <a16:creationId xmlns:a16="http://schemas.microsoft.com/office/drawing/2014/main" id="{82BE7F6F-778A-F92F-D2AA-4244C80F3FC3}"/>
-              </a:ext>
-            </a:extLst>
-          </p:cNvPr>
-          <p:cNvPicPr>
-            <a:picLocks noChangeAspect="1"/>
-          </p:cNvPicPr>
-          <p:nvPr/>
-        </p:nvPicPr>
-        <p:blipFill>
-          <a:blip r:embed="rId5"/>
-          <a:stretch>
-            <a:fillRect/>
-          </a:stretch>
-        </p:blipFill>
-        <p:spPr>
-          <a:xfrm>
-            <a:off x="5551545" y="3733800"/>
-            <a:ext cx="3200554" cy="2535560"/>
-          </a:xfrm>
-          <a:prstGeom prst="rect">
-            <a:avLst/>
-          </a:prstGeom>
-        </p:spPr>
-      </p:pic>
+      <mc:AlternateContent xmlns:mc="http://schemas.openxmlformats.org/markup-compatibility/2006" xmlns:p14="http://schemas.microsoft.com/office/powerpoint/2010/main">
+        <mc:Choice Requires="p14">
+          <p:contentPart p14:bwMode="auto" r:id="rId4">
+            <p14:nvContentPartPr>
+              <p14:cNvPr id="2" name="Ink 1">
+                <a:extLst>
+                  <a:ext uri="{FF2B5EF4-FFF2-40B4-BE49-F238E27FC236}">
+                    <a16:creationId xmlns:a16="http://schemas.microsoft.com/office/drawing/2014/main" id="{70DD7BD6-FD7F-2DB5-6849-D0343729DEA6}"/>
+                  </a:ext>
+                </a:extLst>
+              </p14:cNvPr>
+              <p14:cNvContentPartPr/>
+              <p14:nvPr/>
+            </p14:nvContentPartPr>
+            <p14:xfrm>
+              <a:off x="2927880" y="2541600"/>
+              <a:ext cx="4209480" cy="2820600"/>
+            </p14:xfrm>
+          </p:contentPart>
+        </mc:Choice>
+        <mc:Fallback xmlns="">
+          <p:pic>
+            <p:nvPicPr>
+              <p:cNvPr id="2" name="Ink 1">
+                <a:extLst>
+                  <a:ext uri="{FF2B5EF4-FFF2-40B4-BE49-F238E27FC236}">
+                    <a16:creationId xmlns:a16="http://schemas.microsoft.com/office/drawing/2014/main" id="{70DD7BD6-FD7F-2DB5-6849-D0343729DEA6}"/>
+                  </a:ext>
+                </a:extLst>
+              </p:cNvPr>
+              <p:cNvPicPr/>
+              <p:nvPr/>
+            </p:nvPicPr>
+            <p:blipFill>
+              <a:blip r:embed="rId5"/>
+              <a:stretch>
+                <a:fillRect/>
+              </a:stretch>
+            </p:blipFill>
+            <p:spPr>
+              <a:xfrm>
+                <a:off x="2918520" y="2532240"/>
+                <a:ext cx="4228200" cy="2839320"/>
+              </a:xfrm>
+              <a:prstGeom prst="rect">
+                <a:avLst/>
+              </a:prstGeom>
+            </p:spPr>
+          </p:pic>
+        </mc:Fallback>
+      </mc:AlternateContent>
     </p:spTree>
     <p:extLst>
       <p:ext uri="{BB962C8B-B14F-4D97-AF65-F5344CB8AC3E}">
         <p14:creationId xmlns:p14="http://schemas.microsoft.com/office/powerpoint/2010/main" val="107245456"/>
-      </p:ext>
-    </p:extLst>
-  </p:cSld>
-  <p:clrMapOvr>
-    <a:masterClrMapping/>
-  </p:clrMapOvr>
-</p:sld>
-</file>
-
-<file path=ppt/slides/slide9.xml><?xml version="1.0" encoding="utf-8"?>
-<p:sld xmlns:a="http://schemas.openxmlformats.org/drawingml/2006/main" xmlns:r="http://schemas.openxmlformats.org/officeDocument/2006/relationships" xmlns:p="http://schemas.openxmlformats.org/presentationml/2006/main">
-  <p:cSld>
-    <p:spTree>
-      <p:nvGrpSpPr>
-        <p:cNvPr id="1" name="Shape 124">
-          <a:extLst>
-            <a:ext uri="{FF2B5EF4-FFF2-40B4-BE49-F238E27FC236}">
-              <a16:creationId xmlns:a16="http://schemas.microsoft.com/office/drawing/2014/main" id="{7065FD35-E86A-5FD5-06D1-1F1C4EE73A58}"/>
-            </a:ext>
-          </a:extLst>
-        </p:cNvPr>
-        <p:cNvGrpSpPr/>
-        <p:nvPr/>
-      </p:nvGrpSpPr>
-      <p:grpSpPr>
-        <a:xfrm>
-          <a:off x="0" y="0"/>
-          <a:ext cx="0" cy="0"/>
-          <a:chOff x="0" y="0"/>
-          <a:chExt cx="0" cy="0"/>
-        </a:xfrm>
-      </p:grpSpPr>
-      <p:sp>
-        <p:nvSpPr>
-          <p:cNvPr id="125" name="Google Shape;125;p2">
-            <a:extLst>
-              <a:ext uri="{FF2B5EF4-FFF2-40B4-BE49-F238E27FC236}">
-                <a16:creationId xmlns:a16="http://schemas.microsoft.com/office/drawing/2014/main" id="{888B1380-106D-6975-2288-4CA700F15FE5}"/>
-              </a:ext>
-            </a:extLst>
-          </p:cNvPr>
-          <p:cNvSpPr txBox="1">
-            <a:spLocks noGrp="1"/>
-          </p:cNvSpPr>
-          <p:nvPr>
-            <p:ph type="title"/>
-          </p:nvPr>
-        </p:nvSpPr>
-        <p:spPr>
-          <a:xfrm>
-            <a:off x="1219200" y="2971800"/>
-            <a:ext cx="6858000" cy="1066800"/>
-          </a:xfrm>
-          <a:prstGeom prst="rect">
-            <a:avLst/>
-          </a:prstGeom>
-          <a:noFill/>
-          <a:ln>
-            <a:noFill/>
-          </a:ln>
-        </p:spPr>
-        <p:txBody>
-          <a:bodyPr spcFirstLastPara="1" wrap="square" lIns="91425" tIns="45700" rIns="91425" bIns="45700" anchor="t" anchorCtr="0">
-            <a:normAutofit/>
-          </a:bodyPr>
-          <a:lstStyle/>
-          <a:p>
-            <a:pPr marL="0" lvl="0" indent="0" algn="r" rtl="0">
-              <a:spcBef>
-                <a:spcPts val="0"/>
-              </a:spcBef>
-              <a:spcAft>
-                <a:spcPts val="0"/>
-              </a:spcAft>
-              <a:buClr>
-                <a:schemeClr val="dk2"/>
-              </a:buClr>
-              <a:buSzPts val="3200"/>
-              <a:buFont typeface="Bookman Old Style"/>
-              <a:buNone/>
-            </a:pPr>
-            <a:r>
-              <a:rPr lang="en-US" dirty="0"/>
-              <a:t>Primitives</a:t>
-            </a:r>
-            <a:endParaRPr dirty="0"/>
-          </a:p>
-        </p:txBody>
-      </p:sp>
-      <p:sp>
-        <p:nvSpPr>
-          <p:cNvPr id="126" name="Google Shape;126;p2">
-            <a:extLst>
-              <a:ext uri="{FF2B5EF4-FFF2-40B4-BE49-F238E27FC236}">
-                <a16:creationId xmlns:a16="http://schemas.microsoft.com/office/drawing/2014/main" id="{79918B0D-05F7-92F4-7E62-FDBEEA155BF9}"/>
-              </a:ext>
-            </a:extLst>
-          </p:cNvPr>
-          <p:cNvSpPr txBox="1">
-            <a:spLocks noGrp="1"/>
-          </p:cNvSpPr>
-          <p:nvPr>
-            <p:ph type="body" idx="1"/>
-          </p:nvPr>
-        </p:nvSpPr>
-        <p:spPr>
-          <a:xfrm>
-            <a:off x="1295400" y="4267200"/>
-            <a:ext cx="6781800" cy="1143000"/>
-          </a:xfrm>
-          <a:prstGeom prst="rect">
-            <a:avLst/>
-          </a:prstGeom>
-          <a:noFill/>
-          <a:ln>
-            <a:noFill/>
-          </a:ln>
-        </p:spPr>
-        <p:txBody>
-          <a:bodyPr spcFirstLastPara="1" wrap="square" lIns="91425" tIns="45700" rIns="91425" bIns="45700" anchor="t" anchorCtr="0">
-            <a:normAutofit/>
-          </a:bodyPr>
-          <a:lstStyle/>
-          <a:p>
-            <a:pPr marL="0" lvl="0" indent="0" algn="r" rtl="0">
-              <a:spcBef>
-                <a:spcPts val="0"/>
-              </a:spcBef>
-              <a:spcAft>
-                <a:spcPts val="0"/>
-              </a:spcAft>
-              <a:buSzPts val="1520"/>
-              <a:buNone/>
-            </a:pPr>
-            <a:endParaRPr/>
-          </a:p>
-        </p:txBody>
-      </p:sp>
-      <p:sp>
-        <p:nvSpPr>
-          <p:cNvPr id="4" name="Slide Number Placeholder 3">
-            <a:extLst>
-              <a:ext uri="{FF2B5EF4-FFF2-40B4-BE49-F238E27FC236}">
-                <a16:creationId xmlns:a16="http://schemas.microsoft.com/office/drawing/2014/main" id="{12F15D5C-24CE-371F-4CAA-0CA4AE30F53D}"/>
-              </a:ext>
-            </a:extLst>
-          </p:cNvPr>
-          <p:cNvSpPr>
-            <a:spLocks noGrp="1"/>
-          </p:cNvSpPr>
-          <p:nvPr>
-            <p:ph type="sldNum" idx="12"/>
-          </p:nvPr>
-        </p:nvSpPr>
-        <p:spPr/>
-        <p:txBody>
-          <a:bodyPr/>
-          <a:lstStyle/>
-          <a:p>
-            <a:pPr marL="0" lvl="0" indent="0" algn="l" rtl="0">
-              <a:spcBef>
-                <a:spcPts val="0"/>
-              </a:spcBef>
-              <a:spcAft>
-                <a:spcPts val="0"/>
-              </a:spcAft>
-              <a:buNone/>
-            </a:pPr>
-            <a:fld id="{00000000-1234-1234-1234-123412341234}" type="slidenum">
-              <a:rPr lang="en-US" smtClean="0"/>
-              <a:t>8</a:t>
-            </a:fld>
-            <a:endParaRPr lang="en-US"/>
-          </a:p>
-        </p:txBody>
-      </p:sp>
-    </p:spTree>
-    <p:extLst>
-      <p:ext uri="{BB962C8B-B14F-4D97-AF65-F5344CB8AC3E}">
-        <p14:creationId xmlns:p14="http://schemas.microsoft.com/office/powerpoint/2010/main" val="3222352052"/>
       </p:ext>
     </p:extLst>
   </p:cSld>
